--- a/deliverables/vk-education-columns.pptx
+++ b/deliverables/vk-education-columns.pptx
@@ -1476,7 +1476,7 @@
           <a:lstStyle/>
           <a:p>
             <a:r>
-              <a:t>Этот слайд представляет инициативу по внедрению ИИ-помощника для автоматизации ответов сотрудникам и сокращения времени поиска инструкций.</a:t>
+              <a:t>Слайд вводит инициативу по внедрению ИИ-помощника для автоматизации ответов сотрудникам на вопросы по регламентам.</a:t>
             </a:r>
           </a:p>
         </p:txBody>
@@ -1546,7 +1546,7 @@
           <a:lstStyle/>
           <a:p>
             <a:r>
-              <a:t>Сейчас поиск информации занимает до 30 минут, что существенно замедляет работу сотрудников.</a:t>
+              <a:t>Сейчас поиск информации занимает до 30 минут, а треть обращений дублирует одни и те же вопросы.</a:t>
             </a:r>
           </a:p>
         </p:txBody>
@@ -1616,7 +1616,7 @@
           <a:lstStyle/>
           <a:p>
             <a:r>
-              <a:t>Значительная часть обращений дублирует вопросы по инструкциям, создавая лишнюю нагрузку на поддержку.</a:t>
+              <a:t>Пилотный проект охватывает 150 сотрудников двух подразделений в течение шести недель.</a:t>
             </a:r>
           </a:p>
         </p:txBody>
@@ -1686,7 +1686,7 @@
           <a:lstStyle/>
           <a:p>
             <a:r>
-              <a:t>Текущая ситуация приводит к значительным потерям времени сотрудников и избыточной нагрузке на службу поддержки, что негативно сказывается на бизнес-процессах.</a:t>
+              <a:t>Функция автоматически отвечает сотрудникам на запросы по регламентам и сразу показывает ссылку на исходный документ.</a:t>
             </a:r>
           </a:p>
         </p:txBody>
@@ -1756,7 +1756,7 @@
           <a:lstStyle/>
           <a:p>
             <a:r>
-              <a:t>ИИ-помощник автоматически отвечает сотрудникам на вопросы по регламентам и предоставляет ссылку на исходный документ.</a:t>
+              <a:t>Система обеспечивает безопасность, обрабатывая данные внутри контура без их вывода наружу.</a:t>
             </a:r>
           </a:p>
         </p:txBody>
@@ -1826,7 +1826,7 @@
           <a:lstStyle/>
           <a:p>
             <a:r>
-              <a:t>Мы используем модель с открытыми весами, которая работает исключительно внутри контура компании, гарантируя, что документы не покидают внутреннюю инфраструктуру.</a:t>
+              <a:t>Если ИИ не находит подтверждённый ответ, запрос автоматически передаётся специалисту с полным контекстом диалога.</a:t>
             </a:r>
           </a:p>
         </p:txBody>
@@ -1896,7 +1896,7 @@
           <a:lstStyle/>
           <a:p>
             <a:r>
-              <a:t>При отсутствии готового ответа в базе знаний система автоматически перенаправляет вопрос эксперту, передавая ему весь контекст диалога.</a:t>
+              <a:t>Эта слайд определяет ключевые метрики для оценки эффективности пилота ИИ-помощника.</a:t>
             </a:r>
           </a:p>
         </p:txBody>
@@ -1966,7 +1966,7 @@
           <a:lstStyle/>
           <a:p>
             <a:r>
-              <a:t>Пилотный запуск охватывает два подразделения с общим количеством 150 сотрудников для проверки гипотезы.</a:t>
+              <a:t>Пилот охватывает 150 сотрудников двух подразделений и длится 6 недель.</a:t>
             </a:r>
           </a:p>
         </p:txBody>
@@ -2036,7 +2036,7 @@
           <a:lstStyle/>
           <a:p>
             <a:r>
-              <a:t>Срок проведения пилота составляет шесть недель, что позволит получить достаточную статистическую выборку для оценки эффективности.</a:t>
+              <a:t>Мы будем отслеживать время поиска инструкций и долю обращений, решенных без участия специалиста, чтобы оценить эффективность пилота.</a:t>
             </a:r>
           </a:p>
         </p:txBody>
@@ -2106,7 +2106,7 @@
           <a:lstStyle/>
           <a:p>
             <a:r>
-              <a:t>Успех пилота будет измеряться временем поиска ответа и долей обращений, закрытых без участия специалиста.</a:t>
+              <a:t>Мы используем модель с открытыми весами, которая работает исключительно внутри корпоративного контура, гарантируя, что документы не покидают периметр безопасности.</a:t>
             </a:r>
           </a:p>
         </p:txBody>
@@ -2176,7 +2176,7 @@
           <a:lstStyle/>
           <a:p>
             <a:r>
-              <a:t>Для реализации проекта необходимо выделить команду из трех человек, которые займутся настройкой и мониторингом пилота.</a:t>
+              <a:t>Нам необходимо ваше одобрение для старта пилота и выделение команды из трех человек.</a:t>
             </a:r>
           </a:p>
         </p:txBody>
@@ -2246,7 +2246,7 @@
           <a:lstStyle/>
           <a:p>
             <a:r>
-              <a:t>Для реализации проекта требуется одобрение пилота и выделение команды из трех человек.</a:t>
+              <a:t>Мы просим одобрить пилот и выделить команду из трех человек для реализации проекта.</a:t>
             </a:r>
           </a:p>
         </p:txBody>
@@ -8318,7 +8318,7 @@
                   <a:srgbClr val="000000"/>
                 </a:solidFill>
               </a:rPr>
-              <a:t>Внедрение ИИ-помощника для автоматизации ответов сотрудникам</a:t>
+              <a:t>Автоматизация ответов сотрудников по регламентам</a:t>
             </a:r>
             <a:endParaRPr/>
           </a:p>
@@ -8359,7 +8359,7 @@
                 <a:spcPts val="0"/>
               </a:spcBef>
               <a:spcAft>
-                <a:spcPts val="480"/>
+                <a:spcPts val="359"/>
               </a:spcAft>
               <a:buClr>
                 <a:schemeClr val="lt2"/>
@@ -8369,12 +8369,12 @@
               <a:buNone/>
             </a:pPr>
             <a:r>
-              <a:rPr sz="3200">
+              <a:rPr sz="2400">
                 <a:solidFill>
                   <a:srgbClr val="000000"/>
                 </a:solidFill>
               </a:rPr>
-              <a:t>Сокращение времени поиска инструкций до 30 минут</a:t>
+              <a:t>Сокращение времени поиска инструкций и снижение нагрузки на поддержку</a:t>
             </a:r>
             <a:endParaRPr/>
           </a:p>
@@ -8455,7 +8455,7 @@
                   <a:srgbClr val="000000"/>
                 </a:solidFill>
               </a:rPr>
-              <a:t>Успех измеряется временем поиска ответа и долей закрытых обращений без специалиста</a:t>
+              <a:t>Модель с открытыми весами работает внутри контура, документы не покидают периметр</a:t>
             </a:r>
             <a:endParaRPr/>
           </a:p>
@@ -8520,7 +8520,7 @@
       </p:sp>
       <p:grpSp>
         <p:nvGrpSpPr>
-          <p:cNvPr id="2" name="BrandDeck Diagram icon_grid" descr="icon_grid: Время поиска ответа и доля закрытых обращений без специалиста.; Эти метрики подтвердят эффективность пилота за 6 недель.; Результаты покажут сокращение нагрузки на поддержку."/>
+          <p:cNvPr id="2" name="BrandDeck Diagram icon_grid" descr="icon_grid: Модель с открытыми весами работает строго внутри контура компании.; Документы не покидают периметр и не уходят наружу.; Обеспечивается безопасность данных при обработке запросов."/>
           <p:cNvGrpSpPr/>
           <p:nvPr/>
         </p:nvGrpSpPr>
@@ -8594,7 +8594,7 @@
         </p:sp>
         <p:sp>
           <p:nvSpPr>
-            <p:cNvPr id="805" name="BrandDeck Icon clock"/>
+            <p:cNvPr id="805" name="BrandDeck Icon brain"/>
             <p:cNvSpPr/>
             <p:nvPr/>
           </p:nvSpPr>
@@ -8612,40 +8612,190 @@
               <a:pathLst>
                 <a:path w="24000" h="24000" fill="none">
                   <a:moveTo>
-                    <a:pt x="22000" y="12000"/>
+                    <a:pt x="12000" y="5000"/>
                   </a:moveTo>
                   <a:cubicBezTo>
-                    <a:pt x="22000" y="17523"/>
-                    <a:pt x="17523" y="22000"/>
-                    <a:pt x="12000" y="22000"/>
+                    <a:pt x="12003" y="3911"/>
+                    <a:pt x="11416" y="2906"/>
+                    <a:pt x="10466" y="2374"/>
                   </a:cubicBezTo>
                   <a:cubicBezTo>
-                    <a:pt x="6477" y="22000"/>
-                    <a:pt x="2000" y="17523"/>
-                    <a:pt x="2000" y="12000"/>
+                    <a:pt x="9516" y="1842"/>
+                    <a:pt x="8353" y="1866"/>
+                    <a:pt x="7426" y="2437"/>
                   </a:cubicBezTo>
                   <a:cubicBezTo>
-                    <a:pt x="2000" y="6477"/>
-                    <a:pt x="6477" y="2000"/>
-                    <a:pt x="12000" y="2000"/>
+                    <a:pt x="6499" y="3009"/>
+                    <a:pt x="5954" y="4037"/>
+                    <a:pt x="6003" y="5125"/>
                   </a:cubicBezTo>
                   <a:cubicBezTo>
-                    <a:pt x="17523" y="2000"/>
-                    <a:pt x="22000" y="6477"/>
-                    <a:pt x="22000" y="12000"/>
+                    <a:pt x="4812" y="5431"/>
+                    <a:pt x="3828" y="6268"/>
+                    <a:pt x="3335" y="7395"/>
+                  </a:cubicBezTo>
+                  <a:cubicBezTo>
+                    <a:pt x="2842" y="8521"/>
+                    <a:pt x="2894" y="9812"/>
+                    <a:pt x="3477" y="10895"/>
+                  </a:cubicBezTo>
+                  <a:cubicBezTo>
+                    <a:pt x="2450" y="11729"/>
+                    <a:pt x="1902" y="13018"/>
+                    <a:pt x="2013" y="14336"/>
+                  </a:cubicBezTo>
+                  <a:cubicBezTo>
+                    <a:pt x="2125" y="15654"/>
+                    <a:pt x="2881" y="16833"/>
+                    <a:pt x="4033" y="17483"/>
+                  </a:cubicBezTo>
+                  <a:cubicBezTo>
+                    <a:pt x="3842" y="18961"/>
+                    <a:pt x="4488" y="20422"/>
+                    <a:pt x="5710" y="21275"/>
+                  </a:cubicBezTo>
+                  <a:cubicBezTo>
+                    <a:pt x="6931" y="22128"/>
+                    <a:pt x="8526" y="22232"/>
+                    <a:pt x="9847" y="21544"/>
+                  </a:cubicBezTo>
+                  <a:cubicBezTo>
+                    <a:pt x="11169" y="20856"/>
+                    <a:pt x="11998" y="19490"/>
+                    <a:pt x="12000" y="18000"/>
                   </a:cubicBezTo>
                   <a:close/>
                 </a:path>
                 <a:path w="24000" h="24000" fill="none">
                   <a:moveTo>
-                    <a:pt x="12000" y="6000"/>
+                    <a:pt x="12000" y="5000"/>
                   </a:moveTo>
-                  <a:lnTo>
-                    <a:pt x="12000" y="12000"/>
-                  </a:lnTo>
-                  <a:lnTo>
-                    <a:pt x="16000" y="14000"/>
-                  </a:lnTo>
+                  <a:cubicBezTo>
+                    <a:pt x="11997" y="3911"/>
+                    <a:pt x="12584" y="2906"/>
+                    <a:pt x="13534" y="2374"/>
+                  </a:cubicBezTo>
+                  <a:cubicBezTo>
+                    <a:pt x="14484" y="1842"/>
+                    <a:pt x="15647" y="1866"/>
+                    <a:pt x="16574" y="2437"/>
+                  </a:cubicBezTo>
+                  <a:cubicBezTo>
+                    <a:pt x="17501" y="3009"/>
+                    <a:pt x="18046" y="4037"/>
+                    <a:pt x="17997" y="5125"/>
+                  </a:cubicBezTo>
+                  <a:cubicBezTo>
+                    <a:pt x="19188" y="5431"/>
+                    <a:pt x="20172" y="6268"/>
+                    <a:pt x="20665" y="7395"/>
+                  </a:cubicBezTo>
+                  <a:cubicBezTo>
+                    <a:pt x="21158" y="8521"/>
+                    <a:pt x="21106" y="9812"/>
+                    <a:pt x="20523" y="10895"/>
+                  </a:cubicBezTo>
+                  <a:cubicBezTo>
+                    <a:pt x="21550" y="11729"/>
+                    <a:pt x="22098" y="13018"/>
+                    <a:pt x="21987" y="14336"/>
+                  </a:cubicBezTo>
+                  <a:cubicBezTo>
+                    <a:pt x="21875" y="15654"/>
+                    <a:pt x="21119" y="16833"/>
+                    <a:pt x="19967" y="17483"/>
+                  </a:cubicBezTo>
+                  <a:cubicBezTo>
+                    <a:pt x="20158" y="18961"/>
+                    <a:pt x="19512" y="20422"/>
+                    <a:pt x="18290" y="21275"/>
+                  </a:cubicBezTo>
+                  <a:cubicBezTo>
+                    <a:pt x="17069" y="22128"/>
+                    <a:pt x="15474" y="22232"/>
+                    <a:pt x="14153" y="21544"/>
+                  </a:cubicBezTo>
+                  <a:cubicBezTo>
+                    <a:pt x="12831" y="20856"/>
+                    <a:pt x="12002" y="19490"/>
+                    <a:pt x="12000" y="18000"/>
+                  </a:cubicBezTo>
+                  <a:close/>
+                </a:path>
+                <a:path w="24000" h="24000" fill="none">
+                  <a:moveTo>
+                    <a:pt x="15000" y="13000"/>
+                  </a:moveTo>
+                  <a:cubicBezTo>
+                    <a:pt x="13283" y="12396"/>
+                    <a:pt x="12099" y="10817"/>
+                    <a:pt x="12000" y="9000"/>
+                  </a:cubicBezTo>
+                  <a:cubicBezTo>
+                    <a:pt x="11901" y="10817"/>
+                    <a:pt x="10717" y="12396"/>
+                    <a:pt x="9000" y="13000"/>
+                  </a:cubicBezTo>
+                </a:path>
+                <a:path w="24000" h="24000" fill="none">
+                  <a:moveTo>
+                    <a:pt x="17599" y="6500"/>
+                  </a:moveTo>
+                  <a:cubicBezTo>
+                    <a:pt x="17841" y="6081"/>
+                    <a:pt x="17978" y="5609"/>
+                    <a:pt x="17998" y="5125"/>
+                  </a:cubicBezTo>
+                </a:path>
+                <a:path w="24000" h="24000" fill="none">
+                  <a:moveTo>
+                    <a:pt x="6003" y="5125"/>
+                  </a:moveTo>
+                  <a:cubicBezTo>
+                    <a:pt x="6023" y="5609"/>
+                    <a:pt x="6159" y="6080"/>
+                    <a:pt x="6401" y="6500"/>
+                  </a:cubicBezTo>
+                </a:path>
+                <a:path w="24000" h="24000" fill="none">
+                  <a:moveTo>
+                    <a:pt x="3477" y="10896"/>
+                  </a:moveTo>
+                  <a:cubicBezTo>
+                    <a:pt x="3660" y="10747"/>
+                    <a:pt x="3856" y="10614"/>
+                    <a:pt x="4062" y="10500"/>
+                  </a:cubicBezTo>
+                </a:path>
+                <a:path w="24000" h="24000" fill="none">
+                  <a:moveTo>
+                    <a:pt x="19938" y="10500"/>
+                  </a:moveTo>
+                  <a:cubicBezTo>
+                    <a:pt x="20144" y="10614"/>
+                    <a:pt x="20340" y="10747"/>
+                    <a:pt x="20523" y="10896"/>
+                  </a:cubicBezTo>
+                </a:path>
+                <a:path w="24000" h="24000" fill="none">
+                  <a:moveTo>
+                    <a:pt x="6000" y="18000"/>
+                  </a:moveTo>
+                  <a:cubicBezTo>
+                    <a:pt x="5311" y="18000"/>
+                    <a:pt x="4633" y="17823"/>
+                    <a:pt x="4033" y="17484"/>
+                  </a:cubicBezTo>
+                </a:path>
+                <a:path w="24000" h="24000" fill="none">
+                  <a:moveTo>
+                    <a:pt x="19967" y="17484"/>
+                  </a:moveTo>
+                  <a:cubicBezTo>
+                    <a:pt x="19367" y="17823"/>
+                    <a:pt x="18689" y="18000"/>
+                    <a:pt x="18000" y="18000"/>
+                  </a:cubicBezTo>
                 </a:path>
               </a:pathLst>
             </a:custGeom>
@@ -8699,7 +8849,7 @@
                   </a:solidFill>
                   <a:latin typeface="Play"/>
                 </a:rPr>
-                <a:t>Время поиска ответа и доля закрытых обращений без специалиста.</a:t>
+                <a:t>Модель с открытыми весами работает строго внутри контура компании.</a:t>
               </a:r>
             </a:p>
           </p:txBody>
@@ -8766,7 +8916,7 @@
         </p:sp>
         <p:sp>
           <p:nvSpPr>
-            <p:cNvPr id="809" name="BrandDeck Icon chart-column"/>
+            <p:cNvPr id="809" name="BrandDeck Icon file-text"/>
             <p:cNvSpPr/>
             <p:nvPr/>
           </p:nvSpPr>
@@ -8784,42 +8934,75 @@
               <a:pathLst>
                 <a:path w="24000" h="24000" fill="none">
                   <a:moveTo>
-                    <a:pt x="3000" y="3000"/>
+                    <a:pt x="15000" y="2000"/>
                   </a:moveTo>
                   <a:lnTo>
-                    <a:pt x="3000" y="19000"/>
+                    <a:pt x="6000" y="2000"/>
                   </a:lnTo>
                   <a:cubicBezTo>
-                    <a:pt x="3000" y="20105"/>
-                    <a:pt x="3895" y="21000"/>
-                    <a:pt x="5000" y="21000"/>
+                    <a:pt x="4895" y="2000"/>
+                    <a:pt x="4000" y="2895"/>
+                    <a:pt x="4000" y="4000"/>
                   </a:cubicBezTo>
                   <a:lnTo>
-                    <a:pt x="21000" y="21000"/>
+                    <a:pt x="4000" y="20000"/>
+                  </a:lnTo>
+                  <a:cubicBezTo>
+                    <a:pt x="4000" y="21105"/>
+                    <a:pt x="4895" y="22000"/>
+                    <a:pt x="6000" y="22000"/>
+                  </a:cubicBezTo>
+                  <a:lnTo>
+                    <a:pt x="18000" y="22000"/>
+                  </a:lnTo>
+                  <a:cubicBezTo>
+                    <a:pt x="19105" y="22000"/>
+                    <a:pt x="20000" y="21105"/>
+                    <a:pt x="20000" y="20000"/>
+                  </a:cubicBezTo>
+                  <a:lnTo>
+                    <a:pt x="20000" y="7000"/>
+                  </a:lnTo>
+                  <a:close/>
+                </a:path>
+                <a:path w="24000" h="24000" fill="none">
+                  <a:moveTo>
+                    <a:pt x="14000" y="2000"/>
+                  </a:moveTo>
+                  <a:lnTo>
+                    <a:pt x="14000" y="6000"/>
+                  </a:lnTo>
+                  <a:cubicBezTo>
+                    <a:pt x="14000" y="7105"/>
+                    <a:pt x="14895" y="8000"/>
+                    <a:pt x="16000" y="8000"/>
+                  </a:cubicBezTo>
+                  <a:lnTo>
+                    <a:pt x="20000" y="8000"/>
                   </a:lnTo>
                 </a:path>
                 <a:path w="24000" h="24000" fill="none">
                   <a:moveTo>
-                    <a:pt x="18000" y="17000"/>
+                    <a:pt x="10000" y="9000"/>
                   </a:moveTo>
                   <a:lnTo>
-                    <a:pt x="18000" y="9000"/>
+                    <a:pt x="8000" y="9000"/>
                   </a:lnTo>
                 </a:path>
                 <a:path w="24000" h="24000" fill="none">
                   <a:moveTo>
-                    <a:pt x="13000" y="17000"/>
+                    <a:pt x="16000" y="13000"/>
                   </a:moveTo>
                   <a:lnTo>
-                    <a:pt x="13000" y="5000"/>
+                    <a:pt x="8000" y="13000"/>
                   </a:lnTo>
                 </a:path>
                 <a:path w="24000" h="24000" fill="none">
                   <a:moveTo>
-                    <a:pt x="8000" y="17000"/>
+                    <a:pt x="16000" y="17000"/>
                   </a:moveTo>
                   <a:lnTo>
-                    <a:pt x="8000" y="14000"/>
+                    <a:pt x="8000" y="17000"/>
                   </a:lnTo>
                 </a:path>
               </a:pathLst>
@@ -8874,7 +9057,7 @@
                   </a:solidFill>
                   <a:latin typeface="Play"/>
                 </a:rPr>
-                <a:t>Эти метрики подтвердят эффективность пилота за 6 недель.</a:t>
+                <a:t>Документы не покидают периметр и не уходят наружу.</a:t>
               </a:r>
             </a:p>
           </p:txBody>
@@ -8941,7 +9124,7 @@
         </p:sp>
         <p:sp>
           <p:nvSpPr>
-            <p:cNvPr id="813" name="BrandDeck Icon trophy"/>
+            <p:cNvPr id="813" name="BrandDeck Icon shield-check"/>
             <p:cNvSpPr/>
             <p:nvPr/>
           </p:nvSpPr>
@@ -8959,114 +9142,63 @@
               <a:pathLst>
                 <a:path w="24000" h="24000" fill="none">
                   <a:moveTo>
-                    <a:pt x="6000" y="9000"/>
+                    <a:pt x="20000" y="13000"/>
                   </a:moveTo>
+                  <a:cubicBezTo>
+                    <a:pt x="20000" y="18000"/>
+                    <a:pt x="16500" y="20500"/>
+                    <a:pt x="12340" y="21950"/>
+                  </a:cubicBezTo>
+                  <a:cubicBezTo>
+                    <a:pt x="12122" y="22024"/>
+                    <a:pt x="11886" y="22020"/>
+                    <a:pt x="11670" y="21940"/>
+                  </a:cubicBezTo>
+                  <a:cubicBezTo>
+                    <a:pt x="7500" y="20500"/>
+                    <a:pt x="4000" y="18000"/>
+                    <a:pt x="4000" y="13000"/>
+                  </a:cubicBezTo>
                   <a:lnTo>
-                    <a:pt x="4500" y="9000"/>
+                    <a:pt x="4000" y="6000"/>
                   </a:lnTo>
                   <a:cubicBezTo>
-                    <a:pt x="3119" y="9000"/>
-                    <a:pt x="2000" y="7881"/>
-                    <a:pt x="2000" y="6500"/>
+                    <a:pt x="4000" y="5448"/>
+                    <a:pt x="4448" y="5000"/>
+                    <a:pt x="5000" y="5000"/>
                   </a:cubicBezTo>
                   <a:cubicBezTo>
-                    <a:pt x="2000" y="5119"/>
-                    <a:pt x="3119" y="4000"/>
-                    <a:pt x="4500" y="4000"/>
+                    <a:pt x="7000" y="5000"/>
+                    <a:pt x="9500" y="3800"/>
+                    <a:pt x="11240" y="2280"/>
                   </a:cubicBezTo>
-                  <a:lnTo>
-                    <a:pt x="6000" y="4000"/>
-                  </a:lnTo>
+                  <a:cubicBezTo>
+                    <a:pt x="11678" y="1906"/>
+                    <a:pt x="12322" y="1906"/>
+                    <a:pt x="12760" y="2280"/>
+                  </a:cubicBezTo>
+                  <a:cubicBezTo>
+                    <a:pt x="14510" y="3810"/>
+                    <a:pt x="17000" y="5000"/>
+                    <a:pt x="19000" y="5000"/>
+                  </a:cubicBezTo>
+                  <a:cubicBezTo>
+                    <a:pt x="19552" y="5000"/>
+                    <a:pt x="20000" y="5448"/>
+                    <a:pt x="20000" y="6000"/>
+                  </a:cubicBezTo>
+                  <a:close/>
                 </a:path>
                 <a:path w="24000" h="24000" fill="none">
                   <a:moveTo>
-                    <a:pt x="18000" y="9000"/>
+                    <a:pt x="9000" y="12000"/>
                   </a:moveTo>
                   <a:lnTo>
-                    <a:pt x="19500" y="9000"/>
-                  </a:lnTo>
-                  <a:cubicBezTo>
-                    <a:pt x="20881" y="9000"/>
-                    <a:pt x="22000" y="7881"/>
-                    <a:pt x="22000" y="6500"/>
-                  </a:cubicBezTo>
-                  <a:cubicBezTo>
-                    <a:pt x="22000" y="5119"/>
-                    <a:pt x="20881" y="4000"/>
-                    <a:pt x="19500" y="4000"/>
-                  </a:cubicBezTo>
-                  <a:lnTo>
-                    <a:pt x="18000" y="4000"/>
-                  </a:lnTo>
-                </a:path>
-                <a:path w="24000" h="24000" fill="none">
-                  <a:moveTo>
-                    <a:pt x="4000" y="22000"/>
-                  </a:moveTo>
-                  <a:lnTo>
-                    <a:pt x="20000" y="22000"/>
-                  </a:lnTo>
-                </a:path>
-                <a:path w="24000" h="24000" fill="none">
-                  <a:moveTo>
-                    <a:pt x="10000" y="14660"/>
-                  </a:moveTo>
-                  <a:lnTo>
-                    <a:pt x="10000" y="17000"/>
-                  </a:lnTo>
-                  <a:cubicBezTo>
-                    <a:pt x="10000" y="17550"/>
-                    <a:pt x="9530" y="17980"/>
-                    <a:pt x="9030" y="18210"/>
-                  </a:cubicBezTo>
-                  <a:cubicBezTo>
-                    <a:pt x="7850" y="18750"/>
-                    <a:pt x="7000" y="20240"/>
-                    <a:pt x="7000" y="22000"/>
-                  </a:cubicBezTo>
-                </a:path>
-                <a:path w="24000" h="24000" fill="none">
-                  <a:moveTo>
-                    <a:pt x="14000" y="14660"/>
-                  </a:moveTo>
-                  <a:lnTo>
-                    <a:pt x="14000" y="17000"/>
-                  </a:lnTo>
-                  <a:cubicBezTo>
-                    <a:pt x="14000" y="17550"/>
-                    <a:pt x="14470" y="17980"/>
-                    <a:pt x="14970" y="18210"/>
-                  </a:cubicBezTo>
-                  <a:cubicBezTo>
-                    <a:pt x="16150" y="18750"/>
-                    <a:pt x="17000" y="20240"/>
-                    <a:pt x="17000" y="22000"/>
-                  </a:cubicBezTo>
-                </a:path>
-                <a:path w="24000" h="24000" fill="none">
-                  <a:moveTo>
-                    <a:pt x="18000" y="2000"/>
-                  </a:moveTo>
-                  <a:lnTo>
-                    <a:pt x="6000" y="2000"/>
+                    <a:pt x="11000" y="14000"/>
                   </a:lnTo>
                   <a:lnTo>
-                    <a:pt x="6000" y="9000"/>
+                    <a:pt x="15000" y="10000"/>
                   </a:lnTo>
-                  <a:cubicBezTo>
-                    <a:pt x="6000" y="12314"/>
-                    <a:pt x="8686" y="15000"/>
-                    <a:pt x="12000" y="15000"/>
-                  </a:cubicBezTo>
-                  <a:cubicBezTo>
-                    <a:pt x="15314" y="15000"/>
-                    <a:pt x="18000" y="12314"/>
-                    <a:pt x="18000" y="9000"/>
-                  </a:cubicBezTo>
-                  <a:lnTo>
-                    <a:pt x="18000" y="2000"/>
-                  </a:lnTo>
-                  <a:close/>
                 </a:path>
               </a:pathLst>
             </a:custGeom>
@@ -9120,7 +9252,7 @@
                   </a:solidFill>
                   <a:latin typeface="Play"/>
                 </a:rPr>
-                <a:t>Результаты покажут сокращение нагрузки на поддержку.</a:t>
+                <a:t>Обеспечивается безопасность данных при обработке запросов.</a:t>
               </a:r>
             </a:p>
           </p:txBody>
@@ -9186,7 +9318,7 @@
                 <a:spcPts val="0"/>
               </a:spcBef>
               <a:spcAft>
-                <a:spcPts val="359"/>
+                <a:spcPts val="270"/>
               </a:spcAft>
               <a:buClr>
                 <a:schemeClr val="accent1"/>
@@ -9196,12 +9328,12 @@
               <a:buNone/>
             </a:pPr>
             <a:r>
-              <a:rPr sz="2400">
+              <a:rPr sz="1800">
                 <a:solidFill>
                   <a:srgbClr val="000000"/>
                 </a:solidFill>
               </a:rPr>
-              <a:t>Для реализации требуется команда из 3 человек</a:t>
+              <a:t>Требуется одобрение пилота и выделение команды из 3 человек для реализации</a:t>
             </a:r>
             <a:endParaRPr/>
           </a:p>
@@ -9209,16 +9341,16 @@
       </p:sp>
       <p:grpSp>
         <p:nvGrpSpPr>
-          <p:cNvPr id="2" name="BrandDeck Diagram icon_grid" descr="icon_grid: Для запуска пилота требуется команда из 3 человек.; Специалисты займутся настройкой модели и интеграцией с порталом.; Команда будет отвечать на вопросы и анализировать результаты пилота."/>
+          <p:cNvPr id="2" name="BrandDeck Diagram icon_grid" descr="icon_grid: Просим одобрить запуск пилота.; Требуется выделение команды из 3 человек.; Срок пилота: 6 недель."/>
           <p:cNvGrpSpPr/>
           <p:nvPr/>
         </p:nvGrpSpPr>
         <p:grpSpPr>
           <a:xfrm>
-            <a:off x="677334" y="2912953"/>
-            <a:ext cx="10855853" cy="2782924"/>
-            <a:chOff x="677334" y="2912953"/>
-            <a:chExt cx="10855853" cy="2782924"/>
+            <a:off x="677334" y="2603500"/>
+            <a:ext cx="10855853" cy="3597276"/>
+            <a:chOff x="677334" y="2603500"/>
+            <a:chExt cx="10855853" cy="3597276"/>
           </a:xfrm>
         </p:grpSpPr>
         <p:sp>
@@ -9229,8 +9361,8 @@
           </p:nvSpPr>
           <p:spPr>
             <a:xfrm>
-              <a:off x="677334" y="2912953"/>
-              <a:ext cx="5319368" cy="1282903"/>
+              <a:off x="677334" y="2603500"/>
+              <a:ext cx="3473873" cy="3597276"/>
             </a:xfrm>
             <a:prstGeom prst="roundRect">
               <a:avLst>
@@ -9260,8 +9392,8 @@
           </p:nvSpPr>
           <p:spPr>
             <a:xfrm>
-              <a:off x="896790" y="3317794"/>
-              <a:ext cx="473222" cy="473222"/>
+              <a:off x="896789" y="2822956"/>
+              <a:ext cx="603504" cy="603504"/>
             </a:xfrm>
             <a:prstGeom prst="ellipse">
               <a:avLst/>
@@ -9289,8 +9421,8 @@
           </p:nvSpPr>
           <p:spPr>
             <a:xfrm>
-              <a:off x="1000898" y="3421903"/>
-              <a:ext cx="265004" cy="265004"/>
+              <a:off x="1029560" y="2955726"/>
+              <a:ext cx="337962" cy="337962"/>
             </a:xfrm>
             <a:custGeom>
               <a:avLst/>
@@ -9393,7 +9525,7 @@
               </a:pathLst>
             </a:custGeom>
             <a:noFill/>
-            <a:ln w="22083" cap="rnd">
+            <a:ln w="28163" cap="rnd">
               <a:solidFill>
                 <a:srgbClr val="FFFFFF"/>
               </a:solidFill>
@@ -9416,8 +9548,8 @@
           </p:nvSpPr>
           <p:spPr>
             <a:xfrm>
-              <a:off x="1501685" y="3044627"/>
-              <a:ext cx="4275560" cy="1019556"/>
+              <a:off x="830953" y="3580079"/>
+              <a:ext cx="3166634" cy="2510968"/>
             </a:xfrm>
             <a:prstGeom prst="rect">
               <a:avLst/>
@@ -9425,7 +9557,7 @@
             <a:noFill/>
           </p:spPr>
           <p:txBody>
-            <a:bodyPr wrap="square" anchor="ctr" lIns="36576" tIns="18288" rIns="36576" bIns="18288">
+            <a:bodyPr wrap="square" anchor="t" lIns="36576" tIns="18288" rIns="36576" bIns="18288">
               <a:noAutofit/>
             </a:bodyPr>
             <a:lstStyle/>
@@ -9442,7 +9574,7 @@
                   </a:solidFill>
                   <a:latin typeface="Play"/>
                 </a:rPr>
-                <a:t>Для запуска пилота требуется команда из 3 человек.</a:t>
+                <a:t>Просим одобрить запуск пилота.</a:t>
               </a:r>
             </a:p>
           </p:txBody>
@@ -9455,8 +9587,8 @@
           </p:nvSpPr>
           <p:spPr>
             <a:xfrm>
-              <a:off x="6213819" y="2912953"/>
-              <a:ext cx="5319368" cy="1282903"/>
+              <a:off x="4368324" y="2603500"/>
+              <a:ext cx="3473873" cy="3597276"/>
             </a:xfrm>
             <a:prstGeom prst="roundRect">
               <a:avLst>
@@ -9486,8 +9618,8 @@
           </p:nvSpPr>
           <p:spPr>
             <a:xfrm>
-              <a:off x="6433275" y="3317794"/>
-              <a:ext cx="473222" cy="473222"/>
+              <a:off x="4587780" y="2822956"/>
+              <a:ext cx="603504" cy="603504"/>
             </a:xfrm>
             <a:prstGeom prst="ellipse">
               <a:avLst/>
@@ -9509,199 +9641,14 @@
         </p:sp>
         <p:sp>
           <p:nvSpPr>
-            <p:cNvPr id="550" name="BrandDeck Icon user"/>
+            <p:cNvPr id="550" name="BrandDeck Icon users"/>
             <p:cNvSpPr/>
             <p:nvPr/>
           </p:nvSpPr>
           <p:spPr>
             <a:xfrm>
-              <a:off x="6537384" y="3421903"/>
-              <a:ext cx="265004" cy="265004"/>
-            </a:xfrm>
-            <a:custGeom>
-              <a:avLst/>
-              <a:gdLst/>
-              <a:ahLst/>
-              <a:cxnLst/>
-              <a:rect l="l" t="t" r="r" b="b"/>
-              <a:pathLst>
-                <a:path w="24000" h="24000" fill="none">
-                  <a:moveTo>
-                    <a:pt x="19000" y="21000"/>
-                  </a:moveTo>
-                  <a:lnTo>
-                    <a:pt x="19000" y="19000"/>
-                  </a:lnTo>
-                  <a:cubicBezTo>
-                    <a:pt x="19000" y="16791"/>
-                    <a:pt x="17209" y="15000"/>
-                    <a:pt x="15000" y="15000"/>
-                  </a:cubicBezTo>
-                  <a:lnTo>
-                    <a:pt x="9000" y="15000"/>
-                  </a:lnTo>
-                  <a:cubicBezTo>
-                    <a:pt x="6791" y="15000"/>
-                    <a:pt x="5000" y="16791"/>
-                    <a:pt x="5000" y="19000"/>
-                  </a:cubicBezTo>
-                  <a:lnTo>
-                    <a:pt x="5000" y="21000"/>
-                  </a:lnTo>
-                </a:path>
-                <a:path w="24000" h="24000" fill="none">
-                  <a:moveTo>
-                    <a:pt x="16000" y="7000"/>
-                  </a:moveTo>
-                  <a:cubicBezTo>
-                    <a:pt x="16000" y="9209"/>
-                    <a:pt x="14209" y="11000"/>
-                    <a:pt x="12000" y="11000"/>
-                  </a:cubicBezTo>
-                  <a:cubicBezTo>
-                    <a:pt x="9791" y="11000"/>
-                    <a:pt x="8000" y="9209"/>
-                    <a:pt x="8000" y="7000"/>
-                  </a:cubicBezTo>
-                  <a:cubicBezTo>
-                    <a:pt x="8000" y="4791"/>
-                    <a:pt x="9791" y="3000"/>
-                    <a:pt x="12000" y="3000"/>
-                  </a:cubicBezTo>
-                  <a:cubicBezTo>
-                    <a:pt x="14209" y="3000"/>
-                    <a:pt x="16000" y="4791"/>
-                    <a:pt x="16000" y="7000"/>
-                  </a:cubicBezTo>
-                  <a:close/>
-                </a:path>
-              </a:pathLst>
-            </a:custGeom>
-            <a:noFill/>
-            <a:ln w="22083" cap="rnd">
-              <a:solidFill>
-                <a:srgbClr val="FFFFFF"/>
-              </a:solidFill>
-              <a:round/>
-            </a:ln>
-          </p:spPr>
-          <p:txBody>
-            <a:bodyPr rtlCol="0" anchor="ctr"/>
-            <a:lstStyle/>
-            <a:p>
-              <a:pPr algn="ctr"/>
-            </a:p>
-          </p:txBody>
-        </p:sp>
-        <p:sp>
-          <p:nvSpPr>
-            <p:cNvPr id="551" name="BrandDeck Diagram Text 2"/>
-            <p:cNvSpPr txBox="1"/>
-            <p:nvPr/>
-          </p:nvSpPr>
-          <p:spPr>
-            <a:xfrm>
-              <a:off x="7038171" y="3044627"/>
-              <a:ext cx="4275560" cy="1019556"/>
-            </a:xfrm>
-            <a:prstGeom prst="rect">
-              <a:avLst/>
-            </a:prstGeom>
-            <a:noFill/>
-          </p:spPr>
-          <p:txBody>
-            <a:bodyPr wrap="square" anchor="ctr" lIns="36576" tIns="18288" rIns="36576" bIns="18288">
-              <a:noAutofit/>
-            </a:bodyPr>
-            <a:lstStyle/>
-            <a:p>
-              <a:pPr algn="l">
-                <a:lnSpc>
-                  <a:spcPct val="110000"/>
-                </a:lnSpc>
-              </a:pPr>
-              <a:r>
-                <a:rPr sz="1800" b="0">
-                  <a:solidFill>
-                    <a:srgbClr val="000000"/>
-                  </a:solidFill>
-                  <a:latin typeface="Play"/>
-                </a:rPr>
-                <a:t>Специалисты займутся настройкой модели и интеграцией с порталом.</a:t>
-              </a:r>
-            </a:p>
-          </p:txBody>
-        </p:sp>
-        <p:sp>
-          <p:nvSpPr>
-            <p:cNvPr id="552" name="BrandDeck Diagram Card 3"/>
-            <p:cNvSpPr/>
-            <p:nvPr/>
-          </p:nvSpPr>
-          <p:spPr>
-            <a:xfrm>
-              <a:off x="677334" y="4412974"/>
-              <a:ext cx="5319368" cy="1282903"/>
-            </a:xfrm>
-            <a:prstGeom prst="roundRect">
-              <a:avLst>
-                <a:gd name="adj" fmla="val 8000"/>
-              </a:avLst>
-            </a:prstGeom>
-            <a:solidFill>
-              <a:srgbClr val="EDF5FF"/>
-            </a:solidFill>
-            <a:ln>
-              <a:noFill/>
-            </a:ln>
-          </p:spPr>
-          <p:txBody>
-            <a:bodyPr rtlCol="0" anchor="ctr"/>
-            <a:lstStyle/>
-            <a:p>
-              <a:pPr algn="ctr"/>
-            </a:p>
-          </p:txBody>
-        </p:sp>
-        <p:sp>
-          <p:nvSpPr>
-            <p:cNvPr id="553" name="BrandDeck Diagram Icon 3 Badge"/>
-            <p:cNvSpPr/>
-            <p:nvPr/>
-          </p:nvSpPr>
-          <p:spPr>
-            <a:xfrm>
-              <a:off x="896790" y="4817814"/>
-              <a:ext cx="473222" cy="473222"/>
-            </a:xfrm>
-            <a:prstGeom prst="ellipse">
-              <a:avLst/>
-            </a:prstGeom>
-            <a:solidFill>
-              <a:srgbClr val="006DEB"/>
-            </a:solidFill>
-            <a:ln>
-              <a:noFill/>
-            </a:ln>
-          </p:spPr>
-          <p:txBody>
-            <a:bodyPr rtlCol="0" anchor="ctr"/>
-            <a:lstStyle/>
-            <a:p>
-              <a:pPr algn="ctr"/>
-            </a:p>
-          </p:txBody>
-        </p:sp>
-        <p:sp>
-          <p:nvSpPr>
-            <p:cNvPr id="554" name="BrandDeck Icon users"/>
-            <p:cNvSpPr/>
-            <p:nvPr/>
-          </p:nvSpPr>
-          <p:spPr>
-            <a:xfrm>
-              <a:off x="1000898" y="4921923"/>
-              <a:ext cx="265004" cy="265004"/>
+              <a:off x="4720551" y="2955726"/>
+              <a:ext cx="337962" cy="337962"/>
             </a:xfrm>
             <a:custGeom>
               <a:avLst/>
@@ -9791,7 +9738,7 @@
               </a:pathLst>
             </a:custGeom>
             <a:noFill/>
-            <a:ln w="22083" cap="rnd">
+            <a:ln w="28163" cap="rnd">
               <a:solidFill>
                 <a:srgbClr val="FFFFFF"/>
               </a:solidFill>
@@ -9808,14 +9755,14 @@
         </p:sp>
         <p:sp>
           <p:nvSpPr>
-            <p:cNvPr id="555" name="BrandDeck Diagram Text 3"/>
+            <p:cNvPr id="551" name="BrandDeck Diagram Text 2"/>
             <p:cNvSpPr txBox="1"/>
             <p:nvPr/>
           </p:nvSpPr>
           <p:spPr>
             <a:xfrm>
-              <a:off x="1501685" y="4544647"/>
-              <a:ext cx="4275560" cy="1019556"/>
+              <a:off x="4521943" y="3580079"/>
+              <a:ext cx="3166634" cy="2510968"/>
             </a:xfrm>
             <a:prstGeom prst="rect">
               <a:avLst/>
@@ -9823,7 +9770,7 @@
             <a:noFill/>
           </p:spPr>
           <p:txBody>
-            <a:bodyPr wrap="square" anchor="ctr" lIns="36576" tIns="18288" rIns="36576" bIns="18288">
+            <a:bodyPr wrap="square" anchor="t" lIns="36576" tIns="18288" rIns="36576" bIns="18288">
               <a:noAutofit/>
             </a:bodyPr>
             <a:lstStyle/>
@@ -9840,7 +9787,188 @@
                   </a:solidFill>
                   <a:latin typeface="Play"/>
                 </a:rPr>
-                <a:t>Команда будет отвечать на вопросы и анализировать результаты пилота.</a:t>
+                <a:t>Требуется выделение команды из 3 человек.</a:t>
+              </a:r>
+            </a:p>
+          </p:txBody>
+        </p:sp>
+        <p:sp>
+          <p:nvSpPr>
+            <p:cNvPr id="552" name="BrandDeck Diagram Card 3"/>
+            <p:cNvSpPr/>
+            <p:nvPr/>
+          </p:nvSpPr>
+          <p:spPr>
+            <a:xfrm>
+              <a:off x="8059314" y="2603500"/>
+              <a:ext cx="3473873" cy="3597276"/>
+            </a:xfrm>
+            <a:prstGeom prst="roundRect">
+              <a:avLst>
+                <a:gd name="adj" fmla="val 8000"/>
+              </a:avLst>
+            </a:prstGeom>
+            <a:solidFill>
+              <a:srgbClr val="EDF5FF"/>
+            </a:solidFill>
+            <a:ln>
+              <a:noFill/>
+            </a:ln>
+          </p:spPr>
+          <p:txBody>
+            <a:bodyPr rtlCol="0" anchor="ctr"/>
+            <a:lstStyle/>
+            <a:p>
+              <a:pPr algn="ctr"/>
+            </a:p>
+          </p:txBody>
+        </p:sp>
+        <p:sp>
+          <p:nvSpPr>
+            <p:cNvPr id="553" name="BrandDeck Diagram Icon 3 Badge"/>
+            <p:cNvSpPr/>
+            <p:nvPr/>
+          </p:nvSpPr>
+          <p:spPr>
+            <a:xfrm>
+              <a:off x="8278770" y="2822956"/>
+              <a:ext cx="603504" cy="603504"/>
+            </a:xfrm>
+            <a:prstGeom prst="ellipse">
+              <a:avLst/>
+            </a:prstGeom>
+            <a:solidFill>
+              <a:srgbClr val="006DEB"/>
+            </a:solidFill>
+            <a:ln>
+              <a:noFill/>
+            </a:ln>
+          </p:spPr>
+          <p:txBody>
+            <a:bodyPr rtlCol="0" anchor="ctr"/>
+            <a:lstStyle/>
+            <a:p>
+              <a:pPr algn="ctr"/>
+            </a:p>
+          </p:txBody>
+        </p:sp>
+        <p:sp>
+          <p:nvSpPr>
+            <p:cNvPr id="554" name="BrandDeck Icon clock"/>
+            <p:cNvSpPr/>
+            <p:nvPr/>
+          </p:nvSpPr>
+          <p:spPr>
+            <a:xfrm>
+              <a:off x="8411541" y="2955726"/>
+              <a:ext cx="337962" cy="337962"/>
+            </a:xfrm>
+            <a:custGeom>
+              <a:avLst/>
+              <a:gdLst/>
+              <a:ahLst/>
+              <a:cxnLst/>
+              <a:rect l="l" t="t" r="r" b="b"/>
+              <a:pathLst>
+                <a:path w="24000" h="24000" fill="none">
+                  <a:moveTo>
+                    <a:pt x="22000" y="12000"/>
+                  </a:moveTo>
+                  <a:cubicBezTo>
+                    <a:pt x="22000" y="17523"/>
+                    <a:pt x="17523" y="22000"/>
+                    <a:pt x="12000" y="22000"/>
+                  </a:cubicBezTo>
+                  <a:cubicBezTo>
+                    <a:pt x="6477" y="22000"/>
+                    <a:pt x="2000" y="17523"/>
+                    <a:pt x="2000" y="12000"/>
+                  </a:cubicBezTo>
+                  <a:cubicBezTo>
+                    <a:pt x="2000" y="6477"/>
+                    <a:pt x="6477" y="2000"/>
+                    <a:pt x="12000" y="2000"/>
+                  </a:cubicBezTo>
+                  <a:cubicBezTo>
+                    <a:pt x="17523" y="2000"/>
+                    <a:pt x="22000" y="6477"/>
+                    <a:pt x="22000" y="12000"/>
+                  </a:cubicBezTo>
+                  <a:close/>
+                </a:path>
+                <a:path w="24000" h="24000" fill="none">
+                  <a:moveTo>
+                    <a:pt x="12000" y="6000"/>
+                  </a:moveTo>
+                  <a:lnTo>
+                    <a:pt x="12000" y="12000"/>
+                  </a:lnTo>
+                  <a:lnTo>
+                    <a:pt x="16000" y="14000"/>
+                  </a:lnTo>
+                </a:path>
+              </a:pathLst>
+            </a:custGeom>
+            <a:noFill/>
+            <a:ln w="28163" cap="rnd">
+              <a:solidFill>
+                <a:srgbClr val="FFFFFF"/>
+              </a:solidFill>
+              <a:round/>
+            </a:ln>
+          </p:spPr>
+          <p:txBody>
+            <a:bodyPr rtlCol="0" anchor="ctr"/>
+            <a:lstStyle/>
+            <a:p>
+              <a:pPr algn="ctr"/>
+            </a:p>
+          </p:txBody>
+        </p:sp>
+        <p:sp>
+          <p:nvSpPr>
+            <p:cNvPr id="555" name="BrandDeck Diagram Text 3"/>
+            <p:cNvSpPr txBox="1"/>
+            <p:nvPr/>
+          </p:nvSpPr>
+          <p:spPr>
+            <a:xfrm>
+              <a:off x="8212933" y="3580079"/>
+              <a:ext cx="3166634" cy="2510968"/>
+            </a:xfrm>
+            <a:prstGeom prst="rect">
+              <a:avLst/>
+            </a:prstGeom>
+            <a:noFill/>
+          </p:spPr>
+          <p:txBody>
+            <a:bodyPr wrap="square" anchor="t" lIns="36576" tIns="18288" rIns="36576" bIns="18288">
+              <a:noAutofit/>
+            </a:bodyPr>
+            <a:lstStyle/>
+            <a:p>
+              <a:pPr algn="l">
+                <a:lnSpc>
+                  <a:spcPct val="110000"/>
+                </a:lnSpc>
+              </a:pPr>
+              <a:r>
+                <a:rPr sz="1800" b="1">
+                  <a:solidFill>
+                    <a:srgbClr val="000000"/>
+                  </a:solidFill>
+                  <a:latin typeface="Play"/>
+                </a:rPr>
+                <a:t>Срок пилота:</a:t>
+              </a:r>
+              <a:r>
+                <a:rPr sz="1800" b="0">
+                  <a:solidFill>
+                    <a:srgbClr val="000000"/>
+                  </a:solidFill>
+                  <a:latin typeface="Play"/>
+                </a:rPr>
+                <a:t> 6 недель.</a:t>
               </a:r>
             </a:p>
           </p:txBody>
@@ -9913,7 +10041,7 @@
             </a:pPr>
             <a:r>
               <a:rPr sz="1600"/>
-              <a:t>Решение о старте проекта и выделении ресурсов</a:t>
+              <a:t>Решение о запуске пилота и выделении команды</a:t>
             </a:r>
             <a:endParaRPr/>
           </a:p>
@@ -9961,7 +10089,7 @@
             </a:pPr>
             <a:r>
               <a:rPr sz="1600"/>
-              <a:t>Одобрить запуск пилота для 2 подразделений и 150 сотрудников.</a:t>
+              <a:t>Просим одобрить запуск пилота с командой из 3 человек.</a:t>
             </a:r>
             <a:endParaRPr/>
           </a:p>
@@ -9981,7 +10109,7 @@
             </a:pPr>
             <a:r>
               <a:rPr sz="1600"/>
-              <a:t>Выделить команду из 3 человек для реализации проекта.</a:t>
+              <a:t>Пилот продлится 6 недель в двух подразделениях.</a:t>
             </a:r>
           </a:p>
           <a:p>
@@ -10000,7 +10128,7 @@
             </a:pPr>
             <a:r>
               <a:rPr sz="1600"/>
-              <a:t>Начать пилотный этап в течение 6 недель.</a:t>
+              <a:t>Измерим время поиска ответа и долю закрытых обращений.</a:t>
             </a:r>
           </a:p>
         </p:txBody>
@@ -10055,7 +10183,7 @@
                   <a:srgbClr val="000000"/>
                 </a:solidFill>
               </a:rPr>
-              <a:t>Одобрить пилот и выделить команду из 3 человек</a:t>
+              <a:t>Просим одобрить пилот и выделить команду из 3 человек</a:t>
             </a:r>
             <a:endParaRPr/>
           </a:p>
@@ -10070,168 +10198,6 @@
 </file>
 
 <file path=ppt/slides/slide2.xml><?xml version="1.0" encoding="utf-8"?>
-<p:sld xmlns:a="http://schemas.openxmlformats.org/drawingml/2006/main" xmlns:p="http://schemas.openxmlformats.org/presentationml/2006/main" xmlns:r="http://schemas.openxmlformats.org/officeDocument/2006/relationships">
-  <p:cSld>
-    <p:spTree>
-      <p:nvGrpSpPr>
-        <p:cNvPr id="1" name=""/>
-        <p:cNvGrpSpPr/>
-        <p:nvPr/>
-      </p:nvGrpSpPr>
-      <p:grpSpPr/>
-      <p:sp>
-        <p:nvSpPr>
-          <p:cNvPr id="2" name="BrandDeck Text 2"/>
-          <p:cNvSpPr>
-            <a:spLocks noGrp="1"/>
-          </p:cNvSpPr>
-          <p:nvPr>
-            <p:ph type="title"/>
-          </p:nvPr>
-        </p:nvSpPr>
-        <p:spPr>
-          <a:xfrm>
-            <a:off x="658813" y="692150"/>
-            <a:ext cx="5254307" cy="1380285"/>
-          </a:xfrm>
-        </p:spPr>
-        <p:txBody>
-          <a:bodyPr wrap="square" anchor="t">
-            <a:normAutofit/>
-          </a:bodyPr>
-          <a:lstStyle/>
-          <a:p>
-            <a:pPr algn="l">
-              <a:lnSpc>
-                <a:spcPct val="115000"/>
-              </a:lnSpc>
-              <a:spcBef>
-                <a:spcPts val="0"/>
-              </a:spcBef>
-              <a:spcAft>
-                <a:spcPts val="359"/>
-              </a:spcAft>
-            </a:pPr>
-            <a:r>
-              <a:rPr sz="2400">
-                <a:solidFill>
-                  <a:srgbClr val="000000"/>
-                </a:solidFill>
-              </a:rPr>
-              <a:t>Сотрудники теряют до 30 минут на поиск инструкций</a:t>
-            </a:r>
-          </a:p>
-        </p:txBody>
-      </p:sp>
-      <p:sp>
-        <p:nvSpPr>
-          <p:cNvPr id="3" name="BrandDeck Text 3"/>
-          <p:cNvSpPr>
-            <a:spLocks noGrp="1"/>
-          </p:cNvSpPr>
-          <p:nvPr>
-            <p:ph type="body" idx="1"/>
-          </p:nvPr>
-        </p:nvSpPr>
-        <p:spPr/>
-        <p:txBody>
-          <a:bodyPr wrap="square" anchor="t">
-            <a:normAutofit/>
-          </a:bodyPr>
-          <a:lstStyle/>
-          <a:p>
-            <a:pPr>
-              <a:lnSpc>
-                <a:spcPct val="115000"/>
-              </a:lnSpc>
-              <a:spcBef>
-                <a:spcPts val="0"/>
-              </a:spcBef>
-              <a:spcAft>
-                <a:spcPts val="270"/>
-              </a:spcAft>
-            </a:pPr>
-            <a:r>
-              <a:rPr sz="1800">
-                <a:solidFill>
-                  <a:srgbClr val="000000"/>
-                </a:solidFill>
-              </a:rPr>
-              <a:t>Сотрудники тратят до 30 минут на поиск нужной инструкции.</a:t>
-            </a:r>
-          </a:p>
-          <a:p>
-            <a:pPr>
-              <a:lnSpc>
-                <a:spcPct val="115000"/>
-              </a:lnSpc>
-              <a:spcBef>
-                <a:spcPts val="0"/>
-              </a:spcBef>
-              <a:spcAft>
-                <a:spcPts val="270"/>
-              </a:spcAft>
-            </a:pPr>
-            <a:r>
-              <a:rPr sz="1800">
-                <a:solidFill>
-                  <a:srgbClr val="000000"/>
-                </a:solidFill>
-              </a:rPr>
-              <a:t>Ручной поиск регламентов снижает общую эффективность работы.</a:t>
-            </a:r>
-          </a:p>
-          <a:p>
-            <a:pPr>
-              <a:lnSpc>
-                <a:spcPct val="115000"/>
-              </a:lnSpc>
-              <a:spcBef>
-                <a:spcPts val="0"/>
-              </a:spcBef>
-              <a:spcAft>
-                <a:spcPts val="270"/>
-              </a:spcAft>
-            </a:pPr>
-            <a:r>
-              <a:rPr sz="1800">
-                <a:solidFill>
-                  <a:srgbClr val="000000"/>
-                </a:solidFill>
-              </a:rPr>
-              <a:t>Длительное время поиска отвлекает от выполнения основных задач.</a:t>
-            </a:r>
-          </a:p>
-        </p:txBody>
-      </p:sp>
-      <p:pic>
-        <p:nvPicPr>
-          <p:cNvPr id="4" name="BrandDeck Image" descr="сотрудник специалист поддержки"/>
-          <p:cNvPicPr>
-            <a:picLocks noGrp="1" noChangeAspect="1"/>
-          </p:cNvPicPr>
-          <p:nvPr>
-            <p:ph type="pic" idx="2"/>
-          </p:nvPr>
-        </p:nvPicPr>
-        <p:blipFill>
-          <a:blip r:embed="rId2"/>
-          <a:srcRect l="24987" r="24987"/>
-          <a:stretch>
-            <a:fillRect/>
-          </a:stretch>
-        </p:blipFill>
-        <p:spPr/>
-      </p:pic>
-    </p:spTree>
-  </p:cSld>
-  <p:clrMapOvr>
-    <a:masterClrMapping/>
-  </p:clrMapOvr>
-</p:sld>
-</file>
-
-<file path=ppt/slides/slide3.xml><?xml version="1.0" encoding="utf-8"?>
 <p:sld xmlns:a="http://schemas.openxmlformats.org/drawingml/2006/main" xmlns:p="http://schemas.openxmlformats.org/presentationml/2006/main" xmlns:r="http://schemas.openxmlformats.org/officeDocument/2006/relationships">
   <p:cSld>
     <p:bg>
@@ -10283,7 +10249,7 @@
                 <a:spcPts val="0"/>
               </a:spcBef>
               <a:spcAft>
-                <a:spcPts val="359"/>
+                <a:spcPts val="270"/>
               </a:spcAft>
               <a:buClr>
                 <a:schemeClr val="accent1"/>
@@ -10293,12 +10259,12 @@
               <a:buNone/>
             </a:pPr>
             <a:r>
-              <a:rPr sz="2400">
+              <a:rPr sz="1800">
                 <a:solidFill>
                   <a:srgbClr val="000000"/>
                 </a:solidFill>
               </a:rPr>
-              <a:t>Треть обращений в поддержку — повторяющиеся вопросы</a:t>
+              <a:t>Сотрудники тратят до 30 минут на поиск инструкции, а треть обращений — повторяющиеся вопросы</a:t>
             </a:r>
             <a:endParaRPr/>
           </a:p>
@@ -10306,16 +10272,16 @@
       </p:sp>
       <p:grpSp>
         <p:nvGrpSpPr>
-          <p:cNvPr id="2" name="BrandDeck Diagram icon_grid" descr="icon_grid: Треть обращений в поддержку — повторяющиеся вопросы.; Запросы касаются регламентов и инструкций.; Нагрузка на поддержку растет из-за дублирования."/>
+          <p:cNvPr id="2" name="BrandDeck Diagram icon_grid" descr="icon_grid: Сотрудники тратят до 30 минут на поиск инструкции.; Треть всех обращений в поддержку — повторяющиеся вопросы.; Это создает высокую нагрузку на специалистов поддержки."/>
           <p:cNvGrpSpPr/>
           <p:nvPr/>
         </p:nvGrpSpPr>
         <p:grpSpPr>
           <a:xfrm>
-            <a:off x="677334" y="3040128"/>
-            <a:ext cx="10855853" cy="2448253"/>
-            <a:chOff x="677334" y="3040128"/>
-            <a:chExt cx="10855853" cy="2448253"/>
+            <a:off x="677334" y="2912953"/>
+            <a:ext cx="10855853" cy="2782924"/>
+            <a:chOff x="677334" y="2912953"/>
+            <a:chExt cx="10855853" cy="2782924"/>
           </a:xfrm>
         </p:grpSpPr>
         <p:sp>
@@ -10326,8 +10292,8 @@
           </p:nvSpPr>
           <p:spPr>
             <a:xfrm>
-              <a:off x="677334" y="3040128"/>
-              <a:ext cx="5319368" cy="1115568"/>
+              <a:off x="677334" y="2912953"/>
+              <a:ext cx="5319368" cy="1282903"/>
             </a:xfrm>
             <a:prstGeom prst="roundRect">
               <a:avLst>
@@ -10357,7 +10323,7 @@
           </p:nvSpPr>
           <p:spPr>
             <a:xfrm>
-              <a:off x="896790" y="3361301"/>
+              <a:off x="896790" y="3317794"/>
               <a:ext cx="473222" cy="473222"/>
             </a:xfrm>
             <a:prstGeom prst="ellipse">
@@ -10380,13 +10346,226 @@
         </p:sp>
         <p:sp>
           <p:nvSpPr>
-            <p:cNvPr id="546" name="BrandDeck Icon headset"/>
+            <p:cNvPr id="546" name="BrandDeck Icon users"/>
             <p:cNvSpPr/>
             <p:nvPr/>
           </p:nvSpPr>
           <p:spPr>
             <a:xfrm>
-              <a:off x="1000898" y="3465410"/>
+              <a:off x="1000898" y="3421903"/>
+              <a:ext cx="265004" cy="265004"/>
+            </a:xfrm>
+            <a:custGeom>
+              <a:avLst/>
+              <a:gdLst/>
+              <a:ahLst/>
+              <a:cxnLst/>
+              <a:rect l="l" t="t" r="r" b="b"/>
+              <a:pathLst>
+                <a:path w="24000" h="24000" fill="none">
+                  <a:moveTo>
+                    <a:pt x="16000" y="21000"/>
+                  </a:moveTo>
+                  <a:lnTo>
+                    <a:pt x="16000" y="19000"/>
+                  </a:lnTo>
+                  <a:cubicBezTo>
+                    <a:pt x="16000" y="16791"/>
+                    <a:pt x="14209" y="15000"/>
+                    <a:pt x="12000" y="15000"/>
+                  </a:cubicBezTo>
+                  <a:lnTo>
+                    <a:pt x="6000" y="15000"/>
+                  </a:lnTo>
+                  <a:cubicBezTo>
+                    <a:pt x="3791" y="15000"/>
+                    <a:pt x="2000" y="16791"/>
+                    <a:pt x="2000" y="19000"/>
+                  </a:cubicBezTo>
+                  <a:lnTo>
+                    <a:pt x="2000" y="21000"/>
+                  </a:lnTo>
+                </a:path>
+                <a:path w="24000" h="24000" fill="none">
+                  <a:moveTo>
+                    <a:pt x="13000" y="7000"/>
+                  </a:moveTo>
+                  <a:cubicBezTo>
+                    <a:pt x="13000" y="9209"/>
+                    <a:pt x="11209" y="11000"/>
+                    <a:pt x="9000" y="11000"/>
+                  </a:cubicBezTo>
+                  <a:cubicBezTo>
+                    <a:pt x="6791" y="11000"/>
+                    <a:pt x="5000" y="9209"/>
+                    <a:pt x="5000" y="7000"/>
+                  </a:cubicBezTo>
+                  <a:cubicBezTo>
+                    <a:pt x="5000" y="4791"/>
+                    <a:pt x="6791" y="3000"/>
+                    <a:pt x="9000" y="3000"/>
+                  </a:cubicBezTo>
+                  <a:cubicBezTo>
+                    <a:pt x="11209" y="3000"/>
+                    <a:pt x="13000" y="4791"/>
+                    <a:pt x="13000" y="7000"/>
+                  </a:cubicBezTo>
+                  <a:close/>
+                </a:path>
+                <a:path w="24000" h="24000" fill="none">
+                  <a:moveTo>
+                    <a:pt x="22000" y="21000"/>
+                  </a:moveTo>
+                  <a:lnTo>
+                    <a:pt x="22000" y="19000"/>
+                  </a:lnTo>
+                  <a:cubicBezTo>
+                    <a:pt x="21999" y="17177"/>
+                    <a:pt x="20765" y="15586"/>
+                    <a:pt x="19000" y="15130"/>
+                  </a:cubicBezTo>
+                </a:path>
+                <a:path w="24000" h="24000" fill="none">
+                  <a:moveTo>
+                    <a:pt x="16000" y="3130"/>
+                  </a:moveTo>
+                  <a:cubicBezTo>
+                    <a:pt x="17770" y="3583"/>
+                    <a:pt x="19008" y="5178"/>
+                    <a:pt x="19008" y="7005"/>
+                  </a:cubicBezTo>
+                  <a:cubicBezTo>
+                    <a:pt x="19008" y="8832"/>
+                    <a:pt x="17770" y="10427"/>
+                    <a:pt x="16000" y="10880"/>
+                  </a:cubicBezTo>
+                </a:path>
+              </a:pathLst>
+            </a:custGeom>
+            <a:noFill/>
+            <a:ln w="22083" cap="rnd">
+              <a:solidFill>
+                <a:srgbClr val="FFFFFF"/>
+              </a:solidFill>
+              <a:round/>
+            </a:ln>
+          </p:spPr>
+          <p:txBody>
+            <a:bodyPr rtlCol="0" anchor="ctr"/>
+            <a:lstStyle/>
+            <a:p>
+              <a:pPr algn="ctr"/>
+            </a:p>
+          </p:txBody>
+        </p:sp>
+        <p:sp>
+          <p:nvSpPr>
+            <p:cNvPr id="547" name="BrandDeck Diagram Text 1"/>
+            <p:cNvSpPr txBox="1"/>
+            <p:nvPr/>
+          </p:nvSpPr>
+          <p:spPr>
+            <a:xfrm>
+              <a:off x="1501685" y="3044627"/>
+              <a:ext cx="4275560" cy="1019556"/>
+            </a:xfrm>
+            <a:prstGeom prst="rect">
+              <a:avLst/>
+            </a:prstGeom>
+            <a:noFill/>
+          </p:spPr>
+          <p:txBody>
+            <a:bodyPr wrap="square" anchor="ctr" lIns="36576" tIns="18288" rIns="36576" bIns="18288">
+              <a:noAutofit/>
+            </a:bodyPr>
+            <a:lstStyle/>
+            <a:p>
+              <a:pPr algn="l">
+                <a:lnSpc>
+                  <a:spcPct val="110000"/>
+                </a:lnSpc>
+              </a:pPr>
+              <a:r>
+                <a:rPr sz="1800" b="0">
+                  <a:solidFill>
+                    <a:srgbClr val="000000"/>
+                  </a:solidFill>
+                  <a:latin typeface="Play"/>
+                </a:rPr>
+                <a:t>Сотрудники тратят до 30 минут на поиск инструкции.</a:t>
+              </a:r>
+            </a:p>
+          </p:txBody>
+        </p:sp>
+        <p:sp>
+          <p:nvSpPr>
+            <p:cNvPr id="548" name="BrandDeck Diagram Card 2"/>
+            <p:cNvSpPr/>
+            <p:nvPr/>
+          </p:nvSpPr>
+          <p:spPr>
+            <a:xfrm>
+              <a:off x="6213819" y="2912953"/>
+              <a:ext cx="5319368" cy="1282903"/>
+            </a:xfrm>
+            <a:prstGeom prst="roundRect">
+              <a:avLst>
+                <a:gd name="adj" fmla="val 8000"/>
+              </a:avLst>
+            </a:prstGeom>
+            <a:solidFill>
+              <a:srgbClr val="EDF5FF"/>
+            </a:solidFill>
+            <a:ln>
+              <a:noFill/>
+            </a:ln>
+          </p:spPr>
+          <p:txBody>
+            <a:bodyPr rtlCol="0" anchor="ctr"/>
+            <a:lstStyle/>
+            <a:p>
+              <a:pPr algn="ctr"/>
+            </a:p>
+          </p:txBody>
+        </p:sp>
+        <p:sp>
+          <p:nvSpPr>
+            <p:cNvPr id="549" name="BrandDeck Diagram Icon 2 Badge"/>
+            <p:cNvSpPr/>
+            <p:nvPr/>
+          </p:nvSpPr>
+          <p:spPr>
+            <a:xfrm>
+              <a:off x="6433275" y="3317794"/>
+              <a:ext cx="473222" cy="473222"/>
+            </a:xfrm>
+            <a:prstGeom prst="ellipse">
+              <a:avLst/>
+            </a:prstGeom>
+            <a:solidFill>
+              <a:srgbClr val="006DEB"/>
+            </a:solidFill>
+            <a:ln>
+              <a:noFill/>
+            </a:ln>
+          </p:spPr>
+          <p:txBody>
+            <a:bodyPr rtlCol="0" anchor="ctr"/>
+            <a:lstStyle/>
+            <a:p>
+              <a:pPr algn="ctr"/>
+            </a:p>
+          </p:txBody>
+        </p:sp>
+        <p:sp>
+          <p:nvSpPr>
+            <p:cNvPr id="550" name="BrandDeck Icon headset"/>
+            <p:cNvSpPr/>
+            <p:nvPr/>
+          </p:nvSpPr>
+          <p:spPr>
+            <a:xfrm>
+              <a:off x="6537384" y="3421903"/>
               <a:ext cx="265004" cy="265004"/>
             </a:xfrm>
             <a:custGeom>
@@ -10509,14 +10688,14 @@
         </p:sp>
         <p:sp>
           <p:nvSpPr>
-            <p:cNvPr id="547" name="BrandDeck Diagram Text 1"/>
+            <p:cNvPr id="551" name="BrandDeck Diagram Text 2"/>
             <p:cNvSpPr txBox="1"/>
             <p:nvPr/>
           </p:nvSpPr>
           <p:spPr>
             <a:xfrm>
-              <a:off x="1501685" y="3171802"/>
-              <a:ext cx="4275560" cy="852220"/>
+              <a:off x="7038171" y="3044627"/>
+              <a:ext cx="4275560" cy="1019556"/>
             </a:xfrm>
             <a:prstGeom prst="rect">
               <a:avLst/>
@@ -10541,7 +10720,7 @@
                   </a:solidFill>
                   <a:latin typeface="Play"/>
                 </a:rPr>
-                <a:t>Треть обращений в поддержку —</a:t>
+                <a:t>Треть всех обращений в поддержку —</a:t>
               </a:r>
               <a:r>
                 <a:rPr sz="1800" b="0">
@@ -10557,222 +10736,14 @@
         </p:sp>
         <p:sp>
           <p:nvSpPr>
-            <p:cNvPr id="548" name="BrandDeck Diagram Card 2"/>
-            <p:cNvSpPr/>
-            <p:nvPr/>
-          </p:nvSpPr>
-          <p:spPr>
-            <a:xfrm>
-              <a:off x="6213819" y="3040128"/>
-              <a:ext cx="5319368" cy="1115568"/>
-            </a:xfrm>
-            <a:prstGeom prst="roundRect">
-              <a:avLst>
-                <a:gd name="adj" fmla="val 8000"/>
-              </a:avLst>
-            </a:prstGeom>
-            <a:solidFill>
-              <a:srgbClr val="EDF5FF"/>
-            </a:solidFill>
-            <a:ln>
-              <a:noFill/>
-            </a:ln>
-          </p:spPr>
-          <p:txBody>
-            <a:bodyPr rtlCol="0" anchor="ctr"/>
-            <a:lstStyle/>
-            <a:p>
-              <a:pPr algn="ctr"/>
-            </a:p>
-          </p:txBody>
-        </p:sp>
-        <p:sp>
-          <p:nvSpPr>
-            <p:cNvPr id="549" name="BrandDeck Diagram Icon 2 Badge"/>
-            <p:cNvSpPr/>
-            <p:nvPr/>
-          </p:nvSpPr>
-          <p:spPr>
-            <a:xfrm>
-              <a:off x="6433275" y="3361301"/>
-              <a:ext cx="473222" cy="473222"/>
-            </a:xfrm>
-            <a:prstGeom prst="ellipse">
-              <a:avLst/>
-            </a:prstGeom>
-            <a:solidFill>
-              <a:srgbClr val="006DEB"/>
-            </a:solidFill>
-            <a:ln>
-              <a:noFill/>
-            </a:ln>
-          </p:spPr>
-          <p:txBody>
-            <a:bodyPr rtlCol="0" anchor="ctr"/>
-            <a:lstStyle/>
-            <a:p>
-              <a:pPr algn="ctr"/>
-            </a:p>
-          </p:txBody>
-        </p:sp>
-        <p:sp>
-          <p:nvSpPr>
-            <p:cNvPr id="550" name="BrandDeck Icon file-text"/>
-            <p:cNvSpPr/>
-            <p:nvPr/>
-          </p:nvSpPr>
-          <p:spPr>
-            <a:xfrm>
-              <a:off x="6537384" y="3465410"/>
-              <a:ext cx="265004" cy="265004"/>
-            </a:xfrm>
-            <a:custGeom>
-              <a:avLst/>
-              <a:gdLst/>
-              <a:ahLst/>
-              <a:cxnLst/>
-              <a:rect l="l" t="t" r="r" b="b"/>
-              <a:pathLst>
-                <a:path w="24000" h="24000" fill="none">
-                  <a:moveTo>
-                    <a:pt x="15000" y="2000"/>
-                  </a:moveTo>
-                  <a:lnTo>
-                    <a:pt x="6000" y="2000"/>
-                  </a:lnTo>
-                  <a:cubicBezTo>
-                    <a:pt x="4895" y="2000"/>
-                    <a:pt x="4000" y="2895"/>
-                    <a:pt x="4000" y="4000"/>
-                  </a:cubicBezTo>
-                  <a:lnTo>
-                    <a:pt x="4000" y="20000"/>
-                  </a:lnTo>
-                  <a:cubicBezTo>
-                    <a:pt x="4000" y="21105"/>
-                    <a:pt x="4895" y="22000"/>
-                    <a:pt x="6000" y="22000"/>
-                  </a:cubicBezTo>
-                  <a:lnTo>
-                    <a:pt x="18000" y="22000"/>
-                  </a:lnTo>
-                  <a:cubicBezTo>
-                    <a:pt x="19105" y="22000"/>
-                    <a:pt x="20000" y="21105"/>
-                    <a:pt x="20000" y="20000"/>
-                  </a:cubicBezTo>
-                  <a:lnTo>
-                    <a:pt x="20000" y="7000"/>
-                  </a:lnTo>
-                  <a:close/>
-                </a:path>
-                <a:path w="24000" h="24000" fill="none">
-                  <a:moveTo>
-                    <a:pt x="14000" y="2000"/>
-                  </a:moveTo>
-                  <a:lnTo>
-                    <a:pt x="14000" y="6000"/>
-                  </a:lnTo>
-                  <a:cubicBezTo>
-                    <a:pt x="14000" y="7105"/>
-                    <a:pt x="14895" y="8000"/>
-                    <a:pt x="16000" y="8000"/>
-                  </a:cubicBezTo>
-                  <a:lnTo>
-                    <a:pt x="20000" y="8000"/>
-                  </a:lnTo>
-                </a:path>
-                <a:path w="24000" h="24000" fill="none">
-                  <a:moveTo>
-                    <a:pt x="10000" y="9000"/>
-                  </a:moveTo>
-                  <a:lnTo>
-                    <a:pt x="8000" y="9000"/>
-                  </a:lnTo>
-                </a:path>
-                <a:path w="24000" h="24000" fill="none">
-                  <a:moveTo>
-                    <a:pt x="16000" y="13000"/>
-                  </a:moveTo>
-                  <a:lnTo>
-                    <a:pt x="8000" y="13000"/>
-                  </a:lnTo>
-                </a:path>
-                <a:path w="24000" h="24000" fill="none">
-                  <a:moveTo>
-                    <a:pt x="16000" y="17000"/>
-                  </a:moveTo>
-                  <a:lnTo>
-                    <a:pt x="8000" y="17000"/>
-                  </a:lnTo>
-                </a:path>
-              </a:pathLst>
-            </a:custGeom>
-            <a:noFill/>
-            <a:ln w="22083" cap="rnd">
-              <a:solidFill>
-                <a:srgbClr val="FFFFFF"/>
-              </a:solidFill>
-              <a:round/>
-            </a:ln>
-          </p:spPr>
-          <p:txBody>
-            <a:bodyPr rtlCol="0" anchor="ctr"/>
-            <a:lstStyle/>
-            <a:p>
-              <a:pPr algn="ctr"/>
-            </a:p>
-          </p:txBody>
-        </p:sp>
-        <p:sp>
-          <p:nvSpPr>
-            <p:cNvPr id="551" name="BrandDeck Diagram Text 2"/>
-            <p:cNvSpPr txBox="1"/>
-            <p:nvPr/>
-          </p:nvSpPr>
-          <p:spPr>
-            <a:xfrm>
-              <a:off x="7038171" y="3171802"/>
-              <a:ext cx="4275560" cy="852220"/>
-            </a:xfrm>
-            <a:prstGeom prst="rect">
-              <a:avLst/>
-            </a:prstGeom>
-            <a:noFill/>
-          </p:spPr>
-          <p:txBody>
-            <a:bodyPr wrap="square" anchor="ctr" lIns="36576" tIns="18288" rIns="36576" bIns="18288">
-              <a:noAutofit/>
-            </a:bodyPr>
-            <a:lstStyle/>
-            <a:p>
-              <a:pPr algn="l">
-                <a:lnSpc>
-                  <a:spcPct val="110000"/>
-                </a:lnSpc>
-              </a:pPr>
-              <a:r>
-                <a:rPr sz="1800" b="0">
-                  <a:solidFill>
-                    <a:srgbClr val="000000"/>
-                  </a:solidFill>
-                  <a:latin typeface="Play"/>
-                </a:rPr>
-                <a:t>Запросы касаются регламентов и инструкций.</a:t>
-              </a:r>
-            </a:p>
-          </p:txBody>
-        </p:sp>
-        <p:sp>
-          <p:nvSpPr>
             <p:cNvPr id="552" name="BrandDeck Diagram Card 3"/>
             <p:cNvSpPr/>
             <p:nvPr/>
           </p:nvSpPr>
           <p:spPr>
             <a:xfrm>
-              <a:off x="677334" y="4372813"/>
-              <a:ext cx="5319368" cy="1115568"/>
+              <a:off x="677334" y="4412974"/>
+              <a:ext cx="5319368" cy="1282903"/>
             </a:xfrm>
             <a:prstGeom prst="roundRect">
               <a:avLst>
@@ -10802,7 +10773,7 @@
           </p:nvSpPr>
           <p:spPr>
             <a:xfrm>
-              <a:off x="896790" y="4693986"/>
+              <a:off x="896790" y="4817814"/>
               <a:ext cx="473222" cy="473222"/>
             </a:xfrm>
             <a:prstGeom prst="ellipse">
@@ -10831,7 +10802,7 @@
           </p:nvSpPr>
           <p:spPr>
             <a:xfrm>
-              <a:off x="1000898" y="4798095"/>
+              <a:off x="1000898" y="4921923"/>
               <a:ext cx="265004" cy="265004"/>
             </a:xfrm>
             <a:custGeom>
@@ -10895,8 +10866,8 @@
           </p:nvSpPr>
           <p:spPr>
             <a:xfrm>
-              <a:off x="1501685" y="4504487"/>
-              <a:ext cx="4275560" cy="852220"/>
+              <a:off x="1501685" y="4544647"/>
+              <a:ext cx="4275560" cy="1019556"/>
             </a:xfrm>
             <a:prstGeom prst="rect">
               <a:avLst/>
@@ -10921,7 +10892,7 @@
                   </a:solidFill>
                   <a:latin typeface="Play"/>
                 </a:rPr>
-                <a:t>Нагрузка на поддержку растет из-за дублирования.</a:t>
+                <a:t>Это создает высокую нагрузку на специалистов поддержки.</a:t>
               </a:r>
             </a:p>
           </p:txBody>
@@ -10935,7 +10906,7 @@
 </p:sld>
 </file>
 
-<file path=ppt/slides/slide4.xml><?xml version="1.0" encoding="utf-8"?>
+<file path=ppt/slides/slide3.xml><?xml version="1.0" encoding="utf-8"?>
 <p:sld xmlns:a="http://schemas.openxmlformats.org/drawingml/2006/main" xmlns:p="http://schemas.openxmlformats.org/presentationml/2006/main" xmlns:r="http://schemas.openxmlformats.org/officeDocument/2006/relationships">
   <p:cSld>
     <p:bg>
@@ -10987,674 +10958,6 @@
                 <a:spcPts val="0"/>
               </a:spcBef>
               <a:spcAft>
-                <a:spcPts val="359"/>
-              </a:spcAft>
-              <a:buClr>
-                <a:schemeClr val="accent1"/>
-              </a:buClr>
-              <a:buSzPts val="3600"/>
-              <a:buFont typeface="Play"/>
-              <a:buNone/>
-            </a:pPr>
-            <a:r>
-              <a:rPr sz="2400">
-                <a:solidFill>
-                  <a:srgbClr val="000000"/>
-                </a:solidFill>
-              </a:rPr>
-              <a:t>Потеря времени и нагрузка на поддержку мешают бизнесу</a:t>
-            </a:r>
-            <a:endParaRPr/>
-          </a:p>
-        </p:txBody>
-      </p:sp>
-      <p:grpSp>
-        <p:nvGrpSpPr>
-          <p:cNvPr id="2" name="BrandDeck Diagram icon_grid" descr="icon_grid: До 30 минут тратится на поиск инструкции вместо работы.; Треть обращений — повторяющиеся вопросы, нагружающие поддержку.; Ручной поиск снижает общую эффективность внутренних процессов."/>
-          <p:cNvGrpSpPr/>
-          <p:nvPr/>
-        </p:nvGrpSpPr>
-        <p:grpSpPr>
-          <a:xfrm>
-            <a:off x="677334" y="2912953"/>
-            <a:ext cx="10855853" cy="2782924"/>
-            <a:chOff x="677334" y="2912953"/>
-            <a:chExt cx="10855853" cy="2782924"/>
-          </a:xfrm>
-        </p:grpSpPr>
-        <p:sp>
-          <p:nvSpPr>
-            <p:cNvPr id="544" name="BrandDeck Diagram Card 1"/>
-            <p:cNvSpPr/>
-            <p:nvPr/>
-          </p:nvSpPr>
-          <p:spPr>
-            <a:xfrm>
-              <a:off x="677334" y="2912953"/>
-              <a:ext cx="5319368" cy="1282903"/>
-            </a:xfrm>
-            <a:prstGeom prst="roundRect">
-              <a:avLst>
-                <a:gd name="adj" fmla="val 8000"/>
-              </a:avLst>
-            </a:prstGeom>
-            <a:solidFill>
-              <a:srgbClr val="EDF5FF"/>
-            </a:solidFill>
-            <a:ln>
-              <a:noFill/>
-            </a:ln>
-          </p:spPr>
-          <p:txBody>
-            <a:bodyPr rtlCol="0" anchor="ctr"/>
-            <a:lstStyle/>
-            <a:p>
-              <a:pPr algn="ctr"/>
-            </a:p>
-          </p:txBody>
-        </p:sp>
-        <p:sp>
-          <p:nvSpPr>
-            <p:cNvPr id="545" name="BrandDeck Diagram Icon 1 Badge"/>
-            <p:cNvSpPr/>
-            <p:nvPr/>
-          </p:nvSpPr>
-          <p:spPr>
-            <a:xfrm>
-              <a:off x="896790" y="3317794"/>
-              <a:ext cx="473222" cy="473222"/>
-            </a:xfrm>
-            <a:prstGeom prst="ellipse">
-              <a:avLst/>
-            </a:prstGeom>
-            <a:solidFill>
-              <a:srgbClr val="006DEB"/>
-            </a:solidFill>
-            <a:ln>
-              <a:noFill/>
-            </a:ln>
-          </p:spPr>
-          <p:txBody>
-            <a:bodyPr rtlCol="0" anchor="ctr"/>
-            <a:lstStyle/>
-            <a:p>
-              <a:pPr algn="ctr"/>
-            </a:p>
-          </p:txBody>
-        </p:sp>
-        <p:sp>
-          <p:nvSpPr>
-            <p:cNvPr id="546" name="BrandDeck Icon clock"/>
-            <p:cNvSpPr/>
-            <p:nvPr/>
-          </p:nvSpPr>
-          <p:spPr>
-            <a:xfrm>
-              <a:off x="1000898" y="3421903"/>
-              <a:ext cx="265004" cy="265004"/>
-            </a:xfrm>
-            <a:custGeom>
-              <a:avLst/>
-              <a:gdLst/>
-              <a:ahLst/>
-              <a:cxnLst/>
-              <a:rect l="l" t="t" r="r" b="b"/>
-              <a:pathLst>
-                <a:path w="24000" h="24000" fill="none">
-                  <a:moveTo>
-                    <a:pt x="22000" y="12000"/>
-                  </a:moveTo>
-                  <a:cubicBezTo>
-                    <a:pt x="22000" y="17523"/>
-                    <a:pt x="17523" y="22000"/>
-                    <a:pt x="12000" y="22000"/>
-                  </a:cubicBezTo>
-                  <a:cubicBezTo>
-                    <a:pt x="6477" y="22000"/>
-                    <a:pt x="2000" y="17523"/>
-                    <a:pt x="2000" y="12000"/>
-                  </a:cubicBezTo>
-                  <a:cubicBezTo>
-                    <a:pt x="2000" y="6477"/>
-                    <a:pt x="6477" y="2000"/>
-                    <a:pt x="12000" y="2000"/>
-                  </a:cubicBezTo>
-                  <a:cubicBezTo>
-                    <a:pt x="17523" y="2000"/>
-                    <a:pt x="22000" y="6477"/>
-                    <a:pt x="22000" y="12000"/>
-                  </a:cubicBezTo>
-                  <a:close/>
-                </a:path>
-                <a:path w="24000" h="24000" fill="none">
-                  <a:moveTo>
-                    <a:pt x="12000" y="6000"/>
-                  </a:moveTo>
-                  <a:lnTo>
-                    <a:pt x="12000" y="12000"/>
-                  </a:lnTo>
-                  <a:lnTo>
-                    <a:pt x="16000" y="14000"/>
-                  </a:lnTo>
-                </a:path>
-              </a:pathLst>
-            </a:custGeom>
-            <a:noFill/>
-            <a:ln w="22083" cap="rnd">
-              <a:solidFill>
-                <a:srgbClr val="FFFFFF"/>
-              </a:solidFill>
-              <a:round/>
-            </a:ln>
-          </p:spPr>
-          <p:txBody>
-            <a:bodyPr rtlCol="0" anchor="ctr"/>
-            <a:lstStyle/>
-            <a:p>
-              <a:pPr algn="ctr"/>
-            </a:p>
-          </p:txBody>
-        </p:sp>
-        <p:sp>
-          <p:nvSpPr>
-            <p:cNvPr id="547" name="BrandDeck Diagram Text 1"/>
-            <p:cNvSpPr txBox="1"/>
-            <p:nvPr/>
-          </p:nvSpPr>
-          <p:spPr>
-            <a:xfrm>
-              <a:off x="1501685" y="3044627"/>
-              <a:ext cx="4275560" cy="1019556"/>
-            </a:xfrm>
-            <a:prstGeom prst="rect">
-              <a:avLst/>
-            </a:prstGeom>
-            <a:noFill/>
-          </p:spPr>
-          <p:txBody>
-            <a:bodyPr wrap="square" anchor="ctr" lIns="36576" tIns="18288" rIns="36576" bIns="18288">
-              <a:noAutofit/>
-            </a:bodyPr>
-            <a:lstStyle/>
-            <a:p>
-              <a:pPr algn="l">
-                <a:lnSpc>
-                  <a:spcPct val="110000"/>
-                </a:lnSpc>
-              </a:pPr>
-              <a:r>
-                <a:rPr sz="1800" b="0">
-                  <a:solidFill>
-                    <a:srgbClr val="000000"/>
-                  </a:solidFill>
-                  <a:latin typeface="Play"/>
-                </a:rPr>
-                <a:t>До 30 минут тратится на поиск инструкции вместо работы.</a:t>
-              </a:r>
-            </a:p>
-          </p:txBody>
-        </p:sp>
-        <p:sp>
-          <p:nvSpPr>
-            <p:cNvPr id="548" name="BrandDeck Diagram Card 2"/>
-            <p:cNvSpPr/>
-            <p:nvPr/>
-          </p:nvSpPr>
-          <p:spPr>
-            <a:xfrm>
-              <a:off x="6213819" y="2912953"/>
-              <a:ext cx="5319368" cy="1282903"/>
-            </a:xfrm>
-            <a:prstGeom prst="roundRect">
-              <a:avLst>
-                <a:gd name="adj" fmla="val 8000"/>
-              </a:avLst>
-            </a:prstGeom>
-            <a:solidFill>
-              <a:srgbClr val="EDF5FF"/>
-            </a:solidFill>
-            <a:ln>
-              <a:noFill/>
-            </a:ln>
-          </p:spPr>
-          <p:txBody>
-            <a:bodyPr rtlCol="0" anchor="ctr"/>
-            <a:lstStyle/>
-            <a:p>
-              <a:pPr algn="ctr"/>
-            </a:p>
-          </p:txBody>
-        </p:sp>
-        <p:sp>
-          <p:nvSpPr>
-            <p:cNvPr id="549" name="BrandDeck Diagram Icon 2 Badge"/>
-            <p:cNvSpPr/>
-            <p:nvPr/>
-          </p:nvSpPr>
-          <p:spPr>
-            <a:xfrm>
-              <a:off x="6433275" y="3317794"/>
-              <a:ext cx="473222" cy="473222"/>
-            </a:xfrm>
-            <a:prstGeom prst="ellipse">
-              <a:avLst/>
-            </a:prstGeom>
-            <a:solidFill>
-              <a:srgbClr val="006DEB"/>
-            </a:solidFill>
-            <a:ln>
-              <a:noFill/>
-            </a:ln>
-          </p:spPr>
-          <p:txBody>
-            <a:bodyPr rtlCol="0" anchor="ctr"/>
-            <a:lstStyle/>
-            <a:p>
-              <a:pPr algn="ctr"/>
-            </a:p>
-          </p:txBody>
-        </p:sp>
-        <p:sp>
-          <p:nvSpPr>
-            <p:cNvPr id="550" name="BrandDeck Icon headset"/>
-            <p:cNvSpPr/>
-            <p:nvPr/>
-          </p:nvSpPr>
-          <p:spPr>
-            <a:xfrm>
-              <a:off x="6537384" y="3421903"/>
-              <a:ext cx="265004" cy="265004"/>
-            </a:xfrm>
-            <a:custGeom>
-              <a:avLst/>
-              <a:gdLst/>
-              <a:ahLst/>
-              <a:cxnLst/>
-              <a:rect l="l" t="t" r="r" b="b"/>
-              <a:pathLst>
-                <a:path w="24000" h="24000" fill="none">
-                  <a:moveTo>
-                    <a:pt x="3000" y="11000"/>
-                  </a:moveTo>
-                  <a:lnTo>
-                    <a:pt x="6000" y="11000"/>
-                  </a:lnTo>
-                  <a:cubicBezTo>
-                    <a:pt x="7105" y="11000"/>
-                    <a:pt x="8000" y="11895"/>
-                    <a:pt x="8000" y="13000"/>
-                  </a:cubicBezTo>
-                  <a:lnTo>
-                    <a:pt x="8000" y="16000"/>
-                  </a:lnTo>
-                  <a:cubicBezTo>
-                    <a:pt x="8000" y="17105"/>
-                    <a:pt x="7105" y="18000"/>
-                    <a:pt x="6000" y="18000"/>
-                  </a:cubicBezTo>
-                  <a:lnTo>
-                    <a:pt x="5000" y="18000"/>
-                  </a:lnTo>
-                  <a:cubicBezTo>
-                    <a:pt x="3895" y="18000"/>
-                    <a:pt x="3000" y="17105"/>
-                    <a:pt x="3000" y="16000"/>
-                  </a:cubicBezTo>
-                  <a:lnTo>
-                    <a:pt x="3000" y="11000"/>
-                  </a:lnTo>
-                  <a:close/>
-                  <a:moveTo>
-                    <a:pt x="3000" y="11000"/>
-                  </a:moveTo>
-                  <a:cubicBezTo>
-                    <a:pt x="3000" y="6029"/>
-                    <a:pt x="7029" y="2000"/>
-                    <a:pt x="12000" y="2000"/>
-                  </a:cubicBezTo>
-                  <a:cubicBezTo>
-                    <a:pt x="16971" y="2000"/>
-                    <a:pt x="21000" y="6029"/>
-                    <a:pt x="21000" y="11000"/>
-                  </a:cubicBezTo>
-                  <a:moveTo>
-                    <a:pt x="21000" y="11000"/>
-                  </a:moveTo>
-                  <a:lnTo>
-                    <a:pt x="21000" y="16000"/>
-                  </a:lnTo>
-                  <a:cubicBezTo>
-                    <a:pt x="21000" y="17105"/>
-                    <a:pt x="20105" y="18000"/>
-                    <a:pt x="19000" y="18000"/>
-                  </a:cubicBezTo>
-                  <a:lnTo>
-                    <a:pt x="18000" y="18000"/>
-                  </a:lnTo>
-                  <a:cubicBezTo>
-                    <a:pt x="16895" y="18000"/>
-                    <a:pt x="16000" y="17105"/>
-                    <a:pt x="16000" y="16000"/>
-                  </a:cubicBezTo>
-                  <a:lnTo>
-                    <a:pt x="16000" y="13000"/>
-                  </a:lnTo>
-                  <a:cubicBezTo>
-                    <a:pt x="16000" y="11895"/>
-                    <a:pt x="16895" y="11000"/>
-                    <a:pt x="18000" y="11000"/>
-                  </a:cubicBezTo>
-                  <a:lnTo>
-                    <a:pt x="21000" y="11000"/>
-                  </a:lnTo>
-                  <a:close/>
-                </a:path>
-                <a:path w="24000" h="24000" fill="none">
-                  <a:moveTo>
-                    <a:pt x="21000" y="16000"/>
-                  </a:moveTo>
-                  <a:lnTo>
-                    <a:pt x="21000" y="18000"/>
-                  </a:lnTo>
-                  <a:cubicBezTo>
-                    <a:pt x="21000" y="20209"/>
-                    <a:pt x="19209" y="22000"/>
-                    <a:pt x="17000" y="22000"/>
-                  </a:cubicBezTo>
-                  <a:lnTo>
-                    <a:pt x="12000" y="22000"/>
-                  </a:lnTo>
-                </a:path>
-              </a:pathLst>
-            </a:custGeom>
-            <a:noFill/>
-            <a:ln w="22083" cap="rnd">
-              <a:solidFill>
-                <a:srgbClr val="FFFFFF"/>
-              </a:solidFill>
-              <a:round/>
-            </a:ln>
-          </p:spPr>
-          <p:txBody>
-            <a:bodyPr rtlCol="0" anchor="ctr"/>
-            <a:lstStyle/>
-            <a:p>
-              <a:pPr algn="ctr"/>
-            </a:p>
-          </p:txBody>
-        </p:sp>
-        <p:sp>
-          <p:nvSpPr>
-            <p:cNvPr id="551" name="BrandDeck Diagram Text 2"/>
-            <p:cNvSpPr txBox="1"/>
-            <p:nvPr/>
-          </p:nvSpPr>
-          <p:spPr>
-            <a:xfrm>
-              <a:off x="7038171" y="3044627"/>
-              <a:ext cx="4275560" cy="1019556"/>
-            </a:xfrm>
-            <a:prstGeom prst="rect">
-              <a:avLst/>
-            </a:prstGeom>
-            <a:noFill/>
-          </p:spPr>
-          <p:txBody>
-            <a:bodyPr wrap="square" anchor="ctr" lIns="36576" tIns="18288" rIns="36576" bIns="18288">
-              <a:noAutofit/>
-            </a:bodyPr>
-            <a:lstStyle/>
-            <a:p>
-              <a:pPr algn="l">
-                <a:lnSpc>
-                  <a:spcPct val="110000"/>
-                </a:lnSpc>
-              </a:pPr>
-              <a:r>
-                <a:rPr sz="1800" b="1">
-                  <a:solidFill>
-                    <a:srgbClr val="000000"/>
-                  </a:solidFill>
-                  <a:latin typeface="Play"/>
-                </a:rPr>
-                <a:t>Треть обращений —</a:t>
-              </a:r>
-              <a:r>
-                <a:rPr sz="1800" b="0">
-                  <a:solidFill>
-                    <a:srgbClr val="000000"/>
-                  </a:solidFill>
-                  <a:latin typeface="Play"/>
-                </a:rPr>
-                <a:t> повторяющиеся вопросы, нагружающие поддержку.</a:t>
-              </a:r>
-            </a:p>
-          </p:txBody>
-        </p:sp>
-        <p:sp>
-          <p:nvSpPr>
-            <p:cNvPr id="552" name="BrandDeck Diagram Card 3"/>
-            <p:cNvSpPr/>
-            <p:nvPr/>
-          </p:nvSpPr>
-          <p:spPr>
-            <a:xfrm>
-              <a:off x="677334" y="4412974"/>
-              <a:ext cx="5319368" cy="1282903"/>
-            </a:xfrm>
-            <a:prstGeom prst="roundRect">
-              <a:avLst>
-                <a:gd name="adj" fmla="val 8000"/>
-              </a:avLst>
-            </a:prstGeom>
-            <a:solidFill>
-              <a:srgbClr val="EDF5FF"/>
-            </a:solidFill>
-            <a:ln>
-              <a:noFill/>
-            </a:ln>
-          </p:spPr>
-          <p:txBody>
-            <a:bodyPr rtlCol="0" anchor="ctr"/>
-            <a:lstStyle/>
-            <a:p>
-              <a:pPr algn="ctr"/>
-            </a:p>
-          </p:txBody>
-        </p:sp>
-        <p:sp>
-          <p:nvSpPr>
-            <p:cNvPr id="553" name="BrandDeck Diagram Icon 3 Badge"/>
-            <p:cNvSpPr/>
-            <p:nvPr/>
-          </p:nvSpPr>
-          <p:spPr>
-            <a:xfrm>
-              <a:off x="896790" y="4817814"/>
-              <a:ext cx="473222" cy="473222"/>
-            </a:xfrm>
-            <a:prstGeom prst="ellipse">
-              <a:avLst/>
-            </a:prstGeom>
-            <a:solidFill>
-              <a:srgbClr val="006DEB"/>
-            </a:solidFill>
-            <a:ln>
-              <a:noFill/>
-            </a:ln>
-          </p:spPr>
-          <p:txBody>
-            <a:bodyPr rtlCol="0" anchor="ctr"/>
-            <a:lstStyle/>
-            <a:p>
-              <a:pPr algn="ctr"/>
-            </a:p>
-          </p:txBody>
-        </p:sp>
-        <p:sp>
-          <p:nvSpPr>
-            <p:cNvPr id="554" name="BrandDeck Icon gauge"/>
-            <p:cNvSpPr/>
-            <p:nvPr/>
-          </p:nvSpPr>
-          <p:spPr>
-            <a:xfrm>
-              <a:off x="1000898" y="4921923"/>
-              <a:ext cx="265004" cy="265004"/>
-            </a:xfrm>
-            <a:custGeom>
-              <a:avLst/>
-              <a:gdLst/>
-              <a:ahLst/>
-              <a:cxnLst/>
-              <a:rect l="l" t="t" r="r" b="b"/>
-              <a:pathLst>
-                <a:path w="24000" h="24000" fill="none">
-                  <a:moveTo>
-                    <a:pt x="12000" y="14000"/>
-                  </a:moveTo>
-                  <a:lnTo>
-                    <a:pt x="16000" y="10000"/>
-                  </a:lnTo>
-                </a:path>
-                <a:path w="24000" h="24000" fill="none">
-                  <a:moveTo>
-                    <a:pt x="3340" y="19000"/>
-                  </a:moveTo>
-                  <a:cubicBezTo>
-                    <a:pt x="913" y="14797"/>
-                    <a:pt x="1854" y="9459"/>
-                    <a:pt x="5572" y="6339"/>
-                  </a:cubicBezTo>
-                  <a:cubicBezTo>
-                    <a:pt x="9290" y="3220"/>
-                    <a:pt x="14710" y="3220"/>
-                    <a:pt x="18428" y="6339"/>
-                  </a:cubicBezTo>
-                  <a:cubicBezTo>
-                    <a:pt x="22146" y="9459"/>
-                    <a:pt x="23087" y="14797"/>
-                    <a:pt x="20660" y="19000"/>
-                  </a:cubicBezTo>
-                </a:path>
-              </a:pathLst>
-            </a:custGeom>
-            <a:noFill/>
-            <a:ln w="22083" cap="rnd">
-              <a:solidFill>
-                <a:srgbClr val="FFFFFF"/>
-              </a:solidFill>
-              <a:round/>
-            </a:ln>
-          </p:spPr>
-          <p:txBody>
-            <a:bodyPr rtlCol="0" anchor="ctr"/>
-            <a:lstStyle/>
-            <a:p>
-              <a:pPr algn="ctr"/>
-            </a:p>
-          </p:txBody>
-        </p:sp>
-        <p:sp>
-          <p:nvSpPr>
-            <p:cNvPr id="555" name="BrandDeck Diagram Text 3"/>
-            <p:cNvSpPr txBox="1"/>
-            <p:nvPr/>
-          </p:nvSpPr>
-          <p:spPr>
-            <a:xfrm>
-              <a:off x="1501685" y="4544647"/>
-              <a:ext cx="4275560" cy="1019556"/>
-            </a:xfrm>
-            <a:prstGeom prst="rect">
-              <a:avLst/>
-            </a:prstGeom>
-            <a:noFill/>
-          </p:spPr>
-          <p:txBody>
-            <a:bodyPr wrap="square" anchor="ctr" lIns="36576" tIns="18288" rIns="36576" bIns="18288">
-              <a:noAutofit/>
-            </a:bodyPr>
-            <a:lstStyle/>
-            <a:p>
-              <a:pPr algn="l">
-                <a:lnSpc>
-                  <a:spcPct val="110000"/>
-                </a:lnSpc>
-              </a:pPr>
-              <a:r>
-                <a:rPr sz="1800" b="0">
-                  <a:solidFill>
-                    <a:srgbClr val="000000"/>
-                  </a:solidFill>
-                  <a:latin typeface="Play"/>
-                </a:rPr>
-                <a:t>Ручной поиск снижает общую эффективность внутренних процессов.</a:t>
-              </a:r>
-            </a:p>
-          </p:txBody>
-        </p:sp>
-      </p:grpSp>
-    </p:spTree>
-  </p:cSld>
-  <p:clrMapOvr>
-    <a:masterClrMapping/>
-  </p:clrMapOvr>
-</p:sld>
-</file>
-
-<file path=ppt/slides/slide5.xml><?xml version="1.0" encoding="utf-8"?>
-<p:sld xmlns:a="http://schemas.openxmlformats.org/drawingml/2006/main" xmlns:p="http://schemas.openxmlformats.org/presentationml/2006/main" xmlns:r="http://schemas.openxmlformats.org/officeDocument/2006/relationships">
-  <p:cSld>
-    <p:bg>
-      <p:bgPr>
-        <a:solidFill>
-          <a:schemeClr val="lt2"/>
-        </a:solidFill>
-      </p:bgPr>
-    </p:bg>
-    <p:spTree>
-      <p:nvGrpSpPr>
-        <p:cNvPr id="1" name=""/>
-        <p:cNvGrpSpPr/>
-        <p:nvPr/>
-      </p:nvGrpSpPr>
-      <p:grpSpPr/>
-      <p:sp>
-        <p:nvSpPr>
-          <p:cNvPr id="543" name="BrandDeck Text 543"/>
-          <p:cNvSpPr txBox="1"/>
-          <p:nvPr>
-            <p:ph type="title"/>
-          </p:nvPr>
-        </p:nvSpPr>
-        <p:spPr>
-          <a:xfrm>
-            <a:off x="677334" y="692150"/>
-            <a:ext cx="10855854" cy="644241"/>
-          </a:xfrm>
-          <a:prstGeom prst="rect">
-            <a:avLst/>
-          </a:prstGeom>
-          <a:noFill/>
-          <a:ln>
-            <a:noFill/>
-          </a:ln>
-        </p:spPr>
-        <p:txBody>
-          <a:bodyPr anchorCtr="0" anchor="t" bIns="0" lIns="0" spcFirstLastPara="1" rIns="0" wrap="square" tIns="0">
-            <a:normAutofit/>
-          </a:bodyPr>
-          <a:lstStyle/>
-          <a:p>
-            <a:pPr indent="0" marL="0" rtl="0" algn="l">
-              <a:lnSpc>
-                <a:spcPct val="115000"/>
-              </a:lnSpc>
-              <a:spcBef>
-                <a:spcPts val="0"/>
-              </a:spcBef>
-              <a:spcAft>
                 <a:spcPts val="270"/>
               </a:spcAft>
               <a:buClr>
@@ -11670,7 +10973,7 @@
                   <a:srgbClr val="000000"/>
                 </a:solidFill>
               </a:rPr>
-              <a:t>ИИ-помощник отвечает на вопросы по регламентам и дает ссылку на документ</a:t>
+              <a:t>Влияет на 150 сотрудников двух подразделений при ежедневном обращении к регламентам</a:t>
             </a:r>
             <a:endParaRPr/>
           </a:p>
@@ -11678,16 +10981,16 @@
       </p:sp>
       <p:grpSp>
         <p:nvGrpSpPr>
-          <p:cNvPr id="2" name="BrandDeck Diagram icon_grid" descr="icon_grid: Система отвечает на вопросы по регламентам.; В ответе всегда указывается ссылка на документ.; Ответ формируется автоматически без участия людей."/>
+          <p:cNvPr id="2" name="BrandDeck Diagram icon_grid" descr="icon_grid: 150 сотрудников Два подразделения; 6 недель Период пилота"/>
           <p:cNvGrpSpPr/>
           <p:nvPr/>
         </p:nvGrpSpPr>
         <p:grpSpPr>
           <a:xfrm>
-            <a:off x="677334" y="2912953"/>
-            <a:ext cx="10855853" cy="2782924"/>
-            <a:chOff x="677334" y="2912953"/>
-            <a:chExt cx="10855853" cy="2782924"/>
+            <a:off x="677334" y="2603500"/>
+            <a:ext cx="10855853" cy="3597276"/>
+            <a:chOff x="677334" y="2603500"/>
+            <a:chExt cx="10855853" cy="3597276"/>
           </a:xfrm>
         </p:grpSpPr>
         <p:sp>
@@ -11698,8 +11001,8 @@
           </p:nvSpPr>
           <p:spPr>
             <a:xfrm>
-              <a:off x="677334" y="2912953"/>
-              <a:ext cx="5319368" cy="1282903"/>
+              <a:off x="677334" y="2603500"/>
+              <a:ext cx="5319368" cy="3597276"/>
             </a:xfrm>
             <a:prstGeom prst="roundRect">
               <a:avLst>
@@ -11729,8 +11032,8 @@
           </p:nvSpPr>
           <p:spPr>
             <a:xfrm>
-              <a:off x="896790" y="3317794"/>
-              <a:ext cx="473222" cy="473222"/>
+              <a:off x="896789" y="2822956"/>
+              <a:ext cx="603504" cy="603504"/>
             </a:xfrm>
             <a:prstGeom prst="ellipse">
               <a:avLst/>
@@ -11752,411 +11055,14 @@
         </p:sp>
         <p:sp>
           <p:nvSpPr>
-            <p:cNvPr id="546" name="BrandDeck Icon circle-help"/>
+            <p:cNvPr id="546" name="BrandDeck Icon users"/>
             <p:cNvSpPr/>
             <p:nvPr/>
           </p:nvSpPr>
           <p:spPr>
             <a:xfrm>
-              <a:off x="1000898" y="3421903"/>
-              <a:ext cx="265004" cy="265004"/>
-            </a:xfrm>
-            <a:custGeom>
-              <a:avLst/>
-              <a:gdLst/>
-              <a:ahLst/>
-              <a:cxnLst/>
-              <a:rect l="l" t="t" r="r" b="b"/>
-              <a:pathLst>
-                <a:path w="24000" h="24000" fill="none">
-                  <a:moveTo>
-                    <a:pt x="22000" y="12000"/>
-                  </a:moveTo>
-                  <a:cubicBezTo>
-                    <a:pt x="22000" y="17523"/>
-                    <a:pt x="17523" y="22000"/>
-                    <a:pt x="12000" y="22000"/>
-                  </a:cubicBezTo>
-                  <a:cubicBezTo>
-                    <a:pt x="6477" y="22000"/>
-                    <a:pt x="2000" y="17523"/>
-                    <a:pt x="2000" y="12000"/>
-                  </a:cubicBezTo>
-                  <a:cubicBezTo>
-                    <a:pt x="2000" y="6477"/>
-                    <a:pt x="6477" y="2000"/>
-                    <a:pt x="12000" y="2000"/>
-                  </a:cubicBezTo>
-                  <a:cubicBezTo>
-                    <a:pt x="17523" y="2000"/>
-                    <a:pt x="22000" y="6477"/>
-                    <a:pt x="22000" y="12000"/>
-                  </a:cubicBezTo>
-                  <a:close/>
-                </a:path>
-                <a:path w="24000" h="24000" fill="none">
-                  <a:moveTo>
-                    <a:pt x="9090" y="9000"/>
-                  </a:moveTo>
-                  <a:cubicBezTo>
-                    <a:pt x="9575" y="7620"/>
-                    <a:pt x="10985" y="6791"/>
-                    <a:pt x="12427" y="7039"/>
-                  </a:cubicBezTo>
-                  <a:cubicBezTo>
-                    <a:pt x="13869" y="7286"/>
-                    <a:pt x="14922" y="8537"/>
-                    <a:pt x="14920" y="10000"/>
-                  </a:cubicBezTo>
-                  <a:cubicBezTo>
-                    <a:pt x="14920" y="12000"/>
-                    <a:pt x="11920" y="13000"/>
-                    <a:pt x="11920" y="13000"/>
-                  </a:cubicBezTo>
-                </a:path>
-                <a:path w="24000" h="24000" fill="none">
-                  <a:moveTo>
-                    <a:pt x="12000" y="17000"/>
-                  </a:moveTo>
-                  <a:lnTo>
-                    <a:pt x="12010" y="17000"/>
-                  </a:lnTo>
-                </a:path>
-              </a:pathLst>
-            </a:custGeom>
-            <a:noFill/>
-            <a:ln w="22083" cap="rnd">
-              <a:solidFill>
-                <a:srgbClr val="FFFFFF"/>
-              </a:solidFill>
-              <a:round/>
-            </a:ln>
-          </p:spPr>
-          <p:txBody>
-            <a:bodyPr rtlCol="0" anchor="ctr"/>
-            <a:lstStyle/>
-            <a:p>
-              <a:pPr algn="ctr"/>
-            </a:p>
-          </p:txBody>
-        </p:sp>
-        <p:sp>
-          <p:nvSpPr>
-            <p:cNvPr id="547" name="BrandDeck Diagram Text 1"/>
-            <p:cNvSpPr txBox="1"/>
-            <p:nvPr/>
-          </p:nvSpPr>
-          <p:spPr>
-            <a:xfrm>
-              <a:off x="1501685" y="3044627"/>
-              <a:ext cx="4275560" cy="1019556"/>
-            </a:xfrm>
-            <a:prstGeom prst="rect">
-              <a:avLst/>
-            </a:prstGeom>
-            <a:noFill/>
-          </p:spPr>
-          <p:txBody>
-            <a:bodyPr wrap="square" anchor="ctr" lIns="36576" tIns="18288" rIns="36576" bIns="18288">
-              <a:noAutofit/>
-            </a:bodyPr>
-            <a:lstStyle/>
-            <a:p>
-              <a:pPr algn="l">
-                <a:lnSpc>
-                  <a:spcPct val="110000"/>
-                </a:lnSpc>
-              </a:pPr>
-              <a:r>
-                <a:rPr sz="1800" b="0">
-                  <a:solidFill>
-                    <a:srgbClr val="000000"/>
-                  </a:solidFill>
-                  <a:latin typeface="Play"/>
-                </a:rPr>
-                <a:t>Система отвечает на вопросы по регламентам.</a:t>
-              </a:r>
-            </a:p>
-          </p:txBody>
-        </p:sp>
-        <p:sp>
-          <p:nvSpPr>
-            <p:cNvPr id="548" name="BrandDeck Diagram Card 2"/>
-            <p:cNvSpPr/>
-            <p:nvPr/>
-          </p:nvSpPr>
-          <p:spPr>
-            <a:xfrm>
-              <a:off x="6213819" y="2912953"/>
-              <a:ext cx="5319368" cy="1282903"/>
-            </a:xfrm>
-            <a:prstGeom prst="roundRect">
-              <a:avLst>
-                <a:gd name="adj" fmla="val 8000"/>
-              </a:avLst>
-            </a:prstGeom>
-            <a:solidFill>
-              <a:srgbClr val="EDF5FF"/>
-            </a:solidFill>
-            <a:ln>
-              <a:noFill/>
-            </a:ln>
-          </p:spPr>
-          <p:txBody>
-            <a:bodyPr rtlCol="0" anchor="ctr"/>
-            <a:lstStyle/>
-            <a:p>
-              <a:pPr algn="ctr"/>
-            </a:p>
-          </p:txBody>
-        </p:sp>
-        <p:sp>
-          <p:nvSpPr>
-            <p:cNvPr id="549" name="BrandDeck Diagram Icon 2 Badge"/>
-            <p:cNvSpPr/>
-            <p:nvPr/>
-          </p:nvSpPr>
-          <p:spPr>
-            <a:xfrm>
-              <a:off x="6433275" y="3317794"/>
-              <a:ext cx="473222" cy="473222"/>
-            </a:xfrm>
-            <a:prstGeom prst="ellipse">
-              <a:avLst/>
-            </a:prstGeom>
-            <a:solidFill>
-              <a:srgbClr val="006DEB"/>
-            </a:solidFill>
-            <a:ln>
-              <a:noFill/>
-            </a:ln>
-          </p:spPr>
-          <p:txBody>
-            <a:bodyPr rtlCol="0" anchor="ctr"/>
-            <a:lstStyle/>
-            <a:p>
-              <a:pPr algn="ctr"/>
-            </a:p>
-          </p:txBody>
-        </p:sp>
-        <p:sp>
-          <p:nvSpPr>
-            <p:cNvPr id="550" name="BrandDeck Icon file-text"/>
-            <p:cNvSpPr/>
-            <p:nvPr/>
-          </p:nvSpPr>
-          <p:spPr>
-            <a:xfrm>
-              <a:off x="6537384" y="3421903"/>
-              <a:ext cx="265004" cy="265004"/>
-            </a:xfrm>
-            <a:custGeom>
-              <a:avLst/>
-              <a:gdLst/>
-              <a:ahLst/>
-              <a:cxnLst/>
-              <a:rect l="l" t="t" r="r" b="b"/>
-              <a:pathLst>
-                <a:path w="24000" h="24000" fill="none">
-                  <a:moveTo>
-                    <a:pt x="15000" y="2000"/>
-                  </a:moveTo>
-                  <a:lnTo>
-                    <a:pt x="6000" y="2000"/>
-                  </a:lnTo>
-                  <a:cubicBezTo>
-                    <a:pt x="4895" y="2000"/>
-                    <a:pt x="4000" y="2895"/>
-                    <a:pt x="4000" y="4000"/>
-                  </a:cubicBezTo>
-                  <a:lnTo>
-                    <a:pt x="4000" y="20000"/>
-                  </a:lnTo>
-                  <a:cubicBezTo>
-                    <a:pt x="4000" y="21105"/>
-                    <a:pt x="4895" y="22000"/>
-                    <a:pt x="6000" y="22000"/>
-                  </a:cubicBezTo>
-                  <a:lnTo>
-                    <a:pt x="18000" y="22000"/>
-                  </a:lnTo>
-                  <a:cubicBezTo>
-                    <a:pt x="19105" y="22000"/>
-                    <a:pt x="20000" y="21105"/>
-                    <a:pt x="20000" y="20000"/>
-                  </a:cubicBezTo>
-                  <a:lnTo>
-                    <a:pt x="20000" y="7000"/>
-                  </a:lnTo>
-                  <a:close/>
-                </a:path>
-                <a:path w="24000" h="24000" fill="none">
-                  <a:moveTo>
-                    <a:pt x="14000" y="2000"/>
-                  </a:moveTo>
-                  <a:lnTo>
-                    <a:pt x="14000" y="6000"/>
-                  </a:lnTo>
-                  <a:cubicBezTo>
-                    <a:pt x="14000" y="7105"/>
-                    <a:pt x="14895" y="8000"/>
-                    <a:pt x="16000" y="8000"/>
-                  </a:cubicBezTo>
-                  <a:lnTo>
-                    <a:pt x="20000" y="8000"/>
-                  </a:lnTo>
-                </a:path>
-                <a:path w="24000" h="24000" fill="none">
-                  <a:moveTo>
-                    <a:pt x="10000" y="9000"/>
-                  </a:moveTo>
-                  <a:lnTo>
-                    <a:pt x="8000" y="9000"/>
-                  </a:lnTo>
-                </a:path>
-                <a:path w="24000" h="24000" fill="none">
-                  <a:moveTo>
-                    <a:pt x="16000" y="13000"/>
-                  </a:moveTo>
-                  <a:lnTo>
-                    <a:pt x="8000" y="13000"/>
-                  </a:lnTo>
-                </a:path>
-                <a:path w="24000" h="24000" fill="none">
-                  <a:moveTo>
-                    <a:pt x="16000" y="17000"/>
-                  </a:moveTo>
-                  <a:lnTo>
-                    <a:pt x="8000" y="17000"/>
-                  </a:lnTo>
-                </a:path>
-              </a:pathLst>
-            </a:custGeom>
-            <a:noFill/>
-            <a:ln w="22083" cap="rnd">
-              <a:solidFill>
-                <a:srgbClr val="FFFFFF"/>
-              </a:solidFill>
-              <a:round/>
-            </a:ln>
-          </p:spPr>
-          <p:txBody>
-            <a:bodyPr rtlCol="0" anchor="ctr"/>
-            <a:lstStyle/>
-            <a:p>
-              <a:pPr algn="ctr"/>
-            </a:p>
-          </p:txBody>
-        </p:sp>
-        <p:sp>
-          <p:nvSpPr>
-            <p:cNvPr id="551" name="BrandDeck Diagram Text 2"/>
-            <p:cNvSpPr txBox="1"/>
-            <p:nvPr/>
-          </p:nvSpPr>
-          <p:spPr>
-            <a:xfrm>
-              <a:off x="7038171" y="3044627"/>
-              <a:ext cx="4275560" cy="1019556"/>
-            </a:xfrm>
-            <a:prstGeom prst="rect">
-              <a:avLst/>
-            </a:prstGeom>
-            <a:noFill/>
-          </p:spPr>
-          <p:txBody>
-            <a:bodyPr wrap="square" anchor="ctr" lIns="36576" tIns="18288" rIns="36576" bIns="18288">
-              <a:noAutofit/>
-            </a:bodyPr>
-            <a:lstStyle/>
-            <a:p>
-              <a:pPr algn="l">
-                <a:lnSpc>
-                  <a:spcPct val="110000"/>
-                </a:lnSpc>
-              </a:pPr>
-              <a:r>
-                <a:rPr sz="1800" b="0">
-                  <a:solidFill>
-                    <a:srgbClr val="000000"/>
-                  </a:solidFill>
-                  <a:latin typeface="Play"/>
-                </a:rPr>
-                <a:t>В ответе всегда указывается ссылка на документ.</a:t>
-              </a:r>
-            </a:p>
-          </p:txBody>
-        </p:sp>
-        <p:sp>
-          <p:nvSpPr>
-            <p:cNvPr id="552" name="BrandDeck Diagram Card 3"/>
-            <p:cNvSpPr/>
-            <p:nvPr/>
-          </p:nvSpPr>
-          <p:spPr>
-            <a:xfrm>
-              <a:off x="677334" y="4412974"/>
-              <a:ext cx="5319368" cy="1282903"/>
-            </a:xfrm>
-            <a:prstGeom prst="roundRect">
-              <a:avLst>
-                <a:gd name="adj" fmla="val 8000"/>
-              </a:avLst>
-            </a:prstGeom>
-            <a:solidFill>
-              <a:srgbClr val="EDF5FF"/>
-            </a:solidFill>
-            <a:ln>
-              <a:noFill/>
-            </a:ln>
-          </p:spPr>
-          <p:txBody>
-            <a:bodyPr rtlCol="0" anchor="ctr"/>
-            <a:lstStyle/>
-            <a:p>
-              <a:pPr algn="ctr"/>
-            </a:p>
-          </p:txBody>
-        </p:sp>
-        <p:sp>
-          <p:nvSpPr>
-            <p:cNvPr id="553" name="BrandDeck Diagram Icon 3 Badge"/>
-            <p:cNvSpPr/>
-            <p:nvPr/>
-          </p:nvSpPr>
-          <p:spPr>
-            <a:xfrm>
-              <a:off x="896790" y="4817814"/>
-              <a:ext cx="473222" cy="473222"/>
-            </a:xfrm>
-            <a:prstGeom prst="ellipse">
-              <a:avLst/>
-            </a:prstGeom>
-            <a:solidFill>
-              <a:srgbClr val="006DEB"/>
-            </a:solidFill>
-            <a:ln>
-              <a:noFill/>
-            </a:ln>
-          </p:spPr>
-          <p:txBody>
-            <a:bodyPr rtlCol="0" anchor="ctr"/>
-            <a:lstStyle/>
-            <a:p>
-              <a:pPr algn="ctr"/>
-            </a:p>
-          </p:txBody>
-        </p:sp>
-        <p:sp>
-          <p:nvSpPr>
-            <p:cNvPr id="554" name="BrandDeck Icon users"/>
-            <p:cNvSpPr/>
-            <p:nvPr/>
-          </p:nvSpPr>
-          <p:spPr>
-            <a:xfrm>
-              <a:off x="1000898" y="4921923"/>
-              <a:ext cx="265004" cy="265004"/>
+              <a:off x="1029560" y="2955726"/>
+              <a:ext cx="337962" cy="337962"/>
             </a:xfrm>
             <a:custGeom>
               <a:avLst/>
@@ -12246,7 +11152,7 @@
               </a:pathLst>
             </a:custGeom>
             <a:noFill/>
-            <a:ln w="22083" cap="rnd">
+            <a:ln w="28163" cap="rnd">
               <a:solidFill>
                 <a:srgbClr val="FFFFFF"/>
               </a:solidFill>
@@ -12263,13 +11169,552 @@
         </p:sp>
         <p:sp>
           <p:nvSpPr>
-            <p:cNvPr id="555" name="BrandDeck Diagram Text 3"/>
+            <p:cNvPr id="547" name="BrandDeck Diagram Text 1"/>
             <p:cNvSpPr txBox="1"/>
             <p:nvPr/>
           </p:nvSpPr>
           <p:spPr>
             <a:xfrm>
-              <a:off x="1501685" y="4544647"/>
+              <a:off x="830953" y="3580079"/>
+              <a:ext cx="5012130" cy="2510968"/>
+            </a:xfrm>
+            <a:prstGeom prst="rect">
+              <a:avLst/>
+            </a:prstGeom>
+            <a:noFill/>
+          </p:spPr>
+          <p:txBody>
+            <a:bodyPr wrap="square" anchor="t" lIns="36576" tIns="18288" rIns="36576" bIns="18288">
+              <a:noAutofit/>
+            </a:bodyPr>
+            <a:lstStyle/>
+            <a:p>
+              <a:pPr algn="l">
+                <a:lnSpc>
+                  <a:spcPct val="110000"/>
+                </a:lnSpc>
+              </a:pPr>
+              <a:r>
+                <a:rPr sz="1800" b="1">
+                  <a:solidFill>
+                    <a:srgbClr val="000000"/>
+                  </a:solidFill>
+                  <a:latin typeface="Play"/>
+                </a:rPr>
+                <a:t>150 сотрудников</a:t>
+              </a:r>
+            </a:p>
+            <a:p>
+              <a:pPr algn="l">
+                <a:lnSpc>
+                  <a:spcPct val="110000"/>
+                </a:lnSpc>
+                <a:spcBef>
+                  <a:spcPts val="450"/>
+                </a:spcBef>
+              </a:pPr>
+              <a:r>
+                <a:rPr sz="1800" b="0">
+                  <a:solidFill>
+                    <a:srgbClr val="000000"/>
+                  </a:solidFill>
+                  <a:latin typeface="Play"/>
+                </a:rPr>
+                <a:t>Два подразделения</a:t>
+              </a:r>
+            </a:p>
+          </p:txBody>
+        </p:sp>
+        <p:sp>
+          <p:nvSpPr>
+            <p:cNvPr id="548" name="BrandDeck Diagram Card 2"/>
+            <p:cNvSpPr/>
+            <p:nvPr/>
+          </p:nvSpPr>
+          <p:spPr>
+            <a:xfrm>
+              <a:off x="6213819" y="2603500"/>
+              <a:ext cx="5319368" cy="3597276"/>
+            </a:xfrm>
+            <a:prstGeom prst="roundRect">
+              <a:avLst>
+                <a:gd name="adj" fmla="val 8000"/>
+              </a:avLst>
+            </a:prstGeom>
+            <a:solidFill>
+              <a:srgbClr val="EDF5FF"/>
+            </a:solidFill>
+            <a:ln>
+              <a:noFill/>
+            </a:ln>
+          </p:spPr>
+          <p:txBody>
+            <a:bodyPr rtlCol="0" anchor="ctr"/>
+            <a:lstStyle/>
+            <a:p>
+              <a:pPr algn="ctr"/>
+            </a:p>
+          </p:txBody>
+        </p:sp>
+        <p:sp>
+          <p:nvSpPr>
+            <p:cNvPr id="549" name="BrandDeck Diagram Icon 2 Badge"/>
+            <p:cNvSpPr/>
+            <p:nvPr/>
+          </p:nvSpPr>
+          <p:spPr>
+            <a:xfrm>
+              <a:off x="6433275" y="2822956"/>
+              <a:ext cx="603504" cy="603504"/>
+            </a:xfrm>
+            <a:prstGeom prst="ellipse">
+              <a:avLst/>
+            </a:prstGeom>
+            <a:solidFill>
+              <a:srgbClr val="006DEB"/>
+            </a:solidFill>
+            <a:ln>
+              <a:noFill/>
+            </a:ln>
+          </p:spPr>
+          <p:txBody>
+            <a:bodyPr rtlCol="0" anchor="ctr"/>
+            <a:lstStyle/>
+            <a:p>
+              <a:pPr algn="ctr"/>
+            </a:p>
+          </p:txBody>
+        </p:sp>
+        <p:sp>
+          <p:nvSpPr>
+            <p:cNvPr id="550" name="BrandDeck Icon calendar"/>
+            <p:cNvSpPr/>
+            <p:nvPr/>
+          </p:nvSpPr>
+          <p:spPr>
+            <a:xfrm>
+              <a:off x="6566046" y="2955726"/>
+              <a:ext cx="337962" cy="337962"/>
+            </a:xfrm>
+            <a:custGeom>
+              <a:avLst/>
+              <a:gdLst/>
+              <a:ahLst/>
+              <a:cxnLst/>
+              <a:rect l="l" t="t" r="r" b="b"/>
+              <a:pathLst>
+                <a:path w="24000" h="24000" fill="none">
+                  <a:moveTo>
+                    <a:pt x="8000" y="2000"/>
+                  </a:moveTo>
+                  <a:lnTo>
+                    <a:pt x="8000" y="6000"/>
+                  </a:lnTo>
+                </a:path>
+                <a:path w="24000" h="24000" fill="none">
+                  <a:moveTo>
+                    <a:pt x="16000" y="2000"/>
+                  </a:moveTo>
+                  <a:lnTo>
+                    <a:pt x="16000" y="6000"/>
+                  </a:lnTo>
+                </a:path>
+                <a:path w="24000" h="24000" fill="none">
+                  <a:moveTo>
+                    <a:pt x="5000" y="4000"/>
+                  </a:moveTo>
+                  <a:lnTo>
+                    <a:pt x="19000" y="4000"/>
+                  </a:lnTo>
+                  <a:cubicBezTo>
+                    <a:pt x="20105" y="4000"/>
+                    <a:pt x="21000" y="4895"/>
+                    <a:pt x="21000" y="6000"/>
+                  </a:cubicBezTo>
+                  <a:lnTo>
+                    <a:pt x="21000" y="20000"/>
+                  </a:lnTo>
+                  <a:cubicBezTo>
+                    <a:pt x="21000" y="21105"/>
+                    <a:pt x="20105" y="22000"/>
+                    <a:pt x="19000" y="22000"/>
+                  </a:cubicBezTo>
+                  <a:lnTo>
+                    <a:pt x="5000" y="22000"/>
+                  </a:lnTo>
+                  <a:cubicBezTo>
+                    <a:pt x="3895" y="22000"/>
+                    <a:pt x="3000" y="21105"/>
+                    <a:pt x="3000" y="20000"/>
+                  </a:cubicBezTo>
+                  <a:lnTo>
+                    <a:pt x="3000" y="6000"/>
+                  </a:lnTo>
+                  <a:cubicBezTo>
+                    <a:pt x="3000" y="4895"/>
+                    <a:pt x="3895" y="4000"/>
+                    <a:pt x="5000" y="4000"/>
+                  </a:cubicBezTo>
+                  <a:close/>
+                </a:path>
+                <a:path w="24000" h="24000" fill="none">
+                  <a:moveTo>
+                    <a:pt x="3000" y="10000"/>
+                  </a:moveTo>
+                  <a:lnTo>
+                    <a:pt x="21000" y="10000"/>
+                  </a:lnTo>
+                </a:path>
+              </a:pathLst>
+            </a:custGeom>
+            <a:noFill/>
+            <a:ln w="28163" cap="rnd">
+              <a:solidFill>
+                <a:srgbClr val="FFFFFF"/>
+              </a:solidFill>
+              <a:round/>
+            </a:ln>
+          </p:spPr>
+          <p:txBody>
+            <a:bodyPr rtlCol="0" anchor="ctr"/>
+            <a:lstStyle/>
+            <a:p>
+              <a:pPr algn="ctr"/>
+            </a:p>
+          </p:txBody>
+        </p:sp>
+        <p:sp>
+          <p:nvSpPr>
+            <p:cNvPr id="551" name="BrandDeck Diagram Text 2"/>
+            <p:cNvSpPr txBox="1"/>
+            <p:nvPr/>
+          </p:nvSpPr>
+          <p:spPr>
+            <a:xfrm>
+              <a:off x="6367438" y="3580079"/>
+              <a:ext cx="5012130" cy="2510968"/>
+            </a:xfrm>
+            <a:prstGeom prst="rect">
+              <a:avLst/>
+            </a:prstGeom>
+            <a:noFill/>
+          </p:spPr>
+          <p:txBody>
+            <a:bodyPr wrap="square" anchor="t" lIns="36576" tIns="18288" rIns="36576" bIns="18288">
+              <a:noAutofit/>
+            </a:bodyPr>
+            <a:lstStyle/>
+            <a:p>
+              <a:pPr algn="l">
+                <a:lnSpc>
+                  <a:spcPct val="110000"/>
+                </a:lnSpc>
+              </a:pPr>
+              <a:r>
+                <a:rPr sz="1800" b="1">
+                  <a:solidFill>
+                    <a:srgbClr val="000000"/>
+                  </a:solidFill>
+                  <a:latin typeface="Play"/>
+                </a:rPr>
+                <a:t>6 недель</a:t>
+              </a:r>
+            </a:p>
+            <a:p>
+              <a:pPr algn="l">
+                <a:lnSpc>
+                  <a:spcPct val="110000"/>
+                </a:lnSpc>
+                <a:spcBef>
+                  <a:spcPts val="450"/>
+                </a:spcBef>
+              </a:pPr>
+              <a:r>
+                <a:rPr sz="1800" b="0">
+                  <a:solidFill>
+                    <a:srgbClr val="000000"/>
+                  </a:solidFill>
+                  <a:latin typeface="Play"/>
+                </a:rPr>
+                <a:t>Период пилота</a:t>
+              </a:r>
+            </a:p>
+          </p:txBody>
+        </p:sp>
+      </p:grpSp>
+    </p:spTree>
+  </p:cSld>
+  <p:clrMapOvr>
+    <a:masterClrMapping/>
+  </p:clrMapOvr>
+</p:sld>
+</file>
+
+<file path=ppt/slides/slide4.xml><?xml version="1.0" encoding="utf-8"?>
+<p:sld xmlns:a="http://schemas.openxmlformats.org/drawingml/2006/main" xmlns:p="http://schemas.openxmlformats.org/presentationml/2006/main" xmlns:r="http://schemas.openxmlformats.org/officeDocument/2006/relationships">
+  <p:cSld>
+    <p:bg>
+      <p:bgPr>
+        <a:solidFill>
+          <a:schemeClr val="lt2"/>
+        </a:solidFill>
+      </p:bgPr>
+    </p:bg>
+    <p:spTree>
+      <p:nvGrpSpPr>
+        <p:cNvPr id="1" name=""/>
+        <p:cNvGrpSpPr/>
+        <p:nvPr/>
+      </p:nvGrpSpPr>
+      <p:grpSpPr/>
+      <p:sp>
+        <p:nvSpPr>
+          <p:cNvPr id="543" name="BrandDeck Text 543"/>
+          <p:cNvSpPr txBox="1"/>
+          <p:nvPr>
+            <p:ph type="title"/>
+          </p:nvPr>
+        </p:nvSpPr>
+        <p:spPr>
+          <a:xfrm>
+            <a:off x="677334" y="692150"/>
+            <a:ext cx="10855854" cy="644241"/>
+          </a:xfrm>
+          <a:prstGeom prst="rect">
+            <a:avLst/>
+          </a:prstGeom>
+          <a:noFill/>
+          <a:ln>
+            <a:noFill/>
+          </a:ln>
+        </p:spPr>
+        <p:txBody>
+          <a:bodyPr anchorCtr="0" anchor="t" bIns="0" lIns="0" spcFirstLastPara="1" rIns="0" wrap="square" tIns="0">
+            <a:normAutofit/>
+          </a:bodyPr>
+          <a:lstStyle/>
+          <a:p>
+            <a:pPr indent="0" marL="0" rtl="0" algn="l">
+              <a:lnSpc>
+                <a:spcPct val="115000"/>
+              </a:lnSpc>
+              <a:spcBef>
+                <a:spcPts val="0"/>
+              </a:spcBef>
+              <a:spcAft>
+                <a:spcPts val="270"/>
+              </a:spcAft>
+              <a:buClr>
+                <a:schemeClr val="accent1"/>
+              </a:buClr>
+              <a:buSzPts val="3600"/>
+              <a:buFont typeface="Play"/>
+              <a:buNone/>
+            </a:pPr>
+            <a:r>
+              <a:rPr sz="1800">
+                <a:solidFill>
+                  <a:srgbClr val="000000"/>
+                </a:solidFill>
+              </a:rPr>
+              <a:t>ИИ-помощник отвечает на вопросы по регламентам и сразу дает ссылку на документ-источник</a:t>
+            </a:r>
+            <a:endParaRPr/>
+          </a:p>
+        </p:txBody>
+      </p:sp>
+      <p:grpSp>
+        <p:nvGrpSpPr>
+          <p:cNvPr id="2" name="BrandDeck Diagram icon_grid" descr="icon_grid: ИИ-помощник отвечает на вопросы по регламентам и инструкциям.; Система сразу предоставляет ссылку на документ-источник.; Ответ формируется на основе внутренних корпоративных документов."/>
+          <p:cNvGrpSpPr/>
+          <p:nvPr/>
+        </p:nvGrpSpPr>
+        <p:grpSpPr>
+          <a:xfrm>
+            <a:off x="677334" y="2912953"/>
+            <a:ext cx="10855853" cy="2782924"/>
+            <a:chOff x="677334" y="2912953"/>
+            <a:chExt cx="10855853" cy="2782924"/>
+          </a:xfrm>
+        </p:grpSpPr>
+        <p:sp>
+          <p:nvSpPr>
+            <p:cNvPr id="544" name="BrandDeck Diagram Card 1"/>
+            <p:cNvSpPr/>
+            <p:nvPr/>
+          </p:nvSpPr>
+          <p:spPr>
+            <a:xfrm>
+              <a:off x="677334" y="2912953"/>
+              <a:ext cx="5319368" cy="1282903"/>
+            </a:xfrm>
+            <a:prstGeom prst="roundRect">
+              <a:avLst>
+                <a:gd name="adj" fmla="val 8000"/>
+              </a:avLst>
+            </a:prstGeom>
+            <a:solidFill>
+              <a:srgbClr val="EDF5FF"/>
+            </a:solidFill>
+            <a:ln>
+              <a:noFill/>
+            </a:ln>
+          </p:spPr>
+          <p:txBody>
+            <a:bodyPr rtlCol="0" anchor="ctr"/>
+            <a:lstStyle/>
+            <a:p>
+              <a:pPr algn="ctr"/>
+            </a:p>
+          </p:txBody>
+        </p:sp>
+        <p:sp>
+          <p:nvSpPr>
+            <p:cNvPr id="545" name="BrandDeck Diagram Icon 1 Badge"/>
+            <p:cNvSpPr/>
+            <p:nvPr/>
+          </p:nvSpPr>
+          <p:spPr>
+            <a:xfrm>
+              <a:off x="896790" y="3317794"/>
+              <a:ext cx="473222" cy="473222"/>
+            </a:xfrm>
+            <a:prstGeom prst="ellipse">
+              <a:avLst/>
+            </a:prstGeom>
+            <a:solidFill>
+              <a:srgbClr val="006DEB"/>
+            </a:solidFill>
+            <a:ln>
+              <a:noFill/>
+            </a:ln>
+          </p:spPr>
+          <p:txBody>
+            <a:bodyPr rtlCol="0" anchor="ctr"/>
+            <a:lstStyle/>
+            <a:p>
+              <a:pPr algn="ctr"/>
+            </a:p>
+          </p:txBody>
+        </p:sp>
+        <p:sp>
+          <p:nvSpPr>
+            <p:cNvPr id="546" name="BrandDeck Icon file-text"/>
+            <p:cNvSpPr/>
+            <p:nvPr/>
+          </p:nvSpPr>
+          <p:spPr>
+            <a:xfrm>
+              <a:off x="1000898" y="3421903"/>
+              <a:ext cx="265004" cy="265004"/>
+            </a:xfrm>
+            <a:custGeom>
+              <a:avLst/>
+              <a:gdLst/>
+              <a:ahLst/>
+              <a:cxnLst/>
+              <a:rect l="l" t="t" r="r" b="b"/>
+              <a:pathLst>
+                <a:path w="24000" h="24000" fill="none">
+                  <a:moveTo>
+                    <a:pt x="15000" y="2000"/>
+                  </a:moveTo>
+                  <a:lnTo>
+                    <a:pt x="6000" y="2000"/>
+                  </a:lnTo>
+                  <a:cubicBezTo>
+                    <a:pt x="4895" y="2000"/>
+                    <a:pt x="4000" y="2895"/>
+                    <a:pt x="4000" y="4000"/>
+                  </a:cubicBezTo>
+                  <a:lnTo>
+                    <a:pt x="4000" y="20000"/>
+                  </a:lnTo>
+                  <a:cubicBezTo>
+                    <a:pt x="4000" y="21105"/>
+                    <a:pt x="4895" y="22000"/>
+                    <a:pt x="6000" y="22000"/>
+                  </a:cubicBezTo>
+                  <a:lnTo>
+                    <a:pt x="18000" y="22000"/>
+                  </a:lnTo>
+                  <a:cubicBezTo>
+                    <a:pt x="19105" y="22000"/>
+                    <a:pt x="20000" y="21105"/>
+                    <a:pt x="20000" y="20000"/>
+                  </a:cubicBezTo>
+                  <a:lnTo>
+                    <a:pt x="20000" y="7000"/>
+                  </a:lnTo>
+                  <a:close/>
+                </a:path>
+                <a:path w="24000" h="24000" fill="none">
+                  <a:moveTo>
+                    <a:pt x="14000" y="2000"/>
+                  </a:moveTo>
+                  <a:lnTo>
+                    <a:pt x="14000" y="6000"/>
+                  </a:lnTo>
+                  <a:cubicBezTo>
+                    <a:pt x="14000" y="7105"/>
+                    <a:pt x="14895" y="8000"/>
+                    <a:pt x="16000" y="8000"/>
+                  </a:cubicBezTo>
+                  <a:lnTo>
+                    <a:pt x="20000" y="8000"/>
+                  </a:lnTo>
+                </a:path>
+                <a:path w="24000" h="24000" fill="none">
+                  <a:moveTo>
+                    <a:pt x="10000" y="9000"/>
+                  </a:moveTo>
+                  <a:lnTo>
+                    <a:pt x="8000" y="9000"/>
+                  </a:lnTo>
+                </a:path>
+                <a:path w="24000" h="24000" fill="none">
+                  <a:moveTo>
+                    <a:pt x="16000" y="13000"/>
+                  </a:moveTo>
+                  <a:lnTo>
+                    <a:pt x="8000" y="13000"/>
+                  </a:lnTo>
+                </a:path>
+                <a:path w="24000" h="24000" fill="none">
+                  <a:moveTo>
+                    <a:pt x="16000" y="17000"/>
+                  </a:moveTo>
+                  <a:lnTo>
+                    <a:pt x="8000" y="17000"/>
+                  </a:lnTo>
+                </a:path>
+              </a:pathLst>
+            </a:custGeom>
+            <a:noFill/>
+            <a:ln w="22083" cap="rnd">
+              <a:solidFill>
+                <a:srgbClr val="FFFFFF"/>
+              </a:solidFill>
+              <a:round/>
+            </a:ln>
+          </p:spPr>
+          <p:txBody>
+            <a:bodyPr rtlCol="0" anchor="ctr"/>
+            <a:lstStyle/>
+            <a:p>
+              <a:pPr algn="ctr"/>
+            </a:p>
+          </p:txBody>
+        </p:sp>
+        <p:sp>
+          <p:nvSpPr>
+            <p:cNvPr id="547" name="BrandDeck Diagram Text 1"/>
+            <p:cNvSpPr txBox="1"/>
+            <p:nvPr/>
+          </p:nvSpPr>
+          <p:spPr>
+            <a:xfrm>
+              <a:off x="1501685" y="3044627"/>
               <a:ext cx="4275560" cy="1019556"/>
             </a:xfrm>
             <a:prstGeom prst="rect">
@@ -12295,7 +11740,463 @@
                   </a:solidFill>
                   <a:latin typeface="Play"/>
                 </a:rPr>
-                <a:t>Ответ формируется автоматически без участия людей.</a:t>
+                <a:t>ИИ-помощник отвечает на вопросы по регламентам и инструкциям.</a:t>
+              </a:r>
+            </a:p>
+          </p:txBody>
+        </p:sp>
+        <p:sp>
+          <p:nvSpPr>
+            <p:cNvPr id="548" name="BrandDeck Diagram Card 2"/>
+            <p:cNvSpPr/>
+            <p:nvPr/>
+          </p:nvSpPr>
+          <p:spPr>
+            <a:xfrm>
+              <a:off x="6213819" y="2912953"/>
+              <a:ext cx="5319368" cy="1282903"/>
+            </a:xfrm>
+            <a:prstGeom prst="roundRect">
+              <a:avLst>
+                <a:gd name="adj" fmla="val 8000"/>
+              </a:avLst>
+            </a:prstGeom>
+            <a:solidFill>
+              <a:srgbClr val="EDF5FF"/>
+            </a:solidFill>
+            <a:ln>
+              <a:noFill/>
+            </a:ln>
+          </p:spPr>
+          <p:txBody>
+            <a:bodyPr rtlCol="0" anchor="ctr"/>
+            <a:lstStyle/>
+            <a:p>
+              <a:pPr algn="ctr"/>
+            </a:p>
+          </p:txBody>
+        </p:sp>
+        <p:sp>
+          <p:nvSpPr>
+            <p:cNvPr id="549" name="BrandDeck Diagram Icon 2 Badge"/>
+            <p:cNvSpPr/>
+            <p:nvPr/>
+          </p:nvSpPr>
+          <p:spPr>
+            <a:xfrm>
+              <a:off x="6433275" y="3317794"/>
+              <a:ext cx="473222" cy="473222"/>
+            </a:xfrm>
+            <a:prstGeom prst="ellipse">
+              <a:avLst/>
+            </a:prstGeom>
+            <a:solidFill>
+              <a:srgbClr val="006DEB"/>
+            </a:solidFill>
+            <a:ln>
+              <a:noFill/>
+            </a:ln>
+          </p:spPr>
+          <p:txBody>
+            <a:bodyPr rtlCol="0" anchor="ctr"/>
+            <a:lstStyle/>
+            <a:p>
+              <a:pPr algn="ctr"/>
+            </a:p>
+          </p:txBody>
+        </p:sp>
+        <p:sp>
+          <p:nvSpPr>
+            <p:cNvPr id="550" name="BrandDeck Icon link"/>
+            <p:cNvSpPr/>
+            <p:nvPr/>
+          </p:nvSpPr>
+          <p:spPr>
+            <a:xfrm>
+              <a:off x="6537384" y="3421903"/>
+              <a:ext cx="265004" cy="265004"/>
+            </a:xfrm>
+            <a:custGeom>
+              <a:avLst/>
+              <a:gdLst/>
+              <a:ahLst/>
+              <a:cxnLst/>
+              <a:rect l="l" t="t" r="r" b="b"/>
+              <a:pathLst>
+                <a:path w="24000" h="24000" fill="none">
+                  <a:moveTo>
+                    <a:pt x="10000" y="13000"/>
+                  </a:moveTo>
+                  <a:cubicBezTo>
+                    <a:pt x="10869" y="14162"/>
+                    <a:pt x="12200" y="14889"/>
+                    <a:pt x="13647" y="14992"/>
+                  </a:cubicBezTo>
+                  <a:cubicBezTo>
+                    <a:pt x="15094" y="15096"/>
+                    <a:pt x="16514" y="14566"/>
+                    <a:pt x="17540" y="13540"/>
+                  </a:cubicBezTo>
+                  <a:lnTo>
+                    <a:pt x="20540" y="10540"/>
+                  </a:lnTo>
+                  <a:cubicBezTo>
+                    <a:pt x="22435" y="8578"/>
+                    <a:pt x="22408" y="5460"/>
+                    <a:pt x="20479" y="3531"/>
+                  </a:cubicBezTo>
+                  <a:cubicBezTo>
+                    <a:pt x="18550" y="1602"/>
+                    <a:pt x="15432" y="1575"/>
+                    <a:pt x="13470" y="3470"/>
+                  </a:cubicBezTo>
+                  <a:lnTo>
+                    <a:pt x="11750" y="5180"/>
+                  </a:lnTo>
+                </a:path>
+                <a:path w="24000" h="24000" fill="none">
+                  <a:moveTo>
+                    <a:pt x="14000" y="11000"/>
+                  </a:moveTo>
+                  <a:cubicBezTo>
+                    <a:pt x="13131" y="9838"/>
+                    <a:pt x="11800" y="9111"/>
+                    <a:pt x="10353" y="9008"/>
+                  </a:cubicBezTo>
+                  <a:cubicBezTo>
+                    <a:pt x="8906" y="8904"/>
+                    <a:pt x="7486" y="9434"/>
+                    <a:pt x="6460" y="10460"/>
+                  </a:cubicBezTo>
+                  <a:lnTo>
+                    <a:pt x="3460" y="13460"/>
+                  </a:lnTo>
+                  <a:cubicBezTo>
+                    <a:pt x="1565" y="15422"/>
+                    <a:pt x="1592" y="18540"/>
+                    <a:pt x="3521" y="20469"/>
+                  </a:cubicBezTo>
+                  <a:cubicBezTo>
+                    <a:pt x="5450" y="22398"/>
+                    <a:pt x="8568" y="22425"/>
+                    <a:pt x="10530" y="20530"/>
+                  </a:cubicBezTo>
+                  <a:lnTo>
+                    <a:pt x="12240" y="18820"/>
+                  </a:lnTo>
+                </a:path>
+              </a:pathLst>
+            </a:custGeom>
+            <a:noFill/>
+            <a:ln w="22083" cap="rnd">
+              <a:solidFill>
+                <a:srgbClr val="FFFFFF"/>
+              </a:solidFill>
+              <a:round/>
+            </a:ln>
+          </p:spPr>
+          <p:txBody>
+            <a:bodyPr rtlCol="0" anchor="ctr"/>
+            <a:lstStyle/>
+            <a:p>
+              <a:pPr algn="ctr"/>
+            </a:p>
+          </p:txBody>
+        </p:sp>
+        <p:sp>
+          <p:nvSpPr>
+            <p:cNvPr id="551" name="BrandDeck Diagram Text 2"/>
+            <p:cNvSpPr txBox="1"/>
+            <p:nvPr/>
+          </p:nvSpPr>
+          <p:spPr>
+            <a:xfrm>
+              <a:off x="7038171" y="3044627"/>
+              <a:ext cx="4275560" cy="1019556"/>
+            </a:xfrm>
+            <a:prstGeom prst="rect">
+              <a:avLst/>
+            </a:prstGeom>
+            <a:noFill/>
+          </p:spPr>
+          <p:txBody>
+            <a:bodyPr wrap="square" anchor="ctr" lIns="36576" tIns="18288" rIns="36576" bIns="18288">
+              <a:noAutofit/>
+            </a:bodyPr>
+            <a:lstStyle/>
+            <a:p>
+              <a:pPr algn="l">
+                <a:lnSpc>
+                  <a:spcPct val="110000"/>
+                </a:lnSpc>
+              </a:pPr>
+              <a:r>
+                <a:rPr sz="1800" b="0">
+                  <a:solidFill>
+                    <a:srgbClr val="000000"/>
+                  </a:solidFill>
+                  <a:latin typeface="Play"/>
+                </a:rPr>
+                <a:t>Система сразу предоставляет ссылку на документ-источник.</a:t>
+              </a:r>
+            </a:p>
+          </p:txBody>
+        </p:sp>
+        <p:sp>
+          <p:nvSpPr>
+            <p:cNvPr id="552" name="BrandDeck Diagram Card 3"/>
+            <p:cNvSpPr/>
+            <p:nvPr/>
+          </p:nvSpPr>
+          <p:spPr>
+            <a:xfrm>
+              <a:off x="677334" y="4412974"/>
+              <a:ext cx="5319368" cy="1282903"/>
+            </a:xfrm>
+            <a:prstGeom prst="roundRect">
+              <a:avLst>
+                <a:gd name="adj" fmla="val 8000"/>
+              </a:avLst>
+            </a:prstGeom>
+            <a:solidFill>
+              <a:srgbClr val="EDF5FF"/>
+            </a:solidFill>
+            <a:ln>
+              <a:noFill/>
+            </a:ln>
+          </p:spPr>
+          <p:txBody>
+            <a:bodyPr rtlCol="0" anchor="ctr"/>
+            <a:lstStyle/>
+            <a:p>
+              <a:pPr algn="ctr"/>
+            </a:p>
+          </p:txBody>
+        </p:sp>
+        <p:sp>
+          <p:nvSpPr>
+            <p:cNvPr id="553" name="BrandDeck Diagram Icon 3 Badge"/>
+            <p:cNvSpPr/>
+            <p:nvPr/>
+          </p:nvSpPr>
+          <p:spPr>
+            <a:xfrm>
+              <a:off x="896790" y="4817814"/>
+              <a:ext cx="473222" cy="473222"/>
+            </a:xfrm>
+            <a:prstGeom prst="ellipse">
+              <a:avLst/>
+            </a:prstGeom>
+            <a:solidFill>
+              <a:srgbClr val="006DEB"/>
+            </a:solidFill>
+            <a:ln>
+              <a:noFill/>
+            </a:ln>
+          </p:spPr>
+          <p:txBody>
+            <a:bodyPr rtlCol="0" anchor="ctr"/>
+            <a:lstStyle/>
+            <a:p>
+              <a:pPr algn="ctr"/>
+            </a:p>
+          </p:txBody>
+        </p:sp>
+        <p:sp>
+          <p:nvSpPr>
+            <p:cNvPr id="554" name="BrandDeck Icon building"/>
+            <p:cNvSpPr/>
+            <p:nvPr/>
+          </p:nvSpPr>
+          <p:spPr>
+            <a:xfrm>
+              <a:off x="1000898" y="4921923"/>
+              <a:ext cx="265004" cy="265004"/>
+            </a:xfrm>
+            <a:custGeom>
+              <a:avLst/>
+              <a:gdLst/>
+              <a:ahLst/>
+              <a:cxnLst/>
+              <a:rect l="l" t="t" r="r" b="b"/>
+              <a:pathLst>
+                <a:path w="24000" h="24000" fill="none">
+                  <a:moveTo>
+                    <a:pt x="6000" y="2000"/>
+                  </a:moveTo>
+                  <a:lnTo>
+                    <a:pt x="18000" y="2000"/>
+                  </a:lnTo>
+                  <a:cubicBezTo>
+                    <a:pt x="19105" y="2000"/>
+                    <a:pt x="20000" y="2895"/>
+                    <a:pt x="20000" y="4000"/>
+                  </a:cubicBezTo>
+                  <a:lnTo>
+                    <a:pt x="20000" y="20000"/>
+                  </a:lnTo>
+                  <a:cubicBezTo>
+                    <a:pt x="20000" y="21105"/>
+                    <a:pt x="19105" y="22000"/>
+                    <a:pt x="18000" y="22000"/>
+                  </a:cubicBezTo>
+                  <a:lnTo>
+                    <a:pt x="6000" y="22000"/>
+                  </a:lnTo>
+                  <a:cubicBezTo>
+                    <a:pt x="4895" y="22000"/>
+                    <a:pt x="4000" y="21105"/>
+                    <a:pt x="4000" y="20000"/>
+                  </a:cubicBezTo>
+                  <a:lnTo>
+                    <a:pt x="4000" y="4000"/>
+                  </a:lnTo>
+                  <a:cubicBezTo>
+                    <a:pt x="4000" y="2895"/>
+                    <a:pt x="4895" y="2000"/>
+                    <a:pt x="6000" y="2000"/>
+                  </a:cubicBezTo>
+                  <a:close/>
+                </a:path>
+                <a:path w="24000" h="24000" fill="none">
+                  <a:moveTo>
+                    <a:pt x="9000" y="22000"/>
+                  </a:moveTo>
+                  <a:lnTo>
+                    <a:pt x="9000" y="18000"/>
+                  </a:lnTo>
+                  <a:lnTo>
+                    <a:pt x="15000" y="18000"/>
+                  </a:lnTo>
+                  <a:lnTo>
+                    <a:pt x="15000" y="22000"/>
+                  </a:lnTo>
+                </a:path>
+                <a:path w="24000" h="24000" fill="none">
+                  <a:moveTo>
+                    <a:pt x="8000" y="6000"/>
+                  </a:moveTo>
+                  <a:lnTo>
+                    <a:pt x="8010" y="6000"/>
+                  </a:lnTo>
+                </a:path>
+                <a:path w="24000" h="24000" fill="none">
+                  <a:moveTo>
+                    <a:pt x="16000" y="6000"/>
+                  </a:moveTo>
+                  <a:lnTo>
+                    <a:pt x="16010" y="6000"/>
+                  </a:lnTo>
+                </a:path>
+                <a:path w="24000" h="24000" fill="none">
+                  <a:moveTo>
+                    <a:pt x="12000" y="6000"/>
+                  </a:moveTo>
+                  <a:lnTo>
+                    <a:pt x="12010" y="6000"/>
+                  </a:lnTo>
+                </a:path>
+                <a:path w="24000" h="24000" fill="none">
+                  <a:moveTo>
+                    <a:pt x="12000" y="10000"/>
+                  </a:moveTo>
+                  <a:lnTo>
+                    <a:pt x="12010" y="10000"/>
+                  </a:lnTo>
+                </a:path>
+                <a:path w="24000" h="24000" fill="none">
+                  <a:moveTo>
+                    <a:pt x="12000" y="14000"/>
+                  </a:moveTo>
+                  <a:lnTo>
+                    <a:pt x="12010" y="14000"/>
+                  </a:lnTo>
+                </a:path>
+                <a:path w="24000" h="24000" fill="none">
+                  <a:moveTo>
+                    <a:pt x="16000" y="10000"/>
+                  </a:moveTo>
+                  <a:lnTo>
+                    <a:pt x="16010" y="10000"/>
+                  </a:lnTo>
+                </a:path>
+                <a:path w="24000" h="24000" fill="none">
+                  <a:moveTo>
+                    <a:pt x="16000" y="14000"/>
+                  </a:moveTo>
+                  <a:lnTo>
+                    <a:pt x="16010" y="14000"/>
+                  </a:lnTo>
+                </a:path>
+                <a:path w="24000" h="24000" fill="none">
+                  <a:moveTo>
+                    <a:pt x="8000" y="10000"/>
+                  </a:moveTo>
+                  <a:lnTo>
+                    <a:pt x="8010" y="10000"/>
+                  </a:lnTo>
+                </a:path>
+                <a:path w="24000" h="24000" fill="none">
+                  <a:moveTo>
+                    <a:pt x="8000" y="14000"/>
+                  </a:moveTo>
+                  <a:lnTo>
+                    <a:pt x="8010" y="14000"/>
+                  </a:lnTo>
+                </a:path>
+              </a:pathLst>
+            </a:custGeom>
+            <a:noFill/>
+            <a:ln w="22083" cap="rnd">
+              <a:solidFill>
+                <a:srgbClr val="FFFFFF"/>
+              </a:solidFill>
+              <a:round/>
+            </a:ln>
+          </p:spPr>
+          <p:txBody>
+            <a:bodyPr rtlCol="0" anchor="ctr"/>
+            <a:lstStyle/>
+            <a:p>
+              <a:pPr algn="ctr"/>
+            </a:p>
+          </p:txBody>
+        </p:sp>
+        <p:sp>
+          <p:nvSpPr>
+            <p:cNvPr id="555" name="BrandDeck Diagram Text 3"/>
+            <p:cNvSpPr txBox="1"/>
+            <p:nvPr/>
+          </p:nvSpPr>
+          <p:spPr>
+            <a:xfrm>
+              <a:off x="1501685" y="4544647"/>
+              <a:ext cx="4275560" cy="1019556"/>
+            </a:xfrm>
+            <a:prstGeom prst="rect">
+              <a:avLst/>
+            </a:prstGeom>
+            <a:noFill/>
+          </p:spPr>
+          <p:txBody>
+            <a:bodyPr wrap="square" anchor="ctr" lIns="36576" tIns="18288" rIns="36576" bIns="18288">
+              <a:noAutofit/>
+            </a:bodyPr>
+            <a:lstStyle/>
+            <a:p>
+              <a:pPr algn="l">
+                <a:lnSpc>
+                  <a:spcPct val="110000"/>
+                </a:lnSpc>
+              </a:pPr>
+              <a:r>
+                <a:rPr sz="1800" b="0">
+                  <a:solidFill>
+                    <a:srgbClr val="000000"/>
+                  </a:solidFill>
+                  <a:latin typeface="Play"/>
+                </a:rPr>
+                <a:t>Ответ формируется на основе внутренних корпоративных документов.</a:t>
               </a:r>
             </a:p>
           </p:txBody>
@@ -12309,7 +12210,1600 @@
 </p:sld>
 </file>
 
+<file path=ppt/slides/slide5.xml><?xml version="1.0" encoding="utf-8"?>
+<p:sld xmlns:a="http://schemas.openxmlformats.org/drawingml/2006/main" xmlns:p="http://schemas.openxmlformats.org/presentationml/2006/main" xmlns:r="http://schemas.openxmlformats.org/officeDocument/2006/relationships">
+  <p:cSld>
+    <p:spTree>
+      <p:nvGrpSpPr>
+        <p:cNvPr id="1" name=""/>
+        <p:cNvGrpSpPr/>
+        <p:nvPr/>
+      </p:nvGrpSpPr>
+      <p:grpSpPr/>
+      <p:sp>
+        <p:nvSpPr>
+          <p:cNvPr id="2" name="BrandDeck Text 2"/>
+          <p:cNvSpPr>
+            <a:spLocks noGrp="1"/>
+          </p:cNvSpPr>
+          <p:nvPr>
+            <p:ph type="title"/>
+          </p:nvPr>
+        </p:nvSpPr>
+        <p:spPr>
+          <a:xfrm>
+            <a:off x="658813" y="692150"/>
+            <a:ext cx="5254307" cy="1380285"/>
+          </a:xfrm>
+        </p:spPr>
+        <p:txBody>
+          <a:bodyPr wrap="square" anchor="t">
+            <a:normAutofit/>
+          </a:bodyPr>
+          <a:lstStyle/>
+          <a:p>
+            <a:pPr algn="l">
+              <a:lnSpc>
+                <a:spcPct val="115000"/>
+              </a:lnSpc>
+              <a:spcBef>
+                <a:spcPts val="0"/>
+              </a:spcBef>
+              <a:spcAft>
+                <a:spcPts val="359"/>
+              </a:spcAft>
+            </a:pPr>
+            <a:r>
+              <a:rPr sz="2400">
+                <a:solidFill>
+                  <a:srgbClr val="000000"/>
+                </a:solidFill>
+              </a:rPr>
+              <a:t>Система работает внутри контура компании, не выводя документы наружу</a:t>
+            </a:r>
+          </a:p>
+        </p:txBody>
+      </p:sp>
+      <p:sp>
+        <p:nvSpPr>
+          <p:cNvPr id="3" name="BrandDeck Text 3"/>
+          <p:cNvSpPr>
+            <a:spLocks noGrp="1"/>
+          </p:cNvSpPr>
+          <p:nvPr>
+            <p:ph type="body" idx="1"/>
+          </p:nvPr>
+        </p:nvSpPr>
+        <p:spPr/>
+        <p:txBody>
+          <a:bodyPr wrap="square" anchor="t">
+            <a:normAutofit/>
+          </a:bodyPr>
+          <a:lstStyle/>
+          <a:p>
+            <a:pPr>
+              <a:lnSpc>
+                <a:spcPct val="115000"/>
+              </a:lnSpc>
+              <a:spcBef>
+                <a:spcPts val="0"/>
+              </a:spcBef>
+              <a:spcAft>
+                <a:spcPts val="270"/>
+              </a:spcAft>
+            </a:pPr>
+            <a:r>
+              <a:rPr sz="1800">
+                <a:solidFill>
+                  <a:srgbClr val="000000"/>
+                </a:solidFill>
+              </a:rPr>
+              <a:t>Модель с открытыми весами работает внутри контура компании.</a:t>
+            </a:r>
+          </a:p>
+          <a:p>
+            <a:pPr>
+              <a:lnSpc>
+                <a:spcPct val="115000"/>
+              </a:lnSpc>
+              <a:spcBef>
+                <a:spcPts val="0"/>
+              </a:spcBef>
+              <a:spcAft>
+                <a:spcPts val="270"/>
+              </a:spcAft>
+            </a:pPr>
+            <a:r>
+              <a:rPr sz="1800">
+                <a:solidFill>
+                  <a:srgbClr val="000000"/>
+                </a:solidFill>
+              </a:rPr>
+              <a:t>Документы не покидают периметр и не уходят наружу.</a:t>
+            </a:r>
+          </a:p>
+          <a:p>
+            <a:pPr>
+              <a:lnSpc>
+                <a:spcPct val="115000"/>
+              </a:lnSpc>
+              <a:spcBef>
+                <a:spcPts val="0"/>
+              </a:spcBef>
+              <a:spcAft>
+                <a:spcPts val="270"/>
+              </a:spcAft>
+            </a:pPr>
+            <a:r>
+              <a:rPr sz="1800">
+                <a:solidFill>
+                  <a:srgbClr val="000000"/>
+                </a:solidFill>
+              </a:rPr>
+              <a:t>Обработка запросов происходит локально без передачи данных.</a:t>
+            </a:r>
+          </a:p>
+        </p:txBody>
+      </p:sp>
+      <p:pic>
+        <p:nvPicPr>
+          <p:cNvPr id="4" name="BrandDeck Image" descr="внутренний контур серверная"/>
+          <p:cNvPicPr>
+            <a:picLocks noGrp="1" noChangeAspect="1"/>
+          </p:cNvPicPr>
+          <p:nvPr>
+            <p:ph type="pic" idx="2"/>
+          </p:nvPr>
+        </p:nvPicPr>
+        <p:blipFill>
+          <a:blip r:embed="rId2"/>
+          <a:srcRect l="24987" r="24987"/>
+          <a:stretch>
+            <a:fillRect/>
+          </a:stretch>
+        </p:blipFill>
+        <p:spPr/>
+      </p:pic>
+    </p:spTree>
+  </p:cSld>
+  <p:clrMapOvr>
+    <a:masterClrMapping/>
+  </p:clrMapOvr>
+</p:sld>
+</file>
+
 <file path=ppt/slides/slide6.xml><?xml version="1.0" encoding="utf-8"?>
+<p:sld xmlns:a="http://schemas.openxmlformats.org/drawingml/2006/main" xmlns:p="http://schemas.openxmlformats.org/presentationml/2006/main" xmlns:r="http://schemas.openxmlformats.org/officeDocument/2006/relationships">
+  <p:cSld>
+    <p:bg>
+      <p:bgPr>
+        <a:solidFill>
+          <a:schemeClr val="lt2"/>
+        </a:solidFill>
+      </p:bgPr>
+    </p:bg>
+    <p:spTree>
+      <p:nvGrpSpPr>
+        <p:cNvPr id="1" name=""/>
+        <p:cNvGrpSpPr/>
+        <p:nvPr/>
+      </p:nvGrpSpPr>
+      <p:grpSpPr/>
+      <p:sp>
+        <p:nvSpPr>
+          <p:cNvPr id="276" name="BrandDeck Text 276"/>
+          <p:cNvSpPr txBox="1"/>
+          <p:nvPr>
+            <p:ph type="title"/>
+          </p:nvPr>
+        </p:nvSpPr>
+        <p:spPr>
+          <a:xfrm>
+            <a:off x="677334" y="692150"/>
+            <a:ext cx="10855854" cy="644241"/>
+          </a:xfrm>
+          <a:prstGeom prst="rect">
+            <a:avLst/>
+          </a:prstGeom>
+          <a:noFill/>
+          <a:ln>
+            <a:noFill/>
+          </a:ln>
+        </p:spPr>
+        <p:txBody>
+          <a:bodyPr anchorCtr="0" anchor="t" bIns="0" lIns="0" spcFirstLastPara="1" rIns="0" wrap="square" tIns="0">
+            <a:normAutofit/>
+          </a:bodyPr>
+          <a:lstStyle/>
+          <a:p>
+            <a:pPr indent="0" marL="0" rtl="0" algn="l">
+              <a:lnSpc>
+                <a:spcPct val="115000"/>
+              </a:lnSpc>
+              <a:spcBef>
+                <a:spcPts val="0"/>
+              </a:spcBef>
+              <a:spcAft>
+                <a:spcPts val="270"/>
+              </a:spcAft>
+              <a:buClr>
+                <a:schemeClr val="dk2"/>
+              </a:buClr>
+              <a:buSzPts val="3600"/>
+              <a:buFont typeface="Play"/>
+              <a:buNone/>
+            </a:pPr>
+            <a:r>
+              <a:rPr sz="1800">
+                <a:solidFill>
+                  <a:srgbClr val="000000"/>
+                </a:solidFill>
+              </a:rPr>
+              <a:t>При отсутствии подтвержденного ответа вопрос автоматически уходит специалисту с контекстом</a:t>
+            </a:r>
+            <a:endParaRPr/>
+          </a:p>
+        </p:txBody>
+      </p:sp>
+      <p:grpSp>
+        <p:nvGrpSpPr>
+          <p:cNvPr id="2" name="BrandDeck Diagram process" descr="process: Запрос сотрудника Отправляется в ИИ-помощник; Отсутствие ответа Нет подтверждённого факта в базе; Эскалация Переход к специалисту с контекстом"/>
+          <p:cNvGrpSpPr/>
+          <p:nvPr/>
+        </p:nvGrpSpPr>
+        <p:grpSpPr>
+          <a:xfrm>
+            <a:off x="671512" y="2709023"/>
+            <a:ext cx="10874374" cy="1964944"/>
+            <a:chOff x="671512" y="2709023"/>
+            <a:chExt cx="10874374" cy="1964944"/>
+          </a:xfrm>
+        </p:grpSpPr>
+        <p:sp>
+          <p:nvSpPr>
+            <p:cNvPr id="279" name="BrandDeck Diagram Step 1"/>
+            <p:cNvSpPr/>
+            <p:nvPr/>
+          </p:nvSpPr>
+          <p:spPr>
+            <a:xfrm>
+              <a:off x="671512" y="2709023"/>
+              <a:ext cx="3791822" cy="822960"/>
+            </a:xfrm>
+            <a:prstGeom prst="homePlate">
+              <a:avLst>
+                <a:gd name="adj" fmla="val 36000"/>
+              </a:avLst>
+            </a:prstGeom>
+            <a:solidFill>
+              <a:srgbClr val="006DEB"/>
+            </a:solidFill>
+            <a:ln>
+              <a:noFill/>
+            </a:ln>
+          </p:spPr>
+          <p:txBody>
+            <a:bodyPr rtlCol="0" anchor="ctr" wrap="square" tIns="18288" rIns="351129" bIns="18288">
+              <a:noAutofit/>
+            </a:bodyPr>
+            <a:lstStyle/>
+            <a:p>
+              <a:pPr algn="ctr">
+                <a:lnSpc>
+                  <a:spcPct val="110000"/>
+                </a:lnSpc>
+              </a:pPr>
+              <a:r>
+                <a:rPr sz="1600" b="1">
+                  <a:solidFill>
+                    <a:srgbClr val="FFFFFF"/>
+                  </a:solidFill>
+                  <a:latin typeface="Play"/>
+                </a:rPr>
+                <a:t>01</a:t>
+              </a:r>
+            </a:p>
+          </p:txBody>
+        </p:sp>
+        <p:sp>
+          <p:nvSpPr>
+            <p:cNvPr id="280" name="BrandDeck Diagram Detail Card 1"/>
+            <p:cNvSpPr/>
+            <p:nvPr/>
+          </p:nvSpPr>
+          <p:spPr>
+            <a:xfrm>
+              <a:off x="708088" y="3641711"/>
+              <a:ext cx="3551639" cy="1032256"/>
+            </a:xfrm>
+            <a:prstGeom prst="roundRect">
+              <a:avLst>
+                <a:gd name="adj" fmla="val 12000"/>
+              </a:avLst>
+            </a:prstGeom>
+            <a:solidFill>
+              <a:srgbClr val="EDF5FF"/>
+            </a:solidFill>
+            <a:ln>
+              <a:noFill/>
+            </a:ln>
+          </p:spPr>
+          <p:txBody>
+            <a:bodyPr rtlCol="0" anchor="ctr"/>
+            <a:lstStyle/>
+            <a:p>
+              <a:pPr algn="ctr"/>
+            </a:p>
+          </p:txBody>
+        </p:sp>
+        <p:sp>
+          <p:nvSpPr>
+            <p:cNvPr id="281" name="BrandDeck Diagram Text 1"/>
+            <p:cNvSpPr txBox="1"/>
+            <p:nvPr/>
+          </p:nvSpPr>
+          <p:spPr>
+            <a:xfrm>
+              <a:off x="781240" y="3714863"/>
+              <a:ext cx="3405335" cy="885951"/>
+            </a:xfrm>
+            <a:prstGeom prst="rect">
+              <a:avLst/>
+            </a:prstGeom>
+            <a:noFill/>
+          </p:spPr>
+          <p:txBody>
+            <a:bodyPr wrap="square" anchor="ctr" lIns="36576" tIns="18288" rIns="36576" bIns="18288">
+              <a:noAutofit/>
+            </a:bodyPr>
+            <a:lstStyle/>
+            <a:p>
+              <a:pPr algn="l">
+                <a:lnSpc>
+                  <a:spcPct val="110000"/>
+                </a:lnSpc>
+              </a:pPr>
+              <a:r>
+                <a:rPr sz="1600" b="1">
+                  <a:solidFill>
+                    <a:srgbClr val="000000"/>
+                  </a:solidFill>
+                  <a:latin typeface="Play"/>
+                </a:rPr>
+                <a:t>Запрос сотрудника</a:t>
+              </a:r>
+            </a:p>
+            <a:p>
+              <a:pPr algn="l">
+                <a:lnSpc>
+                  <a:spcPct val="110000"/>
+                </a:lnSpc>
+                <a:spcBef>
+                  <a:spcPts val="400"/>
+                </a:spcBef>
+              </a:pPr>
+              <a:r>
+                <a:rPr sz="1600" b="0">
+                  <a:solidFill>
+                    <a:srgbClr val="000000"/>
+                  </a:solidFill>
+                  <a:latin typeface="Play"/>
+                </a:rPr>
+                <a:t>Отправляется в ИИ-помощник</a:t>
+              </a:r>
+            </a:p>
+          </p:txBody>
+        </p:sp>
+        <p:sp>
+          <p:nvSpPr>
+            <p:cNvPr id="282" name="BrandDeck Diagram Step 2"/>
+            <p:cNvSpPr/>
+            <p:nvPr/>
+          </p:nvSpPr>
+          <p:spPr>
+            <a:xfrm>
+              <a:off x="4212788" y="2709023"/>
+              <a:ext cx="3791822" cy="822960"/>
+            </a:xfrm>
+            <a:prstGeom prst="chevron">
+              <a:avLst>
+                <a:gd name="adj" fmla="val 36000"/>
+              </a:avLst>
+            </a:prstGeom>
+            <a:solidFill>
+              <a:srgbClr val="2683EE"/>
+            </a:solidFill>
+            <a:ln>
+              <a:noFill/>
+            </a:ln>
+          </p:spPr>
+          <p:txBody>
+            <a:bodyPr rtlCol="0" anchor="ctr" wrap="square" lIns="351129" tIns="18288" rIns="351129" bIns="18288">
+              <a:noAutofit/>
+            </a:bodyPr>
+            <a:lstStyle/>
+            <a:p>
+              <a:pPr algn="ctr">
+                <a:lnSpc>
+                  <a:spcPct val="110000"/>
+                </a:lnSpc>
+              </a:pPr>
+              <a:r>
+                <a:rPr sz="1600" b="1">
+                  <a:solidFill>
+                    <a:srgbClr val="000000"/>
+                  </a:solidFill>
+                  <a:latin typeface="Play"/>
+                </a:rPr>
+                <a:t>02</a:t>
+              </a:r>
+            </a:p>
+          </p:txBody>
+        </p:sp>
+        <p:sp>
+          <p:nvSpPr>
+            <p:cNvPr id="283" name="BrandDeck Diagram Detail Card 2"/>
+            <p:cNvSpPr/>
+            <p:nvPr/>
+          </p:nvSpPr>
+          <p:spPr>
+            <a:xfrm>
+              <a:off x="4332879" y="3641711"/>
+              <a:ext cx="3551639" cy="1032256"/>
+            </a:xfrm>
+            <a:prstGeom prst="roundRect">
+              <a:avLst>
+                <a:gd name="adj" fmla="val 12000"/>
+              </a:avLst>
+            </a:prstGeom>
+            <a:solidFill>
+              <a:srgbClr val="EDF5FF"/>
+            </a:solidFill>
+            <a:ln>
+              <a:noFill/>
+            </a:ln>
+          </p:spPr>
+          <p:txBody>
+            <a:bodyPr rtlCol="0" anchor="ctr"/>
+            <a:lstStyle/>
+            <a:p>
+              <a:pPr algn="ctr"/>
+            </a:p>
+          </p:txBody>
+        </p:sp>
+        <p:sp>
+          <p:nvSpPr>
+            <p:cNvPr id="284" name="BrandDeck Diagram Text 2"/>
+            <p:cNvSpPr txBox="1"/>
+            <p:nvPr/>
+          </p:nvSpPr>
+          <p:spPr>
+            <a:xfrm>
+              <a:off x="4406031" y="3714863"/>
+              <a:ext cx="3405335" cy="885951"/>
+            </a:xfrm>
+            <a:prstGeom prst="rect">
+              <a:avLst/>
+            </a:prstGeom>
+            <a:noFill/>
+          </p:spPr>
+          <p:txBody>
+            <a:bodyPr wrap="square" anchor="ctr" lIns="36576" tIns="18288" rIns="36576" bIns="18288">
+              <a:noAutofit/>
+            </a:bodyPr>
+            <a:lstStyle/>
+            <a:p>
+              <a:pPr algn="l">
+                <a:lnSpc>
+                  <a:spcPct val="110000"/>
+                </a:lnSpc>
+              </a:pPr>
+              <a:r>
+                <a:rPr sz="1400" b="1">
+                  <a:solidFill>
+                    <a:srgbClr val="000000"/>
+                  </a:solidFill>
+                  <a:latin typeface="Play"/>
+                </a:rPr>
+                <a:t>Отсутствие ответа</a:t>
+              </a:r>
+            </a:p>
+            <a:p>
+              <a:pPr algn="l">
+                <a:lnSpc>
+                  <a:spcPct val="110000"/>
+                </a:lnSpc>
+                <a:spcBef>
+                  <a:spcPts val="350"/>
+                </a:spcBef>
+              </a:pPr>
+              <a:r>
+                <a:rPr sz="1400" b="0">
+                  <a:solidFill>
+                    <a:srgbClr val="000000"/>
+                  </a:solidFill>
+                  <a:latin typeface="Play"/>
+                </a:rPr>
+                <a:t>Нет подтверждённого факта в базе</a:t>
+              </a:r>
+            </a:p>
+          </p:txBody>
+        </p:sp>
+        <p:sp>
+          <p:nvSpPr>
+            <p:cNvPr id="285" name="BrandDeck Diagram Step 3"/>
+            <p:cNvSpPr/>
+            <p:nvPr/>
+          </p:nvSpPr>
+          <p:spPr>
+            <a:xfrm>
+              <a:off x="7754064" y="2709023"/>
+              <a:ext cx="3791822" cy="822960"/>
+            </a:xfrm>
+            <a:prstGeom prst="chevron">
+              <a:avLst>
+                <a:gd name="adj" fmla="val 36000"/>
+              </a:avLst>
+            </a:prstGeom>
+            <a:solidFill>
+              <a:srgbClr val="4C99F1"/>
+            </a:solidFill>
+            <a:ln>
+              <a:noFill/>
+            </a:ln>
+          </p:spPr>
+          <p:txBody>
+            <a:bodyPr rtlCol="0" anchor="ctr" wrap="square" lIns="351129" tIns="18288" rIns="351129" bIns="18288">
+              <a:noAutofit/>
+            </a:bodyPr>
+            <a:lstStyle/>
+            <a:p>
+              <a:pPr algn="ctr">
+                <a:lnSpc>
+                  <a:spcPct val="110000"/>
+                </a:lnSpc>
+              </a:pPr>
+              <a:r>
+                <a:rPr sz="1600" b="1">
+                  <a:solidFill>
+                    <a:srgbClr val="000000"/>
+                  </a:solidFill>
+                  <a:latin typeface="Play"/>
+                </a:rPr>
+                <a:t>03</a:t>
+              </a:r>
+            </a:p>
+          </p:txBody>
+        </p:sp>
+        <p:sp>
+          <p:nvSpPr>
+            <p:cNvPr id="286" name="BrandDeck Diagram Detail Card 3"/>
+            <p:cNvSpPr/>
+            <p:nvPr/>
+          </p:nvSpPr>
+          <p:spPr>
+            <a:xfrm>
+              <a:off x="7957671" y="3641711"/>
+              <a:ext cx="3551639" cy="1032256"/>
+            </a:xfrm>
+            <a:prstGeom prst="roundRect">
+              <a:avLst>
+                <a:gd name="adj" fmla="val 12000"/>
+              </a:avLst>
+            </a:prstGeom>
+            <a:solidFill>
+              <a:srgbClr val="EDF5FF"/>
+            </a:solidFill>
+            <a:ln>
+              <a:noFill/>
+            </a:ln>
+          </p:spPr>
+          <p:txBody>
+            <a:bodyPr rtlCol="0" anchor="ctr"/>
+            <a:lstStyle/>
+            <a:p>
+              <a:pPr algn="ctr"/>
+            </a:p>
+          </p:txBody>
+        </p:sp>
+        <p:sp>
+          <p:nvSpPr>
+            <p:cNvPr id="287" name="BrandDeck Diagram Text 3"/>
+            <p:cNvSpPr txBox="1"/>
+            <p:nvPr/>
+          </p:nvSpPr>
+          <p:spPr>
+            <a:xfrm>
+              <a:off x="8030823" y="3714863"/>
+              <a:ext cx="3405335" cy="885951"/>
+            </a:xfrm>
+            <a:prstGeom prst="rect">
+              <a:avLst/>
+            </a:prstGeom>
+            <a:noFill/>
+          </p:spPr>
+          <p:txBody>
+            <a:bodyPr wrap="square" anchor="ctr" lIns="36576" tIns="18288" rIns="36576" bIns="18288">
+              <a:noAutofit/>
+            </a:bodyPr>
+            <a:lstStyle/>
+            <a:p>
+              <a:pPr algn="l">
+                <a:lnSpc>
+                  <a:spcPct val="110000"/>
+                </a:lnSpc>
+              </a:pPr>
+              <a:r>
+                <a:rPr sz="1400" b="1">
+                  <a:solidFill>
+                    <a:srgbClr val="000000"/>
+                  </a:solidFill>
+                  <a:latin typeface="Play"/>
+                </a:rPr>
+                <a:t>Эскалация</a:t>
+              </a:r>
+            </a:p>
+            <a:p>
+              <a:pPr algn="l">
+                <a:lnSpc>
+                  <a:spcPct val="110000"/>
+                </a:lnSpc>
+                <a:spcBef>
+                  <a:spcPts val="350"/>
+                </a:spcBef>
+              </a:pPr>
+              <a:r>
+                <a:rPr sz="1400" b="0">
+                  <a:solidFill>
+                    <a:srgbClr val="000000"/>
+                  </a:solidFill>
+                  <a:latin typeface="Play"/>
+                </a:rPr>
+                <a:t>Переход к специалисту с контекстом</a:t>
+              </a:r>
+            </a:p>
+          </p:txBody>
+        </p:sp>
+      </p:grpSp>
+    </p:spTree>
+  </p:cSld>
+  <p:clrMapOvr>
+    <a:masterClrMapping/>
+  </p:clrMapOvr>
+</p:sld>
+</file>
+
+<file path=ppt/slides/slide7.xml><?xml version="1.0" encoding="utf-8"?>
+<p:sld xmlns:a="http://schemas.openxmlformats.org/drawingml/2006/main" xmlns:p="http://schemas.openxmlformats.org/presentationml/2006/main" xmlns:r="http://schemas.openxmlformats.org/officeDocument/2006/relationships">
+  <p:cSld>
+    <p:bg>
+      <p:bgPr>
+        <a:solidFill>
+          <a:schemeClr val="lt2"/>
+        </a:solidFill>
+      </p:bgPr>
+    </p:bg>
+    <p:spTree>
+      <p:nvGrpSpPr>
+        <p:cNvPr id="1" name=""/>
+        <p:cNvGrpSpPr/>
+        <p:nvPr/>
+      </p:nvGrpSpPr>
+      <p:grpSpPr/>
+      <p:sp>
+        <p:nvSpPr>
+          <p:cNvPr id="543" name="BrandDeck Text 543"/>
+          <p:cNvSpPr txBox="1"/>
+          <p:nvPr>
+            <p:ph type="title"/>
+          </p:nvPr>
+        </p:nvSpPr>
+        <p:spPr>
+          <a:xfrm>
+            <a:off x="677334" y="692150"/>
+            <a:ext cx="10855854" cy="644241"/>
+          </a:xfrm>
+          <a:prstGeom prst="rect">
+            <a:avLst/>
+          </a:prstGeom>
+          <a:noFill/>
+          <a:ln>
+            <a:noFill/>
+          </a:ln>
+        </p:spPr>
+        <p:txBody>
+          <a:bodyPr anchorCtr="0" anchor="t" bIns="0" lIns="0" spcFirstLastPara="1" rIns="0" wrap="square" tIns="0">
+            <a:normAutofit/>
+          </a:bodyPr>
+          <a:lstStyle/>
+          <a:p>
+            <a:pPr indent="0" marL="0" rtl="0" algn="l">
+              <a:lnSpc>
+                <a:spcPct val="115000"/>
+              </a:lnSpc>
+              <a:spcBef>
+                <a:spcPts val="0"/>
+              </a:spcBef>
+              <a:spcAft>
+                <a:spcPts val="270"/>
+              </a:spcAft>
+              <a:buClr>
+                <a:schemeClr val="accent1"/>
+              </a:buClr>
+              <a:buSzPts val="3600"/>
+              <a:buFont typeface="Play"/>
+              <a:buNone/>
+            </a:pPr>
+            <a:r>
+              <a:rPr sz="1800">
+                <a:solidFill>
+                  <a:srgbClr val="000000"/>
+                </a:solidFill>
+              </a:rPr>
+              <a:t>Снижение времени поиска ответа и увеличение доли обращений, закрытых без участия специалиста</a:t>
+            </a:r>
+            <a:endParaRPr/>
+          </a:p>
+        </p:txBody>
+      </p:sp>
+      <p:grpSp>
+        <p:nvGrpSpPr>
+          <p:cNvPr id="2" name="BrandDeck Diagram pyramid" descr="pyramid: Критерии успеха Снижение времени поиска и рост автозакрытия; Время поиска Метрика времени ответа сотрудника; Доля автозакрытия Процент вопросов без участия специалиста"/>
+          <p:cNvGrpSpPr/>
+          <p:nvPr/>
+        </p:nvGrpSpPr>
+        <p:grpSpPr>
+          <a:xfrm>
+            <a:off x="694479" y="2642756"/>
+            <a:ext cx="10838709" cy="3511295"/>
+            <a:chOff x="694479" y="2642756"/>
+            <a:chExt cx="10838709" cy="3511295"/>
+          </a:xfrm>
+        </p:grpSpPr>
+        <p:sp>
+          <p:nvSpPr>
+            <p:cNvPr id="544" name="BrandDeck Diagram Level 1"/>
+            <p:cNvSpPr/>
+            <p:nvPr/>
+          </p:nvSpPr>
+          <p:spPr>
+            <a:xfrm>
+              <a:off x="2180379" y="2642756"/>
+              <a:ext cx="1451609" cy="1133856"/>
+            </a:xfrm>
+            <a:custGeom>
+              <a:avLst/>
+              <a:gdLst/>
+              <a:ahLst/>
+              <a:cxnLst/>
+              <a:rect l="l" t="t" r="r" b="b"/>
+              <a:pathLst>
+                <a:path w="1587" h="1240" stroke="0">
+                  <a:moveTo>
+                    <a:pt x="769" y="0"/>
+                  </a:moveTo>
+                  <a:lnTo>
+                    <a:pt x="819" y="0"/>
+                  </a:lnTo>
+                  <a:lnTo>
+                    <a:pt x="1587" y="1240"/>
+                  </a:lnTo>
+                  <a:lnTo>
+                    <a:pt x="0" y="1240"/>
+                  </a:lnTo>
+                  <a:close/>
+                </a:path>
+              </a:pathLst>
+            </a:custGeom>
+            <a:solidFill>
+              <a:srgbClr val="006DEB"/>
+            </a:solidFill>
+            <a:ln w="0">
+              <a:noFill/>
+            </a:ln>
+          </p:spPr>
+          <p:txBody>
+            <a:bodyPr rtlCol="0" anchor="b" wrap="square" lIns="18288" tIns="0" rIns="18288" bIns="73152">
+              <a:noAutofit/>
+            </a:bodyPr>
+            <a:lstStyle/>
+            <a:p>
+              <a:pPr algn="ctr">
+                <a:lnSpc>
+                  <a:spcPct val="110000"/>
+                </a:lnSpc>
+              </a:pPr>
+              <a:r>
+                <a:rPr sz="1400" b="1">
+                  <a:solidFill>
+                    <a:srgbClr val="FFFFFF"/>
+                  </a:solidFill>
+                  <a:latin typeface="Play"/>
+                </a:rPr>
+                <a:t>01</a:t>
+              </a:r>
+            </a:p>
+          </p:txBody>
+        </p:sp>
+        <p:sp>
+          <p:nvSpPr>
+            <p:cNvPr id="545" name="BrandDeck Diagram Text 1"/>
+            <p:cNvSpPr txBox="1"/>
+            <p:nvPr/>
+          </p:nvSpPr>
+          <p:spPr>
+            <a:xfrm>
+              <a:off x="5409354" y="2642756"/>
+              <a:ext cx="6123834" cy="1133856"/>
+            </a:xfrm>
+            <a:prstGeom prst="rect">
+              <a:avLst/>
+            </a:prstGeom>
+            <a:noFill/>
+          </p:spPr>
+          <p:txBody>
+            <a:bodyPr wrap="square" anchor="ctr" lIns="36576" tIns="18288" rIns="36576" bIns="18288">
+              <a:noAutofit/>
+            </a:bodyPr>
+            <a:lstStyle/>
+            <a:p>
+              <a:pPr algn="l">
+                <a:lnSpc>
+                  <a:spcPct val="110000"/>
+                </a:lnSpc>
+              </a:pPr>
+              <a:r>
+                <a:rPr sz="1600" b="1">
+                  <a:solidFill>
+                    <a:srgbClr val="000000"/>
+                  </a:solidFill>
+                  <a:latin typeface="Play"/>
+                </a:rPr>
+                <a:t>Критерии успеха</a:t>
+              </a:r>
+            </a:p>
+            <a:p>
+              <a:pPr algn="l">
+                <a:lnSpc>
+                  <a:spcPct val="110000"/>
+                </a:lnSpc>
+                <a:spcBef>
+                  <a:spcPts val="400"/>
+                </a:spcBef>
+              </a:pPr>
+              <a:r>
+                <a:rPr sz="1600" b="0">
+                  <a:solidFill>
+                    <a:srgbClr val="000000"/>
+                  </a:solidFill>
+                  <a:latin typeface="Play"/>
+                </a:rPr>
+                <a:t>Снижение времени поиска и рост автозакрытия</a:t>
+              </a:r>
+            </a:p>
+          </p:txBody>
+        </p:sp>
+        <p:sp>
+          <p:nvSpPr>
+            <p:cNvPr id="546" name="BrandDeck Diagram Level 2"/>
+            <p:cNvSpPr/>
+            <p:nvPr/>
+          </p:nvSpPr>
+          <p:spPr>
+            <a:xfrm>
+              <a:off x="1437429" y="3831476"/>
+              <a:ext cx="2937509" cy="1133855"/>
+            </a:xfrm>
+            <a:custGeom>
+              <a:avLst/>
+              <a:gdLst/>
+              <a:ahLst/>
+              <a:cxnLst/>
+              <a:rect l="l" t="t" r="r" b="b"/>
+              <a:pathLst>
+                <a:path w="3212" h="1240" stroke="0">
+                  <a:moveTo>
+                    <a:pt x="775" y="0"/>
+                  </a:moveTo>
+                  <a:lnTo>
+                    <a:pt x="2438" y="0"/>
+                  </a:lnTo>
+                  <a:lnTo>
+                    <a:pt x="3212" y="1240"/>
+                  </a:lnTo>
+                  <a:lnTo>
+                    <a:pt x="0" y="1240"/>
+                  </a:lnTo>
+                  <a:close/>
+                </a:path>
+              </a:pathLst>
+            </a:custGeom>
+            <a:solidFill>
+              <a:srgbClr val="4092F0"/>
+            </a:solidFill>
+            <a:ln w="0">
+              <a:noFill/>
+            </a:ln>
+          </p:spPr>
+          <p:txBody>
+            <a:bodyPr rtlCol="0" anchor="ctr" wrap="square" lIns="18288" tIns="0" rIns="18288" bIns="0">
+              <a:noAutofit/>
+            </a:bodyPr>
+            <a:lstStyle/>
+            <a:p>
+              <a:pPr algn="ctr">
+                <a:lnSpc>
+                  <a:spcPct val="110000"/>
+                </a:lnSpc>
+              </a:pPr>
+              <a:r>
+                <a:rPr sz="1400" b="1">
+                  <a:solidFill>
+                    <a:srgbClr val="000000"/>
+                  </a:solidFill>
+                  <a:latin typeface="Play"/>
+                </a:rPr>
+                <a:t>02</a:t>
+              </a:r>
+            </a:p>
+          </p:txBody>
+        </p:sp>
+        <p:sp>
+          <p:nvSpPr>
+            <p:cNvPr id="547" name="BrandDeck Diagram Text 2"/>
+            <p:cNvSpPr txBox="1"/>
+            <p:nvPr/>
+          </p:nvSpPr>
+          <p:spPr>
+            <a:xfrm>
+              <a:off x="5409354" y="3831476"/>
+              <a:ext cx="6123834" cy="1133855"/>
+            </a:xfrm>
+            <a:prstGeom prst="rect">
+              <a:avLst/>
+            </a:prstGeom>
+            <a:noFill/>
+          </p:spPr>
+          <p:txBody>
+            <a:bodyPr wrap="square" anchor="ctr" lIns="36576" tIns="18288" rIns="36576" bIns="18288">
+              <a:noAutofit/>
+            </a:bodyPr>
+            <a:lstStyle/>
+            <a:p>
+              <a:pPr algn="l">
+                <a:lnSpc>
+                  <a:spcPct val="110000"/>
+                </a:lnSpc>
+              </a:pPr>
+              <a:r>
+                <a:rPr sz="1600" b="1">
+                  <a:solidFill>
+                    <a:srgbClr val="000000"/>
+                  </a:solidFill>
+                  <a:latin typeface="Play"/>
+                </a:rPr>
+                <a:t>Время поиска</a:t>
+              </a:r>
+            </a:p>
+            <a:p>
+              <a:pPr algn="l">
+                <a:lnSpc>
+                  <a:spcPct val="110000"/>
+                </a:lnSpc>
+                <a:spcBef>
+                  <a:spcPts val="400"/>
+                </a:spcBef>
+              </a:pPr>
+              <a:r>
+                <a:rPr sz="1600" b="0">
+                  <a:solidFill>
+                    <a:srgbClr val="000000"/>
+                  </a:solidFill>
+                  <a:latin typeface="Play"/>
+                </a:rPr>
+                <a:t>Метрика времени ответа сотрудника</a:t>
+              </a:r>
+            </a:p>
+          </p:txBody>
+        </p:sp>
+        <p:sp>
+          <p:nvSpPr>
+            <p:cNvPr id="548" name="BrandDeck Diagram Level 3"/>
+            <p:cNvSpPr/>
+            <p:nvPr/>
+          </p:nvSpPr>
+          <p:spPr>
+            <a:xfrm>
+              <a:off x="694479" y="5020196"/>
+              <a:ext cx="4423409" cy="1133855"/>
+            </a:xfrm>
+            <a:custGeom>
+              <a:avLst/>
+              <a:gdLst/>
+              <a:ahLst/>
+              <a:cxnLst/>
+              <a:rect l="l" t="t" r="r" b="b"/>
+              <a:pathLst>
+                <a:path w="4837" h="1240" stroke="0">
+                  <a:moveTo>
+                    <a:pt x="775" y="0"/>
+                  </a:moveTo>
+                  <a:lnTo>
+                    <a:pt x="4062" y="0"/>
+                  </a:lnTo>
+                  <a:lnTo>
+                    <a:pt x="4837" y="1240"/>
+                  </a:lnTo>
+                  <a:lnTo>
+                    <a:pt x="0" y="1240"/>
+                  </a:lnTo>
+                  <a:close/>
+                </a:path>
+              </a:pathLst>
+            </a:custGeom>
+            <a:solidFill>
+              <a:srgbClr val="80B6F5"/>
+            </a:solidFill>
+            <a:ln w="0">
+              <a:noFill/>
+            </a:ln>
+          </p:spPr>
+          <p:txBody>
+            <a:bodyPr rtlCol="0" anchor="ctr" wrap="square" lIns="18288" tIns="0" rIns="18288" bIns="0">
+              <a:noAutofit/>
+            </a:bodyPr>
+            <a:lstStyle/>
+            <a:p>
+              <a:pPr algn="ctr">
+                <a:lnSpc>
+                  <a:spcPct val="110000"/>
+                </a:lnSpc>
+              </a:pPr>
+              <a:r>
+                <a:rPr sz="1400" b="1">
+                  <a:solidFill>
+                    <a:srgbClr val="000000"/>
+                  </a:solidFill>
+                  <a:latin typeface="Play"/>
+                </a:rPr>
+                <a:t>03</a:t>
+              </a:r>
+            </a:p>
+          </p:txBody>
+        </p:sp>
+        <p:sp>
+          <p:nvSpPr>
+            <p:cNvPr id="549" name="BrandDeck Diagram Text 3"/>
+            <p:cNvSpPr txBox="1"/>
+            <p:nvPr/>
+          </p:nvSpPr>
+          <p:spPr>
+            <a:xfrm>
+              <a:off x="5409354" y="5020196"/>
+              <a:ext cx="6123834" cy="1133855"/>
+            </a:xfrm>
+            <a:prstGeom prst="rect">
+              <a:avLst/>
+            </a:prstGeom>
+            <a:noFill/>
+          </p:spPr>
+          <p:txBody>
+            <a:bodyPr wrap="square" anchor="ctr" lIns="36576" tIns="18288" rIns="36576" bIns="18288">
+              <a:noAutofit/>
+            </a:bodyPr>
+            <a:lstStyle/>
+            <a:p>
+              <a:pPr algn="l">
+                <a:lnSpc>
+                  <a:spcPct val="110000"/>
+                </a:lnSpc>
+              </a:pPr>
+              <a:r>
+                <a:rPr sz="1600" b="1">
+                  <a:solidFill>
+                    <a:srgbClr val="000000"/>
+                  </a:solidFill>
+                  <a:latin typeface="Play"/>
+                </a:rPr>
+                <a:t>Доля автозакрытия</a:t>
+              </a:r>
+            </a:p>
+            <a:p>
+              <a:pPr algn="l">
+                <a:lnSpc>
+                  <a:spcPct val="110000"/>
+                </a:lnSpc>
+                <a:spcBef>
+                  <a:spcPts val="400"/>
+                </a:spcBef>
+              </a:pPr>
+              <a:r>
+                <a:rPr sz="1600" b="0">
+                  <a:solidFill>
+                    <a:srgbClr val="000000"/>
+                  </a:solidFill>
+                  <a:latin typeface="Play"/>
+                </a:rPr>
+                <a:t>Процент вопросов без участия специалиста</a:t>
+              </a:r>
+            </a:p>
+          </p:txBody>
+        </p:sp>
+      </p:grpSp>
+    </p:spTree>
+  </p:cSld>
+  <p:clrMapOvr>
+    <a:masterClrMapping/>
+  </p:clrMapOvr>
+</p:sld>
+</file>
+
+<file path=ppt/slides/slide8.xml><?xml version="1.0" encoding="utf-8"?>
+<p:sld xmlns:a="http://schemas.openxmlformats.org/drawingml/2006/main" xmlns:p="http://schemas.openxmlformats.org/presentationml/2006/main" xmlns:r="http://schemas.openxmlformats.org/officeDocument/2006/relationships">
+  <p:cSld>
+    <p:bg>
+      <p:bgPr>
+        <a:solidFill>
+          <a:schemeClr val="lt2"/>
+        </a:solidFill>
+      </p:bgPr>
+    </p:bg>
+    <p:spTree>
+      <p:nvGrpSpPr>
+        <p:cNvPr id="1" name=""/>
+        <p:cNvGrpSpPr/>
+        <p:nvPr/>
+      </p:nvGrpSpPr>
+      <p:grpSpPr/>
+      <p:sp>
+        <p:nvSpPr>
+          <p:cNvPr id="276" name="BrandDeck Text 276"/>
+          <p:cNvSpPr txBox="1"/>
+          <p:nvPr>
+            <p:ph type="title"/>
+          </p:nvPr>
+        </p:nvSpPr>
+        <p:spPr>
+          <a:xfrm>
+            <a:off x="677334" y="692150"/>
+            <a:ext cx="10855854" cy="644241"/>
+          </a:xfrm>
+          <a:prstGeom prst="rect">
+            <a:avLst/>
+          </a:prstGeom>
+          <a:noFill/>
+          <a:ln>
+            <a:noFill/>
+          </a:ln>
+        </p:spPr>
+        <p:txBody>
+          <a:bodyPr anchorCtr="0" anchor="t" bIns="0" lIns="0" spcFirstLastPara="1" rIns="0" wrap="square" tIns="0">
+            <a:normAutofit/>
+          </a:bodyPr>
+          <a:lstStyle/>
+          <a:p>
+            <a:pPr indent="0" marL="0" rtl="0" algn="l">
+              <a:lnSpc>
+                <a:spcPct val="115000"/>
+              </a:lnSpc>
+              <a:spcBef>
+                <a:spcPts val="0"/>
+              </a:spcBef>
+              <a:spcAft>
+                <a:spcPts val="300"/>
+              </a:spcAft>
+              <a:buClr>
+                <a:schemeClr val="dk2"/>
+              </a:buClr>
+              <a:buSzPts val="3600"/>
+              <a:buFont typeface="Play"/>
+              <a:buNone/>
+            </a:pPr>
+            <a:r>
+              <a:rPr sz="2000">
+                <a:solidFill>
+                  <a:srgbClr val="000000"/>
+                </a:solidFill>
+              </a:rPr>
+              <a:t>В пилоте участвуют 2 подразделения, 150 сотрудников и 6 недель работы</a:t>
+            </a:r>
+            <a:endParaRPr/>
+          </a:p>
+        </p:txBody>
+      </p:sp>
+      <p:grpSp>
+        <p:nvGrpSpPr>
+          <p:cNvPr id="2" name="BrandDeck Diagram pyramid" descr="pyramid: 6 недель Длительность пилотного запуска; 150 сотрудников Всего участников пилота; 2 подразделения Охват пилотной группы"/>
+          <p:cNvGrpSpPr/>
+          <p:nvPr/>
+        </p:nvGrpSpPr>
+        <p:grpSpPr>
+          <a:xfrm>
+            <a:off x="688657" y="2127993"/>
+            <a:ext cx="10857230" cy="3511295"/>
+            <a:chOff x="688657" y="2127993"/>
+            <a:chExt cx="10857230" cy="3511295"/>
+          </a:xfrm>
+        </p:grpSpPr>
+        <p:sp>
+          <p:nvSpPr>
+            <p:cNvPr id="279" name="BrandDeck Diagram Level 1"/>
+            <p:cNvSpPr/>
+            <p:nvPr/>
+          </p:nvSpPr>
+          <p:spPr>
+            <a:xfrm>
+              <a:off x="2174556" y="2127993"/>
+              <a:ext cx="1451610" cy="1133856"/>
+            </a:xfrm>
+            <a:custGeom>
+              <a:avLst/>
+              <a:gdLst/>
+              <a:ahLst/>
+              <a:cxnLst/>
+              <a:rect l="l" t="t" r="r" b="b"/>
+              <a:pathLst>
+                <a:path w="1588" h="1240" stroke="0">
+                  <a:moveTo>
+                    <a:pt x="769" y="0"/>
+                  </a:moveTo>
+                  <a:lnTo>
+                    <a:pt x="819" y="0"/>
+                  </a:lnTo>
+                  <a:lnTo>
+                    <a:pt x="1588" y="1240"/>
+                  </a:lnTo>
+                  <a:lnTo>
+                    <a:pt x="0" y="1240"/>
+                  </a:lnTo>
+                  <a:close/>
+                </a:path>
+              </a:pathLst>
+            </a:custGeom>
+            <a:solidFill>
+              <a:srgbClr val="006DEB"/>
+            </a:solidFill>
+            <a:ln w="0">
+              <a:noFill/>
+            </a:ln>
+          </p:spPr>
+          <p:txBody>
+            <a:bodyPr rtlCol="0" anchor="b" wrap="square" lIns="18288" tIns="0" rIns="18288" bIns="73152">
+              <a:noAutofit/>
+            </a:bodyPr>
+            <a:lstStyle/>
+            <a:p>
+              <a:pPr algn="ctr">
+                <a:lnSpc>
+                  <a:spcPct val="110000"/>
+                </a:lnSpc>
+              </a:pPr>
+              <a:r>
+                <a:rPr sz="1400" b="1">
+                  <a:solidFill>
+                    <a:srgbClr val="FFFFFF"/>
+                  </a:solidFill>
+                  <a:latin typeface="Play"/>
+                </a:rPr>
+                <a:t>01</a:t>
+              </a:r>
+            </a:p>
+          </p:txBody>
+        </p:sp>
+        <p:sp>
+          <p:nvSpPr>
+            <p:cNvPr id="280" name="BrandDeck Diagram Text 1"/>
+            <p:cNvSpPr txBox="1"/>
+            <p:nvPr/>
+          </p:nvSpPr>
+          <p:spPr>
+            <a:xfrm>
+              <a:off x="5403532" y="2127993"/>
+              <a:ext cx="6142355" cy="1133856"/>
+            </a:xfrm>
+            <a:prstGeom prst="rect">
+              <a:avLst/>
+            </a:prstGeom>
+            <a:noFill/>
+          </p:spPr>
+          <p:txBody>
+            <a:bodyPr wrap="square" anchor="ctr" lIns="36576" tIns="18288" rIns="36576" bIns="18288">
+              <a:noAutofit/>
+            </a:bodyPr>
+            <a:lstStyle/>
+            <a:p>
+              <a:pPr algn="l">
+                <a:lnSpc>
+                  <a:spcPct val="110000"/>
+                </a:lnSpc>
+              </a:pPr>
+              <a:r>
+                <a:rPr sz="1600" b="1">
+                  <a:solidFill>
+                    <a:srgbClr val="000000"/>
+                  </a:solidFill>
+                  <a:latin typeface="Play"/>
+                </a:rPr>
+                <a:t>6 недель</a:t>
+              </a:r>
+            </a:p>
+            <a:p>
+              <a:pPr algn="l">
+                <a:lnSpc>
+                  <a:spcPct val="110000"/>
+                </a:lnSpc>
+                <a:spcBef>
+                  <a:spcPts val="400"/>
+                </a:spcBef>
+              </a:pPr>
+              <a:r>
+                <a:rPr sz="1600" b="0">
+                  <a:solidFill>
+                    <a:srgbClr val="000000"/>
+                  </a:solidFill>
+                  <a:latin typeface="Play"/>
+                </a:rPr>
+                <a:t>Длительность пилотного запуска</a:t>
+              </a:r>
+            </a:p>
+          </p:txBody>
+        </p:sp>
+        <p:sp>
+          <p:nvSpPr>
+            <p:cNvPr id="281" name="BrandDeck Diagram Level 2"/>
+            <p:cNvSpPr/>
+            <p:nvPr/>
+          </p:nvSpPr>
+          <p:spPr>
+            <a:xfrm>
+              <a:off x="1431607" y="3316713"/>
+              <a:ext cx="2937509" cy="1133855"/>
+            </a:xfrm>
+            <a:custGeom>
+              <a:avLst/>
+              <a:gdLst/>
+              <a:ahLst/>
+              <a:cxnLst/>
+              <a:rect l="l" t="t" r="r" b="b"/>
+              <a:pathLst>
+                <a:path w="3212" h="1240" stroke="0">
+                  <a:moveTo>
+                    <a:pt x="775" y="0"/>
+                  </a:moveTo>
+                  <a:lnTo>
+                    <a:pt x="2438" y="0"/>
+                  </a:lnTo>
+                  <a:lnTo>
+                    <a:pt x="3212" y="1240"/>
+                  </a:lnTo>
+                  <a:lnTo>
+                    <a:pt x="0" y="1240"/>
+                  </a:lnTo>
+                  <a:close/>
+                </a:path>
+              </a:pathLst>
+            </a:custGeom>
+            <a:solidFill>
+              <a:srgbClr val="4092F0"/>
+            </a:solidFill>
+            <a:ln w="0">
+              <a:noFill/>
+            </a:ln>
+          </p:spPr>
+          <p:txBody>
+            <a:bodyPr rtlCol="0" anchor="ctr" wrap="square" lIns="18288" tIns="0" rIns="18288" bIns="0">
+              <a:noAutofit/>
+            </a:bodyPr>
+            <a:lstStyle/>
+            <a:p>
+              <a:pPr algn="ctr">
+                <a:lnSpc>
+                  <a:spcPct val="110000"/>
+                </a:lnSpc>
+              </a:pPr>
+              <a:r>
+                <a:rPr sz="1400" b="1">
+                  <a:solidFill>
+                    <a:srgbClr val="000000"/>
+                  </a:solidFill>
+                  <a:latin typeface="Play"/>
+                </a:rPr>
+                <a:t>02</a:t>
+              </a:r>
+            </a:p>
+          </p:txBody>
+        </p:sp>
+        <p:sp>
+          <p:nvSpPr>
+            <p:cNvPr id="282" name="BrandDeck Diagram Text 2"/>
+            <p:cNvSpPr txBox="1"/>
+            <p:nvPr/>
+          </p:nvSpPr>
+          <p:spPr>
+            <a:xfrm>
+              <a:off x="5403532" y="3316713"/>
+              <a:ext cx="6142355" cy="1133855"/>
+            </a:xfrm>
+            <a:prstGeom prst="rect">
+              <a:avLst/>
+            </a:prstGeom>
+            <a:noFill/>
+          </p:spPr>
+          <p:txBody>
+            <a:bodyPr wrap="square" anchor="ctr" lIns="36576" tIns="18288" rIns="36576" bIns="18288">
+              <a:noAutofit/>
+            </a:bodyPr>
+            <a:lstStyle/>
+            <a:p>
+              <a:pPr algn="l">
+                <a:lnSpc>
+                  <a:spcPct val="110000"/>
+                </a:lnSpc>
+              </a:pPr>
+              <a:r>
+                <a:rPr sz="1600" b="1">
+                  <a:solidFill>
+                    <a:srgbClr val="000000"/>
+                  </a:solidFill>
+                  <a:latin typeface="Play"/>
+                </a:rPr>
+                <a:t>150 сотрудников</a:t>
+              </a:r>
+            </a:p>
+            <a:p>
+              <a:pPr algn="l">
+                <a:lnSpc>
+                  <a:spcPct val="110000"/>
+                </a:lnSpc>
+                <a:spcBef>
+                  <a:spcPts val="400"/>
+                </a:spcBef>
+              </a:pPr>
+              <a:r>
+                <a:rPr sz="1600" b="0">
+                  <a:solidFill>
+                    <a:srgbClr val="000000"/>
+                  </a:solidFill>
+                  <a:latin typeface="Play"/>
+                </a:rPr>
+                <a:t>Всего участников пилота</a:t>
+              </a:r>
+            </a:p>
+          </p:txBody>
+        </p:sp>
+        <p:sp>
+          <p:nvSpPr>
+            <p:cNvPr id="283" name="BrandDeck Diagram Level 3"/>
+            <p:cNvSpPr/>
+            <p:nvPr/>
+          </p:nvSpPr>
+          <p:spPr>
+            <a:xfrm>
+              <a:off x="688657" y="4505433"/>
+              <a:ext cx="4423409" cy="1133855"/>
+            </a:xfrm>
+            <a:custGeom>
+              <a:avLst/>
+              <a:gdLst/>
+              <a:ahLst/>
+              <a:cxnLst/>
+              <a:rect l="l" t="t" r="r" b="b"/>
+              <a:pathLst>
+                <a:path w="4837" h="1240" stroke="0">
+                  <a:moveTo>
+                    <a:pt x="775" y="0"/>
+                  </a:moveTo>
+                  <a:lnTo>
+                    <a:pt x="4062" y="0"/>
+                  </a:lnTo>
+                  <a:lnTo>
+                    <a:pt x="4837" y="1240"/>
+                  </a:lnTo>
+                  <a:lnTo>
+                    <a:pt x="0" y="1240"/>
+                  </a:lnTo>
+                  <a:close/>
+                </a:path>
+              </a:pathLst>
+            </a:custGeom>
+            <a:solidFill>
+              <a:srgbClr val="80B6F5"/>
+            </a:solidFill>
+            <a:ln w="0">
+              <a:noFill/>
+            </a:ln>
+          </p:spPr>
+          <p:txBody>
+            <a:bodyPr rtlCol="0" anchor="ctr" wrap="square" lIns="18288" tIns="0" rIns="18288" bIns="0">
+              <a:noAutofit/>
+            </a:bodyPr>
+            <a:lstStyle/>
+            <a:p>
+              <a:pPr algn="ctr">
+                <a:lnSpc>
+                  <a:spcPct val="110000"/>
+                </a:lnSpc>
+              </a:pPr>
+              <a:r>
+                <a:rPr sz="1400" b="1">
+                  <a:solidFill>
+                    <a:srgbClr val="000000"/>
+                  </a:solidFill>
+                  <a:latin typeface="Play"/>
+                </a:rPr>
+                <a:t>03</a:t>
+              </a:r>
+            </a:p>
+          </p:txBody>
+        </p:sp>
+        <p:sp>
+          <p:nvSpPr>
+            <p:cNvPr id="284" name="BrandDeck Diagram Text 3"/>
+            <p:cNvSpPr txBox="1"/>
+            <p:nvPr/>
+          </p:nvSpPr>
+          <p:spPr>
+            <a:xfrm>
+              <a:off x="5403532" y="4505433"/>
+              <a:ext cx="6142355" cy="1133855"/>
+            </a:xfrm>
+            <a:prstGeom prst="rect">
+              <a:avLst/>
+            </a:prstGeom>
+            <a:noFill/>
+          </p:spPr>
+          <p:txBody>
+            <a:bodyPr wrap="square" anchor="ctr" lIns="36576" tIns="18288" rIns="36576" bIns="18288">
+              <a:noAutofit/>
+            </a:bodyPr>
+            <a:lstStyle/>
+            <a:p>
+              <a:pPr algn="l">
+                <a:lnSpc>
+                  <a:spcPct val="110000"/>
+                </a:lnSpc>
+              </a:pPr>
+              <a:r>
+                <a:rPr sz="1600" b="1">
+                  <a:solidFill>
+                    <a:srgbClr val="000000"/>
+                  </a:solidFill>
+                  <a:latin typeface="Play"/>
+                </a:rPr>
+                <a:t>2 подразделения</a:t>
+              </a:r>
+            </a:p>
+            <a:p>
+              <a:pPr algn="l">
+                <a:lnSpc>
+                  <a:spcPct val="110000"/>
+                </a:lnSpc>
+                <a:spcBef>
+                  <a:spcPts val="400"/>
+                </a:spcBef>
+              </a:pPr>
+              <a:r>
+                <a:rPr sz="1600" b="0">
+                  <a:solidFill>
+                    <a:srgbClr val="000000"/>
+                  </a:solidFill>
+                  <a:latin typeface="Play"/>
+                </a:rPr>
+                <a:t>Охват пилотной группы</a:t>
+              </a:r>
+            </a:p>
+          </p:txBody>
+        </p:sp>
+      </p:grpSp>
+    </p:spTree>
+  </p:cSld>
+  <p:clrMapOvr>
+    <a:masterClrMapping/>
+  </p:clrMapOvr>
+</p:sld>
+</file>
+
+<file path=ppt/slides/slide9.xml><?xml version="1.0" encoding="utf-8"?>
 <p:sld xmlns:a="http://schemas.openxmlformats.org/drawingml/2006/main" xmlns:p="http://schemas.openxmlformats.org/presentationml/2006/main" xmlns:r="http://schemas.openxmlformats.org/officeDocument/2006/relationships">
   <p:cSld>
     <p:spTree>
@@ -12354,7 +13848,7 @@
                 <a:spcPts val="0"/>
               </a:spcBef>
               <a:spcAft>
-                <a:spcPts val="359"/>
+                <a:spcPts val="270"/>
               </a:spcAft>
               <a:buClr>
                 <a:schemeClr val="accent1"/>
@@ -12364,12 +13858,12 @@
               <a:buNone/>
             </a:pPr>
             <a:r>
-              <a:rPr sz="2400">
+              <a:rPr sz="1800">
                 <a:solidFill>
                   <a:srgbClr val="000000"/>
                 </a:solidFill>
               </a:rPr>
-              <a:t>Модель с открытыми весами работает внутри контура компании</a:t>
+              <a:t>Измерим время поиска ответа и долю обращений, закрытых без специалиста поддержки</a:t>
             </a:r>
             <a:endParaRPr/>
           </a:p>
@@ -12377,7 +13871,7 @@
       </p:sp>
       <p:pic>
         <p:nvPicPr>
-          <p:cNvPr id="1072" name="BrandDeck Image" descr="внутренний контур серверная"/>
+          <p:cNvPr id="1072" name="BrandDeck Image" descr="сотрудник специалист поддержки"/>
           <p:cNvPicPr>
             <a:picLocks noChangeAspect="1"/>
           </p:cNvPicPr>
@@ -12507,7 +14001,7 @@
                 </a:solidFill>
                 <a:latin typeface="Play"/>
               </a:rPr>
-              <a:t>• Модель с открытыми весами работает внутри контура компании.</a:t>
+              <a:t>• Измерим время поиска ответа и долю закрытых обращений.</a:t>
             </a:r>
           </a:p>
           <a:p>
@@ -12529,7 +14023,7 @@
                 </a:solidFill>
                 <a:latin typeface="Play"/>
               </a:rPr>
-              <a:t>• Документы не покидают внутреннюю инфраструктуру.</a:t>
+              <a:t>• Снижение времени поиска и нагрузки на поддержку — критерии успеха.</a:t>
             </a:r>
           </a:p>
           <a:p>
@@ -12551,1248 +14045,8 @@
                 </a:solidFill>
                 <a:latin typeface="Play"/>
               </a:rPr>
-              <a:t>• Обработка запросов происходит локально без передачи данных наружу.</a:t>
+              <a:t>• Результаты пилота определят эффективность ИИ-помощника.</a:t>
             </a:r>
-          </a:p>
-        </p:txBody>
-      </p:sp>
-    </p:spTree>
-  </p:cSld>
-  <p:clrMapOvr>
-    <a:masterClrMapping/>
-  </p:clrMapOvr>
-</p:sld>
-</file>
-
-<file path=ppt/slides/slide7.xml><?xml version="1.0" encoding="utf-8"?>
-<p:sld xmlns:a="http://schemas.openxmlformats.org/drawingml/2006/main" xmlns:p="http://schemas.openxmlformats.org/presentationml/2006/main" xmlns:r="http://schemas.openxmlformats.org/officeDocument/2006/relationships">
-  <p:cSld>
-    <p:bg>
-      <p:bgPr>
-        <a:solidFill>
-          <a:schemeClr val="lt2"/>
-        </a:solidFill>
-      </p:bgPr>
-    </p:bg>
-    <p:spTree>
-      <p:nvGrpSpPr>
-        <p:cNvPr id="1" name=""/>
-        <p:cNvGrpSpPr/>
-        <p:nvPr/>
-      </p:nvGrpSpPr>
-      <p:grpSpPr/>
-      <p:sp>
-        <p:nvSpPr>
-          <p:cNvPr id="274" name="BrandDeck Text 274"/>
-          <p:cNvSpPr/>
-          <p:nvPr/>
-        </p:nvSpPr>
-        <p:spPr>
-          <a:xfrm>
-            <a:off x="671512" y="1773238"/>
-            <a:ext cx="5365752" cy="2156481"/>
-          </a:xfrm>
-          <a:prstGeom prst="roundRect">
-            <a:avLst>
-              <a:gd fmla="val 0" name="adj"/>
-            </a:avLst>
-          </a:prstGeom>
-          <a:solidFill>
-            <a:schemeClr val="lt1"/>
-          </a:solidFill>
-          <a:ln>
-            <a:noFill/>
-          </a:ln>
-        </p:spPr>
-        <p:txBody>
-          <a:bodyPr anchorCtr="0" anchor="t" bIns="45700" lIns="91425" spcFirstLastPara="1" rIns="91425" wrap="square" tIns="45700">
-            <a:normAutofit/>
-          </a:bodyPr>
-          <a:lstStyle/>
-          <a:p>
-            <a:pPr indent="0" marL="179388" marR="0" rtl="0" algn="l">
-              <a:lnSpc>
-                <a:spcPct val="115000"/>
-              </a:lnSpc>
-              <a:spcBef>
-                <a:spcPts val="0"/>
-              </a:spcBef>
-              <a:spcAft>
-                <a:spcPts val="270"/>
-              </a:spcAft>
-              <a:buNone/>
-            </a:pPr>
-            <a:r>
-              <a:rPr sz="1800" b="0">
-                <a:latin typeface="Play"/>
-                <a:solidFill>
-                  <a:schemeClr val="dk1"/>
-                </a:solidFill>
-              </a:rPr>
-              <a:t>Вопросы без ответа в базе передаются специалисту.</a:t>
-            </a:r>
-            <a:endParaRPr b="0" i="0" sz="1800" u="none" cap="none" strike="noStrike">
-              <a:solidFill>
-                <a:schemeClr val="dk1"/>
-              </a:solidFill>
-              <a:latin typeface="Play"/>
-              <a:ea typeface="Play"/>
-              <a:cs typeface="Play"/>
-              <a:sym typeface="Play"/>
-            </a:endParaRPr>
-          </a:p>
-        </p:txBody>
-      </p:sp>
-      <p:sp>
-        <p:nvSpPr>
-          <p:cNvPr id="275" name="BrandDeck Text 275"/>
-          <p:cNvSpPr/>
-          <p:nvPr/>
-        </p:nvSpPr>
-        <p:spPr>
-          <a:xfrm>
-            <a:off x="6154737" y="1775553"/>
-            <a:ext cx="5391150" cy="2156481"/>
-          </a:xfrm>
-          <a:prstGeom prst="roundRect">
-            <a:avLst>
-              <a:gd fmla="val 0" name="adj"/>
-            </a:avLst>
-          </a:prstGeom>
-          <a:solidFill>
-            <a:schemeClr val="lt1"/>
-          </a:solidFill>
-          <a:ln>
-            <a:noFill/>
-          </a:ln>
-        </p:spPr>
-        <p:txBody>
-          <a:bodyPr anchorCtr="0" anchor="t" bIns="45700" lIns="91425" spcFirstLastPara="1" rIns="91425" wrap="square" tIns="45700">
-            <a:normAutofit/>
-          </a:bodyPr>
-          <a:lstStyle/>
-          <a:p>
-            <a:pPr indent="0" marL="179388" marR="0" rtl="0" algn="l">
-              <a:lnSpc>
-                <a:spcPct val="115000"/>
-              </a:lnSpc>
-              <a:spcBef>
-                <a:spcPts val="0"/>
-              </a:spcBef>
-              <a:spcAft>
-                <a:spcPts val="270"/>
-              </a:spcAft>
-              <a:buNone/>
-            </a:pPr>
-            <a:r>
-              <a:rPr sz="1800" b="0">
-                <a:latin typeface="Play"/>
-                <a:solidFill>
-                  <a:schemeClr val="dk1"/>
-                </a:solidFill>
-              </a:rPr>
-              <a:t>Система отправляет контекст запроса вместе с эскаляцией.</a:t>
-            </a:r>
-            <a:endParaRPr b="0" i="0" sz="1800" u="none" cap="none" strike="noStrike">
-              <a:solidFill>
-                <a:schemeClr val="dk1"/>
-              </a:solidFill>
-              <a:latin typeface="Play"/>
-              <a:ea typeface="Play"/>
-              <a:cs typeface="Play"/>
-              <a:sym typeface="Play"/>
-            </a:endParaRPr>
-          </a:p>
-        </p:txBody>
-      </p:sp>
-      <p:sp>
-        <p:nvSpPr>
-          <p:cNvPr id="276" name="BrandDeck Text 276"/>
-          <p:cNvSpPr txBox="1"/>
-          <p:nvPr>
-            <p:ph type="title"/>
-          </p:nvPr>
-        </p:nvSpPr>
-        <p:spPr>
-          <a:xfrm>
-            <a:off x="677334" y="692150"/>
-            <a:ext cx="10855854" cy="644241"/>
-          </a:xfrm>
-          <a:prstGeom prst="rect">
-            <a:avLst/>
-          </a:prstGeom>
-          <a:noFill/>
-          <a:ln>
-            <a:noFill/>
-          </a:ln>
-        </p:spPr>
-        <p:txBody>
-          <a:bodyPr anchorCtr="0" anchor="t" bIns="0" lIns="0" spcFirstLastPara="1" rIns="0" wrap="square" tIns="0">
-            <a:normAutofit/>
-          </a:bodyPr>
-          <a:lstStyle/>
-          <a:p>
-            <a:pPr indent="0" marL="0" rtl="0" algn="l">
-              <a:lnSpc>
-                <a:spcPct val="115000"/>
-              </a:lnSpc>
-              <a:spcBef>
-                <a:spcPts val="0"/>
-              </a:spcBef>
-              <a:spcAft>
-                <a:spcPts val="270"/>
-              </a:spcAft>
-              <a:buClr>
-                <a:schemeClr val="dk2"/>
-              </a:buClr>
-              <a:buSzPts val="3600"/>
-              <a:buFont typeface="Play"/>
-              <a:buNone/>
-            </a:pPr>
-            <a:r>
-              <a:rPr sz="1800">
-                <a:solidFill>
-                  <a:srgbClr val="000000"/>
-                </a:solidFill>
-              </a:rPr>
-              <a:t>Отсутствие подтвержденного ответа перенаправляет вопрос специалисту с контекстом</a:t>
-            </a:r>
-            <a:endParaRPr/>
-          </a:p>
-        </p:txBody>
-      </p:sp>
-      <p:sp>
-        <p:nvSpPr>
-          <p:cNvPr id="277" name="BrandDeck Text 277"/>
-          <p:cNvSpPr/>
-          <p:nvPr/>
-        </p:nvSpPr>
-        <p:spPr>
-          <a:xfrm>
-            <a:off x="671512" y="4044294"/>
-            <a:ext cx="5365752" cy="2156481"/>
-          </a:xfrm>
-          <a:prstGeom prst="roundRect">
-            <a:avLst>
-              <a:gd fmla="val 0" name="adj"/>
-            </a:avLst>
-          </a:prstGeom>
-          <a:solidFill>
-            <a:schemeClr val="lt1"/>
-          </a:solidFill>
-          <a:ln>
-            <a:noFill/>
-          </a:ln>
-        </p:spPr>
-        <p:txBody>
-          <a:bodyPr anchorCtr="0" anchor="t" bIns="45700" lIns="91425" spcFirstLastPara="1" rIns="91425" wrap="square" tIns="45700">
-            <a:normAutofit/>
-          </a:bodyPr>
-          <a:lstStyle/>
-          <a:p>
-            <a:pPr indent="0" marL="179388" marR="0" rtl="0" algn="l">
-              <a:lnSpc>
-                <a:spcPct val="115000"/>
-              </a:lnSpc>
-              <a:spcBef>
-                <a:spcPts val="0"/>
-              </a:spcBef>
-              <a:spcAft>
-                <a:spcPts val="270"/>
-              </a:spcAft>
-              <a:buNone/>
-            </a:pPr>
-            <a:r>
-              <a:rPr sz="1800" b="0">
-                <a:latin typeface="Play"/>
-                <a:solidFill>
-                  <a:schemeClr val="dk1"/>
-                </a:solidFill>
-              </a:rPr>
-              <a:t>Специалист получает полную информацию для решения задачи.</a:t>
-            </a:r>
-            <a:endParaRPr/>
-          </a:p>
-        </p:txBody>
-      </p:sp>
-    </p:spTree>
-  </p:cSld>
-  <p:clrMapOvr>
-    <a:masterClrMapping/>
-  </p:clrMapOvr>
-</p:sld>
-</file>
-
-<file path=ppt/slides/slide8.xml><?xml version="1.0" encoding="utf-8"?>
-<p:sld xmlns:a="http://schemas.openxmlformats.org/drawingml/2006/main" xmlns:p="http://schemas.openxmlformats.org/presentationml/2006/main" xmlns:r="http://schemas.openxmlformats.org/officeDocument/2006/relationships">
-  <p:cSld>
-    <p:bg>
-      <p:bgPr>
-        <a:solidFill>
-          <a:schemeClr val="lt2"/>
-        </a:solidFill>
-      </p:bgPr>
-    </p:bg>
-    <p:spTree>
-      <p:nvGrpSpPr>
-        <p:cNvPr id="1" name=""/>
-        <p:cNvGrpSpPr/>
-        <p:nvPr/>
-      </p:nvGrpSpPr>
-      <p:grpSpPr/>
-      <p:sp>
-        <p:nvSpPr>
-          <p:cNvPr id="543" name="BrandDeck Text 543"/>
-          <p:cNvSpPr txBox="1"/>
-          <p:nvPr>
-            <p:ph type="title"/>
-          </p:nvPr>
-        </p:nvSpPr>
-        <p:spPr>
-          <a:xfrm>
-            <a:off x="677334" y="692150"/>
-            <a:ext cx="10855854" cy="644241"/>
-          </a:xfrm>
-          <a:prstGeom prst="rect">
-            <a:avLst/>
-          </a:prstGeom>
-          <a:noFill/>
-          <a:ln>
-            <a:noFill/>
-          </a:ln>
-        </p:spPr>
-        <p:txBody>
-          <a:bodyPr anchorCtr="0" anchor="t" bIns="0" lIns="0" spcFirstLastPara="1" rIns="0" wrap="square" tIns="0">
-            <a:normAutofit/>
-          </a:bodyPr>
-          <a:lstStyle/>
-          <a:p>
-            <a:pPr indent="0" marL="0" rtl="0" algn="l">
-              <a:lnSpc>
-                <a:spcPct val="115000"/>
-              </a:lnSpc>
-              <a:spcBef>
-                <a:spcPts val="0"/>
-              </a:spcBef>
-              <a:spcAft>
-                <a:spcPts val="359"/>
-              </a:spcAft>
-              <a:buClr>
-                <a:schemeClr val="accent1"/>
-              </a:buClr>
-              <a:buSzPts val="3600"/>
-              <a:buFont typeface="Play"/>
-              <a:buNone/>
-            </a:pPr>
-            <a:r>
-              <a:rPr sz="2400">
-                <a:solidFill>
-                  <a:srgbClr val="000000"/>
-                </a:solidFill>
-              </a:rPr>
-              <a:t>Пилот охватывает 2 подразделения и 150 сотрудников</a:t>
-            </a:r>
-            <a:endParaRPr/>
-          </a:p>
-        </p:txBody>
-      </p:sp>
-      <p:grpSp>
-        <p:nvGrpSpPr>
-          <p:cNvPr id="2" name="BrandDeck Diagram icon_grid" descr="icon_grid: Пилот запускается в двух подразделениях.; В проекте участвуют 150 сотрудников.; Охват ограничен выбранными группами для теста."/>
-          <p:cNvGrpSpPr/>
-          <p:nvPr/>
-        </p:nvGrpSpPr>
-        <p:grpSpPr>
-          <a:xfrm>
-            <a:off x="677334" y="3170236"/>
-            <a:ext cx="10855853" cy="2105863"/>
-            <a:chOff x="677334" y="3170236"/>
-            <a:chExt cx="10855853" cy="2105863"/>
-          </a:xfrm>
-        </p:grpSpPr>
-        <p:sp>
-          <p:nvSpPr>
-            <p:cNvPr id="544" name="BrandDeck Diagram Card 1"/>
-            <p:cNvSpPr/>
-            <p:nvPr/>
-          </p:nvSpPr>
-          <p:spPr>
-            <a:xfrm>
-              <a:off x="677334" y="3170236"/>
-              <a:ext cx="3473873" cy="2105863"/>
-            </a:xfrm>
-            <a:prstGeom prst="roundRect">
-              <a:avLst>
-                <a:gd name="adj" fmla="val 8000"/>
-              </a:avLst>
-            </a:prstGeom>
-            <a:solidFill>
-              <a:srgbClr val="EDF5FF"/>
-            </a:solidFill>
-            <a:ln>
-              <a:noFill/>
-            </a:ln>
-          </p:spPr>
-          <p:txBody>
-            <a:bodyPr rtlCol="0" anchor="ctr"/>
-            <a:lstStyle/>
-            <a:p>
-              <a:pPr algn="ctr"/>
-            </a:p>
-          </p:txBody>
-        </p:sp>
-        <p:sp>
-          <p:nvSpPr>
-            <p:cNvPr id="545" name="BrandDeck Diagram Icon 1 Badge"/>
-            <p:cNvSpPr/>
-            <p:nvPr/>
-          </p:nvSpPr>
-          <p:spPr>
-            <a:xfrm>
-              <a:off x="896789" y="3389692"/>
-              <a:ext cx="603504" cy="603504"/>
-            </a:xfrm>
-            <a:prstGeom prst="ellipse">
-              <a:avLst/>
-            </a:prstGeom>
-            <a:solidFill>
-              <a:srgbClr val="006DEB"/>
-            </a:solidFill>
-            <a:ln>
-              <a:noFill/>
-            </a:ln>
-          </p:spPr>
-          <p:txBody>
-            <a:bodyPr rtlCol="0" anchor="ctr"/>
-            <a:lstStyle/>
-            <a:p>
-              <a:pPr algn="ctr"/>
-            </a:p>
-          </p:txBody>
-        </p:sp>
-        <p:sp>
-          <p:nvSpPr>
-            <p:cNvPr id="546" name="BrandDeck Icon rocket"/>
-            <p:cNvSpPr/>
-            <p:nvPr/>
-          </p:nvSpPr>
-          <p:spPr>
-            <a:xfrm>
-              <a:off x="1029560" y="3522463"/>
-              <a:ext cx="337962" cy="337962"/>
-            </a:xfrm>
-            <a:custGeom>
-              <a:avLst/>
-              <a:gdLst/>
-              <a:ahLst/>
-              <a:cxnLst/>
-              <a:rect l="l" t="t" r="r" b="b"/>
-              <a:pathLst>
-                <a:path w="24000" h="24000" fill="none">
-                  <a:moveTo>
-                    <a:pt x="4500" y="16500"/>
-                  </a:moveTo>
-                  <a:cubicBezTo>
-                    <a:pt x="3000" y="17760"/>
-                    <a:pt x="2500" y="21500"/>
-                    <a:pt x="2500" y="21500"/>
-                  </a:cubicBezTo>
-                  <a:cubicBezTo>
-                    <a:pt x="2500" y="21500"/>
-                    <a:pt x="6240" y="21000"/>
-                    <a:pt x="7500" y="19500"/>
-                  </a:cubicBezTo>
-                  <a:cubicBezTo>
-                    <a:pt x="8210" y="18660"/>
-                    <a:pt x="8200" y="17370"/>
-                    <a:pt x="7410" y="16590"/>
-                  </a:cubicBezTo>
-                  <a:cubicBezTo>
-                    <a:pt x="6605" y="15822"/>
-                    <a:pt x="5351" y="15783"/>
-                    <a:pt x="4500" y="16500"/>
-                  </a:cubicBezTo>
-                  <a:close/>
-                </a:path>
-                <a:path w="24000" h="24000" fill="none">
-                  <a:moveTo>
-                    <a:pt x="12000" y="15000"/>
-                  </a:moveTo>
-                  <a:lnTo>
-                    <a:pt x="9000" y="12000"/>
-                  </a:lnTo>
-                  <a:cubicBezTo>
-                    <a:pt x="9532" y="10619"/>
-                    <a:pt x="10202" y="9296"/>
-                    <a:pt x="11000" y="8050"/>
-                  </a:cubicBezTo>
-                  <a:cubicBezTo>
-                    <a:pt x="13369" y="4262"/>
-                    <a:pt x="17532" y="1972"/>
-                    <a:pt x="22000" y="2000"/>
-                  </a:cubicBezTo>
-                  <a:cubicBezTo>
-                    <a:pt x="22000" y="4720"/>
-                    <a:pt x="21220" y="9500"/>
-                    <a:pt x="16000" y="13000"/>
-                  </a:cubicBezTo>
-                  <a:cubicBezTo>
-                    <a:pt x="14737" y="13799"/>
-                    <a:pt x="13397" y="14469"/>
-                    <a:pt x="12000" y="15000"/>
-                  </a:cubicBezTo>
-                  <a:close/>
-                </a:path>
-                <a:path w="24000" h="24000" fill="none">
-                  <a:moveTo>
-                    <a:pt x="9000" y="12000"/>
-                  </a:moveTo>
-                  <a:lnTo>
-                    <a:pt x="4000" y="12000"/>
-                  </a:lnTo>
-                  <a:cubicBezTo>
-                    <a:pt x="4000" y="12000"/>
-                    <a:pt x="4550" y="8970"/>
-                    <a:pt x="6000" y="8000"/>
-                  </a:cubicBezTo>
-                  <a:cubicBezTo>
-                    <a:pt x="7620" y="6920"/>
-                    <a:pt x="11000" y="8000"/>
-                    <a:pt x="11000" y="8000"/>
-                  </a:cubicBezTo>
-                </a:path>
-                <a:path w="24000" h="24000" fill="none">
-                  <a:moveTo>
-                    <a:pt x="12000" y="15000"/>
-                  </a:moveTo>
-                  <a:lnTo>
-                    <a:pt x="12000" y="20000"/>
-                  </a:lnTo>
-                  <a:cubicBezTo>
-                    <a:pt x="12000" y="20000"/>
-                    <a:pt x="15030" y="19450"/>
-                    <a:pt x="16000" y="18000"/>
-                  </a:cubicBezTo>
-                  <a:cubicBezTo>
-                    <a:pt x="17080" y="16380"/>
-                    <a:pt x="16000" y="13000"/>
-                    <a:pt x="16000" y="13000"/>
-                  </a:cubicBezTo>
-                </a:path>
-              </a:pathLst>
-            </a:custGeom>
-            <a:noFill/>
-            <a:ln w="28163" cap="rnd">
-              <a:solidFill>
-                <a:srgbClr val="FFFFFF"/>
-              </a:solidFill>
-              <a:round/>
-            </a:ln>
-          </p:spPr>
-          <p:txBody>
-            <a:bodyPr rtlCol="0" anchor="ctr"/>
-            <a:lstStyle/>
-            <a:p>
-              <a:pPr algn="ctr"/>
-            </a:p>
-          </p:txBody>
-        </p:sp>
-        <p:sp>
-          <p:nvSpPr>
-            <p:cNvPr id="547" name="BrandDeck Diagram Text 1"/>
-            <p:cNvSpPr txBox="1"/>
-            <p:nvPr/>
-          </p:nvSpPr>
-          <p:spPr>
-            <a:xfrm>
-              <a:off x="830953" y="4146816"/>
-              <a:ext cx="3166634" cy="1019555"/>
-            </a:xfrm>
-            <a:prstGeom prst="rect">
-              <a:avLst/>
-            </a:prstGeom>
-            <a:noFill/>
-          </p:spPr>
-          <p:txBody>
-            <a:bodyPr wrap="square" anchor="t" lIns="36576" tIns="18288" rIns="36576" bIns="18288">
-              <a:noAutofit/>
-            </a:bodyPr>
-            <a:lstStyle/>
-            <a:p>
-              <a:pPr algn="l">
-                <a:lnSpc>
-                  <a:spcPct val="110000"/>
-                </a:lnSpc>
-              </a:pPr>
-              <a:r>
-                <a:rPr sz="1800" b="0">
-                  <a:solidFill>
-                    <a:srgbClr val="000000"/>
-                  </a:solidFill>
-                  <a:latin typeface="Play"/>
-                </a:rPr>
-                <a:t>Пилот запускается в двух подразделениях.</a:t>
-              </a:r>
-            </a:p>
-          </p:txBody>
-        </p:sp>
-        <p:sp>
-          <p:nvSpPr>
-            <p:cNvPr id="548" name="BrandDeck Diagram Card 2"/>
-            <p:cNvSpPr/>
-            <p:nvPr/>
-          </p:nvSpPr>
-          <p:spPr>
-            <a:xfrm>
-              <a:off x="4368324" y="3170236"/>
-              <a:ext cx="3473873" cy="2105863"/>
-            </a:xfrm>
-            <a:prstGeom prst="roundRect">
-              <a:avLst>
-                <a:gd name="adj" fmla="val 8000"/>
-              </a:avLst>
-            </a:prstGeom>
-            <a:solidFill>
-              <a:srgbClr val="EDF5FF"/>
-            </a:solidFill>
-            <a:ln>
-              <a:noFill/>
-            </a:ln>
-          </p:spPr>
-          <p:txBody>
-            <a:bodyPr rtlCol="0" anchor="ctr"/>
-            <a:lstStyle/>
-            <a:p>
-              <a:pPr algn="ctr"/>
-            </a:p>
-          </p:txBody>
-        </p:sp>
-        <p:sp>
-          <p:nvSpPr>
-            <p:cNvPr id="549" name="BrandDeck Diagram Icon 2 Badge"/>
-            <p:cNvSpPr/>
-            <p:nvPr/>
-          </p:nvSpPr>
-          <p:spPr>
-            <a:xfrm>
-              <a:off x="4587780" y="3389692"/>
-              <a:ext cx="603504" cy="603504"/>
-            </a:xfrm>
-            <a:prstGeom prst="ellipse">
-              <a:avLst/>
-            </a:prstGeom>
-            <a:solidFill>
-              <a:srgbClr val="006DEB"/>
-            </a:solidFill>
-            <a:ln>
-              <a:noFill/>
-            </a:ln>
-          </p:spPr>
-          <p:txBody>
-            <a:bodyPr rtlCol="0" anchor="ctr"/>
-            <a:lstStyle/>
-            <a:p>
-              <a:pPr algn="ctr"/>
-            </a:p>
-          </p:txBody>
-        </p:sp>
-        <p:sp>
-          <p:nvSpPr>
-            <p:cNvPr id="550" name="BrandDeck Icon users"/>
-            <p:cNvSpPr/>
-            <p:nvPr/>
-          </p:nvSpPr>
-          <p:spPr>
-            <a:xfrm>
-              <a:off x="4720551" y="3522463"/>
-              <a:ext cx="337962" cy="337962"/>
-            </a:xfrm>
-            <a:custGeom>
-              <a:avLst/>
-              <a:gdLst/>
-              <a:ahLst/>
-              <a:cxnLst/>
-              <a:rect l="l" t="t" r="r" b="b"/>
-              <a:pathLst>
-                <a:path w="24000" h="24000" fill="none">
-                  <a:moveTo>
-                    <a:pt x="16000" y="21000"/>
-                  </a:moveTo>
-                  <a:lnTo>
-                    <a:pt x="16000" y="19000"/>
-                  </a:lnTo>
-                  <a:cubicBezTo>
-                    <a:pt x="16000" y="16791"/>
-                    <a:pt x="14209" y="15000"/>
-                    <a:pt x="12000" y="15000"/>
-                  </a:cubicBezTo>
-                  <a:lnTo>
-                    <a:pt x="6000" y="15000"/>
-                  </a:lnTo>
-                  <a:cubicBezTo>
-                    <a:pt x="3791" y="15000"/>
-                    <a:pt x="2000" y="16791"/>
-                    <a:pt x="2000" y="19000"/>
-                  </a:cubicBezTo>
-                  <a:lnTo>
-                    <a:pt x="2000" y="21000"/>
-                  </a:lnTo>
-                </a:path>
-                <a:path w="24000" h="24000" fill="none">
-                  <a:moveTo>
-                    <a:pt x="13000" y="7000"/>
-                  </a:moveTo>
-                  <a:cubicBezTo>
-                    <a:pt x="13000" y="9209"/>
-                    <a:pt x="11209" y="11000"/>
-                    <a:pt x="9000" y="11000"/>
-                  </a:cubicBezTo>
-                  <a:cubicBezTo>
-                    <a:pt x="6791" y="11000"/>
-                    <a:pt x="5000" y="9209"/>
-                    <a:pt x="5000" y="7000"/>
-                  </a:cubicBezTo>
-                  <a:cubicBezTo>
-                    <a:pt x="5000" y="4791"/>
-                    <a:pt x="6791" y="3000"/>
-                    <a:pt x="9000" y="3000"/>
-                  </a:cubicBezTo>
-                  <a:cubicBezTo>
-                    <a:pt x="11209" y="3000"/>
-                    <a:pt x="13000" y="4791"/>
-                    <a:pt x="13000" y="7000"/>
-                  </a:cubicBezTo>
-                  <a:close/>
-                </a:path>
-                <a:path w="24000" h="24000" fill="none">
-                  <a:moveTo>
-                    <a:pt x="22000" y="21000"/>
-                  </a:moveTo>
-                  <a:lnTo>
-                    <a:pt x="22000" y="19000"/>
-                  </a:lnTo>
-                  <a:cubicBezTo>
-                    <a:pt x="21999" y="17177"/>
-                    <a:pt x="20765" y="15586"/>
-                    <a:pt x="19000" y="15130"/>
-                  </a:cubicBezTo>
-                </a:path>
-                <a:path w="24000" h="24000" fill="none">
-                  <a:moveTo>
-                    <a:pt x="16000" y="3130"/>
-                  </a:moveTo>
-                  <a:cubicBezTo>
-                    <a:pt x="17770" y="3583"/>
-                    <a:pt x="19008" y="5178"/>
-                    <a:pt x="19008" y="7005"/>
-                  </a:cubicBezTo>
-                  <a:cubicBezTo>
-                    <a:pt x="19008" y="8832"/>
-                    <a:pt x="17770" y="10427"/>
-                    <a:pt x="16000" y="10880"/>
-                  </a:cubicBezTo>
-                </a:path>
-              </a:pathLst>
-            </a:custGeom>
-            <a:noFill/>
-            <a:ln w="28163" cap="rnd">
-              <a:solidFill>
-                <a:srgbClr val="FFFFFF"/>
-              </a:solidFill>
-              <a:round/>
-            </a:ln>
-          </p:spPr>
-          <p:txBody>
-            <a:bodyPr rtlCol="0" anchor="ctr"/>
-            <a:lstStyle/>
-            <a:p>
-              <a:pPr algn="ctr"/>
-            </a:p>
-          </p:txBody>
-        </p:sp>
-        <p:sp>
-          <p:nvSpPr>
-            <p:cNvPr id="551" name="BrandDeck Diagram Text 2"/>
-            <p:cNvSpPr txBox="1"/>
-            <p:nvPr/>
-          </p:nvSpPr>
-          <p:spPr>
-            <a:xfrm>
-              <a:off x="4521943" y="4146816"/>
-              <a:ext cx="3166634" cy="1019555"/>
-            </a:xfrm>
-            <a:prstGeom prst="rect">
-              <a:avLst/>
-            </a:prstGeom>
-            <a:noFill/>
-          </p:spPr>
-          <p:txBody>
-            <a:bodyPr wrap="square" anchor="t" lIns="36576" tIns="18288" rIns="36576" bIns="18288">
-              <a:noAutofit/>
-            </a:bodyPr>
-            <a:lstStyle/>
-            <a:p>
-              <a:pPr algn="l">
-                <a:lnSpc>
-                  <a:spcPct val="110000"/>
-                </a:lnSpc>
-              </a:pPr>
-              <a:r>
-                <a:rPr sz="1800" b="0">
-                  <a:solidFill>
-                    <a:srgbClr val="000000"/>
-                  </a:solidFill>
-                  <a:latin typeface="Play"/>
-                </a:rPr>
-                <a:t>В проекте участвуют 150 сотрудников.</a:t>
-              </a:r>
-            </a:p>
-          </p:txBody>
-        </p:sp>
-        <p:sp>
-          <p:nvSpPr>
-            <p:cNvPr id="552" name="BrandDeck Diagram Card 3"/>
-            <p:cNvSpPr/>
-            <p:nvPr/>
-          </p:nvSpPr>
-          <p:spPr>
-            <a:xfrm>
-              <a:off x="8059314" y="3170236"/>
-              <a:ext cx="3473873" cy="2105863"/>
-            </a:xfrm>
-            <a:prstGeom prst="roundRect">
-              <a:avLst>
-                <a:gd name="adj" fmla="val 8000"/>
-              </a:avLst>
-            </a:prstGeom>
-            <a:solidFill>
-              <a:srgbClr val="EDF5FF"/>
-            </a:solidFill>
-            <a:ln>
-              <a:noFill/>
-            </a:ln>
-          </p:spPr>
-          <p:txBody>
-            <a:bodyPr rtlCol="0" anchor="ctr"/>
-            <a:lstStyle/>
-            <a:p>
-              <a:pPr algn="ctr"/>
-            </a:p>
-          </p:txBody>
-        </p:sp>
-        <p:sp>
-          <p:nvSpPr>
-            <p:cNvPr id="553" name="BrandDeck Diagram Icon 3 Badge"/>
-            <p:cNvSpPr/>
-            <p:nvPr/>
-          </p:nvSpPr>
-          <p:spPr>
-            <a:xfrm>
-              <a:off x="8278770" y="3389692"/>
-              <a:ext cx="603504" cy="603504"/>
-            </a:xfrm>
-            <a:prstGeom prst="ellipse">
-              <a:avLst/>
-            </a:prstGeom>
-            <a:solidFill>
-              <a:srgbClr val="006DEB"/>
-            </a:solidFill>
-            <a:ln>
-              <a:noFill/>
-            </a:ln>
-          </p:spPr>
-          <p:txBody>
-            <a:bodyPr rtlCol="0" anchor="ctr"/>
-            <a:lstStyle/>
-            <a:p>
-              <a:pPr algn="ctr"/>
-            </a:p>
-          </p:txBody>
-        </p:sp>
-        <p:sp>
-          <p:nvSpPr>
-            <p:cNvPr id="554" name="BrandDeck Icon circle-dot"/>
-            <p:cNvSpPr/>
-            <p:nvPr/>
-          </p:nvSpPr>
-          <p:spPr>
-            <a:xfrm>
-              <a:off x="8411541" y="3522463"/>
-              <a:ext cx="337962" cy="337962"/>
-            </a:xfrm>
-            <a:custGeom>
-              <a:avLst/>
-              <a:gdLst/>
-              <a:ahLst/>
-              <a:cxnLst/>
-              <a:rect l="l" t="t" r="r" b="b"/>
-              <a:pathLst>
-                <a:path w="24000" h="24000" fill="none">
-                  <a:moveTo>
-                    <a:pt x="22000" y="12000"/>
-                  </a:moveTo>
-                  <a:cubicBezTo>
-                    <a:pt x="22000" y="17523"/>
-                    <a:pt x="17523" y="22000"/>
-                    <a:pt x="12000" y="22000"/>
-                  </a:cubicBezTo>
-                  <a:cubicBezTo>
-                    <a:pt x="6477" y="22000"/>
-                    <a:pt x="2000" y="17523"/>
-                    <a:pt x="2000" y="12000"/>
-                  </a:cubicBezTo>
-                  <a:cubicBezTo>
-                    <a:pt x="2000" y="6477"/>
-                    <a:pt x="6477" y="2000"/>
-                    <a:pt x="12000" y="2000"/>
-                  </a:cubicBezTo>
-                  <a:cubicBezTo>
-                    <a:pt x="17523" y="2000"/>
-                    <a:pt x="22000" y="6477"/>
-                    <a:pt x="22000" y="12000"/>
-                  </a:cubicBezTo>
-                  <a:close/>
-                </a:path>
-                <a:path w="24000" h="24000" fill="none">
-                  <a:moveTo>
-                    <a:pt x="13000" y="12000"/>
-                  </a:moveTo>
-                  <a:cubicBezTo>
-                    <a:pt x="13000" y="12552"/>
-                    <a:pt x="12552" y="13000"/>
-                    <a:pt x="12000" y="13000"/>
-                  </a:cubicBezTo>
-                  <a:cubicBezTo>
-                    <a:pt x="11448" y="13000"/>
-                    <a:pt x="11000" y="12552"/>
-                    <a:pt x="11000" y="12000"/>
-                  </a:cubicBezTo>
-                  <a:cubicBezTo>
-                    <a:pt x="11000" y="11448"/>
-                    <a:pt x="11448" y="11000"/>
-                    <a:pt x="12000" y="11000"/>
-                  </a:cubicBezTo>
-                  <a:cubicBezTo>
-                    <a:pt x="12552" y="11000"/>
-                    <a:pt x="13000" y="11448"/>
-                    <a:pt x="13000" y="12000"/>
-                  </a:cubicBezTo>
-                  <a:close/>
-                </a:path>
-              </a:pathLst>
-            </a:custGeom>
-            <a:noFill/>
-            <a:ln w="28163" cap="rnd">
-              <a:solidFill>
-                <a:srgbClr val="FFFFFF"/>
-              </a:solidFill>
-              <a:round/>
-            </a:ln>
-          </p:spPr>
-          <p:txBody>
-            <a:bodyPr rtlCol="0" anchor="ctr"/>
-            <a:lstStyle/>
-            <a:p>
-              <a:pPr algn="ctr"/>
-            </a:p>
-          </p:txBody>
-        </p:sp>
-        <p:sp>
-          <p:nvSpPr>
-            <p:cNvPr id="555" name="BrandDeck Diagram Text 3"/>
-            <p:cNvSpPr txBox="1"/>
-            <p:nvPr/>
-          </p:nvSpPr>
-          <p:spPr>
-            <a:xfrm>
-              <a:off x="8212933" y="4146816"/>
-              <a:ext cx="3166634" cy="1019555"/>
-            </a:xfrm>
-            <a:prstGeom prst="rect">
-              <a:avLst/>
-            </a:prstGeom>
-            <a:noFill/>
-          </p:spPr>
-          <p:txBody>
-            <a:bodyPr wrap="square" anchor="t" lIns="36576" tIns="18288" rIns="36576" bIns="18288">
-              <a:noAutofit/>
-            </a:bodyPr>
-            <a:lstStyle/>
-            <a:p>
-              <a:pPr algn="l">
-                <a:lnSpc>
-                  <a:spcPct val="110000"/>
-                </a:lnSpc>
-              </a:pPr>
-              <a:r>
-                <a:rPr sz="1800" b="0">
-                  <a:solidFill>
-                    <a:srgbClr val="000000"/>
-                  </a:solidFill>
-                  <a:latin typeface="Play"/>
-                </a:rPr>
-                <a:t>Охват ограничен выбранными группами для теста.</a:t>
-              </a:r>
-            </a:p>
-          </p:txBody>
-        </p:sp>
-      </p:grpSp>
-    </p:spTree>
-  </p:cSld>
-  <p:clrMapOvr>
-    <a:masterClrMapping/>
-  </p:clrMapOvr>
-</p:sld>
-</file>
-
-<file path=ppt/slides/slide9.xml><?xml version="1.0" encoding="utf-8"?>
-<p:sld xmlns:a="http://schemas.openxmlformats.org/drawingml/2006/main" xmlns:p="http://schemas.openxmlformats.org/presentationml/2006/main" xmlns:r="http://schemas.openxmlformats.org/officeDocument/2006/relationships">
-  <p:cSld>
-    <p:bg>
-      <p:bgPr>
-        <a:solidFill>
-          <a:schemeClr val="lt2"/>
-        </a:solidFill>
-      </p:bgPr>
-    </p:bg>
-    <p:spTree>
-      <p:nvGrpSpPr>
-        <p:cNvPr id="1" name=""/>
-        <p:cNvGrpSpPr/>
-        <p:nvPr/>
-      </p:nvGrpSpPr>
-      <p:grpSpPr/>
-      <p:sp>
-        <p:nvSpPr>
-          <p:cNvPr id="274" name="BrandDeck Text 274"/>
-          <p:cNvSpPr/>
-          <p:nvPr/>
-        </p:nvSpPr>
-        <p:spPr>
-          <a:xfrm>
-            <a:off x="671512" y="1773238"/>
-            <a:ext cx="5365752" cy="2156481"/>
-          </a:xfrm>
-          <a:prstGeom prst="roundRect">
-            <a:avLst>
-              <a:gd fmla="val 0" name="adj"/>
-            </a:avLst>
-          </a:prstGeom>
-          <a:solidFill>
-            <a:schemeClr val="lt1"/>
-          </a:solidFill>
-          <a:ln>
-            <a:noFill/>
-          </a:ln>
-        </p:spPr>
-        <p:txBody>
-          <a:bodyPr anchorCtr="0" anchor="t" bIns="45700" lIns="91425" spcFirstLastPara="1" rIns="91425" wrap="square" tIns="45700">
-            <a:normAutofit/>
-          </a:bodyPr>
-          <a:lstStyle/>
-          <a:p>
-            <a:pPr indent="0" marL="179388" marR="0" rtl="0" algn="l">
-              <a:lnSpc>
-                <a:spcPct val="115000"/>
-              </a:lnSpc>
-              <a:spcBef>
-                <a:spcPts val="0"/>
-              </a:spcBef>
-              <a:spcAft>
-                <a:spcPts val="270"/>
-              </a:spcAft>
-              <a:buNone/>
-            </a:pPr>
-            <a:r>
-              <a:rPr sz="1800" b="0">
-                <a:latin typeface="Play"/>
-                <a:solidFill>
-                  <a:schemeClr val="dk1"/>
-                </a:solidFill>
-              </a:rPr>
-              <a:t>Пилотный эксперимент длится 6 недель.</a:t>
-            </a:r>
-            <a:endParaRPr b="0" i="0" sz="1800" u="none" cap="none" strike="noStrike">
-              <a:solidFill>
-                <a:schemeClr val="dk1"/>
-              </a:solidFill>
-              <a:latin typeface="Play"/>
-              <a:ea typeface="Play"/>
-              <a:cs typeface="Play"/>
-              <a:sym typeface="Play"/>
-            </a:endParaRPr>
-          </a:p>
-        </p:txBody>
-      </p:sp>
-      <p:sp>
-        <p:nvSpPr>
-          <p:cNvPr id="275" name="BrandDeck Text 275"/>
-          <p:cNvSpPr/>
-          <p:nvPr/>
-        </p:nvSpPr>
-        <p:spPr>
-          <a:xfrm>
-            <a:off x="6154737" y="1775553"/>
-            <a:ext cx="5391150" cy="2156481"/>
-          </a:xfrm>
-          <a:prstGeom prst="roundRect">
-            <a:avLst>
-              <a:gd fmla="val 0" name="adj"/>
-            </a:avLst>
-          </a:prstGeom>
-          <a:solidFill>
-            <a:schemeClr val="lt1"/>
-          </a:solidFill>
-          <a:ln>
-            <a:noFill/>
-          </a:ln>
-        </p:spPr>
-        <p:txBody>
-          <a:bodyPr anchorCtr="0" anchor="t" bIns="45700" lIns="91425" spcFirstLastPara="1" rIns="91425" wrap="square" tIns="45700">
-            <a:normAutofit/>
-          </a:bodyPr>
-          <a:lstStyle/>
-          <a:p>
-            <a:pPr indent="0" marL="179388" marR="0" rtl="0" algn="l">
-              <a:lnSpc>
-                <a:spcPct val="115000"/>
-              </a:lnSpc>
-              <a:spcBef>
-                <a:spcPts val="0"/>
-              </a:spcBef>
-              <a:spcAft>
-                <a:spcPts val="270"/>
-              </a:spcAft>
-              <a:buNone/>
-            </a:pPr>
-            <a:r>
-              <a:rPr sz="1800" b="0">
-                <a:latin typeface="Play"/>
-                <a:solidFill>
-                  <a:schemeClr val="dk1"/>
-                </a:solidFill>
-              </a:rPr>
-              <a:t>В этот период тестируется работа ИИ-помощника.</a:t>
-            </a:r>
-            <a:endParaRPr b="0" i="0" sz="1800" u="none" cap="none" strike="noStrike">
-              <a:solidFill>
-                <a:schemeClr val="dk1"/>
-              </a:solidFill>
-              <a:latin typeface="Play"/>
-              <a:ea typeface="Play"/>
-              <a:cs typeface="Play"/>
-              <a:sym typeface="Play"/>
-            </a:endParaRPr>
-          </a:p>
-        </p:txBody>
-      </p:sp>
-      <p:sp>
-        <p:nvSpPr>
-          <p:cNvPr id="276" name="BrandDeck Text 276"/>
-          <p:cNvSpPr txBox="1"/>
-          <p:nvPr>
-            <p:ph type="title"/>
-          </p:nvPr>
-        </p:nvSpPr>
-        <p:spPr>
-          <a:xfrm>
-            <a:off x="677334" y="692150"/>
-            <a:ext cx="10855854" cy="644241"/>
-          </a:xfrm>
-          <a:prstGeom prst="rect">
-            <a:avLst/>
-          </a:prstGeom>
-          <a:noFill/>
-          <a:ln>
-            <a:noFill/>
-          </a:ln>
-        </p:spPr>
-        <p:txBody>
-          <a:bodyPr anchorCtr="0" anchor="t" bIns="0" lIns="0" spcFirstLastPara="1" rIns="0" wrap="square" tIns="0">
-            <a:normAutofit/>
-          </a:bodyPr>
-          <a:lstStyle/>
-          <a:p>
-            <a:pPr indent="0" marL="0" rtl="0" algn="l">
-              <a:lnSpc>
-                <a:spcPct val="115000"/>
-              </a:lnSpc>
-              <a:spcBef>
-                <a:spcPts val="0"/>
-              </a:spcBef>
-              <a:spcAft>
-                <a:spcPts val="359"/>
-              </a:spcAft>
-              <a:buClr>
-                <a:schemeClr val="dk2"/>
-              </a:buClr>
-              <a:buSzPts val="3600"/>
-              <a:buFont typeface="Play"/>
-              <a:buNone/>
-            </a:pPr>
-            <a:r>
-              <a:rPr sz="2400">
-                <a:solidFill>
-                  <a:srgbClr val="000000"/>
-                </a:solidFill>
-              </a:rPr>
-              <a:t>Длительность пилотного проекта составляет 6 недель</a:t>
-            </a:r>
-            <a:endParaRPr/>
-          </a:p>
-        </p:txBody>
-      </p:sp>
-      <p:sp>
-        <p:nvSpPr>
-          <p:cNvPr id="277" name="BrandDeck Text 277"/>
-          <p:cNvSpPr/>
-          <p:nvPr/>
-        </p:nvSpPr>
-        <p:spPr>
-          <a:xfrm>
-            <a:off x="671512" y="4044294"/>
-            <a:ext cx="5365752" cy="2156481"/>
-          </a:xfrm>
-          <a:prstGeom prst="roundRect">
-            <a:avLst>
-              <a:gd fmla="val 0" name="adj"/>
-            </a:avLst>
-          </a:prstGeom>
-          <a:solidFill>
-            <a:schemeClr val="lt1"/>
-          </a:solidFill>
-          <a:ln>
-            <a:noFill/>
-          </a:ln>
-        </p:spPr>
-        <p:txBody>
-          <a:bodyPr anchorCtr="0" anchor="t" bIns="45700" lIns="91425" spcFirstLastPara="1" rIns="91425" wrap="square" tIns="45700">
-            <a:normAutofit/>
-          </a:bodyPr>
-          <a:lstStyle/>
-          <a:p>
-            <a:pPr indent="0" marL="179388" marR="0" rtl="0" algn="l">
-              <a:lnSpc>
-                <a:spcPct val="115000"/>
-              </a:lnSpc>
-              <a:spcBef>
-                <a:spcPts val="0"/>
-              </a:spcBef>
-              <a:spcAft>
-                <a:spcPts val="270"/>
-              </a:spcAft>
-              <a:buNone/>
-            </a:pPr>
-            <a:r>
-              <a:rPr sz="1800" b="0">
-                <a:latin typeface="Play"/>
-                <a:solidFill>
-                  <a:schemeClr val="dk1"/>
-                </a:solidFill>
-              </a:rPr>
-              <a:t>За это время оценивается эффективность решения.</a:t>
-            </a:r>
-            <a:endParaRPr/>
           </a:p>
         </p:txBody>
       </p:sp>

--- a/deliverables/vk-education-columns.pptx
+++ b/deliverables/vk-education-columns.pptx
@@ -19,8 +19,6 @@
     <p:sldId id="318" r:id="rId71"/>
     <p:sldId id="319" r:id="rId72"/>
     <p:sldId id="320" r:id="rId73"/>
-    <p:sldId id="321" r:id="rId74"/>
-    <p:sldId id="322" r:id="rId75"/>
   </p:sldIdLst>
   <p:sldSz cy="6858000" cx="12192000"/>
   <p:notesSz cx="6858000" cy="9144000"/>
@@ -1476,7 +1474,7 @@
           <a:lstStyle/>
           <a:p>
             <a:r>
-              <a:t>Слайд вводит инициативу по внедрению ИИ-помощника для автоматизации ответов сотрудникам на вопросы по регламентам.</a:t>
+              <a:t>Данный слайд представляет инициативу по внедрению ИИ-помощника во внутренний портал для автоматизации ответов сотрудникам.</a:t>
             </a:r>
           </a:p>
         </p:txBody>
@@ -1546,7 +1544,7 @@
           <a:lstStyle/>
           <a:p>
             <a:r>
-              <a:t>Сейчас поиск информации занимает до 30 минут, а треть обращений дублирует одни и те же вопросы.</a:t>
+              <a:t>Сейчас поиск инструкции занимает до 30 минут, а треть обращений в поддержку — повторяющиеся вопросы.</a:t>
             </a:r>
           </a:p>
         </p:txBody>
@@ -1616,7 +1614,7 @@
           <a:lstStyle/>
           <a:p>
             <a:r>
-              <a:t>Пилотный проект охватывает 150 сотрудников двух подразделений в течение шести недель.</a:t>
+              <a:t>Сейчас сотрудники тратят до 30 минут на поиск инструкций, а треть обращений в поддержку — это повторяющиеся вопросы, что создает нагрузку на обе стороны.</a:t>
             </a:r>
           </a:p>
         </p:txBody>
@@ -1686,7 +1684,7 @@
           <a:lstStyle/>
           <a:p>
             <a:r>
-              <a:t>Функция автоматически отвечает сотрудникам на запросы по регламентам и сразу показывает ссылку на исходный документ.</a:t>
+              <a:t>ИИ-помощник автоматически отвечает на вопросы по регламентам, предоставляя ссылку на источник, а сложные запросы перенаправляет специалистам с полным контекстом.</a:t>
             </a:r>
           </a:p>
         </p:txBody>
@@ -1756,7 +1754,7 @@
           <a:lstStyle/>
           <a:p>
             <a:r>
-              <a:t>Система обеспечивает безопасность, обрабатывая данные внутри контура без их вывода наружу.</a:t>
+              <a:t>Модель работает внутри контура, документы не покидают его, а сложные вопросы передаются специалистам с контекстом.</a:t>
             </a:r>
           </a:p>
         </p:txBody>
@@ -1826,7 +1824,7 @@
           <a:lstStyle/>
           <a:p>
             <a:r>
-              <a:t>Если ИИ не находит подтверждённый ответ, запрос автоматически передаётся специалисту с полным контекстом диалога.</a:t>
+              <a:t>Пилотный проект охватывает 150 сотрудников из двух подразделений и длится 6 недель.</a:t>
             </a:r>
           </a:p>
         </p:txBody>
@@ -1896,7 +1894,7 @@
           <a:lstStyle/>
           <a:p>
             <a:r>
-              <a:t>Эта слайд определяет ключевые метрики для оценки эффективности пилота ИИ-помощника.</a:t>
+              <a:t>Эти две метрики позволяют оценить эффективность внедрения ИИ-помощника и снижение нагрузки на поддержку.</a:t>
             </a:r>
           </a:p>
         </p:txBody>
@@ -1966,7 +1964,7 @@
           <a:lstStyle/>
           <a:p>
             <a:r>
-              <a:t>Пилот охватывает 150 сотрудников двух подразделений и длится 6 недель.</a:t>
+              <a:t>План предусматривает запуск пилота в двух подразделениях и мониторинг метрик в течение шести недель.</a:t>
             </a:r>
           </a:p>
         </p:txBody>
@@ -2036,7 +2034,7 @@
           <a:lstStyle/>
           <a:p>
             <a:r>
-              <a:t>Мы будем отслеживать время поиска инструкций и долю обращений, решенных без участия специалиста, чтобы оценить эффективность пилота.</a:t>
+              <a:t>Архитектурное ограничение работы модели внутри контура компании минимизирует риски утечки данных.</a:t>
             </a:r>
           </a:p>
         </p:txBody>
@@ -2106,147 +2104,7 @@
           <a:lstStyle/>
           <a:p>
             <a:r>
-              <a:t>Мы используем модель с открытыми весами, которая работает исключительно внутри корпоративного контура, гарантируя, что документы не покидают периметр безопасности.</a:t>
-            </a:r>
-          </a:p>
-        </p:txBody>
-      </p:sp>
-      <p:sp>
-        <p:nvSpPr>
-          <p:cNvPr id="4" name="Slide Number Placeholder 3"/>
-          <p:cNvSpPr>
-            <a:spLocks noGrp="1"/>
-          </p:cNvSpPr>
-          <p:nvPr>
-            <p:ph type="sldNum" idx="12"/>
-          </p:nvPr>
-        </p:nvSpPr>
-        <p:spPr/>
-      </p:sp>
-    </p:spTree>
-  </p:cSld>
-  <p:clrMapOvr>
-    <a:masterClrMapping/>
-  </p:clrMapOvr>
-</p:notes>
-</file>
-
-<file path=ppt/notesSlides/notesSlide66.xml><?xml version="1.0" encoding="utf-8"?>
-<p:notes xmlns:a="http://schemas.openxmlformats.org/drawingml/2006/main" xmlns:p="http://schemas.openxmlformats.org/presentationml/2006/main" xmlns:r="http://schemas.openxmlformats.org/officeDocument/2006/relationships">
-  <p:cSld>
-    <p:spTree>
-      <p:nvGrpSpPr>
-        <p:cNvPr id="1" name=""/>
-        <p:cNvGrpSpPr/>
-        <p:nvPr/>
-      </p:nvGrpSpPr>
-      <p:grpSpPr>
-        <a:xfrm>
-          <a:off x="0" y="0"/>
-          <a:ext cx="0" cy="0"/>
-          <a:chOff x="0" y="0"/>
-          <a:chExt cx="0" cy="0"/>
-        </a:xfrm>
-      </p:grpSpPr>
-      <p:sp>
-        <p:nvSpPr>
-          <p:cNvPr id="2" name="Slide Image Placeholder 1"/>
-          <p:cNvSpPr>
-            <a:spLocks noGrp="1"/>
-          </p:cNvSpPr>
-          <p:nvPr>
-            <p:ph type="sldImg" idx="3"/>
-          </p:nvPr>
-        </p:nvSpPr>
-        <p:spPr/>
-      </p:sp>
-      <p:sp>
-        <p:nvSpPr>
-          <p:cNvPr id="3" name="Notes Placeholder 2"/>
-          <p:cNvSpPr>
-            <a:spLocks noGrp="1"/>
-          </p:cNvSpPr>
-          <p:nvPr>
-            <p:ph type="body" idx="1"/>
-          </p:nvPr>
-        </p:nvSpPr>
-        <p:spPr/>
-        <p:txBody>
-          <a:bodyPr/>
-          <a:lstStyle/>
-          <a:p>
-            <a:r>
-              <a:t>Нам необходимо ваше одобрение для старта пилота и выделение команды из трех человек.</a:t>
-            </a:r>
-          </a:p>
-        </p:txBody>
-      </p:sp>
-      <p:sp>
-        <p:nvSpPr>
-          <p:cNvPr id="4" name="Slide Number Placeholder 3"/>
-          <p:cNvSpPr>
-            <a:spLocks noGrp="1"/>
-          </p:cNvSpPr>
-          <p:nvPr>
-            <p:ph type="sldNum" idx="12"/>
-          </p:nvPr>
-        </p:nvSpPr>
-        <p:spPr/>
-      </p:sp>
-    </p:spTree>
-  </p:cSld>
-  <p:clrMapOvr>
-    <a:masterClrMapping/>
-  </p:clrMapOvr>
-</p:notes>
-</file>
-
-<file path=ppt/notesSlides/notesSlide67.xml><?xml version="1.0" encoding="utf-8"?>
-<p:notes xmlns:a="http://schemas.openxmlformats.org/drawingml/2006/main" xmlns:p="http://schemas.openxmlformats.org/presentationml/2006/main" xmlns:r="http://schemas.openxmlformats.org/officeDocument/2006/relationships">
-  <p:cSld>
-    <p:spTree>
-      <p:nvGrpSpPr>
-        <p:cNvPr id="1" name=""/>
-        <p:cNvGrpSpPr/>
-        <p:nvPr/>
-      </p:nvGrpSpPr>
-      <p:grpSpPr>
-        <a:xfrm>
-          <a:off x="0" y="0"/>
-          <a:ext cx="0" cy="0"/>
-          <a:chOff x="0" y="0"/>
-          <a:chExt cx="0" cy="0"/>
-        </a:xfrm>
-      </p:grpSpPr>
-      <p:sp>
-        <p:nvSpPr>
-          <p:cNvPr id="2" name="Slide Image Placeholder 1"/>
-          <p:cNvSpPr>
-            <a:spLocks noGrp="1"/>
-          </p:cNvSpPr>
-          <p:nvPr>
-            <p:ph type="sldImg" idx="3"/>
-          </p:nvPr>
-        </p:nvSpPr>
-        <p:spPr/>
-      </p:sp>
-      <p:sp>
-        <p:nvSpPr>
-          <p:cNvPr id="3" name="Notes Placeholder 2"/>
-          <p:cNvSpPr>
-            <a:spLocks noGrp="1"/>
-          </p:cNvSpPr>
-          <p:nvPr>
-            <p:ph type="body" idx="1"/>
-          </p:nvPr>
-        </p:nvSpPr>
-        <p:spPr/>
-        <p:txBody>
-          <a:bodyPr/>
-          <a:lstStyle/>
-          <a:p>
-            <a:r>
-              <a:t>Мы просим одобрить пилот и выделить команду из трех человек для реализации проекта.</a:t>
+              <a:t>Для запуска пилота требуется ваше одобрение и выделение команды из трех человек.</a:t>
             </a:r>
           </a:p>
         </p:txBody>
@@ -2734,6 +2592,1288 @@
 </p:sldLayout>
 </file>
 
+<file path=ppt/slideLayouts/slideLayout10.xml><?xml version="1.0" encoding="utf-8"?>
+<p:sldLayout xmlns:a="http://schemas.openxmlformats.org/drawingml/2006/main" xmlns:r="http://schemas.openxmlformats.org/officeDocument/2006/relationships" xmlns:mc="http://schemas.openxmlformats.org/markup-compatibility/2006" xmlns:mv="urn:schemas-microsoft-com:mac:vml" xmlns:p="http://schemas.openxmlformats.org/presentationml/2006/main" xmlns:c="http://schemas.openxmlformats.org/drawingml/2006/chart" xmlns:dgm="http://schemas.openxmlformats.org/drawingml/2006/diagram" xmlns:o="urn:schemas-microsoft-com:office:office" xmlns:v="urn:schemas-microsoft-com:vml" xmlns:pvml="urn:schemas-microsoft-com:office:powerpoint" xmlns:com="http://schemas.openxmlformats.org/drawingml/2006/compatibility" xmlns:p14="http://schemas.microsoft.com/office/powerpoint/2010/main" xmlns:p15="http://schemas.microsoft.com/office/powerpoint/2012/main" xmlns:ahyp="http://schemas.microsoft.com/office/drawing/2018/hyperlinkcolor" matchingName="2 фактоида + текст">
+  <p:cSld name="2 фактоида + текст">
+    <p:spTree>
+      <p:nvGrpSpPr>
+        <p:cNvPr id="93" name="Shape 93"/>
+        <p:cNvGrpSpPr/>
+        <p:nvPr/>
+      </p:nvGrpSpPr>
+      <p:grpSpPr>
+        <a:xfrm>
+          <a:off x="0" y="0"/>
+          <a:ext cx="0" cy="0"/>
+          <a:chOff x="0" y="0"/>
+          <a:chExt cx="0" cy="0"/>
+        </a:xfrm>
+      </p:grpSpPr>
+      <p:sp>
+        <p:nvSpPr>
+          <p:cNvPr id="94" name="Google Shape;94;p11"/>
+          <p:cNvSpPr txBox="1"/>
+          <p:nvPr>
+            <p:ph idx="1" type="body"/>
+          </p:nvPr>
+        </p:nvSpPr>
+        <p:spPr>
+          <a:xfrm>
+            <a:off x="671514" y="1773238"/>
+            <a:ext cx="5135728" cy="4427537"/>
+          </a:xfrm>
+          <a:prstGeom prst="rect">
+            <a:avLst/>
+          </a:prstGeom>
+          <a:noFill/>
+          <a:ln>
+            <a:noFill/>
+          </a:ln>
+        </p:spPr>
+        <p:txBody>
+          <a:bodyPr anchorCtr="0" anchor="t" bIns="0" lIns="0" spcFirstLastPara="1" rIns="0" wrap="square" tIns="0">
+            <a:normAutofit/>
+          </a:bodyPr>
+          <a:lstStyle>
+            <a:lvl1pPr indent="-228600" lvl="0" marL="457200" algn="l">
+              <a:lnSpc>
+                <a:spcPct val="110000"/>
+              </a:lnSpc>
+              <a:spcBef>
+                <a:spcPts val="1000"/>
+              </a:spcBef>
+              <a:spcAft>
+                <a:spcPts val="0"/>
+              </a:spcAft>
+              <a:buClr>
+                <a:schemeClr val="dk1"/>
+              </a:buClr>
+              <a:buSzPts val="1800"/>
+              <a:buNone/>
+              <a:defRPr/>
+            </a:lvl1pPr>
+            <a:lvl2pPr indent="-342900" lvl="1" marL="914400" algn="l">
+              <a:lnSpc>
+                <a:spcPct val="110000"/>
+              </a:lnSpc>
+              <a:spcBef>
+                <a:spcPts val="500"/>
+              </a:spcBef>
+              <a:spcAft>
+                <a:spcPts val="0"/>
+              </a:spcAft>
+              <a:buSzPts val="1800"/>
+              <a:buChar char="•"/>
+              <a:defRPr/>
+            </a:lvl2pPr>
+            <a:lvl3pPr indent="-342900" lvl="2" marL="1371600" algn="l">
+              <a:lnSpc>
+                <a:spcPct val="110000"/>
+              </a:lnSpc>
+              <a:spcBef>
+                <a:spcPts val="500"/>
+              </a:spcBef>
+              <a:spcAft>
+                <a:spcPts val="0"/>
+              </a:spcAft>
+              <a:buClr>
+                <a:schemeClr val="dk1"/>
+              </a:buClr>
+              <a:buSzPts val="1800"/>
+              <a:buChar char="−"/>
+              <a:defRPr/>
+            </a:lvl3pPr>
+            <a:lvl4pPr indent="-342900" lvl="3" marL="1828800" algn="l">
+              <a:lnSpc>
+                <a:spcPct val="90000"/>
+              </a:lnSpc>
+              <a:spcBef>
+                <a:spcPts val="500"/>
+              </a:spcBef>
+              <a:spcAft>
+                <a:spcPts val="0"/>
+              </a:spcAft>
+              <a:buClr>
+                <a:schemeClr val="dk1"/>
+              </a:buClr>
+              <a:buSzPts val="1800"/>
+              <a:buChar char="•"/>
+              <a:defRPr/>
+            </a:lvl4pPr>
+            <a:lvl5pPr indent="-342900" lvl="4" marL="2286000" algn="l">
+              <a:lnSpc>
+                <a:spcPct val="90000"/>
+              </a:lnSpc>
+              <a:spcBef>
+                <a:spcPts val="500"/>
+              </a:spcBef>
+              <a:spcAft>
+                <a:spcPts val="0"/>
+              </a:spcAft>
+              <a:buClr>
+                <a:schemeClr val="dk1"/>
+              </a:buClr>
+              <a:buSzPts val="1800"/>
+              <a:buChar char="•"/>
+              <a:defRPr/>
+            </a:lvl5pPr>
+            <a:lvl6pPr indent="-342900" lvl="5" marL="2743200" algn="l">
+              <a:lnSpc>
+                <a:spcPct val="90000"/>
+              </a:lnSpc>
+              <a:spcBef>
+                <a:spcPts val="500"/>
+              </a:spcBef>
+              <a:spcAft>
+                <a:spcPts val="0"/>
+              </a:spcAft>
+              <a:buClr>
+                <a:schemeClr val="dk1"/>
+              </a:buClr>
+              <a:buSzPts val="1800"/>
+              <a:buChar char="•"/>
+              <a:defRPr/>
+            </a:lvl6pPr>
+            <a:lvl7pPr indent="-342900" lvl="6" marL="3200400" algn="l">
+              <a:lnSpc>
+                <a:spcPct val="90000"/>
+              </a:lnSpc>
+              <a:spcBef>
+                <a:spcPts val="500"/>
+              </a:spcBef>
+              <a:spcAft>
+                <a:spcPts val="0"/>
+              </a:spcAft>
+              <a:buClr>
+                <a:schemeClr val="dk1"/>
+              </a:buClr>
+              <a:buSzPts val="1800"/>
+              <a:buChar char="•"/>
+              <a:defRPr/>
+            </a:lvl7pPr>
+            <a:lvl8pPr indent="-342900" lvl="7" marL="3657600" algn="l">
+              <a:lnSpc>
+                <a:spcPct val="90000"/>
+              </a:lnSpc>
+              <a:spcBef>
+                <a:spcPts val="500"/>
+              </a:spcBef>
+              <a:spcAft>
+                <a:spcPts val="0"/>
+              </a:spcAft>
+              <a:buClr>
+                <a:schemeClr val="dk1"/>
+              </a:buClr>
+              <a:buSzPts val="1800"/>
+              <a:buChar char="•"/>
+              <a:defRPr/>
+            </a:lvl8pPr>
+            <a:lvl9pPr indent="-342900" lvl="8" marL="4114800" algn="l">
+              <a:lnSpc>
+                <a:spcPct val="90000"/>
+              </a:lnSpc>
+              <a:spcBef>
+                <a:spcPts val="500"/>
+              </a:spcBef>
+              <a:spcAft>
+                <a:spcPts val="0"/>
+              </a:spcAft>
+              <a:buClr>
+                <a:schemeClr val="dk1"/>
+              </a:buClr>
+              <a:buSzPts val="1800"/>
+              <a:buChar char="•"/>
+              <a:defRPr/>
+            </a:lvl9pPr>
+          </a:lstStyle>
+          <a:p/>
+        </p:txBody>
+      </p:sp>
+      <p:sp>
+        <p:nvSpPr>
+          <p:cNvPr id="95" name="Google Shape;95;p11"/>
+          <p:cNvSpPr txBox="1"/>
+          <p:nvPr>
+            <p:ph type="title"/>
+          </p:nvPr>
+        </p:nvSpPr>
+        <p:spPr>
+          <a:xfrm>
+            <a:off x="677334" y="692150"/>
+            <a:ext cx="10855854" cy="644241"/>
+          </a:xfrm>
+          <a:prstGeom prst="rect">
+            <a:avLst/>
+          </a:prstGeom>
+          <a:noFill/>
+          <a:ln>
+            <a:noFill/>
+          </a:ln>
+        </p:spPr>
+        <p:txBody>
+          <a:bodyPr anchorCtr="0" anchor="t" bIns="0" lIns="0" spcFirstLastPara="1" rIns="0" wrap="square" tIns="0">
+            <a:noAutofit/>
+          </a:bodyPr>
+          <a:lstStyle>
+            <a:lvl1pPr lvl="0" algn="l">
+              <a:lnSpc>
+                <a:spcPct val="90000"/>
+              </a:lnSpc>
+              <a:spcBef>
+                <a:spcPts val="0"/>
+              </a:spcBef>
+              <a:spcAft>
+                <a:spcPts val="0"/>
+              </a:spcAft>
+              <a:buClr>
+                <a:schemeClr val="accent1"/>
+              </a:buClr>
+              <a:buSzPts val="3600"/>
+              <a:buFont typeface="Play"/>
+              <a:buNone/>
+              <a:defRPr>
+                <a:solidFill>
+                  <a:schemeClr val="accent1"/>
+                </a:solidFill>
+              </a:defRPr>
+            </a:lvl1pPr>
+            <a:lvl2pPr lvl="1">
+              <a:spcBef>
+                <a:spcPts val="0"/>
+              </a:spcBef>
+              <a:spcAft>
+                <a:spcPts val="0"/>
+              </a:spcAft>
+              <a:buSzPts val="1400"/>
+              <a:buNone/>
+              <a:defRPr/>
+            </a:lvl2pPr>
+            <a:lvl3pPr lvl="2">
+              <a:spcBef>
+                <a:spcPts val="0"/>
+              </a:spcBef>
+              <a:spcAft>
+                <a:spcPts val="0"/>
+              </a:spcAft>
+              <a:buSzPts val="1400"/>
+              <a:buNone/>
+              <a:defRPr/>
+            </a:lvl3pPr>
+            <a:lvl4pPr lvl="3">
+              <a:spcBef>
+                <a:spcPts val="0"/>
+              </a:spcBef>
+              <a:spcAft>
+                <a:spcPts val="0"/>
+              </a:spcAft>
+              <a:buSzPts val="1400"/>
+              <a:buNone/>
+              <a:defRPr/>
+            </a:lvl4pPr>
+            <a:lvl5pPr lvl="4">
+              <a:spcBef>
+                <a:spcPts val="0"/>
+              </a:spcBef>
+              <a:spcAft>
+                <a:spcPts val="0"/>
+              </a:spcAft>
+              <a:buSzPts val="1400"/>
+              <a:buNone/>
+              <a:defRPr/>
+            </a:lvl5pPr>
+            <a:lvl6pPr lvl="5">
+              <a:spcBef>
+                <a:spcPts val="0"/>
+              </a:spcBef>
+              <a:spcAft>
+                <a:spcPts val="0"/>
+              </a:spcAft>
+              <a:buSzPts val="1400"/>
+              <a:buNone/>
+              <a:defRPr/>
+            </a:lvl6pPr>
+            <a:lvl7pPr lvl="6">
+              <a:spcBef>
+                <a:spcPts val="0"/>
+              </a:spcBef>
+              <a:spcAft>
+                <a:spcPts val="0"/>
+              </a:spcAft>
+              <a:buSzPts val="1400"/>
+              <a:buNone/>
+              <a:defRPr/>
+            </a:lvl7pPr>
+            <a:lvl8pPr lvl="7">
+              <a:spcBef>
+                <a:spcPts val="0"/>
+              </a:spcBef>
+              <a:spcAft>
+                <a:spcPts val="0"/>
+              </a:spcAft>
+              <a:buSzPts val="1400"/>
+              <a:buNone/>
+              <a:defRPr/>
+            </a:lvl8pPr>
+            <a:lvl9pPr lvl="8">
+              <a:spcBef>
+                <a:spcPts val="0"/>
+              </a:spcBef>
+              <a:spcAft>
+                <a:spcPts val="0"/>
+              </a:spcAft>
+              <a:buSzPts val="1400"/>
+              <a:buNone/>
+              <a:defRPr/>
+            </a:lvl9pPr>
+          </a:lstStyle>
+          <a:p/>
+        </p:txBody>
+      </p:sp>
+      <p:sp>
+        <p:nvSpPr>
+          <p:cNvPr id="96" name="Google Shape;96;p11"/>
+          <p:cNvSpPr txBox="1"/>
+          <p:nvPr>
+            <p:ph idx="11" type="ftr"/>
+          </p:nvPr>
+        </p:nvSpPr>
+        <p:spPr>
+          <a:xfrm>
+            <a:off x="671513" y="167981"/>
+            <a:ext cx="10874375" cy="241437"/>
+          </a:xfrm>
+          <a:prstGeom prst="rect">
+            <a:avLst/>
+          </a:prstGeom>
+          <a:noFill/>
+          <a:ln>
+            <a:noFill/>
+          </a:ln>
+        </p:spPr>
+        <p:txBody>
+          <a:bodyPr anchorCtr="0" anchor="t" bIns="45700" lIns="0" spcFirstLastPara="1" rIns="91425" wrap="square" tIns="45700">
+            <a:noAutofit/>
+          </a:bodyPr>
+          <a:lstStyle>
+            <a:lvl1pPr lvl="0" marR="0" rtl="0" algn="l">
+              <a:spcBef>
+                <a:spcPts val="0"/>
+              </a:spcBef>
+              <a:spcAft>
+                <a:spcPts val="0"/>
+              </a:spcAft>
+              <a:buSzPts val="1400"/>
+              <a:buNone/>
+              <a:defRPr b="0" i="0" sz="1800" u="none" cap="none" strike="noStrike">
+                <a:solidFill>
+                  <a:schemeClr val="dk1"/>
+                </a:solidFill>
+                <a:latin typeface="Arial"/>
+                <a:ea typeface="Arial"/>
+                <a:cs typeface="Arial"/>
+                <a:sym typeface="Arial"/>
+              </a:defRPr>
+            </a:lvl1pPr>
+            <a:lvl2pPr lvl="1" marR="0" rtl="0" algn="l">
+              <a:spcBef>
+                <a:spcPts val="0"/>
+              </a:spcBef>
+              <a:spcAft>
+                <a:spcPts val="0"/>
+              </a:spcAft>
+              <a:buSzPts val="1400"/>
+              <a:buNone/>
+              <a:defRPr b="0" i="0" sz="1800" u="none" cap="none" strike="noStrike">
+                <a:solidFill>
+                  <a:schemeClr val="dk1"/>
+                </a:solidFill>
+                <a:latin typeface="Arial"/>
+                <a:ea typeface="Arial"/>
+                <a:cs typeface="Arial"/>
+                <a:sym typeface="Arial"/>
+              </a:defRPr>
+            </a:lvl2pPr>
+            <a:lvl3pPr lvl="2" marR="0" rtl="0" algn="l">
+              <a:spcBef>
+                <a:spcPts val="0"/>
+              </a:spcBef>
+              <a:spcAft>
+                <a:spcPts val="0"/>
+              </a:spcAft>
+              <a:buSzPts val="1400"/>
+              <a:buNone/>
+              <a:defRPr b="0" i="0" sz="1800" u="none" cap="none" strike="noStrike">
+                <a:solidFill>
+                  <a:schemeClr val="dk1"/>
+                </a:solidFill>
+                <a:latin typeface="Arial"/>
+                <a:ea typeface="Arial"/>
+                <a:cs typeface="Arial"/>
+                <a:sym typeface="Arial"/>
+              </a:defRPr>
+            </a:lvl3pPr>
+            <a:lvl4pPr lvl="3" marR="0" rtl="0" algn="l">
+              <a:spcBef>
+                <a:spcPts val="0"/>
+              </a:spcBef>
+              <a:spcAft>
+                <a:spcPts val="0"/>
+              </a:spcAft>
+              <a:buSzPts val="1400"/>
+              <a:buNone/>
+              <a:defRPr b="0" i="0" sz="1800" u="none" cap="none" strike="noStrike">
+                <a:solidFill>
+                  <a:schemeClr val="dk1"/>
+                </a:solidFill>
+                <a:latin typeface="Arial"/>
+                <a:ea typeface="Arial"/>
+                <a:cs typeface="Arial"/>
+                <a:sym typeface="Arial"/>
+              </a:defRPr>
+            </a:lvl4pPr>
+            <a:lvl5pPr lvl="4" marR="0" rtl="0" algn="l">
+              <a:spcBef>
+                <a:spcPts val="0"/>
+              </a:spcBef>
+              <a:spcAft>
+                <a:spcPts val="0"/>
+              </a:spcAft>
+              <a:buSzPts val="1400"/>
+              <a:buNone/>
+              <a:defRPr b="0" i="0" sz="1800" u="none" cap="none" strike="noStrike">
+                <a:solidFill>
+                  <a:schemeClr val="dk1"/>
+                </a:solidFill>
+                <a:latin typeface="Arial"/>
+                <a:ea typeface="Arial"/>
+                <a:cs typeface="Arial"/>
+                <a:sym typeface="Arial"/>
+              </a:defRPr>
+            </a:lvl5pPr>
+            <a:lvl6pPr lvl="5" marR="0" rtl="0" algn="l">
+              <a:spcBef>
+                <a:spcPts val="0"/>
+              </a:spcBef>
+              <a:spcAft>
+                <a:spcPts val="0"/>
+              </a:spcAft>
+              <a:buSzPts val="1400"/>
+              <a:buNone/>
+              <a:defRPr b="0" i="0" sz="1800" u="none" cap="none" strike="noStrike">
+                <a:solidFill>
+                  <a:schemeClr val="dk1"/>
+                </a:solidFill>
+                <a:latin typeface="Arial"/>
+                <a:ea typeface="Arial"/>
+                <a:cs typeface="Arial"/>
+                <a:sym typeface="Arial"/>
+              </a:defRPr>
+            </a:lvl6pPr>
+            <a:lvl7pPr lvl="6" marR="0" rtl="0" algn="l">
+              <a:spcBef>
+                <a:spcPts val="0"/>
+              </a:spcBef>
+              <a:spcAft>
+                <a:spcPts val="0"/>
+              </a:spcAft>
+              <a:buSzPts val="1400"/>
+              <a:buNone/>
+              <a:defRPr b="0" i="0" sz="1800" u="none" cap="none" strike="noStrike">
+                <a:solidFill>
+                  <a:schemeClr val="dk1"/>
+                </a:solidFill>
+                <a:latin typeface="Arial"/>
+                <a:ea typeface="Arial"/>
+                <a:cs typeface="Arial"/>
+                <a:sym typeface="Arial"/>
+              </a:defRPr>
+            </a:lvl7pPr>
+            <a:lvl8pPr lvl="7" marR="0" rtl="0" algn="l">
+              <a:spcBef>
+                <a:spcPts val="0"/>
+              </a:spcBef>
+              <a:spcAft>
+                <a:spcPts val="0"/>
+              </a:spcAft>
+              <a:buSzPts val="1400"/>
+              <a:buNone/>
+              <a:defRPr b="0" i="0" sz="1800" u="none" cap="none" strike="noStrike">
+                <a:solidFill>
+                  <a:schemeClr val="dk1"/>
+                </a:solidFill>
+                <a:latin typeface="Arial"/>
+                <a:ea typeface="Arial"/>
+                <a:cs typeface="Arial"/>
+                <a:sym typeface="Arial"/>
+              </a:defRPr>
+            </a:lvl8pPr>
+            <a:lvl9pPr lvl="8" marR="0" rtl="0" algn="l">
+              <a:spcBef>
+                <a:spcPts val="0"/>
+              </a:spcBef>
+              <a:spcAft>
+                <a:spcPts val="0"/>
+              </a:spcAft>
+              <a:buSzPts val="1400"/>
+              <a:buNone/>
+              <a:defRPr b="0" i="0" sz="1800" u="none" cap="none" strike="noStrike">
+                <a:solidFill>
+                  <a:schemeClr val="dk1"/>
+                </a:solidFill>
+                <a:latin typeface="Arial"/>
+                <a:ea typeface="Arial"/>
+                <a:cs typeface="Arial"/>
+                <a:sym typeface="Arial"/>
+              </a:defRPr>
+            </a:lvl9pPr>
+          </a:lstStyle>
+          <a:p/>
+        </p:txBody>
+      </p:sp>
+      <p:sp>
+        <p:nvSpPr>
+          <p:cNvPr id="97" name="Google Shape;97;p11"/>
+          <p:cNvSpPr txBox="1"/>
+          <p:nvPr>
+            <p:ph idx="2" type="body"/>
+          </p:nvPr>
+        </p:nvSpPr>
+        <p:spPr>
+          <a:xfrm>
+            <a:off x="6097339" y="3864033"/>
+            <a:ext cx="5417327" cy="1080000"/>
+          </a:xfrm>
+          <a:prstGeom prst="rect">
+            <a:avLst/>
+          </a:prstGeom>
+          <a:noFill/>
+          <a:ln>
+            <a:noFill/>
+          </a:ln>
+        </p:spPr>
+        <p:txBody>
+          <a:bodyPr anchorCtr="0" anchor="b" bIns="0" lIns="0" spcFirstLastPara="1" rIns="0" wrap="square" tIns="0">
+            <a:noAutofit/>
+          </a:bodyPr>
+          <a:lstStyle>
+            <a:lvl1pPr indent="-228600" lvl="0" marL="457200" algn="l">
+              <a:lnSpc>
+                <a:spcPct val="100000"/>
+              </a:lnSpc>
+              <a:spcBef>
+                <a:spcPts val="1000"/>
+              </a:spcBef>
+              <a:spcAft>
+                <a:spcPts val="0"/>
+              </a:spcAft>
+              <a:buClr>
+                <a:schemeClr val="dk1"/>
+              </a:buClr>
+              <a:buSzPts val="8800"/>
+              <a:buNone/>
+              <a:defRPr b="1" i="0" sz="8800">
+                <a:solidFill>
+                  <a:schemeClr val="dk1"/>
+                </a:solidFill>
+                <a:latin typeface="Play"/>
+                <a:ea typeface="Play"/>
+                <a:cs typeface="Play"/>
+                <a:sym typeface="Play"/>
+              </a:defRPr>
+            </a:lvl1pPr>
+            <a:lvl2pPr indent="-342900" lvl="1" marL="914400" algn="l">
+              <a:lnSpc>
+                <a:spcPct val="110000"/>
+              </a:lnSpc>
+              <a:spcBef>
+                <a:spcPts val="500"/>
+              </a:spcBef>
+              <a:spcAft>
+                <a:spcPts val="0"/>
+              </a:spcAft>
+              <a:buSzPts val="1800"/>
+              <a:buChar char="•"/>
+              <a:defRPr/>
+            </a:lvl2pPr>
+            <a:lvl3pPr indent="-342900" lvl="2" marL="1371600" algn="l">
+              <a:lnSpc>
+                <a:spcPct val="110000"/>
+              </a:lnSpc>
+              <a:spcBef>
+                <a:spcPts val="500"/>
+              </a:spcBef>
+              <a:spcAft>
+                <a:spcPts val="0"/>
+              </a:spcAft>
+              <a:buClr>
+                <a:schemeClr val="dk1"/>
+              </a:buClr>
+              <a:buSzPts val="1800"/>
+              <a:buChar char="−"/>
+              <a:defRPr/>
+            </a:lvl3pPr>
+            <a:lvl4pPr indent="-342900" lvl="3" marL="1828800" algn="l">
+              <a:lnSpc>
+                <a:spcPct val="90000"/>
+              </a:lnSpc>
+              <a:spcBef>
+                <a:spcPts val="500"/>
+              </a:spcBef>
+              <a:spcAft>
+                <a:spcPts val="0"/>
+              </a:spcAft>
+              <a:buClr>
+                <a:schemeClr val="dk1"/>
+              </a:buClr>
+              <a:buSzPts val="1800"/>
+              <a:buChar char="•"/>
+              <a:defRPr/>
+            </a:lvl4pPr>
+            <a:lvl5pPr indent="-342900" lvl="4" marL="2286000" algn="l">
+              <a:lnSpc>
+                <a:spcPct val="90000"/>
+              </a:lnSpc>
+              <a:spcBef>
+                <a:spcPts val="500"/>
+              </a:spcBef>
+              <a:spcAft>
+                <a:spcPts val="0"/>
+              </a:spcAft>
+              <a:buClr>
+                <a:schemeClr val="dk1"/>
+              </a:buClr>
+              <a:buSzPts val="1800"/>
+              <a:buChar char="•"/>
+              <a:defRPr/>
+            </a:lvl5pPr>
+            <a:lvl6pPr indent="-342900" lvl="5" marL="2743200" algn="l">
+              <a:lnSpc>
+                <a:spcPct val="90000"/>
+              </a:lnSpc>
+              <a:spcBef>
+                <a:spcPts val="500"/>
+              </a:spcBef>
+              <a:spcAft>
+                <a:spcPts val="0"/>
+              </a:spcAft>
+              <a:buClr>
+                <a:schemeClr val="dk1"/>
+              </a:buClr>
+              <a:buSzPts val="1800"/>
+              <a:buChar char="•"/>
+              <a:defRPr/>
+            </a:lvl6pPr>
+            <a:lvl7pPr indent="-342900" lvl="6" marL="3200400" algn="l">
+              <a:lnSpc>
+                <a:spcPct val="90000"/>
+              </a:lnSpc>
+              <a:spcBef>
+                <a:spcPts val="500"/>
+              </a:spcBef>
+              <a:spcAft>
+                <a:spcPts val="0"/>
+              </a:spcAft>
+              <a:buClr>
+                <a:schemeClr val="dk1"/>
+              </a:buClr>
+              <a:buSzPts val="1800"/>
+              <a:buChar char="•"/>
+              <a:defRPr/>
+            </a:lvl7pPr>
+            <a:lvl8pPr indent="-342900" lvl="7" marL="3657600" algn="l">
+              <a:lnSpc>
+                <a:spcPct val="90000"/>
+              </a:lnSpc>
+              <a:spcBef>
+                <a:spcPts val="500"/>
+              </a:spcBef>
+              <a:spcAft>
+                <a:spcPts val="0"/>
+              </a:spcAft>
+              <a:buClr>
+                <a:schemeClr val="dk1"/>
+              </a:buClr>
+              <a:buSzPts val="1800"/>
+              <a:buChar char="•"/>
+              <a:defRPr/>
+            </a:lvl8pPr>
+            <a:lvl9pPr indent="-342900" lvl="8" marL="4114800" algn="l">
+              <a:lnSpc>
+                <a:spcPct val="90000"/>
+              </a:lnSpc>
+              <a:spcBef>
+                <a:spcPts val="500"/>
+              </a:spcBef>
+              <a:spcAft>
+                <a:spcPts val="0"/>
+              </a:spcAft>
+              <a:buClr>
+                <a:schemeClr val="dk1"/>
+              </a:buClr>
+              <a:buSzPts val="1800"/>
+              <a:buChar char="•"/>
+              <a:defRPr/>
+            </a:lvl9pPr>
+          </a:lstStyle>
+          <a:p/>
+        </p:txBody>
+      </p:sp>
+      <p:sp>
+        <p:nvSpPr>
+          <p:cNvPr id="98" name="Google Shape;98;p11"/>
+          <p:cNvSpPr txBox="1"/>
+          <p:nvPr>
+            <p:ph idx="3" type="body"/>
+          </p:nvPr>
+        </p:nvSpPr>
+        <p:spPr>
+          <a:xfrm>
+            <a:off x="6097338" y="5058095"/>
+            <a:ext cx="5417327" cy="356617"/>
+          </a:xfrm>
+          <a:prstGeom prst="rect">
+            <a:avLst/>
+          </a:prstGeom>
+          <a:noFill/>
+          <a:ln>
+            <a:noFill/>
+          </a:ln>
+        </p:spPr>
+        <p:txBody>
+          <a:bodyPr anchorCtr="0" anchor="t" bIns="0" lIns="0" spcFirstLastPara="1" rIns="0" wrap="square" tIns="0">
+            <a:normAutofit/>
+          </a:bodyPr>
+          <a:lstStyle>
+            <a:lvl1pPr indent="-228600" lvl="0" marL="457200" algn="l">
+              <a:lnSpc>
+                <a:spcPct val="110000"/>
+              </a:lnSpc>
+              <a:spcBef>
+                <a:spcPts val="1000"/>
+              </a:spcBef>
+              <a:spcAft>
+                <a:spcPts val="0"/>
+              </a:spcAft>
+              <a:buClr>
+                <a:schemeClr val="dk1"/>
+              </a:buClr>
+              <a:buSzPts val="1800"/>
+              <a:buNone/>
+              <a:defRPr sz="1800"/>
+            </a:lvl1pPr>
+            <a:lvl2pPr indent="-342900" lvl="1" marL="914400" algn="l">
+              <a:lnSpc>
+                <a:spcPct val="110000"/>
+              </a:lnSpc>
+              <a:spcBef>
+                <a:spcPts val="500"/>
+              </a:spcBef>
+              <a:spcAft>
+                <a:spcPts val="0"/>
+              </a:spcAft>
+              <a:buSzPts val="1800"/>
+              <a:buChar char="•"/>
+              <a:defRPr/>
+            </a:lvl2pPr>
+            <a:lvl3pPr indent="-342900" lvl="2" marL="1371600" algn="l">
+              <a:lnSpc>
+                <a:spcPct val="110000"/>
+              </a:lnSpc>
+              <a:spcBef>
+                <a:spcPts val="500"/>
+              </a:spcBef>
+              <a:spcAft>
+                <a:spcPts val="0"/>
+              </a:spcAft>
+              <a:buClr>
+                <a:schemeClr val="dk1"/>
+              </a:buClr>
+              <a:buSzPts val="1800"/>
+              <a:buChar char="−"/>
+              <a:defRPr/>
+            </a:lvl3pPr>
+            <a:lvl4pPr indent="-342900" lvl="3" marL="1828800" algn="l">
+              <a:lnSpc>
+                <a:spcPct val="90000"/>
+              </a:lnSpc>
+              <a:spcBef>
+                <a:spcPts val="500"/>
+              </a:spcBef>
+              <a:spcAft>
+                <a:spcPts val="0"/>
+              </a:spcAft>
+              <a:buClr>
+                <a:schemeClr val="dk1"/>
+              </a:buClr>
+              <a:buSzPts val="1800"/>
+              <a:buChar char="•"/>
+              <a:defRPr/>
+            </a:lvl4pPr>
+            <a:lvl5pPr indent="-342900" lvl="4" marL="2286000" algn="l">
+              <a:lnSpc>
+                <a:spcPct val="90000"/>
+              </a:lnSpc>
+              <a:spcBef>
+                <a:spcPts val="500"/>
+              </a:spcBef>
+              <a:spcAft>
+                <a:spcPts val="0"/>
+              </a:spcAft>
+              <a:buClr>
+                <a:schemeClr val="dk1"/>
+              </a:buClr>
+              <a:buSzPts val="1800"/>
+              <a:buChar char="•"/>
+              <a:defRPr/>
+            </a:lvl5pPr>
+            <a:lvl6pPr indent="-342900" lvl="5" marL="2743200" algn="l">
+              <a:lnSpc>
+                <a:spcPct val="90000"/>
+              </a:lnSpc>
+              <a:spcBef>
+                <a:spcPts val="500"/>
+              </a:spcBef>
+              <a:spcAft>
+                <a:spcPts val="0"/>
+              </a:spcAft>
+              <a:buClr>
+                <a:schemeClr val="dk1"/>
+              </a:buClr>
+              <a:buSzPts val="1800"/>
+              <a:buChar char="•"/>
+              <a:defRPr/>
+            </a:lvl6pPr>
+            <a:lvl7pPr indent="-342900" lvl="6" marL="3200400" algn="l">
+              <a:lnSpc>
+                <a:spcPct val="90000"/>
+              </a:lnSpc>
+              <a:spcBef>
+                <a:spcPts val="500"/>
+              </a:spcBef>
+              <a:spcAft>
+                <a:spcPts val="0"/>
+              </a:spcAft>
+              <a:buClr>
+                <a:schemeClr val="dk1"/>
+              </a:buClr>
+              <a:buSzPts val="1800"/>
+              <a:buChar char="•"/>
+              <a:defRPr/>
+            </a:lvl7pPr>
+            <a:lvl8pPr indent="-342900" lvl="7" marL="3657600" algn="l">
+              <a:lnSpc>
+                <a:spcPct val="90000"/>
+              </a:lnSpc>
+              <a:spcBef>
+                <a:spcPts val="500"/>
+              </a:spcBef>
+              <a:spcAft>
+                <a:spcPts val="0"/>
+              </a:spcAft>
+              <a:buClr>
+                <a:schemeClr val="dk1"/>
+              </a:buClr>
+              <a:buSzPts val="1800"/>
+              <a:buChar char="•"/>
+              <a:defRPr/>
+            </a:lvl8pPr>
+            <a:lvl9pPr indent="-342900" lvl="8" marL="4114800" algn="l">
+              <a:lnSpc>
+                <a:spcPct val="90000"/>
+              </a:lnSpc>
+              <a:spcBef>
+                <a:spcPts val="500"/>
+              </a:spcBef>
+              <a:spcAft>
+                <a:spcPts val="0"/>
+              </a:spcAft>
+              <a:buClr>
+                <a:schemeClr val="dk1"/>
+              </a:buClr>
+              <a:buSzPts val="1800"/>
+              <a:buChar char="•"/>
+              <a:defRPr/>
+            </a:lvl9pPr>
+          </a:lstStyle>
+          <a:p/>
+        </p:txBody>
+      </p:sp>
+      <p:sp>
+        <p:nvSpPr>
+          <p:cNvPr id="99" name="Google Shape;99;p11"/>
+          <p:cNvSpPr txBox="1"/>
+          <p:nvPr>
+            <p:ph idx="4" type="body"/>
+          </p:nvPr>
+        </p:nvSpPr>
+        <p:spPr>
+          <a:xfrm>
+            <a:off x="6096000" y="1773238"/>
+            <a:ext cx="5417327" cy="1080000"/>
+          </a:xfrm>
+          <a:prstGeom prst="rect">
+            <a:avLst/>
+          </a:prstGeom>
+          <a:noFill/>
+          <a:ln>
+            <a:noFill/>
+          </a:ln>
+        </p:spPr>
+        <p:txBody>
+          <a:bodyPr anchorCtr="0" anchor="b" bIns="0" lIns="0" spcFirstLastPara="1" rIns="0" wrap="square" tIns="0">
+            <a:noAutofit/>
+          </a:bodyPr>
+          <a:lstStyle>
+            <a:lvl1pPr indent="-228600" lvl="0" marL="457200" algn="l">
+              <a:lnSpc>
+                <a:spcPct val="100000"/>
+              </a:lnSpc>
+              <a:spcBef>
+                <a:spcPts val="1000"/>
+              </a:spcBef>
+              <a:spcAft>
+                <a:spcPts val="0"/>
+              </a:spcAft>
+              <a:buClr>
+                <a:schemeClr val="dk1"/>
+              </a:buClr>
+              <a:buSzPts val="8800"/>
+              <a:buNone/>
+              <a:defRPr b="1" i="0" sz="8800">
+                <a:solidFill>
+                  <a:schemeClr val="dk1"/>
+                </a:solidFill>
+                <a:latin typeface="Play"/>
+                <a:ea typeface="Play"/>
+                <a:cs typeface="Play"/>
+                <a:sym typeface="Play"/>
+              </a:defRPr>
+            </a:lvl1pPr>
+            <a:lvl2pPr indent="-342900" lvl="1" marL="914400" algn="l">
+              <a:lnSpc>
+                <a:spcPct val="110000"/>
+              </a:lnSpc>
+              <a:spcBef>
+                <a:spcPts val="500"/>
+              </a:spcBef>
+              <a:spcAft>
+                <a:spcPts val="0"/>
+              </a:spcAft>
+              <a:buSzPts val="1800"/>
+              <a:buChar char="•"/>
+              <a:defRPr/>
+            </a:lvl2pPr>
+            <a:lvl3pPr indent="-342900" lvl="2" marL="1371600" algn="l">
+              <a:lnSpc>
+                <a:spcPct val="110000"/>
+              </a:lnSpc>
+              <a:spcBef>
+                <a:spcPts val="500"/>
+              </a:spcBef>
+              <a:spcAft>
+                <a:spcPts val="0"/>
+              </a:spcAft>
+              <a:buClr>
+                <a:schemeClr val="dk1"/>
+              </a:buClr>
+              <a:buSzPts val="1800"/>
+              <a:buChar char="−"/>
+              <a:defRPr/>
+            </a:lvl3pPr>
+            <a:lvl4pPr indent="-342900" lvl="3" marL="1828800" algn="l">
+              <a:lnSpc>
+                <a:spcPct val="90000"/>
+              </a:lnSpc>
+              <a:spcBef>
+                <a:spcPts val="500"/>
+              </a:spcBef>
+              <a:spcAft>
+                <a:spcPts val="0"/>
+              </a:spcAft>
+              <a:buClr>
+                <a:schemeClr val="dk1"/>
+              </a:buClr>
+              <a:buSzPts val="1800"/>
+              <a:buChar char="•"/>
+              <a:defRPr/>
+            </a:lvl4pPr>
+            <a:lvl5pPr indent="-342900" lvl="4" marL="2286000" algn="l">
+              <a:lnSpc>
+                <a:spcPct val="90000"/>
+              </a:lnSpc>
+              <a:spcBef>
+                <a:spcPts val="500"/>
+              </a:spcBef>
+              <a:spcAft>
+                <a:spcPts val="0"/>
+              </a:spcAft>
+              <a:buClr>
+                <a:schemeClr val="dk1"/>
+              </a:buClr>
+              <a:buSzPts val="1800"/>
+              <a:buChar char="•"/>
+              <a:defRPr/>
+            </a:lvl5pPr>
+            <a:lvl6pPr indent="-342900" lvl="5" marL="2743200" algn="l">
+              <a:lnSpc>
+                <a:spcPct val="90000"/>
+              </a:lnSpc>
+              <a:spcBef>
+                <a:spcPts val="500"/>
+              </a:spcBef>
+              <a:spcAft>
+                <a:spcPts val="0"/>
+              </a:spcAft>
+              <a:buClr>
+                <a:schemeClr val="dk1"/>
+              </a:buClr>
+              <a:buSzPts val="1800"/>
+              <a:buChar char="•"/>
+              <a:defRPr/>
+            </a:lvl6pPr>
+            <a:lvl7pPr indent="-342900" lvl="6" marL="3200400" algn="l">
+              <a:lnSpc>
+                <a:spcPct val="90000"/>
+              </a:lnSpc>
+              <a:spcBef>
+                <a:spcPts val="500"/>
+              </a:spcBef>
+              <a:spcAft>
+                <a:spcPts val="0"/>
+              </a:spcAft>
+              <a:buClr>
+                <a:schemeClr val="dk1"/>
+              </a:buClr>
+              <a:buSzPts val="1800"/>
+              <a:buChar char="•"/>
+              <a:defRPr/>
+            </a:lvl7pPr>
+            <a:lvl8pPr indent="-342900" lvl="7" marL="3657600" algn="l">
+              <a:lnSpc>
+                <a:spcPct val="90000"/>
+              </a:lnSpc>
+              <a:spcBef>
+                <a:spcPts val="500"/>
+              </a:spcBef>
+              <a:spcAft>
+                <a:spcPts val="0"/>
+              </a:spcAft>
+              <a:buClr>
+                <a:schemeClr val="dk1"/>
+              </a:buClr>
+              <a:buSzPts val="1800"/>
+              <a:buChar char="•"/>
+              <a:defRPr/>
+            </a:lvl8pPr>
+            <a:lvl9pPr indent="-342900" lvl="8" marL="4114800" algn="l">
+              <a:lnSpc>
+                <a:spcPct val="90000"/>
+              </a:lnSpc>
+              <a:spcBef>
+                <a:spcPts val="500"/>
+              </a:spcBef>
+              <a:spcAft>
+                <a:spcPts val="0"/>
+              </a:spcAft>
+              <a:buClr>
+                <a:schemeClr val="dk1"/>
+              </a:buClr>
+              <a:buSzPts val="1800"/>
+              <a:buChar char="•"/>
+              <a:defRPr/>
+            </a:lvl9pPr>
+          </a:lstStyle>
+          <a:p/>
+        </p:txBody>
+      </p:sp>
+      <p:sp>
+        <p:nvSpPr>
+          <p:cNvPr id="100" name="Google Shape;100;p11"/>
+          <p:cNvSpPr txBox="1"/>
+          <p:nvPr>
+            <p:ph idx="5" type="body"/>
+          </p:nvPr>
+        </p:nvSpPr>
+        <p:spPr>
+          <a:xfrm>
+            <a:off x="6096000" y="2967300"/>
+            <a:ext cx="5417327" cy="356617"/>
+          </a:xfrm>
+          <a:prstGeom prst="rect">
+            <a:avLst/>
+          </a:prstGeom>
+          <a:noFill/>
+          <a:ln>
+            <a:noFill/>
+          </a:ln>
+        </p:spPr>
+        <p:txBody>
+          <a:bodyPr anchorCtr="0" anchor="t" bIns="0" lIns="0" spcFirstLastPara="1" rIns="0" wrap="square" tIns="0">
+            <a:normAutofit/>
+          </a:bodyPr>
+          <a:lstStyle>
+            <a:lvl1pPr indent="-228600" lvl="0" marL="457200" algn="l">
+              <a:lnSpc>
+                <a:spcPct val="110000"/>
+              </a:lnSpc>
+              <a:spcBef>
+                <a:spcPts val="1000"/>
+              </a:spcBef>
+              <a:spcAft>
+                <a:spcPts val="0"/>
+              </a:spcAft>
+              <a:buClr>
+                <a:schemeClr val="dk1"/>
+              </a:buClr>
+              <a:buSzPts val="1800"/>
+              <a:buNone/>
+              <a:defRPr sz="1800"/>
+            </a:lvl1pPr>
+            <a:lvl2pPr indent="-342900" lvl="1" marL="914400" algn="l">
+              <a:lnSpc>
+                <a:spcPct val="110000"/>
+              </a:lnSpc>
+              <a:spcBef>
+                <a:spcPts val="500"/>
+              </a:spcBef>
+              <a:spcAft>
+                <a:spcPts val="0"/>
+              </a:spcAft>
+              <a:buSzPts val="1800"/>
+              <a:buChar char="•"/>
+              <a:defRPr/>
+            </a:lvl2pPr>
+            <a:lvl3pPr indent="-342900" lvl="2" marL="1371600" algn="l">
+              <a:lnSpc>
+                <a:spcPct val="110000"/>
+              </a:lnSpc>
+              <a:spcBef>
+                <a:spcPts val="500"/>
+              </a:spcBef>
+              <a:spcAft>
+                <a:spcPts val="0"/>
+              </a:spcAft>
+              <a:buClr>
+                <a:schemeClr val="dk1"/>
+              </a:buClr>
+              <a:buSzPts val="1800"/>
+              <a:buChar char="−"/>
+              <a:defRPr/>
+            </a:lvl3pPr>
+            <a:lvl4pPr indent="-342900" lvl="3" marL="1828800" algn="l">
+              <a:lnSpc>
+                <a:spcPct val="90000"/>
+              </a:lnSpc>
+              <a:spcBef>
+                <a:spcPts val="500"/>
+              </a:spcBef>
+              <a:spcAft>
+                <a:spcPts val="0"/>
+              </a:spcAft>
+              <a:buClr>
+                <a:schemeClr val="dk1"/>
+              </a:buClr>
+              <a:buSzPts val="1800"/>
+              <a:buChar char="•"/>
+              <a:defRPr/>
+            </a:lvl4pPr>
+            <a:lvl5pPr indent="-342900" lvl="4" marL="2286000" algn="l">
+              <a:lnSpc>
+                <a:spcPct val="90000"/>
+              </a:lnSpc>
+              <a:spcBef>
+                <a:spcPts val="500"/>
+              </a:spcBef>
+              <a:spcAft>
+                <a:spcPts val="0"/>
+              </a:spcAft>
+              <a:buClr>
+                <a:schemeClr val="dk1"/>
+              </a:buClr>
+              <a:buSzPts val="1800"/>
+              <a:buChar char="•"/>
+              <a:defRPr/>
+            </a:lvl5pPr>
+            <a:lvl6pPr indent="-342900" lvl="5" marL="2743200" algn="l">
+              <a:lnSpc>
+                <a:spcPct val="90000"/>
+              </a:lnSpc>
+              <a:spcBef>
+                <a:spcPts val="500"/>
+              </a:spcBef>
+              <a:spcAft>
+                <a:spcPts val="0"/>
+              </a:spcAft>
+              <a:buClr>
+                <a:schemeClr val="dk1"/>
+              </a:buClr>
+              <a:buSzPts val="1800"/>
+              <a:buChar char="•"/>
+              <a:defRPr/>
+            </a:lvl6pPr>
+            <a:lvl7pPr indent="-342900" lvl="6" marL="3200400" algn="l">
+              <a:lnSpc>
+                <a:spcPct val="90000"/>
+              </a:lnSpc>
+              <a:spcBef>
+                <a:spcPts val="500"/>
+              </a:spcBef>
+              <a:spcAft>
+                <a:spcPts val="0"/>
+              </a:spcAft>
+              <a:buClr>
+                <a:schemeClr val="dk1"/>
+              </a:buClr>
+              <a:buSzPts val="1800"/>
+              <a:buChar char="•"/>
+              <a:defRPr/>
+            </a:lvl7pPr>
+            <a:lvl8pPr indent="-342900" lvl="7" marL="3657600" algn="l">
+              <a:lnSpc>
+                <a:spcPct val="90000"/>
+              </a:lnSpc>
+              <a:spcBef>
+                <a:spcPts val="500"/>
+              </a:spcBef>
+              <a:spcAft>
+                <a:spcPts val="0"/>
+              </a:spcAft>
+              <a:buClr>
+                <a:schemeClr val="dk1"/>
+              </a:buClr>
+              <a:buSzPts val="1800"/>
+              <a:buChar char="•"/>
+              <a:defRPr/>
+            </a:lvl8pPr>
+            <a:lvl9pPr indent="-342900" lvl="8" marL="4114800" algn="l">
+              <a:lnSpc>
+                <a:spcPct val="90000"/>
+              </a:lnSpc>
+              <a:spcBef>
+                <a:spcPts val="500"/>
+              </a:spcBef>
+              <a:spcAft>
+                <a:spcPts val="0"/>
+              </a:spcAft>
+              <a:buClr>
+                <a:schemeClr val="dk1"/>
+              </a:buClr>
+              <a:buSzPts val="1800"/>
+              <a:buChar char="•"/>
+              <a:defRPr/>
+            </a:lvl9pPr>
+          </a:lstStyle>
+          <a:p/>
+        </p:txBody>
+      </p:sp>
+    </p:spTree>
+  </p:cSld>
+  <p:clrMapOvr>
+    <a:masterClrMapping/>
+  </p:clrMapOvr>
+</p:sldLayout>
+</file>
+
 <file path=ppt/slideLayouts/slideLayout12.xml><?xml version="1.0" encoding="utf-8"?>
 <p:sldLayout xmlns:a="http://schemas.openxmlformats.org/drawingml/2006/main" xmlns:r="http://schemas.openxmlformats.org/officeDocument/2006/relationships" xmlns:mc="http://schemas.openxmlformats.org/markup-compatibility/2006" xmlns:mv="urn:schemas-microsoft-com:mac:vml" xmlns:p="http://schemas.openxmlformats.org/presentationml/2006/main" xmlns:c="http://schemas.openxmlformats.org/drawingml/2006/chart" xmlns:dgm="http://schemas.openxmlformats.org/drawingml/2006/diagram" xmlns:o="urn:schemas-microsoft-com:office:office" xmlns:v="urn:schemas-microsoft-com:vml" xmlns:pvml="urn:schemas-microsoft-com:office:powerpoint" xmlns:com="http://schemas.openxmlformats.org/drawingml/2006/compatibility" xmlns:p14="http://schemas.microsoft.com/office/powerpoint/2010/main" xmlns:p15="http://schemas.microsoft.com/office/powerpoint/2012/main" xmlns:ahyp="http://schemas.microsoft.com/office/drawing/2018/hyperlinkcolor" matchingName="2_Заголовок + текст в две колонки">
   <p:cSld name="2_Заголовок + текст в две колонки">
@@ -3151,6 +4291,548 @@
       <p:sp>
         <p:nvSpPr>
           <p:cNvPr id="110" name="Google Shape;110;p13"/>
+          <p:cNvSpPr txBox="1"/>
+          <p:nvPr>
+            <p:ph type="title"/>
+          </p:nvPr>
+        </p:nvSpPr>
+        <p:spPr>
+          <a:xfrm>
+            <a:off x="677334" y="692150"/>
+            <a:ext cx="10855854" cy="644241"/>
+          </a:xfrm>
+          <a:prstGeom prst="rect">
+            <a:avLst/>
+          </a:prstGeom>
+          <a:noFill/>
+          <a:ln>
+            <a:noFill/>
+          </a:ln>
+        </p:spPr>
+        <p:txBody>
+          <a:bodyPr anchorCtr="0" anchor="t" bIns="0" lIns="0" spcFirstLastPara="1" rIns="0" wrap="square" tIns="0">
+            <a:noAutofit/>
+          </a:bodyPr>
+          <a:lstStyle>
+            <a:lvl1pPr lvl="0" algn="l">
+              <a:lnSpc>
+                <a:spcPct val="90000"/>
+              </a:lnSpc>
+              <a:spcBef>
+                <a:spcPts val="0"/>
+              </a:spcBef>
+              <a:spcAft>
+                <a:spcPts val="0"/>
+              </a:spcAft>
+              <a:buClr>
+                <a:schemeClr val="accent1"/>
+              </a:buClr>
+              <a:buSzPts val="3600"/>
+              <a:buFont typeface="Play"/>
+              <a:buNone/>
+              <a:defRPr>
+                <a:solidFill>
+                  <a:schemeClr val="accent1"/>
+                </a:solidFill>
+              </a:defRPr>
+            </a:lvl1pPr>
+            <a:lvl2pPr lvl="1">
+              <a:spcBef>
+                <a:spcPts val="0"/>
+              </a:spcBef>
+              <a:spcAft>
+                <a:spcPts val="0"/>
+              </a:spcAft>
+              <a:buSzPts val="1400"/>
+              <a:buNone/>
+              <a:defRPr/>
+            </a:lvl2pPr>
+            <a:lvl3pPr lvl="2">
+              <a:spcBef>
+                <a:spcPts val="0"/>
+              </a:spcBef>
+              <a:spcAft>
+                <a:spcPts val="0"/>
+              </a:spcAft>
+              <a:buSzPts val="1400"/>
+              <a:buNone/>
+              <a:defRPr/>
+            </a:lvl3pPr>
+            <a:lvl4pPr lvl="3">
+              <a:spcBef>
+                <a:spcPts val="0"/>
+              </a:spcBef>
+              <a:spcAft>
+                <a:spcPts val="0"/>
+              </a:spcAft>
+              <a:buSzPts val="1400"/>
+              <a:buNone/>
+              <a:defRPr/>
+            </a:lvl4pPr>
+            <a:lvl5pPr lvl="4">
+              <a:spcBef>
+                <a:spcPts val="0"/>
+              </a:spcBef>
+              <a:spcAft>
+                <a:spcPts val="0"/>
+              </a:spcAft>
+              <a:buSzPts val="1400"/>
+              <a:buNone/>
+              <a:defRPr/>
+            </a:lvl5pPr>
+            <a:lvl6pPr lvl="5">
+              <a:spcBef>
+                <a:spcPts val="0"/>
+              </a:spcBef>
+              <a:spcAft>
+                <a:spcPts val="0"/>
+              </a:spcAft>
+              <a:buSzPts val="1400"/>
+              <a:buNone/>
+              <a:defRPr/>
+            </a:lvl6pPr>
+            <a:lvl7pPr lvl="6">
+              <a:spcBef>
+                <a:spcPts val="0"/>
+              </a:spcBef>
+              <a:spcAft>
+                <a:spcPts val="0"/>
+              </a:spcAft>
+              <a:buSzPts val="1400"/>
+              <a:buNone/>
+              <a:defRPr/>
+            </a:lvl7pPr>
+            <a:lvl8pPr lvl="7">
+              <a:spcBef>
+                <a:spcPts val="0"/>
+              </a:spcBef>
+              <a:spcAft>
+                <a:spcPts val="0"/>
+              </a:spcAft>
+              <a:buSzPts val="1400"/>
+              <a:buNone/>
+              <a:defRPr/>
+            </a:lvl8pPr>
+            <a:lvl9pPr lvl="8">
+              <a:spcBef>
+                <a:spcPts val="0"/>
+              </a:spcBef>
+              <a:spcAft>
+                <a:spcPts val="0"/>
+              </a:spcAft>
+              <a:buSzPts val="1400"/>
+              <a:buNone/>
+              <a:defRPr/>
+            </a:lvl9pPr>
+          </a:lstStyle>
+          <a:p/>
+        </p:txBody>
+      </p:sp>
+    </p:spTree>
+  </p:cSld>
+  <p:clrMapOvr>
+    <a:masterClrMapping/>
+  </p:clrMapOvr>
+</p:sldLayout>
+</file>
+
+<file path=ppt/slideLayouts/slideLayout25.xml><?xml version="1.0" encoding="utf-8"?>
+<p:sldLayout xmlns:a="http://schemas.openxmlformats.org/drawingml/2006/main" xmlns:r="http://schemas.openxmlformats.org/officeDocument/2006/relationships" xmlns:mc="http://schemas.openxmlformats.org/markup-compatibility/2006" xmlns:mv="urn:schemas-microsoft-com:mac:vml" xmlns:p="http://schemas.openxmlformats.org/presentationml/2006/main" xmlns:c="http://schemas.openxmlformats.org/drawingml/2006/chart" xmlns:dgm="http://schemas.openxmlformats.org/drawingml/2006/diagram" xmlns:o="urn:schemas-microsoft-com:office:office" xmlns:v="urn:schemas-microsoft-com:vml" xmlns:pvml="urn:schemas-microsoft-com:office:powerpoint" xmlns:com="http://schemas.openxmlformats.org/drawingml/2006/compatibility" xmlns:p14="http://schemas.microsoft.com/office/powerpoint/2010/main" xmlns:p15="http://schemas.microsoft.com/office/powerpoint/2012/main" xmlns:ahyp="http://schemas.microsoft.com/office/drawing/2018/hyperlinkcolor" matchingName="Заголовок + 2 объекта">
+  <p:cSld name="Заголовок + 2 объекта">
+    <p:bg>
+      <p:bgPr>
+        <a:solidFill>
+          <a:schemeClr val="lt2"/>
+        </a:solidFill>
+      </p:bgPr>
+    </p:bg>
+    <p:spTree>
+      <p:nvGrpSpPr>
+        <p:cNvPr id="165" name="Shape 165"/>
+        <p:cNvGrpSpPr/>
+        <p:nvPr/>
+      </p:nvGrpSpPr>
+      <p:grpSpPr>
+        <a:xfrm>
+          <a:off x="0" y="0"/>
+          <a:ext cx="0" cy="0"/>
+          <a:chOff x="0" y="0"/>
+          <a:chExt cx="0" cy="0"/>
+        </a:xfrm>
+      </p:grpSpPr>
+      <p:sp>
+        <p:nvSpPr>
+          <p:cNvPr id="166" name="Google Shape;166;p26"/>
+          <p:cNvSpPr txBox="1"/>
+          <p:nvPr>
+            <p:ph idx="1" type="body"/>
+          </p:nvPr>
+        </p:nvSpPr>
+        <p:spPr>
+          <a:xfrm>
+            <a:off x="677334" y="1773238"/>
+            <a:ext cx="5317065" cy="4427537"/>
+          </a:xfrm>
+          <a:prstGeom prst="rect">
+            <a:avLst/>
+          </a:prstGeom>
+          <a:noFill/>
+          <a:ln>
+            <a:noFill/>
+          </a:ln>
+        </p:spPr>
+        <p:txBody>
+          <a:bodyPr anchorCtr="0" anchor="t" bIns="0" lIns="0" spcFirstLastPara="1" rIns="0" wrap="square" tIns="0">
+            <a:normAutofit/>
+          </a:bodyPr>
+          <a:lstStyle>
+            <a:lvl1pPr indent="-228600" lvl="0" marL="457200" algn="l">
+              <a:lnSpc>
+                <a:spcPct val="110000"/>
+              </a:lnSpc>
+              <a:spcBef>
+                <a:spcPts val="1000"/>
+              </a:spcBef>
+              <a:spcAft>
+                <a:spcPts val="0"/>
+              </a:spcAft>
+              <a:buClr>
+                <a:schemeClr val="dk1"/>
+              </a:buClr>
+              <a:buSzPts val="1600"/>
+              <a:buNone/>
+              <a:defRPr b="0" i="0">
+                <a:latin typeface="Play"/>
+                <a:ea typeface="Play"/>
+                <a:cs typeface="Play"/>
+                <a:sym typeface="Play"/>
+              </a:defRPr>
+            </a:lvl1pPr>
+            <a:lvl2pPr indent="-342900" lvl="1" marL="914400" algn="l">
+              <a:lnSpc>
+                <a:spcPct val="110000"/>
+              </a:lnSpc>
+              <a:spcBef>
+                <a:spcPts val="500"/>
+              </a:spcBef>
+              <a:spcAft>
+                <a:spcPts val="0"/>
+              </a:spcAft>
+              <a:buSzPts val="1800"/>
+              <a:buChar char="•"/>
+              <a:defRPr/>
+            </a:lvl2pPr>
+            <a:lvl3pPr indent="-342900" lvl="2" marL="1371600" algn="l">
+              <a:lnSpc>
+                <a:spcPct val="110000"/>
+              </a:lnSpc>
+              <a:spcBef>
+                <a:spcPts val="500"/>
+              </a:spcBef>
+              <a:spcAft>
+                <a:spcPts val="0"/>
+              </a:spcAft>
+              <a:buClr>
+                <a:schemeClr val="dk1"/>
+              </a:buClr>
+              <a:buSzPts val="1800"/>
+              <a:buChar char="−"/>
+              <a:defRPr/>
+            </a:lvl3pPr>
+            <a:lvl4pPr indent="-342900" lvl="3" marL="1828800" algn="l">
+              <a:lnSpc>
+                <a:spcPct val="90000"/>
+              </a:lnSpc>
+              <a:spcBef>
+                <a:spcPts val="500"/>
+              </a:spcBef>
+              <a:spcAft>
+                <a:spcPts val="0"/>
+              </a:spcAft>
+              <a:buClr>
+                <a:schemeClr val="dk1"/>
+              </a:buClr>
+              <a:buSzPts val="1800"/>
+              <a:buChar char="•"/>
+              <a:defRPr/>
+            </a:lvl4pPr>
+            <a:lvl5pPr indent="-342900" lvl="4" marL="2286000" algn="l">
+              <a:lnSpc>
+                <a:spcPct val="90000"/>
+              </a:lnSpc>
+              <a:spcBef>
+                <a:spcPts val="500"/>
+              </a:spcBef>
+              <a:spcAft>
+                <a:spcPts val="0"/>
+              </a:spcAft>
+              <a:buClr>
+                <a:schemeClr val="dk1"/>
+              </a:buClr>
+              <a:buSzPts val="1800"/>
+              <a:buChar char="•"/>
+              <a:defRPr/>
+            </a:lvl5pPr>
+            <a:lvl6pPr indent="-342900" lvl="5" marL="2743200" algn="l">
+              <a:lnSpc>
+                <a:spcPct val="90000"/>
+              </a:lnSpc>
+              <a:spcBef>
+                <a:spcPts val="500"/>
+              </a:spcBef>
+              <a:spcAft>
+                <a:spcPts val="0"/>
+              </a:spcAft>
+              <a:buClr>
+                <a:schemeClr val="dk1"/>
+              </a:buClr>
+              <a:buSzPts val="1800"/>
+              <a:buChar char="•"/>
+              <a:defRPr/>
+            </a:lvl6pPr>
+            <a:lvl7pPr indent="-342900" lvl="6" marL="3200400" algn="l">
+              <a:lnSpc>
+                <a:spcPct val="90000"/>
+              </a:lnSpc>
+              <a:spcBef>
+                <a:spcPts val="500"/>
+              </a:spcBef>
+              <a:spcAft>
+                <a:spcPts val="0"/>
+              </a:spcAft>
+              <a:buClr>
+                <a:schemeClr val="dk1"/>
+              </a:buClr>
+              <a:buSzPts val="1800"/>
+              <a:buChar char="•"/>
+              <a:defRPr/>
+            </a:lvl7pPr>
+            <a:lvl8pPr indent="-342900" lvl="7" marL="3657600" algn="l">
+              <a:lnSpc>
+                <a:spcPct val="90000"/>
+              </a:lnSpc>
+              <a:spcBef>
+                <a:spcPts val="500"/>
+              </a:spcBef>
+              <a:spcAft>
+                <a:spcPts val="0"/>
+              </a:spcAft>
+              <a:buClr>
+                <a:schemeClr val="dk1"/>
+              </a:buClr>
+              <a:buSzPts val="1800"/>
+              <a:buChar char="•"/>
+              <a:defRPr/>
+            </a:lvl8pPr>
+            <a:lvl9pPr indent="-342900" lvl="8" marL="4114800" algn="l">
+              <a:lnSpc>
+                <a:spcPct val="90000"/>
+              </a:lnSpc>
+              <a:spcBef>
+                <a:spcPts val="500"/>
+              </a:spcBef>
+              <a:spcAft>
+                <a:spcPts val="0"/>
+              </a:spcAft>
+              <a:buClr>
+                <a:schemeClr val="dk1"/>
+              </a:buClr>
+              <a:buSzPts val="1800"/>
+              <a:buChar char="•"/>
+              <a:defRPr/>
+            </a:lvl9pPr>
+          </a:lstStyle>
+          <a:p/>
+        </p:txBody>
+      </p:sp>
+      <p:sp>
+        <p:nvSpPr>
+          <p:cNvPr id="167" name="Google Shape;167;p26"/>
+          <p:cNvSpPr txBox="1"/>
+          <p:nvPr>
+            <p:ph idx="2" type="body"/>
+          </p:nvPr>
+        </p:nvSpPr>
+        <p:spPr>
+          <a:xfrm>
+            <a:off x="6197604" y="1773238"/>
+            <a:ext cx="5317062" cy="4427537"/>
+          </a:xfrm>
+          <a:prstGeom prst="rect">
+            <a:avLst/>
+          </a:prstGeom>
+          <a:noFill/>
+          <a:ln>
+            <a:noFill/>
+          </a:ln>
+        </p:spPr>
+        <p:txBody>
+          <a:bodyPr anchorCtr="0" anchor="t" bIns="0" lIns="0" spcFirstLastPara="1" rIns="0" wrap="square" tIns="0">
+            <a:normAutofit/>
+          </a:bodyPr>
+          <a:lstStyle>
+            <a:lvl1pPr indent="-228600" lvl="0" marL="457200" algn="l">
+              <a:lnSpc>
+                <a:spcPct val="110000"/>
+              </a:lnSpc>
+              <a:spcBef>
+                <a:spcPts val="1000"/>
+              </a:spcBef>
+              <a:spcAft>
+                <a:spcPts val="0"/>
+              </a:spcAft>
+              <a:buClr>
+                <a:schemeClr val="dk1"/>
+              </a:buClr>
+              <a:buSzPts val="1600"/>
+              <a:buNone/>
+              <a:defRPr b="0" i="0">
+                <a:latin typeface="Play"/>
+                <a:ea typeface="Play"/>
+                <a:cs typeface="Play"/>
+                <a:sym typeface="Play"/>
+              </a:defRPr>
+            </a:lvl1pPr>
+            <a:lvl2pPr indent="-342900" lvl="1" marL="914400" algn="l">
+              <a:lnSpc>
+                <a:spcPct val="110000"/>
+              </a:lnSpc>
+              <a:spcBef>
+                <a:spcPts val="500"/>
+              </a:spcBef>
+              <a:spcAft>
+                <a:spcPts val="0"/>
+              </a:spcAft>
+              <a:buSzPts val="1800"/>
+              <a:buChar char="•"/>
+              <a:defRPr/>
+            </a:lvl2pPr>
+            <a:lvl3pPr indent="-342900" lvl="2" marL="1371600" algn="l">
+              <a:lnSpc>
+                <a:spcPct val="110000"/>
+              </a:lnSpc>
+              <a:spcBef>
+                <a:spcPts val="500"/>
+              </a:spcBef>
+              <a:spcAft>
+                <a:spcPts val="0"/>
+              </a:spcAft>
+              <a:buClr>
+                <a:schemeClr val="dk1"/>
+              </a:buClr>
+              <a:buSzPts val="1800"/>
+              <a:buChar char="−"/>
+              <a:defRPr/>
+            </a:lvl3pPr>
+            <a:lvl4pPr indent="-342900" lvl="3" marL="1828800" algn="l">
+              <a:lnSpc>
+                <a:spcPct val="90000"/>
+              </a:lnSpc>
+              <a:spcBef>
+                <a:spcPts val="500"/>
+              </a:spcBef>
+              <a:spcAft>
+                <a:spcPts val="0"/>
+              </a:spcAft>
+              <a:buClr>
+                <a:schemeClr val="dk1"/>
+              </a:buClr>
+              <a:buSzPts val="1800"/>
+              <a:buChar char="•"/>
+              <a:defRPr/>
+            </a:lvl4pPr>
+            <a:lvl5pPr indent="-342900" lvl="4" marL="2286000" algn="l">
+              <a:lnSpc>
+                <a:spcPct val="90000"/>
+              </a:lnSpc>
+              <a:spcBef>
+                <a:spcPts val="500"/>
+              </a:spcBef>
+              <a:spcAft>
+                <a:spcPts val="0"/>
+              </a:spcAft>
+              <a:buClr>
+                <a:schemeClr val="dk1"/>
+              </a:buClr>
+              <a:buSzPts val="1800"/>
+              <a:buChar char="•"/>
+              <a:defRPr/>
+            </a:lvl5pPr>
+            <a:lvl6pPr indent="-342900" lvl="5" marL="2743200" algn="l">
+              <a:lnSpc>
+                <a:spcPct val="90000"/>
+              </a:lnSpc>
+              <a:spcBef>
+                <a:spcPts val="500"/>
+              </a:spcBef>
+              <a:spcAft>
+                <a:spcPts val="0"/>
+              </a:spcAft>
+              <a:buClr>
+                <a:schemeClr val="dk1"/>
+              </a:buClr>
+              <a:buSzPts val="1800"/>
+              <a:buChar char="•"/>
+              <a:defRPr/>
+            </a:lvl6pPr>
+            <a:lvl7pPr indent="-342900" lvl="6" marL="3200400" algn="l">
+              <a:lnSpc>
+                <a:spcPct val="90000"/>
+              </a:lnSpc>
+              <a:spcBef>
+                <a:spcPts val="500"/>
+              </a:spcBef>
+              <a:spcAft>
+                <a:spcPts val="0"/>
+              </a:spcAft>
+              <a:buClr>
+                <a:schemeClr val="dk1"/>
+              </a:buClr>
+              <a:buSzPts val="1800"/>
+              <a:buChar char="•"/>
+              <a:defRPr/>
+            </a:lvl7pPr>
+            <a:lvl8pPr indent="-342900" lvl="7" marL="3657600" algn="l">
+              <a:lnSpc>
+                <a:spcPct val="90000"/>
+              </a:lnSpc>
+              <a:spcBef>
+                <a:spcPts val="500"/>
+              </a:spcBef>
+              <a:spcAft>
+                <a:spcPts val="0"/>
+              </a:spcAft>
+              <a:buClr>
+                <a:schemeClr val="dk1"/>
+              </a:buClr>
+              <a:buSzPts val="1800"/>
+              <a:buChar char="•"/>
+              <a:defRPr/>
+            </a:lvl8pPr>
+            <a:lvl9pPr indent="-342900" lvl="8" marL="4114800" algn="l">
+              <a:lnSpc>
+                <a:spcPct val="90000"/>
+              </a:lnSpc>
+              <a:spcBef>
+                <a:spcPts val="500"/>
+              </a:spcBef>
+              <a:spcAft>
+                <a:spcPts val="0"/>
+              </a:spcAft>
+              <a:buClr>
+                <a:schemeClr val="dk1"/>
+              </a:buClr>
+              <a:buSzPts val="1800"/>
+              <a:buChar char="•"/>
+              <a:defRPr/>
+            </a:lvl9pPr>
+          </a:lstStyle>
+          <a:p/>
+        </p:txBody>
+      </p:sp>
+      <p:sp>
+        <p:nvSpPr>
+          <p:cNvPr id="168" name="Google Shape;168;p26"/>
           <p:cNvSpPr txBox="1"/>
           <p:nvPr>
             <p:ph type="title"/>
@@ -5344,7 +7026,9 @@
     <p:sldLayoutId id="2147483648" r:id="rId1"/>
     <p:sldLayoutId id="2147483652" r:id="rId5"/>
     <p:sldLayoutId id="2147483653" r:id="rId6"/>
+    <p:sldLayoutId id="2147483657" r:id="rId10"/>
     <p:sldLayoutId id="2147483659" r:id="rId12"/>
+    <p:sldLayoutId id="2147483672" r:id="rId25"/>
   </p:sldLayoutIdLst>
   <p:hf dt="0" ftr="0" hdr="0" sldNum="0"/>
   <p:txStyles>
@@ -8290,7 +9974,7 @@
           </a:ln>
         </p:spPr>
         <p:txBody>
-          <a:bodyPr anchorCtr="0" anchor="t" bIns="0" lIns="0" spcFirstLastPara="1" rIns="0" wrap="square" tIns="0">
+          <a:bodyPr anchorCtr="0" anchor="t" bIns="0" lIns="0" spcFirstLastPara="1" rIns="0" wrap="square" tIns="0" vert="horz">
             <a:normAutofit/>
           </a:bodyPr>
           <a:lstStyle/>
@@ -8318,7 +10002,7 @@
                   <a:srgbClr val="000000"/>
                 </a:solidFill>
               </a:rPr>
-              <a:t>Автоматизация ответов сотрудников по регламентам</a:t>
+              <a:t>Инициатива по внедрению ИИ-помощника для автоматизации ответов сотрудников</a:t>
             </a:r>
             <a:endParaRPr/>
           </a:p>
@@ -8346,7 +10030,7 @@
           </a:ln>
         </p:spPr>
         <p:txBody>
-          <a:bodyPr anchorCtr="0" anchor="t" bIns="0" lIns="0" spcFirstLastPara="1" rIns="0" wrap="square" tIns="0">
+          <a:bodyPr anchorCtr="0" anchor="t" bIns="0" lIns="0" spcFirstLastPara="1" rIns="0" wrap="square" tIns="0" vert="horz">
             <a:normAutofit/>
           </a:bodyPr>
           <a:lstStyle/>
@@ -8391,13 +10075,6 @@
 <file path=ppt/slides/slide10.xml><?xml version="1.0" encoding="utf-8"?>
 <p:sld xmlns:a="http://schemas.openxmlformats.org/drawingml/2006/main" xmlns:p="http://schemas.openxmlformats.org/presentationml/2006/main" xmlns:r="http://schemas.openxmlformats.org/officeDocument/2006/relationships">
   <p:cSld>
-    <p:bg>
-      <p:bgPr>
-        <a:solidFill>
-          <a:schemeClr val="lt2"/>
-        </a:solidFill>
-      </p:bgPr>
-    </p:bg>
     <p:spTree>
       <p:nvGrpSpPr>
         <p:cNvPr id="1" name=""/>
@@ -8407,8 +10084,119 @@
       <p:grpSpPr/>
       <p:sp>
         <p:nvSpPr>
-          <p:cNvPr id="794" name="BrandDeck Text 794"/>
-          <p:cNvSpPr txBox="1"/>
+          <p:cNvPr id="2" name="BrandDeck Text 2"/>
+          <p:cNvSpPr>
+            <a:spLocks noGrp="1"/>
+          </p:cNvSpPr>
+          <p:nvPr>
+            <p:ph type="body" idx="1"/>
+          </p:nvPr>
+        </p:nvSpPr>
+        <p:spPr>
+          <a:xfrm>
+            <a:off x="677334" y="1773238"/>
+            <a:ext cx="5317065" cy="4427537"/>
+          </a:xfrm>
+        </p:spPr>
+        <p:txBody>
+          <a:bodyPr vert="horz" wrap="square" anchor="t">
+            <a:normAutofit/>
+          </a:bodyPr>
+          <a:lstStyle/>
+          <a:p>
+            <a:pPr algn="l">
+              <a:lnSpc>
+                <a:spcPct val="115000"/>
+              </a:lnSpc>
+              <a:spcBef>
+                <a:spcPts val="0"/>
+              </a:spcBef>
+              <a:spcAft>
+                <a:spcPts val="240"/>
+              </a:spcAft>
+            </a:pPr>
+            <a:r>
+              <a:rPr sz="1600"/>
+              <a:t>Запрос на одобрение пилота и выделение команды из 3 человек</a:t>
+            </a:r>
+          </a:p>
+        </p:txBody>
+      </p:sp>
+      <p:sp>
+        <p:nvSpPr>
+          <p:cNvPr id="3" name="BrandDeck Text 3"/>
+          <p:cNvSpPr>
+            <a:spLocks noGrp="1"/>
+          </p:cNvSpPr>
+          <p:nvPr>
+            <p:ph type="body" idx="2"/>
+          </p:nvPr>
+        </p:nvSpPr>
+        <p:spPr/>
+        <p:txBody>
+          <a:bodyPr vert="horz" wrap="square" anchor="t">
+            <a:normAutofit/>
+          </a:bodyPr>
+          <a:lstStyle/>
+          <a:p>
+            <a:pPr>
+              <a:lnSpc>
+                <a:spcPct val="115000"/>
+              </a:lnSpc>
+              <a:spcBef>
+                <a:spcPts val="0"/>
+              </a:spcBef>
+              <a:spcAft>
+                <a:spcPts val="240"/>
+              </a:spcAft>
+            </a:pPr>
+            <a:r>
+              <a:rPr sz="1600"/>
+              <a:t>Просим одобрить запуск пилота ИИ-помощника.</a:t>
+            </a:r>
+          </a:p>
+          <a:p>
+            <a:pPr>
+              <a:lnSpc>
+                <a:spcPct val="115000"/>
+              </a:lnSpc>
+              <a:spcBef>
+                <a:spcPts val="0"/>
+              </a:spcBef>
+              <a:spcAft>
+                <a:spcPts val="240"/>
+              </a:spcAft>
+            </a:pPr>
+            <a:r>
+              <a:rPr sz="1600"/>
+              <a:t>Необходимо выделить команду из 3 человек для реализации.</a:t>
+            </a:r>
+          </a:p>
+          <a:p>
+            <a:pPr>
+              <a:lnSpc>
+                <a:spcPct val="115000"/>
+              </a:lnSpc>
+              <a:spcBef>
+                <a:spcPts val="0"/>
+              </a:spcBef>
+              <a:spcAft>
+                <a:spcPts val="240"/>
+              </a:spcAft>
+            </a:pPr>
+            <a:r>
+              <a:rPr sz="1600"/>
+              <a:t>Решение требуется для начала работ по пилоту.</a:t>
+            </a:r>
+          </a:p>
+        </p:txBody>
+      </p:sp>
+      <p:sp>
+        <p:nvSpPr>
+          <p:cNvPr id="4" name="BrandDeck Text 4"/>
+          <p:cNvSpPr>
+            <a:spLocks noGrp="1"/>
+          </p:cNvSpPr>
           <p:nvPr>
             <p:ph type="title"/>
           </p:nvPr>
@@ -8418,21 +10206,14 @@
             <a:off x="677334" y="692150"/>
             <a:ext cx="10855854" cy="644241"/>
           </a:xfrm>
-          <a:prstGeom prst="rect">
-            <a:avLst/>
-          </a:prstGeom>
-          <a:noFill/>
-          <a:ln>
-            <a:noFill/>
-          </a:ln>
         </p:spPr>
         <p:txBody>
-          <a:bodyPr anchorCtr="0" anchor="t" bIns="0" lIns="0" spcFirstLastPara="1" rIns="0" wrap="square" tIns="0">
+          <a:bodyPr vert="horz" wrap="square" anchor="t">
             <a:normAutofit/>
           </a:bodyPr>
           <a:lstStyle/>
           <a:p>
-            <a:pPr indent="0" marL="0" rtl="0" algn="l">
+            <a:pPr algn="l">
               <a:lnSpc>
                 <a:spcPct val="115000"/>
               </a:lnSpc>
@@ -8440,824 +10221,20 @@
                 <a:spcPts val="0"/>
               </a:spcBef>
               <a:spcAft>
-                <a:spcPts val="270"/>
-              </a:spcAft>
-              <a:buClr>
-                <a:schemeClr val="accent1"/>
-              </a:buClr>
-              <a:buSzPts val="3600"/>
-              <a:buFont typeface="Play"/>
-              <a:buNone/>
+                <a:spcPts val="359"/>
+              </a:spcAft>
             </a:pPr>
             <a:r>
-              <a:rPr sz="1800">
+              <a:rPr sz="2400">
                 <a:solidFill>
                   <a:srgbClr val="000000"/>
                 </a:solidFill>
               </a:rPr>
-              <a:t>Модель с открытыми весами работает внутри контура, документы не покидают периметр</a:t>
+              <a:t>Одобрить пилот и выделить команду из 3 человек</a:t>
             </a:r>
-            <a:endParaRPr/>
           </a:p>
         </p:txBody>
       </p:sp>
-      <p:sp>
-        <p:nvSpPr>
-          <p:cNvPr id="795" name="Google Shape;795;p60"/>
-          <p:cNvSpPr txBox="1"/>
-          <p:nvPr/>
-        </p:nvSpPr>
-        <p:spPr>
-          <a:xfrm>
-            <a:off x="18692059" y="4674436"/>
-            <a:ext cx="4304330" cy="678198"/>
-          </a:xfrm>
-          <a:prstGeom prst="rect">
-            <a:avLst/>
-          </a:prstGeom>
-          <a:noFill/>
-          <a:ln>
-            <a:noFill/>
-          </a:ln>
-        </p:spPr>
-        <p:txBody>
-          <a:bodyPr anchorCtr="0" anchor="t" bIns="45700" lIns="91425" spcFirstLastPara="1" rIns="91425" wrap="square" tIns="45700">
-            <a:noAutofit/>
-          </a:bodyPr>
-          <a:lstStyle/>
-          <a:p>
-            <a:pPr indent="0" lvl="0" marL="0" marR="0" rtl="0" algn="l">
-              <a:lnSpc>
-                <a:spcPct val="110000"/>
-              </a:lnSpc>
-              <a:spcBef>
-                <a:spcPts val="0"/>
-              </a:spcBef>
-              <a:spcAft>
-                <a:spcPts val="0"/>
-              </a:spcAft>
-              <a:buClr>
-                <a:schemeClr val="dk1"/>
-              </a:buClr>
-              <a:buSzPts val="1600"/>
-              <a:buFont typeface="Arial"/>
-              <a:buNone/>
-            </a:pPr>
-            <a:r>
-              <a:t/>
-            </a:r>
-            <a:endParaRPr sz="1600">
-              <a:solidFill>
-                <a:schemeClr val="dk1"/>
-              </a:solidFill>
-              <a:latin typeface="Arial"/>
-              <a:ea typeface="Arial"/>
-              <a:cs typeface="Arial"/>
-              <a:sym typeface="Arial"/>
-            </a:endParaRPr>
-          </a:p>
-        </p:txBody>
-      </p:sp>
-      <p:grpSp>
-        <p:nvGrpSpPr>
-          <p:cNvPr id="2" name="BrandDeck Diagram icon_grid" descr="icon_grid: Модель с открытыми весами работает строго внутри контура компании.; Документы не покидают периметр и не уходят наружу.; Обеспечивается безопасность данных при обработке запросов."/>
-          <p:cNvGrpSpPr/>
-          <p:nvPr/>
-        </p:nvGrpSpPr>
-        <p:grpSpPr>
-          <a:xfrm>
-            <a:off x="658811" y="3425681"/>
-            <a:ext cx="10333314" cy="2772473"/>
-            <a:chOff x="658811" y="3425681"/>
-            <a:chExt cx="10333314" cy="2772473"/>
-          </a:xfrm>
-        </p:grpSpPr>
-        <p:sp>
-          <p:nvSpPr>
-            <p:cNvPr id="803" name="BrandDeck Diagram Card 1"/>
-            <p:cNvSpPr/>
-            <p:nvPr/>
-          </p:nvSpPr>
-          <p:spPr>
-            <a:xfrm>
-              <a:off x="658811" y="3425681"/>
-              <a:ext cx="5063324" cy="1282903"/>
-            </a:xfrm>
-            <a:prstGeom prst="roundRect">
-              <a:avLst>
-                <a:gd name="adj" fmla="val 8000"/>
-              </a:avLst>
-            </a:prstGeom>
-            <a:solidFill>
-              <a:srgbClr val="EDF5FF"/>
-            </a:solidFill>
-            <a:ln>
-              <a:noFill/>
-            </a:ln>
-          </p:spPr>
-          <p:txBody>
-            <a:bodyPr rtlCol="0" anchor="ctr"/>
-            <a:lstStyle/>
-            <a:p>
-              <a:pPr algn="ctr"/>
-            </a:p>
-          </p:txBody>
-        </p:sp>
-        <p:sp>
-          <p:nvSpPr>
-            <p:cNvPr id="804" name="BrandDeck Diagram Icon 1 Badge"/>
-            <p:cNvSpPr/>
-            <p:nvPr/>
-          </p:nvSpPr>
-          <p:spPr>
-            <a:xfrm>
-              <a:off x="878267" y="3859485"/>
-              <a:ext cx="415295" cy="415295"/>
-            </a:xfrm>
-            <a:prstGeom prst="ellipse">
-              <a:avLst/>
-            </a:prstGeom>
-            <a:solidFill>
-              <a:srgbClr val="006DEB"/>
-            </a:solidFill>
-            <a:ln>
-              <a:noFill/>
-            </a:ln>
-          </p:spPr>
-          <p:txBody>
-            <a:bodyPr rtlCol="0" anchor="ctr"/>
-            <a:lstStyle/>
-            <a:p>
-              <a:pPr algn="ctr"/>
-            </a:p>
-          </p:txBody>
-        </p:sp>
-        <p:sp>
-          <p:nvSpPr>
-            <p:cNvPr id="805" name="BrandDeck Icon brain"/>
-            <p:cNvSpPr/>
-            <p:nvPr/>
-          </p:nvSpPr>
-          <p:spPr>
-            <a:xfrm>
-              <a:off x="969631" y="3950850"/>
-              <a:ext cx="232565" cy="232565"/>
-            </a:xfrm>
-            <a:custGeom>
-              <a:avLst/>
-              <a:gdLst/>
-              <a:ahLst/>
-              <a:cxnLst/>
-              <a:rect l="l" t="t" r="r" b="b"/>
-              <a:pathLst>
-                <a:path w="24000" h="24000" fill="none">
-                  <a:moveTo>
-                    <a:pt x="12000" y="5000"/>
-                  </a:moveTo>
-                  <a:cubicBezTo>
-                    <a:pt x="12003" y="3911"/>
-                    <a:pt x="11416" y="2906"/>
-                    <a:pt x="10466" y="2374"/>
-                  </a:cubicBezTo>
-                  <a:cubicBezTo>
-                    <a:pt x="9516" y="1842"/>
-                    <a:pt x="8353" y="1866"/>
-                    <a:pt x="7426" y="2437"/>
-                  </a:cubicBezTo>
-                  <a:cubicBezTo>
-                    <a:pt x="6499" y="3009"/>
-                    <a:pt x="5954" y="4037"/>
-                    <a:pt x="6003" y="5125"/>
-                  </a:cubicBezTo>
-                  <a:cubicBezTo>
-                    <a:pt x="4812" y="5431"/>
-                    <a:pt x="3828" y="6268"/>
-                    <a:pt x="3335" y="7395"/>
-                  </a:cubicBezTo>
-                  <a:cubicBezTo>
-                    <a:pt x="2842" y="8521"/>
-                    <a:pt x="2894" y="9812"/>
-                    <a:pt x="3477" y="10895"/>
-                  </a:cubicBezTo>
-                  <a:cubicBezTo>
-                    <a:pt x="2450" y="11729"/>
-                    <a:pt x="1902" y="13018"/>
-                    <a:pt x="2013" y="14336"/>
-                  </a:cubicBezTo>
-                  <a:cubicBezTo>
-                    <a:pt x="2125" y="15654"/>
-                    <a:pt x="2881" y="16833"/>
-                    <a:pt x="4033" y="17483"/>
-                  </a:cubicBezTo>
-                  <a:cubicBezTo>
-                    <a:pt x="3842" y="18961"/>
-                    <a:pt x="4488" y="20422"/>
-                    <a:pt x="5710" y="21275"/>
-                  </a:cubicBezTo>
-                  <a:cubicBezTo>
-                    <a:pt x="6931" y="22128"/>
-                    <a:pt x="8526" y="22232"/>
-                    <a:pt x="9847" y="21544"/>
-                  </a:cubicBezTo>
-                  <a:cubicBezTo>
-                    <a:pt x="11169" y="20856"/>
-                    <a:pt x="11998" y="19490"/>
-                    <a:pt x="12000" y="18000"/>
-                  </a:cubicBezTo>
-                  <a:close/>
-                </a:path>
-                <a:path w="24000" h="24000" fill="none">
-                  <a:moveTo>
-                    <a:pt x="12000" y="5000"/>
-                  </a:moveTo>
-                  <a:cubicBezTo>
-                    <a:pt x="11997" y="3911"/>
-                    <a:pt x="12584" y="2906"/>
-                    <a:pt x="13534" y="2374"/>
-                  </a:cubicBezTo>
-                  <a:cubicBezTo>
-                    <a:pt x="14484" y="1842"/>
-                    <a:pt x="15647" y="1866"/>
-                    <a:pt x="16574" y="2437"/>
-                  </a:cubicBezTo>
-                  <a:cubicBezTo>
-                    <a:pt x="17501" y="3009"/>
-                    <a:pt x="18046" y="4037"/>
-                    <a:pt x="17997" y="5125"/>
-                  </a:cubicBezTo>
-                  <a:cubicBezTo>
-                    <a:pt x="19188" y="5431"/>
-                    <a:pt x="20172" y="6268"/>
-                    <a:pt x="20665" y="7395"/>
-                  </a:cubicBezTo>
-                  <a:cubicBezTo>
-                    <a:pt x="21158" y="8521"/>
-                    <a:pt x="21106" y="9812"/>
-                    <a:pt x="20523" y="10895"/>
-                  </a:cubicBezTo>
-                  <a:cubicBezTo>
-                    <a:pt x="21550" y="11729"/>
-                    <a:pt x="22098" y="13018"/>
-                    <a:pt x="21987" y="14336"/>
-                  </a:cubicBezTo>
-                  <a:cubicBezTo>
-                    <a:pt x="21875" y="15654"/>
-                    <a:pt x="21119" y="16833"/>
-                    <a:pt x="19967" y="17483"/>
-                  </a:cubicBezTo>
-                  <a:cubicBezTo>
-                    <a:pt x="20158" y="18961"/>
-                    <a:pt x="19512" y="20422"/>
-                    <a:pt x="18290" y="21275"/>
-                  </a:cubicBezTo>
-                  <a:cubicBezTo>
-                    <a:pt x="17069" y="22128"/>
-                    <a:pt x="15474" y="22232"/>
-                    <a:pt x="14153" y="21544"/>
-                  </a:cubicBezTo>
-                  <a:cubicBezTo>
-                    <a:pt x="12831" y="20856"/>
-                    <a:pt x="12002" y="19490"/>
-                    <a:pt x="12000" y="18000"/>
-                  </a:cubicBezTo>
-                  <a:close/>
-                </a:path>
-                <a:path w="24000" h="24000" fill="none">
-                  <a:moveTo>
-                    <a:pt x="15000" y="13000"/>
-                  </a:moveTo>
-                  <a:cubicBezTo>
-                    <a:pt x="13283" y="12396"/>
-                    <a:pt x="12099" y="10817"/>
-                    <a:pt x="12000" y="9000"/>
-                  </a:cubicBezTo>
-                  <a:cubicBezTo>
-                    <a:pt x="11901" y="10817"/>
-                    <a:pt x="10717" y="12396"/>
-                    <a:pt x="9000" y="13000"/>
-                  </a:cubicBezTo>
-                </a:path>
-                <a:path w="24000" h="24000" fill="none">
-                  <a:moveTo>
-                    <a:pt x="17599" y="6500"/>
-                  </a:moveTo>
-                  <a:cubicBezTo>
-                    <a:pt x="17841" y="6081"/>
-                    <a:pt x="17978" y="5609"/>
-                    <a:pt x="17998" y="5125"/>
-                  </a:cubicBezTo>
-                </a:path>
-                <a:path w="24000" h="24000" fill="none">
-                  <a:moveTo>
-                    <a:pt x="6003" y="5125"/>
-                  </a:moveTo>
-                  <a:cubicBezTo>
-                    <a:pt x="6023" y="5609"/>
-                    <a:pt x="6159" y="6080"/>
-                    <a:pt x="6401" y="6500"/>
-                  </a:cubicBezTo>
-                </a:path>
-                <a:path w="24000" h="24000" fill="none">
-                  <a:moveTo>
-                    <a:pt x="3477" y="10896"/>
-                  </a:moveTo>
-                  <a:cubicBezTo>
-                    <a:pt x="3660" y="10747"/>
-                    <a:pt x="3856" y="10614"/>
-                    <a:pt x="4062" y="10500"/>
-                  </a:cubicBezTo>
-                </a:path>
-                <a:path w="24000" h="24000" fill="none">
-                  <a:moveTo>
-                    <a:pt x="19938" y="10500"/>
-                  </a:moveTo>
-                  <a:cubicBezTo>
-                    <a:pt x="20144" y="10614"/>
-                    <a:pt x="20340" y="10747"/>
-                    <a:pt x="20523" y="10896"/>
-                  </a:cubicBezTo>
-                </a:path>
-                <a:path w="24000" h="24000" fill="none">
-                  <a:moveTo>
-                    <a:pt x="6000" y="18000"/>
-                  </a:moveTo>
-                  <a:cubicBezTo>
-                    <a:pt x="5311" y="18000"/>
-                    <a:pt x="4633" y="17823"/>
-                    <a:pt x="4033" y="17484"/>
-                  </a:cubicBezTo>
-                </a:path>
-                <a:path w="24000" h="24000" fill="none">
-                  <a:moveTo>
-                    <a:pt x="19967" y="17484"/>
-                  </a:moveTo>
-                  <a:cubicBezTo>
-                    <a:pt x="19367" y="17823"/>
-                    <a:pt x="18689" y="18000"/>
-                    <a:pt x="18000" y="18000"/>
-                  </a:cubicBezTo>
-                </a:path>
-              </a:pathLst>
-            </a:custGeom>
-            <a:noFill/>
-            <a:ln w="19380" cap="rnd">
-              <a:solidFill>
-                <a:srgbClr val="FFFFFF"/>
-              </a:solidFill>
-              <a:round/>
-            </a:ln>
-          </p:spPr>
-          <p:txBody>
-            <a:bodyPr rtlCol="0" anchor="ctr"/>
-            <a:lstStyle/>
-            <a:p>
-              <a:pPr algn="ctr"/>
-            </a:p>
-          </p:txBody>
-        </p:sp>
-        <p:sp>
-          <p:nvSpPr>
-            <p:cNvPr id="806" name="BrandDeck Diagram Text 1"/>
-            <p:cNvSpPr txBox="1"/>
-            <p:nvPr/>
-          </p:nvSpPr>
-          <p:spPr>
-            <a:xfrm>
-              <a:off x="1425235" y="3557355"/>
-              <a:ext cx="4077443" cy="1019556"/>
-            </a:xfrm>
-            <a:prstGeom prst="rect">
-              <a:avLst/>
-            </a:prstGeom>
-            <a:noFill/>
-          </p:spPr>
-          <p:txBody>
-            <a:bodyPr wrap="square" anchor="ctr" lIns="36576" tIns="18288" rIns="36576" bIns="18288">
-              <a:noAutofit/>
-            </a:bodyPr>
-            <a:lstStyle/>
-            <a:p>
-              <a:pPr algn="l">
-                <a:lnSpc>
-                  <a:spcPct val="110000"/>
-                </a:lnSpc>
-              </a:pPr>
-              <a:r>
-                <a:rPr sz="1800" b="0">
-                  <a:solidFill>
-                    <a:srgbClr val="000000"/>
-                  </a:solidFill>
-                  <a:latin typeface="Play"/>
-                </a:rPr>
-                <a:t>Модель с открытыми весами работает строго внутри контура компании.</a:t>
-              </a:r>
-            </a:p>
-          </p:txBody>
-        </p:sp>
-        <p:sp>
-          <p:nvSpPr>
-            <p:cNvPr id="807" name="BrandDeck Diagram Card 2"/>
-            <p:cNvSpPr/>
-            <p:nvPr/>
-          </p:nvSpPr>
-          <p:spPr>
-            <a:xfrm>
-              <a:off x="5928801" y="3425681"/>
-              <a:ext cx="5063324" cy="1282903"/>
-            </a:xfrm>
-            <a:prstGeom prst="roundRect">
-              <a:avLst>
-                <a:gd name="adj" fmla="val 8000"/>
-              </a:avLst>
-            </a:prstGeom>
-            <a:solidFill>
-              <a:srgbClr val="EDF5FF"/>
-            </a:solidFill>
-            <a:ln>
-              <a:noFill/>
-            </a:ln>
-          </p:spPr>
-          <p:txBody>
-            <a:bodyPr rtlCol="0" anchor="ctr"/>
-            <a:lstStyle/>
-            <a:p>
-              <a:pPr algn="ctr"/>
-            </a:p>
-          </p:txBody>
-        </p:sp>
-        <p:sp>
-          <p:nvSpPr>
-            <p:cNvPr id="808" name="BrandDeck Diagram Icon 2 Badge"/>
-            <p:cNvSpPr/>
-            <p:nvPr/>
-          </p:nvSpPr>
-          <p:spPr>
-            <a:xfrm>
-              <a:off x="6148257" y="3859485"/>
-              <a:ext cx="415295" cy="415295"/>
-            </a:xfrm>
-            <a:prstGeom prst="ellipse">
-              <a:avLst/>
-            </a:prstGeom>
-            <a:solidFill>
-              <a:srgbClr val="006DEB"/>
-            </a:solidFill>
-            <a:ln>
-              <a:noFill/>
-            </a:ln>
-          </p:spPr>
-          <p:txBody>
-            <a:bodyPr rtlCol="0" anchor="ctr"/>
-            <a:lstStyle/>
-            <a:p>
-              <a:pPr algn="ctr"/>
-            </a:p>
-          </p:txBody>
-        </p:sp>
-        <p:sp>
-          <p:nvSpPr>
-            <p:cNvPr id="809" name="BrandDeck Icon file-text"/>
-            <p:cNvSpPr/>
-            <p:nvPr/>
-          </p:nvSpPr>
-          <p:spPr>
-            <a:xfrm>
-              <a:off x="6239622" y="3950850"/>
-              <a:ext cx="232565" cy="232565"/>
-            </a:xfrm>
-            <a:custGeom>
-              <a:avLst/>
-              <a:gdLst/>
-              <a:ahLst/>
-              <a:cxnLst/>
-              <a:rect l="l" t="t" r="r" b="b"/>
-              <a:pathLst>
-                <a:path w="24000" h="24000" fill="none">
-                  <a:moveTo>
-                    <a:pt x="15000" y="2000"/>
-                  </a:moveTo>
-                  <a:lnTo>
-                    <a:pt x="6000" y="2000"/>
-                  </a:lnTo>
-                  <a:cubicBezTo>
-                    <a:pt x="4895" y="2000"/>
-                    <a:pt x="4000" y="2895"/>
-                    <a:pt x="4000" y="4000"/>
-                  </a:cubicBezTo>
-                  <a:lnTo>
-                    <a:pt x="4000" y="20000"/>
-                  </a:lnTo>
-                  <a:cubicBezTo>
-                    <a:pt x="4000" y="21105"/>
-                    <a:pt x="4895" y="22000"/>
-                    <a:pt x="6000" y="22000"/>
-                  </a:cubicBezTo>
-                  <a:lnTo>
-                    <a:pt x="18000" y="22000"/>
-                  </a:lnTo>
-                  <a:cubicBezTo>
-                    <a:pt x="19105" y="22000"/>
-                    <a:pt x="20000" y="21105"/>
-                    <a:pt x="20000" y="20000"/>
-                  </a:cubicBezTo>
-                  <a:lnTo>
-                    <a:pt x="20000" y="7000"/>
-                  </a:lnTo>
-                  <a:close/>
-                </a:path>
-                <a:path w="24000" h="24000" fill="none">
-                  <a:moveTo>
-                    <a:pt x="14000" y="2000"/>
-                  </a:moveTo>
-                  <a:lnTo>
-                    <a:pt x="14000" y="6000"/>
-                  </a:lnTo>
-                  <a:cubicBezTo>
-                    <a:pt x="14000" y="7105"/>
-                    <a:pt x="14895" y="8000"/>
-                    <a:pt x="16000" y="8000"/>
-                  </a:cubicBezTo>
-                  <a:lnTo>
-                    <a:pt x="20000" y="8000"/>
-                  </a:lnTo>
-                </a:path>
-                <a:path w="24000" h="24000" fill="none">
-                  <a:moveTo>
-                    <a:pt x="10000" y="9000"/>
-                  </a:moveTo>
-                  <a:lnTo>
-                    <a:pt x="8000" y="9000"/>
-                  </a:lnTo>
-                </a:path>
-                <a:path w="24000" h="24000" fill="none">
-                  <a:moveTo>
-                    <a:pt x="16000" y="13000"/>
-                  </a:moveTo>
-                  <a:lnTo>
-                    <a:pt x="8000" y="13000"/>
-                  </a:lnTo>
-                </a:path>
-                <a:path w="24000" h="24000" fill="none">
-                  <a:moveTo>
-                    <a:pt x="16000" y="17000"/>
-                  </a:moveTo>
-                  <a:lnTo>
-                    <a:pt x="8000" y="17000"/>
-                  </a:lnTo>
-                </a:path>
-              </a:pathLst>
-            </a:custGeom>
-            <a:noFill/>
-            <a:ln w="19380" cap="rnd">
-              <a:solidFill>
-                <a:srgbClr val="FFFFFF"/>
-              </a:solidFill>
-              <a:round/>
-            </a:ln>
-          </p:spPr>
-          <p:txBody>
-            <a:bodyPr rtlCol="0" anchor="ctr"/>
-            <a:lstStyle/>
-            <a:p>
-              <a:pPr algn="ctr"/>
-            </a:p>
-          </p:txBody>
-        </p:sp>
-        <p:sp>
-          <p:nvSpPr>
-            <p:cNvPr id="810" name="BrandDeck Diagram Text 2"/>
-            <p:cNvSpPr txBox="1"/>
-            <p:nvPr/>
-          </p:nvSpPr>
-          <p:spPr>
-            <a:xfrm>
-              <a:off x="6695226" y="3557355"/>
-              <a:ext cx="4077443" cy="1019556"/>
-            </a:xfrm>
-            <a:prstGeom prst="rect">
-              <a:avLst/>
-            </a:prstGeom>
-            <a:noFill/>
-          </p:spPr>
-          <p:txBody>
-            <a:bodyPr wrap="square" anchor="ctr" lIns="36576" tIns="18288" rIns="36576" bIns="18288">
-              <a:noAutofit/>
-            </a:bodyPr>
-            <a:lstStyle/>
-            <a:p>
-              <a:pPr algn="l">
-                <a:lnSpc>
-                  <a:spcPct val="110000"/>
-                </a:lnSpc>
-              </a:pPr>
-              <a:r>
-                <a:rPr sz="1800" b="0">
-                  <a:solidFill>
-                    <a:srgbClr val="000000"/>
-                  </a:solidFill>
-                  <a:latin typeface="Play"/>
-                </a:rPr>
-                <a:t>Документы не покидают периметр и не уходят наружу.</a:t>
-              </a:r>
-            </a:p>
-          </p:txBody>
-        </p:sp>
-        <p:sp>
-          <p:nvSpPr>
-            <p:cNvPr id="811" name="BrandDeck Diagram Card 3"/>
-            <p:cNvSpPr/>
-            <p:nvPr/>
-          </p:nvSpPr>
-          <p:spPr>
-            <a:xfrm>
-              <a:off x="658811" y="4915251"/>
-              <a:ext cx="5063324" cy="1282903"/>
-            </a:xfrm>
-            <a:prstGeom prst="roundRect">
-              <a:avLst>
-                <a:gd name="adj" fmla="val 8000"/>
-              </a:avLst>
-            </a:prstGeom>
-            <a:solidFill>
-              <a:srgbClr val="EDF5FF"/>
-            </a:solidFill>
-            <a:ln>
-              <a:noFill/>
-            </a:ln>
-          </p:spPr>
-          <p:txBody>
-            <a:bodyPr rtlCol="0" anchor="ctr"/>
-            <a:lstStyle/>
-            <a:p>
-              <a:pPr algn="ctr"/>
-            </a:p>
-          </p:txBody>
-        </p:sp>
-        <p:sp>
-          <p:nvSpPr>
-            <p:cNvPr id="812" name="BrandDeck Diagram Icon 3 Badge"/>
-            <p:cNvSpPr/>
-            <p:nvPr/>
-          </p:nvSpPr>
-          <p:spPr>
-            <a:xfrm>
-              <a:off x="878267" y="5349055"/>
-              <a:ext cx="415295" cy="415295"/>
-            </a:xfrm>
-            <a:prstGeom prst="ellipse">
-              <a:avLst/>
-            </a:prstGeom>
-            <a:solidFill>
-              <a:srgbClr val="006DEB"/>
-            </a:solidFill>
-            <a:ln>
-              <a:noFill/>
-            </a:ln>
-          </p:spPr>
-          <p:txBody>
-            <a:bodyPr rtlCol="0" anchor="ctr"/>
-            <a:lstStyle/>
-            <a:p>
-              <a:pPr algn="ctr"/>
-            </a:p>
-          </p:txBody>
-        </p:sp>
-        <p:sp>
-          <p:nvSpPr>
-            <p:cNvPr id="813" name="BrandDeck Icon shield-check"/>
-            <p:cNvSpPr/>
-            <p:nvPr/>
-          </p:nvSpPr>
-          <p:spPr>
-            <a:xfrm>
-              <a:off x="969631" y="5440420"/>
-              <a:ext cx="232565" cy="232565"/>
-            </a:xfrm>
-            <a:custGeom>
-              <a:avLst/>
-              <a:gdLst/>
-              <a:ahLst/>
-              <a:cxnLst/>
-              <a:rect l="l" t="t" r="r" b="b"/>
-              <a:pathLst>
-                <a:path w="24000" h="24000" fill="none">
-                  <a:moveTo>
-                    <a:pt x="20000" y="13000"/>
-                  </a:moveTo>
-                  <a:cubicBezTo>
-                    <a:pt x="20000" y="18000"/>
-                    <a:pt x="16500" y="20500"/>
-                    <a:pt x="12340" y="21950"/>
-                  </a:cubicBezTo>
-                  <a:cubicBezTo>
-                    <a:pt x="12122" y="22024"/>
-                    <a:pt x="11886" y="22020"/>
-                    <a:pt x="11670" y="21940"/>
-                  </a:cubicBezTo>
-                  <a:cubicBezTo>
-                    <a:pt x="7500" y="20500"/>
-                    <a:pt x="4000" y="18000"/>
-                    <a:pt x="4000" y="13000"/>
-                  </a:cubicBezTo>
-                  <a:lnTo>
-                    <a:pt x="4000" y="6000"/>
-                  </a:lnTo>
-                  <a:cubicBezTo>
-                    <a:pt x="4000" y="5448"/>
-                    <a:pt x="4448" y="5000"/>
-                    <a:pt x="5000" y="5000"/>
-                  </a:cubicBezTo>
-                  <a:cubicBezTo>
-                    <a:pt x="7000" y="5000"/>
-                    <a:pt x="9500" y="3800"/>
-                    <a:pt x="11240" y="2280"/>
-                  </a:cubicBezTo>
-                  <a:cubicBezTo>
-                    <a:pt x="11678" y="1906"/>
-                    <a:pt x="12322" y="1906"/>
-                    <a:pt x="12760" y="2280"/>
-                  </a:cubicBezTo>
-                  <a:cubicBezTo>
-                    <a:pt x="14510" y="3810"/>
-                    <a:pt x="17000" y="5000"/>
-                    <a:pt x="19000" y="5000"/>
-                  </a:cubicBezTo>
-                  <a:cubicBezTo>
-                    <a:pt x="19552" y="5000"/>
-                    <a:pt x="20000" y="5448"/>
-                    <a:pt x="20000" y="6000"/>
-                  </a:cubicBezTo>
-                  <a:close/>
-                </a:path>
-                <a:path w="24000" h="24000" fill="none">
-                  <a:moveTo>
-                    <a:pt x="9000" y="12000"/>
-                  </a:moveTo>
-                  <a:lnTo>
-                    <a:pt x="11000" y="14000"/>
-                  </a:lnTo>
-                  <a:lnTo>
-                    <a:pt x="15000" y="10000"/>
-                  </a:lnTo>
-                </a:path>
-              </a:pathLst>
-            </a:custGeom>
-            <a:noFill/>
-            <a:ln w="19380" cap="rnd">
-              <a:solidFill>
-                <a:srgbClr val="FFFFFF"/>
-              </a:solidFill>
-              <a:round/>
-            </a:ln>
-          </p:spPr>
-          <p:txBody>
-            <a:bodyPr rtlCol="0" anchor="ctr"/>
-            <a:lstStyle/>
-            <a:p>
-              <a:pPr algn="ctr"/>
-            </a:p>
-          </p:txBody>
-        </p:sp>
-        <p:sp>
-          <p:nvSpPr>
-            <p:cNvPr id="814" name="BrandDeck Diagram Text 3"/>
-            <p:cNvSpPr txBox="1"/>
-            <p:nvPr/>
-          </p:nvSpPr>
-          <p:spPr>
-            <a:xfrm>
-              <a:off x="1425235" y="5046925"/>
-              <a:ext cx="4077443" cy="1019556"/>
-            </a:xfrm>
-            <a:prstGeom prst="rect">
-              <a:avLst/>
-            </a:prstGeom>
-            <a:noFill/>
-          </p:spPr>
-          <p:txBody>
-            <a:bodyPr wrap="square" anchor="ctr" lIns="36576" tIns="18288" rIns="36576" bIns="18288">
-              <a:noAutofit/>
-            </a:bodyPr>
-            <a:lstStyle/>
-            <a:p>
-              <a:pPr algn="l">
-                <a:lnSpc>
-                  <a:spcPct val="110000"/>
-                </a:lnSpc>
-              </a:pPr>
-              <a:r>
-                <a:rPr sz="1800" b="0">
-                  <a:solidFill>
-                    <a:srgbClr val="000000"/>
-                  </a:solidFill>
-                  <a:latin typeface="Play"/>
-                </a:rPr>
-                <a:t>Обеспечивается безопасность данных при обработке запросов.</a:t>
-              </a:r>
-            </a:p>
-          </p:txBody>
-        </p:sp>
-      </p:grpSp>
     </p:spTree>
   </p:cSld>
   <p:clrMapOvr>
@@ -9266,7 +10243,7 @@
 </p:sld>
 </file>
 
-<file path=ppt/slides/slide11.xml><?xml version="1.0" encoding="utf-8"?>
+<file path=ppt/slides/slide2.xml><?xml version="1.0" encoding="utf-8"?>
 <p:sld xmlns:a="http://schemas.openxmlformats.org/drawingml/2006/main" xmlns:p="http://schemas.openxmlformats.org/presentationml/2006/main" xmlns:r="http://schemas.openxmlformats.org/officeDocument/2006/relationships">
   <p:cSld>
     <p:bg>
@@ -9305,7 +10282,7 @@
           </a:ln>
         </p:spPr>
         <p:txBody>
-          <a:bodyPr anchorCtr="0" anchor="t" bIns="0" lIns="0" spcFirstLastPara="1" rIns="0" wrap="square" tIns="0">
+          <a:bodyPr anchorCtr="0" anchor="t" bIns="0" lIns="0" spcFirstLastPara="1" rIns="0" wrap="square" tIns="0" vert="horz">
             <a:normAutofit/>
           </a:bodyPr>
           <a:lstStyle/>
@@ -9333,7 +10310,7 @@
                   <a:srgbClr val="000000"/>
                 </a:solidFill>
               </a:rPr>
-              <a:t>Требуется одобрение пилота и выделение команды из 3 человек для реализации</a:t>
+              <a:t>Поиск инструкции занимает до 30 минут, а треть обращений — повторяющиеся вопросы</a:t>
             </a:r>
             <a:endParaRPr/>
           </a:p>
@@ -9341,16 +10318,16 @@
       </p:sp>
       <p:grpSp>
         <p:nvGrpSpPr>
-          <p:cNvPr id="2" name="BrandDeck Diagram icon_grid" descr="icon_grid: Просим одобрить запуск пилота.; Требуется выделение команды из 3 человек.; Срок пилота: 6 недель."/>
+          <p:cNvPr id="2" name="BrandDeck Diagram icon_grid" descr="icon_grid: Время поиска до 30 минут; Повторяющиеся вопросы треть обращений"/>
           <p:cNvGrpSpPr/>
           <p:nvPr/>
         </p:nvGrpSpPr>
         <p:grpSpPr>
           <a:xfrm>
             <a:off x="677334" y="2603500"/>
-            <a:ext cx="10855853" cy="3597276"/>
+            <a:ext cx="10855854" cy="3597275"/>
             <a:chOff x="677334" y="2603500"/>
-            <a:chExt cx="10855853" cy="3597276"/>
+            <a:chExt cx="10855854" cy="3597275"/>
           </a:xfrm>
         </p:grpSpPr>
         <p:sp>
@@ -9362,7 +10339,7 @@
           <p:spPr>
             <a:xfrm>
               <a:off x="677334" y="2603500"/>
-              <a:ext cx="3473873" cy="3597276"/>
+              <a:ext cx="10855854" cy="1690079"/>
             </a:xfrm>
             <a:prstGeom prst="roundRect">
               <a:avLst>
@@ -9392,8 +10369,8 @@
           </p:nvSpPr>
           <p:spPr>
             <a:xfrm>
-              <a:off x="896789" y="2822956"/>
-              <a:ext cx="603504" cy="603504"/>
+              <a:off x="896790" y="3211928"/>
+              <a:ext cx="473222" cy="473222"/>
             </a:xfrm>
             <a:prstGeom prst="ellipse">
               <a:avLst/>
@@ -9415,14 +10392,14 @@
         </p:sp>
         <p:sp>
           <p:nvSpPr>
-            <p:cNvPr id="546" name="BrandDeck Icon rocket"/>
+            <p:cNvPr id="546" name="BrandDeck Icon clock"/>
             <p:cNvSpPr/>
             <p:nvPr/>
           </p:nvSpPr>
           <p:spPr>
             <a:xfrm>
-              <a:off x="1029560" y="2955726"/>
-              <a:ext cx="337962" cy="337962"/>
+              <a:off x="1000898" y="3316037"/>
+              <a:ext cx="265004" cy="265004"/>
             </a:xfrm>
             <a:custGeom>
               <a:avLst/>
@@ -9433,99 +10410,45 @@
               <a:pathLst>
                 <a:path w="24000" h="24000" fill="none">
                   <a:moveTo>
-                    <a:pt x="4500" y="16500"/>
+                    <a:pt x="22000" y="12000"/>
                   </a:moveTo>
                   <a:cubicBezTo>
-                    <a:pt x="3000" y="17760"/>
-                    <a:pt x="2500" y="21500"/>
-                    <a:pt x="2500" y="21500"/>
+                    <a:pt x="22000" y="17523"/>
+                    <a:pt x="17523" y="22000"/>
+                    <a:pt x="12000" y="22000"/>
                   </a:cubicBezTo>
                   <a:cubicBezTo>
-                    <a:pt x="2500" y="21500"/>
-                    <a:pt x="6240" y="21000"/>
-                    <a:pt x="7500" y="19500"/>
+                    <a:pt x="6477" y="22000"/>
+                    <a:pt x="2000" y="17523"/>
+                    <a:pt x="2000" y="12000"/>
                   </a:cubicBezTo>
                   <a:cubicBezTo>
-                    <a:pt x="8210" y="18660"/>
-                    <a:pt x="8200" y="17370"/>
-                    <a:pt x="7410" y="16590"/>
+                    <a:pt x="2000" y="6477"/>
+                    <a:pt x="6477" y="2000"/>
+                    <a:pt x="12000" y="2000"/>
                   </a:cubicBezTo>
                   <a:cubicBezTo>
-                    <a:pt x="6605" y="15822"/>
-                    <a:pt x="5351" y="15783"/>
-                    <a:pt x="4500" y="16500"/>
+                    <a:pt x="17523" y="2000"/>
+                    <a:pt x="22000" y="6477"/>
+                    <a:pt x="22000" y="12000"/>
                   </a:cubicBezTo>
                   <a:close/>
                 </a:path>
                 <a:path w="24000" h="24000" fill="none">
                   <a:moveTo>
-                    <a:pt x="12000" y="15000"/>
+                    <a:pt x="12000" y="6000"/>
                   </a:moveTo>
                   <a:lnTo>
-                    <a:pt x="9000" y="12000"/>
+                    <a:pt x="12000" y="12000"/>
                   </a:lnTo>
-                  <a:cubicBezTo>
-                    <a:pt x="9532" y="10619"/>
-                    <a:pt x="10202" y="9296"/>
-                    <a:pt x="11000" y="8050"/>
-                  </a:cubicBezTo>
-                  <a:cubicBezTo>
-                    <a:pt x="13369" y="4262"/>
-                    <a:pt x="17532" y="1972"/>
-                    <a:pt x="22000" y="2000"/>
-                  </a:cubicBezTo>
-                  <a:cubicBezTo>
-                    <a:pt x="22000" y="4720"/>
-                    <a:pt x="21220" y="9500"/>
-                    <a:pt x="16000" y="13000"/>
-                  </a:cubicBezTo>
-                  <a:cubicBezTo>
-                    <a:pt x="14737" y="13799"/>
-                    <a:pt x="13397" y="14469"/>
-                    <a:pt x="12000" y="15000"/>
-                  </a:cubicBezTo>
-                  <a:close/>
-                </a:path>
-                <a:path w="24000" h="24000" fill="none">
-                  <a:moveTo>
-                    <a:pt x="9000" y="12000"/>
-                  </a:moveTo>
                   <a:lnTo>
-                    <a:pt x="4000" y="12000"/>
+                    <a:pt x="16000" y="14000"/>
                   </a:lnTo>
-                  <a:cubicBezTo>
-                    <a:pt x="4000" y="12000"/>
-                    <a:pt x="4550" y="8970"/>
-                    <a:pt x="6000" y="8000"/>
-                  </a:cubicBezTo>
-                  <a:cubicBezTo>
-                    <a:pt x="7620" y="6920"/>
-                    <a:pt x="11000" y="8000"/>
-                    <a:pt x="11000" y="8000"/>
-                  </a:cubicBezTo>
-                </a:path>
-                <a:path w="24000" h="24000" fill="none">
-                  <a:moveTo>
-                    <a:pt x="12000" y="15000"/>
-                  </a:moveTo>
-                  <a:lnTo>
-                    <a:pt x="12000" y="20000"/>
-                  </a:lnTo>
-                  <a:cubicBezTo>
-                    <a:pt x="12000" y="20000"/>
-                    <a:pt x="15030" y="19450"/>
-                    <a:pt x="16000" y="18000"/>
-                  </a:cubicBezTo>
-                  <a:cubicBezTo>
-                    <a:pt x="17080" y="16380"/>
-                    <a:pt x="16000" y="13000"/>
-                    <a:pt x="16000" y="13000"/>
-                  </a:cubicBezTo>
                 </a:path>
               </a:pathLst>
             </a:custGeom>
             <a:noFill/>
-            <a:ln w="28163" cap="rnd">
+            <a:ln w="22083" cap="rnd">
               <a:solidFill>
                 <a:srgbClr val="FFFFFF"/>
               </a:solidFill>
@@ -9548,8 +10471,8 @@
           </p:nvSpPr>
           <p:spPr>
             <a:xfrm>
-              <a:off x="830953" y="3580079"/>
-              <a:ext cx="3166634" cy="2510968"/>
+              <a:off x="1501685" y="2735173"/>
+              <a:ext cx="9812046" cy="1426732"/>
             </a:xfrm>
             <a:prstGeom prst="rect">
               <a:avLst/>
@@ -9557,7 +10480,7 @@
             <a:noFill/>
           </p:spPr>
           <p:txBody>
-            <a:bodyPr wrap="square" anchor="t" lIns="36576" tIns="18288" rIns="36576" bIns="18288">
+            <a:bodyPr wrap="square" anchor="ctr" lIns="36576" tIns="18288" rIns="36576" bIns="18288">
               <a:noAutofit/>
             </a:bodyPr>
             <a:lstStyle/>
@@ -9568,13 +10491,32 @@
                 </a:lnSpc>
               </a:pPr>
               <a:r>
+                <a:rPr sz="1800" b="1">
+                  <a:solidFill>
+                    <a:srgbClr val="000000"/>
+                  </a:solidFill>
+                  <a:latin typeface="Play"/>
+                </a:rPr>
+                <a:t>Время поиска</a:t>
+              </a:r>
+            </a:p>
+            <a:p>
+              <a:pPr algn="l">
+                <a:lnSpc>
+                  <a:spcPct val="110000"/>
+                </a:lnSpc>
+                <a:spcBef>
+                  <a:spcPts val="450"/>
+                </a:spcBef>
+              </a:pPr>
+              <a:r>
                 <a:rPr sz="1800" b="0">
                   <a:solidFill>
                     <a:srgbClr val="000000"/>
                   </a:solidFill>
                   <a:latin typeface="Play"/>
                 </a:rPr>
-                <a:t>Просим одобрить запуск пилота.</a:t>
+                <a:t>до 30 минут</a:t>
               </a:r>
             </a:p>
           </p:txBody>
@@ -9587,8 +10529,8 @@
           </p:nvSpPr>
           <p:spPr>
             <a:xfrm>
-              <a:off x="4368324" y="2603500"/>
-              <a:ext cx="3473873" cy="3597276"/>
+              <a:off x="677334" y="4510696"/>
+              <a:ext cx="10855854" cy="1690079"/>
             </a:xfrm>
             <a:prstGeom prst="roundRect">
               <a:avLst>
@@ -9618,8 +10560,1274 @@
           </p:nvSpPr>
           <p:spPr>
             <a:xfrm>
-              <a:off x="4587780" y="2822956"/>
-              <a:ext cx="603504" cy="603504"/>
+              <a:off x="896790" y="5119125"/>
+              <a:ext cx="473222" cy="473222"/>
+            </a:xfrm>
+            <a:prstGeom prst="ellipse">
+              <a:avLst/>
+            </a:prstGeom>
+            <a:solidFill>
+              <a:srgbClr val="006DEB"/>
+            </a:solidFill>
+            <a:ln>
+              <a:noFill/>
+            </a:ln>
+          </p:spPr>
+          <p:txBody>
+            <a:bodyPr rtlCol="0" anchor="ctr"/>
+            <a:lstStyle/>
+            <a:p>
+              <a:pPr algn="ctr"/>
+            </a:p>
+          </p:txBody>
+        </p:sp>
+        <p:sp>
+          <p:nvSpPr>
+            <p:cNvPr id="550" name="BrandDeck Icon repeat"/>
+            <p:cNvSpPr/>
+            <p:nvPr/>
+          </p:nvSpPr>
+          <p:spPr>
+            <a:xfrm>
+              <a:off x="1000898" y="5223234"/>
+              <a:ext cx="265004" cy="265004"/>
+            </a:xfrm>
+            <a:custGeom>
+              <a:avLst/>
+              <a:gdLst/>
+              <a:ahLst/>
+              <a:cxnLst/>
+              <a:rect l="l" t="t" r="r" b="b"/>
+              <a:pathLst>
+                <a:path w="24000" h="24000" fill="none">
+                  <a:moveTo>
+                    <a:pt x="17000" y="2000"/>
+                  </a:moveTo>
+                  <a:lnTo>
+                    <a:pt x="21000" y="6000"/>
+                  </a:lnTo>
+                  <a:lnTo>
+                    <a:pt x="17000" y="10000"/>
+                  </a:lnTo>
+                </a:path>
+                <a:path w="24000" h="24000" fill="none">
+                  <a:moveTo>
+                    <a:pt x="3000" y="11000"/>
+                  </a:moveTo>
+                  <a:lnTo>
+                    <a:pt x="3000" y="10000"/>
+                  </a:lnTo>
+                  <a:cubicBezTo>
+                    <a:pt x="3000" y="7791"/>
+                    <a:pt x="4791" y="6000"/>
+                    <a:pt x="7000" y="6000"/>
+                  </a:cubicBezTo>
+                  <a:lnTo>
+                    <a:pt x="21000" y="6000"/>
+                  </a:lnTo>
+                </a:path>
+                <a:path w="24000" h="24000" fill="none">
+                  <a:moveTo>
+                    <a:pt x="7000" y="22000"/>
+                  </a:moveTo>
+                  <a:lnTo>
+                    <a:pt x="3000" y="18000"/>
+                  </a:lnTo>
+                  <a:lnTo>
+                    <a:pt x="7000" y="14000"/>
+                  </a:lnTo>
+                </a:path>
+                <a:path w="24000" h="24000" fill="none">
+                  <a:moveTo>
+                    <a:pt x="21000" y="13000"/>
+                  </a:moveTo>
+                  <a:lnTo>
+                    <a:pt x="21000" y="14000"/>
+                  </a:lnTo>
+                  <a:cubicBezTo>
+                    <a:pt x="21000" y="16209"/>
+                    <a:pt x="19209" y="18000"/>
+                    <a:pt x="17000" y="18000"/>
+                  </a:cubicBezTo>
+                  <a:lnTo>
+                    <a:pt x="3000" y="18000"/>
+                  </a:lnTo>
+                </a:path>
+              </a:pathLst>
+            </a:custGeom>
+            <a:noFill/>
+            <a:ln w="22083" cap="rnd">
+              <a:solidFill>
+                <a:srgbClr val="FFFFFF"/>
+              </a:solidFill>
+              <a:round/>
+            </a:ln>
+          </p:spPr>
+          <p:txBody>
+            <a:bodyPr rtlCol="0" anchor="ctr"/>
+            <a:lstStyle/>
+            <a:p>
+              <a:pPr algn="ctr"/>
+            </a:p>
+          </p:txBody>
+        </p:sp>
+        <p:sp>
+          <p:nvSpPr>
+            <p:cNvPr id="551" name="BrandDeck Diagram Text 2"/>
+            <p:cNvSpPr txBox="1"/>
+            <p:nvPr/>
+          </p:nvSpPr>
+          <p:spPr>
+            <a:xfrm>
+              <a:off x="1501685" y="4642370"/>
+              <a:ext cx="9812046" cy="1426732"/>
+            </a:xfrm>
+            <a:prstGeom prst="rect">
+              <a:avLst/>
+            </a:prstGeom>
+            <a:noFill/>
+          </p:spPr>
+          <p:txBody>
+            <a:bodyPr wrap="square" anchor="ctr" lIns="36576" tIns="18288" rIns="36576" bIns="18288">
+              <a:noAutofit/>
+            </a:bodyPr>
+            <a:lstStyle/>
+            <a:p>
+              <a:pPr algn="l">
+                <a:lnSpc>
+                  <a:spcPct val="110000"/>
+                </a:lnSpc>
+              </a:pPr>
+              <a:r>
+                <a:rPr sz="1800" b="1">
+                  <a:solidFill>
+                    <a:srgbClr val="000000"/>
+                  </a:solidFill>
+                  <a:latin typeface="Play"/>
+                </a:rPr>
+                <a:t>Повторяющиеся вопросы</a:t>
+              </a:r>
+            </a:p>
+            <a:p>
+              <a:pPr algn="l">
+                <a:lnSpc>
+                  <a:spcPct val="110000"/>
+                </a:lnSpc>
+                <a:spcBef>
+                  <a:spcPts val="450"/>
+                </a:spcBef>
+              </a:pPr>
+              <a:r>
+                <a:rPr sz="1800" b="0">
+                  <a:solidFill>
+                    <a:srgbClr val="000000"/>
+                  </a:solidFill>
+                  <a:latin typeface="Play"/>
+                </a:rPr>
+                <a:t>треть обращений</a:t>
+              </a:r>
+            </a:p>
+          </p:txBody>
+        </p:sp>
+      </p:grpSp>
+    </p:spTree>
+  </p:cSld>
+  <p:clrMapOvr>
+    <a:masterClrMapping/>
+  </p:clrMapOvr>
+</p:sld>
+</file>
+
+<file path=ppt/slides/slide3.xml><?xml version="1.0" encoding="utf-8"?>
+<p:sld xmlns:a="http://schemas.openxmlformats.org/drawingml/2006/main" xmlns:p="http://schemas.openxmlformats.org/presentationml/2006/main" xmlns:r="http://schemas.openxmlformats.org/officeDocument/2006/relationships">
+  <p:cSld>
+    <p:spTree>
+      <p:nvGrpSpPr>
+        <p:cNvPr id="1" name=""/>
+        <p:cNvGrpSpPr/>
+        <p:nvPr/>
+      </p:nvGrpSpPr>
+      <p:grpSpPr/>
+      <p:sp>
+        <p:nvSpPr>
+          <p:cNvPr id="2" name="BrandDeck Text 2"/>
+          <p:cNvSpPr>
+            <a:spLocks noGrp="1"/>
+          </p:cNvSpPr>
+          <p:nvPr>
+            <p:ph type="title"/>
+          </p:nvPr>
+        </p:nvSpPr>
+        <p:spPr>
+          <a:xfrm>
+            <a:off x="658813" y="692150"/>
+            <a:ext cx="5254307" cy="1380285"/>
+          </a:xfrm>
+        </p:spPr>
+        <p:txBody>
+          <a:bodyPr vert="horz" wrap="square" anchor="t">
+            <a:normAutofit/>
+          </a:bodyPr>
+          <a:lstStyle/>
+          <a:p>
+            <a:pPr algn="l">
+              <a:lnSpc>
+                <a:spcPct val="115000"/>
+              </a:lnSpc>
+              <a:spcBef>
+                <a:spcPts val="0"/>
+              </a:spcBef>
+              <a:spcAft>
+                <a:spcPts val="300"/>
+              </a:spcAft>
+            </a:pPr>
+            <a:r>
+              <a:rPr sz="2000">
+                <a:solidFill>
+                  <a:srgbClr val="000000"/>
+                </a:solidFill>
+              </a:rPr>
+              <a:t>Сотрудники тратят время на поиск, а поддержка обрабатывает повторяющиеся запросы</a:t>
+            </a:r>
+          </a:p>
+        </p:txBody>
+      </p:sp>
+      <p:sp>
+        <p:nvSpPr>
+          <p:cNvPr id="3" name="BrandDeck Text 3"/>
+          <p:cNvSpPr>
+            <a:spLocks noGrp="1"/>
+          </p:cNvSpPr>
+          <p:nvPr>
+            <p:ph type="body" idx="1"/>
+          </p:nvPr>
+        </p:nvSpPr>
+        <p:spPr/>
+        <p:txBody>
+          <a:bodyPr vert="horz" wrap="square" anchor="t">
+            <a:normAutofit/>
+          </a:bodyPr>
+          <a:lstStyle/>
+          <a:p>
+            <a:pPr>
+              <a:lnSpc>
+                <a:spcPct val="115000"/>
+              </a:lnSpc>
+              <a:spcBef>
+                <a:spcPts val="0"/>
+              </a:spcBef>
+              <a:spcAft>
+                <a:spcPts val="270"/>
+              </a:spcAft>
+            </a:pPr>
+            <a:r>
+              <a:rPr sz="1800">
+                <a:solidFill>
+                  <a:srgbClr val="000000"/>
+                </a:solidFill>
+              </a:rPr>
+              <a:t>Сотрудники тратят до 30 минут на поиск инструкций.</a:t>
+            </a:r>
+          </a:p>
+          <a:p>
+            <a:pPr>
+              <a:lnSpc>
+                <a:spcPct val="115000"/>
+              </a:lnSpc>
+              <a:spcBef>
+                <a:spcPts val="0"/>
+              </a:spcBef>
+              <a:spcAft>
+                <a:spcPts val="270"/>
+              </a:spcAft>
+            </a:pPr>
+            <a:r>
+              <a:rPr sz="1800">
+                <a:solidFill>
+                  <a:srgbClr val="000000"/>
+                </a:solidFill>
+              </a:rPr>
+              <a:t>Треть обращений в поддержку — повторяющиеся вопросы.</a:t>
+            </a:r>
+          </a:p>
+          <a:p>
+            <a:pPr>
+              <a:lnSpc>
+                <a:spcPct val="115000"/>
+              </a:lnSpc>
+              <a:spcBef>
+                <a:spcPts val="0"/>
+              </a:spcBef>
+              <a:spcAft>
+                <a:spcPts val="270"/>
+              </a:spcAft>
+            </a:pPr>
+            <a:r>
+              <a:rPr sz="1800">
+                <a:solidFill>
+                  <a:srgbClr val="000000"/>
+                </a:solidFill>
+              </a:rPr>
+              <a:t>Инициатива направлена на сотрудников и специалистов поддержки.</a:t>
+            </a:r>
+          </a:p>
+        </p:txBody>
+      </p:sp>
+      <p:pic>
+        <p:nvPicPr>
+          <p:cNvPr id="4" name="BrandDeck Image" descr="сотрудник специалист поддержки"/>
+          <p:cNvPicPr>
+            <a:picLocks noGrp="1" noChangeAspect="1"/>
+          </p:cNvPicPr>
+          <p:nvPr>
+            <p:ph type="pic" idx="2"/>
+          </p:nvPr>
+        </p:nvPicPr>
+        <p:blipFill>
+          <a:blip r:embed="rId2"/>
+          <a:srcRect l="36980" r="12993"/>
+          <a:stretch>
+            <a:fillRect/>
+          </a:stretch>
+        </p:blipFill>
+        <p:spPr/>
+      </p:pic>
+    </p:spTree>
+  </p:cSld>
+  <p:clrMapOvr>
+    <a:masterClrMapping/>
+  </p:clrMapOvr>
+</p:sld>
+</file>
+
+<file path=ppt/slides/slide4.xml><?xml version="1.0" encoding="utf-8"?>
+<p:sld xmlns:a="http://schemas.openxmlformats.org/drawingml/2006/main" xmlns:p="http://schemas.openxmlformats.org/presentationml/2006/main" xmlns:r="http://schemas.openxmlformats.org/officeDocument/2006/relationships">
+  <p:cSld>
+    <p:bg>
+      <p:bgPr>
+        <a:solidFill>
+          <a:schemeClr val="lt2"/>
+        </a:solidFill>
+      </p:bgPr>
+    </p:bg>
+    <p:spTree>
+      <p:nvGrpSpPr>
+        <p:cNvPr id="1" name=""/>
+        <p:cNvGrpSpPr/>
+        <p:nvPr/>
+      </p:nvGrpSpPr>
+      <p:grpSpPr/>
+      <p:sp>
+        <p:nvSpPr>
+          <p:cNvPr id="274" name="BrandDeck Text 274"/>
+          <p:cNvSpPr/>
+          <p:nvPr/>
+        </p:nvSpPr>
+        <p:spPr>
+          <a:xfrm>
+            <a:off x="671512" y="1773238"/>
+            <a:ext cx="5365752" cy="2156481"/>
+          </a:xfrm>
+          <a:prstGeom prst="roundRect">
+            <a:avLst>
+              <a:gd fmla="val 0" name="adj"/>
+            </a:avLst>
+          </a:prstGeom>
+          <a:solidFill>
+            <a:schemeClr val="lt1"/>
+          </a:solidFill>
+          <a:ln>
+            <a:noFill/>
+          </a:ln>
+        </p:spPr>
+        <p:txBody>
+          <a:bodyPr anchorCtr="0" anchor="t" bIns="45700" lIns="91425" spcFirstLastPara="1" rIns="91425" wrap="square" tIns="45700" vert="horz">
+            <a:normAutofit/>
+          </a:bodyPr>
+          <a:lstStyle/>
+          <a:p>
+            <a:pPr indent="0" marL="179388" marR="0" rtl="0" algn="l">
+              <a:lnSpc>
+                <a:spcPct val="115000"/>
+              </a:lnSpc>
+              <a:spcBef>
+                <a:spcPts val="0"/>
+              </a:spcBef>
+              <a:spcAft>
+                <a:spcPts val="270"/>
+              </a:spcAft>
+              <a:buNone/>
+            </a:pPr>
+            <a:r>
+              <a:rPr sz="1800" b="0">
+                <a:latin typeface="Play"/>
+                <a:solidFill>
+                  <a:schemeClr val="dk1"/>
+                </a:solidFill>
+              </a:rPr>
+              <a:t>Система отвечает на вопросы по регламентам и инструкциям.</a:t>
+            </a:r>
+            <a:endParaRPr b="0" i="0" sz="1800" u="none" cap="none" strike="noStrike">
+              <a:solidFill>
+                <a:schemeClr val="dk1"/>
+              </a:solidFill>
+              <a:latin typeface="Play"/>
+              <a:ea typeface="Play"/>
+              <a:cs typeface="Play"/>
+              <a:sym typeface="Play"/>
+            </a:endParaRPr>
+          </a:p>
+        </p:txBody>
+      </p:sp>
+      <p:sp>
+        <p:nvSpPr>
+          <p:cNvPr id="275" name="BrandDeck Text 275"/>
+          <p:cNvSpPr/>
+          <p:nvPr/>
+        </p:nvSpPr>
+        <p:spPr>
+          <a:xfrm>
+            <a:off x="6154737" y="1775553"/>
+            <a:ext cx="5391150" cy="2156481"/>
+          </a:xfrm>
+          <a:prstGeom prst="roundRect">
+            <a:avLst>
+              <a:gd fmla="val 0" name="adj"/>
+            </a:avLst>
+          </a:prstGeom>
+          <a:solidFill>
+            <a:schemeClr val="lt1"/>
+          </a:solidFill>
+          <a:ln>
+            <a:noFill/>
+          </a:ln>
+        </p:spPr>
+        <p:txBody>
+          <a:bodyPr anchorCtr="0" anchor="t" bIns="45700" lIns="91425" spcFirstLastPara="1" rIns="91425" wrap="square" tIns="45700" vert="horz">
+            <a:normAutofit/>
+          </a:bodyPr>
+          <a:lstStyle/>
+          <a:p>
+            <a:pPr indent="0" marL="179388" marR="0" rtl="0" algn="l">
+              <a:lnSpc>
+                <a:spcPct val="115000"/>
+              </a:lnSpc>
+              <a:spcBef>
+                <a:spcPts val="0"/>
+              </a:spcBef>
+              <a:spcAft>
+                <a:spcPts val="270"/>
+              </a:spcAft>
+              <a:buNone/>
+            </a:pPr>
+            <a:r>
+              <a:rPr sz="1800" b="0">
+                <a:latin typeface="Play"/>
+                <a:solidFill>
+                  <a:schemeClr val="dk1"/>
+                </a:solidFill>
+              </a:rPr>
+              <a:t>При ответе предоставляется ссылка на документ-источник.</a:t>
+            </a:r>
+            <a:endParaRPr b="0" i="0" sz="1800" u="none" cap="none" strike="noStrike">
+              <a:solidFill>
+                <a:schemeClr val="dk1"/>
+              </a:solidFill>
+              <a:latin typeface="Play"/>
+              <a:ea typeface="Play"/>
+              <a:cs typeface="Play"/>
+              <a:sym typeface="Play"/>
+            </a:endParaRPr>
+          </a:p>
+        </p:txBody>
+      </p:sp>
+      <p:sp>
+        <p:nvSpPr>
+          <p:cNvPr id="276" name="BrandDeck Text 276"/>
+          <p:cNvSpPr txBox="1"/>
+          <p:nvPr>
+            <p:ph type="title"/>
+          </p:nvPr>
+        </p:nvSpPr>
+        <p:spPr>
+          <a:xfrm>
+            <a:off x="677334" y="692150"/>
+            <a:ext cx="10855854" cy="644241"/>
+          </a:xfrm>
+          <a:prstGeom prst="rect">
+            <a:avLst/>
+          </a:prstGeom>
+          <a:noFill/>
+          <a:ln>
+            <a:noFill/>
+          </a:ln>
+        </p:spPr>
+        <p:txBody>
+          <a:bodyPr anchorCtr="0" anchor="t" bIns="0" lIns="0" spcFirstLastPara="1" rIns="0" wrap="square" tIns="0" vert="horz">
+            <a:normAutofit/>
+          </a:bodyPr>
+          <a:lstStyle/>
+          <a:p>
+            <a:pPr indent="0" marL="0" rtl="0" algn="l">
+              <a:lnSpc>
+                <a:spcPct val="115000"/>
+              </a:lnSpc>
+              <a:spcBef>
+                <a:spcPts val="0"/>
+              </a:spcBef>
+              <a:spcAft>
+                <a:spcPts val="270"/>
+              </a:spcAft>
+              <a:buClr>
+                <a:schemeClr val="dk2"/>
+              </a:buClr>
+              <a:buSzPts val="3600"/>
+              <a:buFont typeface="Play"/>
+              <a:buNone/>
+            </a:pPr>
+            <a:r>
+              <a:rPr sz="1800">
+                <a:solidFill>
+                  <a:srgbClr val="000000"/>
+                </a:solidFill>
+              </a:rPr>
+              <a:t>ИИ-помощник отвечает на вопросы по регламентам и дает ссылку на документ-источник</a:t>
+            </a:r>
+            <a:endParaRPr/>
+          </a:p>
+        </p:txBody>
+      </p:sp>
+      <p:sp>
+        <p:nvSpPr>
+          <p:cNvPr id="277" name="BrandDeck Text 277"/>
+          <p:cNvSpPr/>
+          <p:nvPr/>
+        </p:nvSpPr>
+        <p:spPr>
+          <a:xfrm>
+            <a:off x="671512" y="4044294"/>
+            <a:ext cx="5365752" cy="2156481"/>
+          </a:xfrm>
+          <a:prstGeom prst="roundRect">
+            <a:avLst>
+              <a:gd fmla="val 0" name="adj"/>
+            </a:avLst>
+          </a:prstGeom>
+          <a:solidFill>
+            <a:schemeClr val="lt1"/>
+          </a:solidFill>
+          <a:ln>
+            <a:noFill/>
+          </a:ln>
+        </p:spPr>
+        <p:txBody>
+          <a:bodyPr anchorCtr="0" anchor="t" bIns="45700" lIns="91425" spcFirstLastPara="1" rIns="91425" wrap="square" tIns="45700" vert="horz">
+            <a:normAutofit/>
+          </a:bodyPr>
+          <a:lstStyle/>
+          <a:p>
+            <a:pPr indent="0" marL="179388" marR="0" rtl="0" algn="l">
+              <a:lnSpc>
+                <a:spcPct val="115000"/>
+              </a:lnSpc>
+              <a:spcBef>
+                <a:spcPts val="0"/>
+              </a:spcBef>
+              <a:spcAft>
+                <a:spcPts val="270"/>
+              </a:spcAft>
+              <a:buNone/>
+            </a:pPr>
+            <a:r>
+              <a:rPr sz="1800" b="0">
+                <a:latin typeface="Play"/>
+                <a:solidFill>
+                  <a:schemeClr val="dk1"/>
+                </a:solidFill>
+              </a:rPr>
+              <a:t>При отсутствии ответа вопрос перенаправляется специалисту.</a:t>
+            </a:r>
+            <a:endParaRPr/>
+          </a:p>
+        </p:txBody>
+      </p:sp>
+      <p:sp>
+        <p:nvSpPr>
+          <p:cNvPr id="278" name="BrandDeck Text 278"/>
+          <p:cNvSpPr/>
+          <p:nvPr/>
+        </p:nvSpPr>
+        <p:spPr>
+          <a:xfrm>
+            <a:off x="6154737" y="4044294"/>
+            <a:ext cx="5391150" cy="2156481"/>
+          </a:xfrm>
+          <a:prstGeom prst="roundRect">
+            <a:avLst>
+              <a:gd fmla="val 0" name="adj"/>
+            </a:avLst>
+          </a:prstGeom>
+          <a:solidFill>
+            <a:schemeClr val="lt1"/>
+          </a:solidFill>
+          <a:ln>
+            <a:noFill/>
+          </a:ln>
+        </p:spPr>
+        <p:txBody>
+          <a:bodyPr anchorCtr="0" anchor="t" bIns="45700" lIns="91425" spcFirstLastPara="1" rIns="91425" wrap="square" tIns="45700" vert="horz">
+            <a:normAutofit/>
+          </a:bodyPr>
+          <a:lstStyle/>
+          <a:p>
+            <a:pPr indent="0" marL="179388" marR="0" rtl="0" algn="l">
+              <a:lnSpc>
+                <a:spcPct val="115000"/>
+              </a:lnSpc>
+              <a:spcBef>
+                <a:spcPts val="0"/>
+              </a:spcBef>
+              <a:spcAft>
+                <a:spcPts val="270"/>
+              </a:spcAft>
+              <a:buNone/>
+            </a:pPr>
+            <a:r>
+              <a:rPr sz="1800" b="0">
+                <a:latin typeface="Play"/>
+                <a:solidFill>
+                  <a:schemeClr val="dk1"/>
+                </a:solidFill>
+              </a:rPr>
+              <a:t>Перенаправление включает контекст для быстрого решения.</a:t>
+            </a:r>
+            <a:endParaRPr b="0" i="0" sz="1800" u="none" cap="none" strike="noStrike">
+              <a:solidFill>
+                <a:schemeClr val="dk1"/>
+              </a:solidFill>
+              <a:latin typeface="Play"/>
+              <a:ea typeface="Play"/>
+              <a:cs typeface="Play"/>
+              <a:sym typeface="Play"/>
+            </a:endParaRPr>
+          </a:p>
+        </p:txBody>
+      </p:sp>
+    </p:spTree>
+  </p:cSld>
+  <p:clrMapOvr>
+    <a:masterClrMapping/>
+  </p:clrMapOvr>
+</p:sld>
+</file>
+
+<file path=ppt/slides/slide5.xml><?xml version="1.0" encoding="utf-8"?>
+<p:sld xmlns:a="http://schemas.openxmlformats.org/drawingml/2006/main" xmlns:p="http://schemas.openxmlformats.org/presentationml/2006/main" xmlns:r="http://schemas.openxmlformats.org/officeDocument/2006/relationships">
+  <p:cSld>
+    <p:spTree>
+      <p:nvGrpSpPr>
+        <p:cNvPr id="1" name=""/>
+        <p:cNvGrpSpPr/>
+        <p:nvPr/>
+      </p:nvGrpSpPr>
+      <p:grpSpPr/>
+      <p:sp>
+        <p:nvSpPr>
+          <p:cNvPr id="1060" name="BrandDeck Text 1060"/>
+          <p:cNvSpPr txBox="1"/>
+          <p:nvPr>
+            <p:ph type="title"/>
+          </p:nvPr>
+        </p:nvSpPr>
+        <p:spPr>
+          <a:xfrm>
+            <a:off x="677334" y="692150"/>
+            <a:ext cx="10855854" cy="644241"/>
+          </a:xfrm>
+          <a:prstGeom prst="rect">
+            <a:avLst/>
+          </a:prstGeom>
+          <a:noFill/>
+          <a:ln>
+            <a:noFill/>
+          </a:ln>
+        </p:spPr>
+        <p:txBody>
+          <a:bodyPr anchorCtr="0" anchor="t" bIns="0" lIns="0" spcFirstLastPara="1" rIns="0" wrap="square" tIns="0" vert="horz">
+            <a:normAutofit/>
+          </a:bodyPr>
+          <a:lstStyle/>
+          <a:p>
+            <a:pPr indent="0" marL="0" rtl="0" algn="l">
+              <a:lnSpc>
+                <a:spcPct val="115000"/>
+              </a:lnSpc>
+              <a:spcBef>
+                <a:spcPts val="0"/>
+              </a:spcBef>
+              <a:spcAft>
+                <a:spcPts val="270"/>
+              </a:spcAft>
+              <a:buClr>
+                <a:schemeClr val="accent1"/>
+              </a:buClr>
+              <a:buSzPts val="3600"/>
+              <a:buFont typeface="Play"/>
+              <a:buNone/>
+            </a:pPr>
+            <a:r>
+              <a:rPr sz="1800">
+                <a:solidFill>
+                  <a:srgbClr val="000000"/>
+                </a:solidFill>
+              </a:rPr>
+              <a:t>Модель работает внутри контура компании, а подтвержденные вопросы уходят к специалисту</a:t>
+            </a:r>
+            <a:endParaRPr/>
+          </a:p>
+        </p:txBody>
+      </p:sp>
+      <p:pic>
+        <p:nvPicPr>
+          <p:cNvPr id="1072" name="BrandDeck Image" descr="внутренний контур серверная"/>
+          <p:cNvPicPr>
+            <a:picLocks noChangeAspect="1"/>
+          </p:cNvPicPr>
+          <p:nvPr/>
+        </p:nvPicPr>
+        <p:blipFill>
+          <a:blip r:embed="rId3"/>
+          <a:srcRect l="5955" r="5955"/>
+          <a:stretch>
+            <a:fillRect/>
+          </a:stretch>
+        </p:blipFill>
+        <p:spPr>
+          <a:xfrm>
+            <a:off x="671514" y="1773238"/>
+            <a:ext cx="6929992" cy="4427537"/>
+          </a:xfrm>
+          <a:prstGeom prst="rect">
+            <a:avLst/>
+          </a:prstGeom>
+        </p:spPr>
+      </p:pic>
+      <p:sp>
+        <p:nvSpPr>
+          <p:cNvPr id="1069" name="Google Shape;1069;p83"/>
+          <p:cNvSpPr txBox="1"/>
+          <p:nvPr/>
+        </p:nvSpPr>
+        <p:spPr>
+          <a:xfrm>
+            <a:off x="8355728" y="627078"/>
+            <a:ext cx="3409196" cy="3951457"/>
+          </a:xfrm>
+          <a:prstGeom prst="rect">
+            <a:avLst/>
+          </a:prstGeom>
+          <a:noFill/>
+          <a:ln>
+            <a:noFill/>
+          </a:ln>
+        </p:spPr>
+        <p:txBody>
+          <a:bodyPr anchorCtr="0" anchor="t" bIns="36000" lIns="36000" spcFirstLastPara="1" rIns="36000" wrap="square" tIns="36000">
+            <a:normAutofit/>
+          </a:bodyPr>
+          <a:lstStyle/>
+          <a:p>
+            <a:pPr indent="0" lvl="0" marL="0" marR="0" rtl="0" algn="l">
+              <a:lnSpc>
+                <a:spcPct val="110000"/>
+              </a:lnSpc>
+              <a:spcBef>
+                <a:spcPts val="0"/>
+              </a:spcBef>
+              <a:spcAft>
+                <a:spcPts val="0"/>
+              </a:spcAft>
+              <a:buNone/>
+            </a:pPr>
+            <a:endParaRPr/>
+          </a:p>
+        </p:txBody>
+      </p:sp>
+      <p:cxnSp>
+        <p:nvCxnSpPr>
+          <p:cNvPr id="1070" name="Google Shape;1070;p83"/>
+          <p:cNvCxnSpPr/>
+          <p:nvPr/>
+        </p:nvCxnSpPr>
+        <p:spPr>
+          <a:xfrm flipH="1">
+            <a:off x="8111315" y="692150"/>
+            <a:ext cx="9261" cy="5508625"/>
+          </a:xfrm>
+          <a:prstGeom prst="straightConnector1">
+            <a:avLst/>
+          </a:prstGeom>
+          <a:noFill/>
+          <a:ln cap="flat" cmpd="sng" w="9525">
+            <a:solidFill>
+              <a:srgbClr val="F4F8FB"/>
+            </a:solidFill>
+            <a:prstDash val="solid"/>
+            <a:miter lim="8000"/>
+            <a:headEnd len="sm" w="sm" type="none"/>
+            <a:tailEnd len="sm" w="sm" type="none"/>
+          </a:ln>
+        </p:spPr>
+      </p:cxnSp>
+      <p:sp>
+        <p:nvSpPr>
+          <p:cNvPr id="1071" name="BrandDeck Body"/>
+          <p:cNvSpPr txBox="1"/>
+          <p:nvPr/>
+        </p:nvSpPr>
+        <p:spPr>
+          <a:xfrm>
+            <a:off x="8355728" y="1473551"/>
+            <a:ext cx="3409196" cy="3104984"/>
+          </a:xfrm>
+          <a:prstGeom prst="rect">
+            <a:avLst/>
+          </a:prstGeom>
+          <a:noFill/>
+        </p:spPr>
+        <p:txBody>
+          <a:bodyPr wrap="square" vert="horz" anchor="t" lIns="36576" rIns="36576" tIns="18288" bIns="18288">
+            <a:normAutofit/>
+          </a:bodyPr>
+          <a:lstStyle/>
+          <a:p>
+            <a:pPr algn="l">
+              <a:lnSpc>
+                <a:spcPct val="115000"/>
+              </a:lnSpc>
+              <a:spcBef>
+                <a:spcPts val="0"/>
+              </a:spcBef>
+              <a:spcAft>
+                <a:spcPts val="210"/>
+              </a:spcAft>
+            </a:pPr>
+            <a:r>
+              <a:rPr sz="1400">
+                <a:solidFill>
+                  <a:srgbClr val="000000"/>
+                </a:solidFill>
+                <a:latin typeface="Play"/>
+              </a:rPr>
+              <a:t>• Модель с открытыми весами работает внутри контура компании.</a:t>
+            </a:r>
+          </a:p>
+          <a:p>
+            <a:pPr algn="l">
+              <a:lnSpc>
+                <a:spcPct val="115000"/>
+              </a:lnSpc>
+              <a:spcBef>
+                <a:spcPts val="0"/>
+              </a:spcBef>
+              <a:spcAft>
+                <a:spcPts val="210"/>
+              </a:spcAft>
+            </a:pPr>
+            <a:r>
+              <a:rPr sz="1400">
+                <a:solidFill>
+                  <a:srgbClr val="000000"/>
+                </a:solidFill>
+                <a:latin typeface="Play"/>
+              </a:rPr>
+              <a:t>• Документы не уходят наружу при обработке запросов.</a:t>
+            </a:r>
+          </a:p>
+          <a:p>
+            <a:pPr algn="l">
+              <a:lnSpc>
+                <a:spcPct val="115000"/>
+              </a:lnSpc>
+              <a:spcBef>
+                <a:spcPts val="0"/>
+              </a:spcBef>
+              <a:spcAft>
+                <a:spcPts val="210"/>
+              </a:spcAft>
+            </a:pPr>
+            <a:r>
+              <a:rPr sz="1400">
+                <a:solidFill>
+                  <a:srgbClr val="000000"/>
+                </a:solidFill>
+                <a:latin typeface="Play"/>
+              </a:rPr>
+              <a:t>• Вопросы без подтверждённого ответа уходят специалисту с контекстом.</a:t>
+            </a:r>
+          </a:p>
+        </p:txBody>
+      </p:sp>
+    </p:spTree>
+  </p:cSld>
+  <p:clrMapOvr>
+    <a:masterClrMapping/>
+  </p:clrMapOvr>
+</p:sld>
+</file>
+
+<file path=ppt/slides/slide6.xml><?xml version="1.0" encoding="utf-8"?>
+<p:sld xmlns:a="http://schemas.openxmlformats.org/drawingml/2006/main" xmlns:p="http://schemas.openxmlformats.org/presentationml/2006/main" xmlns:r="http://schemas.openxmlformats.org/officeDocument/2006/relationships">
+  <p:cSld>
+    <p:bg>
+      <p:bgPr>
+        <a:solidFill>
+          <a:schemeClr val="lt2"/>
+        </a:solidFill>
+      </p:bgPr>
+    </p:bg>
+    <p:spTree>
+      <p:nvGrpSpPr>
+        <p:cNvPr id="1" name=""/>
+        <p:cNvGrpSpPr/>
+        <p:nvPr/>
+      </p:nvGrpSpPr>
+      <p:grpSpPr/>
+      <p:sp>
+        <p:nvSpPr>
+          <p:cNvPr id="543" name="BrandDeck Text 543"/>
+          <p:cNvSpPr txBox="1"/>
+          <p:nvPr>
+            <p:ph type="title"/>
+          </p:nvPr>
+        </p:nvSpPr>
+        <p:spPr>
+          <a:xfrm>
+            <a:off x="677334" y="692150"/>
+            <a:ext cx="10855854" cy="644241"/>
+          </a:xfrm>
+          <a:prstGeom prst="rect">
+            <a:avLst/>
+          </a:prstGeom>
+          <a:noFill/>
+          <a:ln>
+            <a:noFill/>
+          </a:ln>
+        </p:spPr>
+        <p:txBody>
+          <a:bodyPr anchorCtr="0" anchor="t" bIns="0" lIns="0" spcFirstLastPara="1" rIns="0" wrap="square" tIns="0" vert="horz">
+            <a:normAutofit/>
+          </a:bodyPr>
+          <a:lstStyle/>
+          <a:p>
+            <a:pPr indent="0" marL="0" rtl="0" algn="l">
+              <a:lnSpc>
+                <a:spcPct val="115000"/>
+              </a:lnSpc>
+              <a:spcBef>
+                <a:spcPts val="0"/>
+              </a:spcBef>
+              <a:spcAft>
+                <a:spcPts val="300"/>
+              </a:spcAft>
+              <a:buClr>
+                <a:schemeClr val="accent1"/>
+              </a:buClr>
+              <a:buSzPts val="3600"/>
+              <a:buFont typeface="Play"/>
+              <a:buNone/>
+            </a:pPr>
+            <a:r>
+              <a:rPr sz="2000">
+                <a:solidFill>
+                  <a:srgbClr val="000000"/>
+                </a:solidFill>
+              </a:rPr>
+              <a:t>Пилот охватывает 2 подразделения и 150 сотрудников в течение 6 недель</a:t>
+            </a:r>
+            <a:endParaRPr/>
+          </a:p>
+        </p:txBody>
+      </p:sp>
+      <p:grpSp>
+        <p:nvGrpSpPr>
+          <p:cNvPr id="2" name="BrandDeck Diagram icon_grid" descr="icon_grid: Длительность 6 недель; Участники 150 сотрудников; Охват 2 подразделения"/>
+          <p:cNvGrpSpPr/>
+          <p:nvPr/>
+        </p:nvGrpSpPr>
+        <p:grpSpPr>
+          <a:xfrm>
+            <a:off x="677334" y="2603500"/>
+            <a:ext cx="10855854" cy="3597275"/>
+            <a:chOff x="677334" y="2603500"/>
+            <a:chExt cx="10855854" cy="3597275"/>
+          </a:xfrm>
+        </p:grpSpPr>
+        <p:sp>
+          <p:nvSpPr>
+            <p:cNvPr id="544" name="BrandDeck Diagram Card 1"/>
+            <p:cNvSpPr/>
+            <p:nvPr/>
+          </p:nvSpPr>
+          <p:spPr>
+            <a:xfrm>
+              <a:off x="677334" y="2603500"/>
+              <a:ext cx="10855854" cy="1054347"/>
+            </a:xfrm>
+            <a:prstGeom prst="roundRect">
+              <a:avLst>
+                <a:gd name="adj" fmla="val 8000"/>
+              </a:avLst>
+            </a:prstGeom>
+            <a:solidFill>
+              <a:srgbClr val="EDF5FF"/>
+            </a:solidFill>
+            <a:ln>
+              <a:noFill/>
+            </a:ln>
+          </p:spPr>
+          <p:txBody>
+            <a:bodyPr rtlCol="0" anchor="ctr"/>
+            <a:lstStyle/>
+            <a:p>
+              <a:pPr algn="ctr"/>
+            </a:p>
+          </p:txBody>
+        </p:sp>
+        <p:sp>
+          <p:nvSpPr>
+            <p:cNvPr id="545" name="BrandDeck Diagram Icon 1 Badge"/>
+            <p:cNvSpPr/>
+            <p:nvPr/>
+          </p:nvSpPr>
+          <p:spPr>
+            <a:xfrm>
+              <a:off x="896790" y="2947793"/>
+              <a:ext cx="365760" cy="365760"/>
+            </a:xfrm>
+            <a:prstGeom prst="ellipse">
+              <a:avLst/>
+            </a:prstGeom>
+            <a:solidFill>
+              <a:srgbClr val="006DEB"/>
+            </a:solidFill>
+            <a:ln>
+              <a:noFill/>
+            </a:ln>
+          </p:spPr>
+          <p:txBody>
+            <a:bodyPr rtlCol="0" anchor="ctr"/>
+            <a:lstStyle/>
+            <a:p>
+              <a:pPr algn="ctr"/>
+            </a:p>
+          </p:txBody>
+        </p:sp>
+        <p:sp>
+          <p:nvSpPr>
+            <p:cNvPr id="546" name="BrandDeck Icon hourglass"/>
+            <p:cNvSpPr/>
+            <p:nvPr/>
+          </p:nvSpPr>
+          <p:spPr>
+            <a:xfrm>
+              <a:off x="977257" y="3028260"/>
+              <a:ext cx="204825" cy="204825"/>
+            </a:xfrm>
+            <a:custGeom>
+              <a:avLst/>
+              <a:gdLst/>
+              <a:ahLst/>
+              <a:cxnLst/>
+              <a:rect l="l" t="t" r="r" b="b"/>
+              <a:pathLst>
+                <a:path w="24000" h="24000" fill="none">
+                  <a:moveTo>
+                    <a:pt x="5000" y="22000"/>
+                  </a:moveTo>
+                  <a:lnTo>
+                    <a:pt x="19000" y="22000"/>
+                  </a:lnTo>
+                </a:path>
+                <a:path w="24000" h="24000" fill="none">
+                  <a:moveTo>
+                    <a:pt x="5000" y="2000"/>
+                  </a:moveTo>
+                  <a:lnTo>
+                    <a:pt x="19000" y="2000"/>
+                  </a:lnTo>
+                </a:path>
+                <a:path w="24000" h="24000" fill="none">
+                  <a:moveTo>
+                    <a:pt x="17000" y="22000"/>
+                  </a:moveTo>
+                  <a:lnTo>
+                    <a:pt x="17000" y="17828"/>
+                  </a:lnTo>
+                  <a:cubicBezTo>
+                    <a:pt x="17000" y="17298"/>
+                    <a:pt x="16789" y="16789"/>
+                    <a:pt x="16414" y="16414"/>
+                  </a:cubicBezTo>
+                  <a:lnTo>
+                    <a:pt x="12000" y="12000"/>
+                  </a:lnTo>
+                  <a:lnTo>
+                    <a:pt x="7586" y="16414"/>
+                  </a:lnTo>
+                  <a:cubicBezTo>
+                    <a:pt x="7211" y="16789"/>
+                    <a:pt x="7000" y="17298"/>
+                    <a:pt x="7000" y="17828"/>
+                  </a:cubicBezTo>
+                  <a:lnTo>
+                    <a:pt x="7000" y="22000"/>
+                  </a:lnTo>
+                </a:path>
+                <a:path w="24000" h="24000" fill="none">
+                  <a:moveTo>
+                    <a:pt x="7000" y="2000"/>
+                  </a:moveTo>
+                  <a:lnTo>
+                    <a:pt x="7000" y="6172"/>
+                  </a:lnTo>
+                  <a:cubicBezTo>
+                    <a:pt x="7000" y="6702"/>
+                    <a:pt x="7211" y="7211"/>
+                    <a:pt x="7586" y="7586"/>
+                  </a:cubicBezTo>
+                  <a:lnTo>
+                    <a:pt x="12000" y="12000"/>
+                  </a:lnTo>
+                  <a:lnTo>
+                    <a:pt x="16414" y="7586"/>
+                  </a:lnTo>
+                  <a:cubicBezTo>
+                    <a:pt x="16789" y="7211"/>
+                    <a:pt x="17000" y="6702"/>
+                    <a:pt x="17000" y="6172"/>
+                  </a:cubicBezTo>
+                  <a:lnTo>
+                    <a:pt x="17000" y="2000"/>
+                  </a:lnTo>
+                </a:path>
+              </a:pathLst>
+            </a:custGeom>
+            <a:noFill/>
+            <a:ln w="17068" cap="rnd">
+              <a:solidFill>
+                <a:srgbClr val="FFFFFF"/>
+              </a:solidFill>
+              <a:round/>
+            </a:ln>
+          </p:spPr>
+          <p:txBody>
+            <a:bodyPr rtlCol="0" anchor="ctr"/>
+            <a:lstStyle/>
+            <a:p>
+              <a:pPr algn="ctr"/>
+            </a:p>
+          </p:txBody>
+        </p:sp>
+        <p:sp>
+          <p:nvSpPr>
+            <p:cNvPr id="547" name="BrandDeck Diagram Text 1"/>
+            <p:cNvSpPr txBox="1"/>
+            <p:nvPr/>
+          </p:nvSpPr>
+          <p:spPr>
+            <a:xfrm>
+              <a:off x="1394223" y="2735173"/>
+              <a:ext cx="9919508" cy="791000"/>
+            </a:xfrm>
+            <a:prstGeom prst="rect">
+              <a:avLst/>
+            </a:prstGeom>
+            <a:noFill/>
+          </p:spPr>
+          <p:txBody>
+            <a:bodyPr wrap="square" anchor="ctr" lIns="36576" tIns="18288" rIns="36576" bIns="18288">
+              <a:noAutofit/>
+            </a:bodyPr>
+            <a:lstStyle/>
+            <a:p>
+              <a:pPr algn="l">
+                <a:lnSpc>
+                  <a:spcPct val="110000"/>
+                </a:lnSpc>
+              </a:pPr>
+              <a:r>
+                <a:rPr sz="1800" b="1">
+                  <a:solidFill>
+                    <a:srgbClr val="000000"/>
+                  </a:solidFill>
+                  <a:latin typeface="Play"/>
+                </a:rPr>
+                <a:t>Длительность</a:t>
+              </a:r>
+            </a:p>
+            <a:p>
+              <a:pPr algn="l">
+                <a:lnSpc>
+                  <a:spcPct val="110000"/>
+                </a:lnSpc>
+                <a:spcBef>
+                  <a:spcPts val="450"/>
+                </a:spcBef>
+              </a:pPr>
+              <a:r>
+                <a:rPr sz="1800" b="0">
+                  <a:solidFill>
+                    <a:srgbClr val="000000"/>
+                  </a:solidFill>
+                  <a:latin typeface="Play"/>
+                </a:rPr>
+                <a:t>6 недель</a:t>
+              </a:r>
+            </a:p>
+          </p:txBody>
+        </p:sp>
+        <p:sp>
+          <p:nvSpPr>
+            <p:cNvPr id="548" name="BrandDeck Diagram Card 2"/>
+            <p:cNvSpPr/>
+            <p:nvPr/>
+          </p:nvSpPr>
+          <p:spPr>
+            <a:xfrm>
+              <a:off x="677334" y="3874964"/>
+              <a:ext cx="10855854" cy="1054347"/>
+            </a:xfrm>
+            <a:prstGeom prst="roundRect">
+              <a:avLst>
+                <a:gd name="adj" fmla="val 8000"/>
+              </a:avLst>
+            </a:prstGeom>
+            <a:solidFill>
+              <a:srgbClr val="EDF5FF"/>
+            </a:solidFill>
+            <a:ln>
+              <a:noFill/>
+            </a:ln>
+          </p:spPr>
+          <p:txBody>
+            <a:bodyPr rtlCol="0" anchor="ctr"/>
+            <a:lstStyle/>
+            <a:p>
+              <a:pPr algn="ctr"/>
+            </a:p>
+          </p:txBody>
+        </p:sp>
+        <p:sp>
+          <p:nvSpPr>
+            <p:cNvPr id="549" name="BrandDeck Diagram Icon 2 Badge"/>
+            <p:cNvSpPr/>
+            <p:nvPr/>
+          </p:nvSpPr>
+          <p:spPr>
+            <a:xfrm>
+              <a:off x="896790" y="4219258"/>
+              <a:ext cx="365760" cy="365760"/>
             </a:xfrm>
             <a:prstGeom prst="ellipse">
               <a:avLst/>
@@ -9647,8 +11855,8 @@
           </p:nvSpPr>
           <p:spPr>
             <a:xfrm>
-              <a:off x="4720551" y="2955726"/>
-              <a:ext cx="337962" cy="337962"/>
+              <a:off x="977257" y="4299725"/>
+              <a:ext cx="204825" cy="204825"/>
             </a:xfrm>
             <a:custGeom>
               <a:avLst/>
@@ -9738,7 +11946,7 @@
               </a:pathLst>
             </a:custGeom>
             <a:noFill/>
-            <a:ln w="28163" cap="rnd">
+            <a:ln w="17068" cap="rnd">
               <a:solidFill>
                 <a:srgbClr val="FFFFFF"/>
               </a:solidFill>
@@ -9761,8 +11969,8 @@
           </p:nvSpPr>
           <p:spPr>
             <a:xfrm>
-              <a:off x="4521943" y="3580079"/>
-              <a:ext cx="3166634" cy="2510968"/>
+              <a:off x="1394223" y="4006637"/>
+              <a:ext cx="9919508" cy="791000"/>
             </a:xfrm>
             <a:prstGeom prst="rect">
               <a:avLst/>
@@ -9770,7 +11978,7 @@
             <a:noFill/>
           </p:spPr>
           <p:txBody>
-            <a:bodyPr wrap="square" anchor="t" lIns="36576" tIns="18288" rIns="36576" bIns="18288">
+            <a:bodyPr wrap="square" anchor="ctr" lIns="36576" tIns="18288" rIns="36576" bIns="18288">
               <a:noAutofit/>
             </a:bodyPr>
             <a:lstStyle/>
@@ -9781,13 +11989,32 @@
                 </a:lnSpc>
               </a:pPr>
               <a:r>
+                <a:rPr sz="1800" b="1">
+                  <a:solidFill>
+                    <a:srgbClr val="000000"/>
+                  </a:solidFill>
+                  <a:latin typeface="Play"/>
+                </a:rPr>
+                <a:t>Участники</a:t>
+              </a:r>
+            </a:p>
+            <a:p>
+              <a:pPr algn="l">
+                <a:lnSpc>
+                  <a:spcPct val="110000"/>
+                </a:lnSpc>
+                <a:spcBef>
+                  <a:spcPts val="450"/>
+                </a:spcBef>
+              </a:pPr>
+              <a:r>
                 <a:rPr sz="1800" b="0">
                   <a:solidFill>
                     <a:srgbClr val="000000"/>
                   </a:solidFill>
                   <a:latin typeface="Play"/>
                 </a:rPr>
-                <a:t>Требуется выделение команды из 3 человек.</a:t>
+                <a:t>150 сотрудников</a:t>
               </a:r>
             </a:p>
           </p:txBody>
@@ -9800,8 +12027,8 @@
           </p:nvSpPr>
           <p:spPr>
             <a:xfrm>
-              <a:off x="8059314" y="2603500"/>
-              <a:ext cx="3473873" cy="3597276"/>
+              <a:off x="677334" y="5146428"/>
+              <a:ext cx="10855854" cy="1054347"/>
             </a:xfrm>
             <a:prstGeom prst="roundRect">
               <a:avLst>
@@ -9831,8 +12058,8 @@
           </p:nvSpPr>
           <p:spPr>
             <a:xfrm>
-              <a:off x="8278770" y="2822956"/>
-              <a:ext cx="603504" cy="603504"/>
+              <a:off x="896790" y="5490722"/>
+              <a:ext cx="365760" cy="365760"/>
             </a:xfrm>
             <a:prstGeom prst="ellipse">
               <a:avLst/>
@@ -9854,14 +12081,14 @@
         </p:sp>
         <p:sp>
           <p:nvSpPr>
-            <p:cNvPr id="554" name="BrandDeck Icon clock"/>
+            <p:cNvPr id="554" name="BrandDeck Icon building-2"/>
             <p:cNvSpPr/>
             <p:nvPr/>
           </p:nvSpPr>
           <p:spPr>
             <a:xfrm>
-              <a:off x="8411541" y="2955726"/>
-              <a:ext cx="337962" cy="337962"/>
+              <a:off x="977257" y="5571189"/>
+              <a:ext cx="204825" cy="204825"/>
             </a:xfrm>
             <a:custGeom>
               <a:avLst/>
@@ -9872,45 +12099,113 @@
               <a:pathLst>
                 <a:path w="24000" h="24000" fill="none">
                   <a:moveTo>
-                    <a:pt x="22000" y="12000"/>
+                    <a:pt x="6000" y="22000"/>
                   </a:moveTo>
+                  <a:lnTo>
+                    <a:pt x="6000" y="4000"/>
+                  </a:lnTo>
                   <a:cubicBezTo>
-                    <a:pt x="22000" y="17523"/>
-                    <a:pt x="17523" y="22000"/>
-                    <a:pt x="12000" y="22000"/>
+                    <a:pt x="6000" y="2895"/>
+                    <a:pt x="6895" y="2000"/>
+                    <a:pt x="8000" y="2000"/>
                   </a:cubicBezTo>
+                  <a:lnTo>
+                    <a:pt x="16000" y="2000"/>
+                  </a:lnTo>
                   <a:cubicBezTo>
-                    <a:pt x="6477" y="22000"/>
-                    <a:pt x="2000" y="17523"/>
-                    <a:pt x="2000" y="12000"/>
+                    <a:pt x="17105" y="2000"/>
+                    <a:pt x="18000" y="2895"/>
+                    <a:pt x="18000" y="4000"/>
                   </a:cubicBezTo>
-                  <a:cubicBezTo>
-                    <a:pt x="2000" y="6477"/>
-                    <a:pt x="6477" y="2000"/>
-                    <a:pt x="12000" y="2000"/>
-                  </a:cubicBezTo>
-                  <a:cubicBezTo>
-                    <a:pt x="17523" y="2000"/>
-                    <a:pt x="22000" y="6477"/>
-                    <a:pt x="22000" y="12000"/>
-                  </a:cubicBezTo>
+                  <a:lnTo>
+                    <a:pt x="18000" y="22000"/>
+                  </a:lnTo>
                   <a:close/>
                 </a:path>
                 <a:path w="24000" h="24000" fill="none">
                   <a:moveTo>
-                    <a:pt x="12000" y="6000"/>
+                    <a:pt x="6000" y="12000"/>
                   </a:moveTo>
                   <a:lnTo>
-                    <a:pt x="12000" y="12000"/>
+                    <a:pt x="4000" y="12000"/>
                   </a:lnTo>
+                  <a:cubicBezTo>
+                    <a:pt x="2895" y="12000"/>
+                    <a:pt x="2000" y="12895"/>
+                    <a:pt x="2000" y="14000"/>
+                  </a:cubicBezTo>
                   <a:lnTo>
-                    <a:pt x="16000" y="14000"/>
+                    <a:pt x="2000" y="20000"/>
+                  </a:lnTo>
+                  <a:cubicBezTo>
+                    <a:pt x="2000" y="21105"/>
+                    <a:pt x="2895" y="22000"/>
+                    <a:pt x="4000" y="22000"/>
+                  </a:cubicBezTo>
+                  <a:lnTo>
+                    <a:pt x="6000" y="22000"/>
+                  </a:lnTo>
+                </a:path>
+                <a:path w="24000" h="24000" fill="none">
+                  <a:moveTo>
+                    <a:pt x="18000" y="9000"/>
+                  </a:moveTo>
+                  <a:lnTo>
+                    <a:pt x="20000" y="9000"/>
+                  </a:lnTo>
+                  <a:cubicBezTo>
+                    <a:pt x="21105" y="9000"/>
+                    <a:pt x="22000" y="9895"/>
+                    <a:pt x="22000" y="11000"/>
+                  </a:cubicBezTo>
+                  <a:lnTo>
+                    <a:pt x="22000" y="20000"/>
+                  </a:lnTo>
+                  <a:cubicBezTo>
+                    <a:pt x="22000" y="21105"/>
+                    <a:pt x="21105" y="22000"/>
+                    <a:pt x="20000" y="22000"/>
+                  </a:cubicBezTo>
+                  <a:lnTo>
+                    <a:pt x="18000" y="22000"/>
+                  </a:lnTo>
+                </a:path>
+                <a:path w="24000" h="24000" fill="none">
+                  <a:moveTo>
+                    <a:pt x="10000" y="6000"/>
+                  </a:moveTo>
+                  <a:lnTo>
+                    <a:pt x="14000" y="6000"/>
+                  </a:lnTo>
+                </a:path>
+                <a:path w="24000" h="24000" fill="none">
+                  <a:moveTo>
+                    <a:pt x="10000" y="10000"/>
+                  </a:moveTo>
+                  <a:lnTo>
+                    <a:pt x="14000" y="10000"/>
+                  </a:lnTo>
+                </a:path>
+                <a:path w="24000" h="24000" fill="none">
+                  <a:moveTo>
+                    <a:pt x="10000" y="14000"/>
+                  </a:moveTo>
+                  <a:lnTo>
+                    <a:pt x="14000" y="14000"/>
+                  </a:lnTo>
+                </a:path>
+                <a:path w="24000" h="24000" fill="none">
+                  <a:moveTo>
+                    <a:pt x="10000" y="18000"/>
+                  </a:moveTo>
+                  <a:lnTo>
+                    <a:pt x="14000" y="18000"/>
                   </a:lnTo>
                 </a:path>
               </a:pathLst>
             </a:custGeom>
             <a:noFill/>
-            <a:ln w="28163" cap="rnd">
+            <a:ln w="17068" cap="rnd">
               <a:solidFill>
                 <a:srgbClr val="FFFFFF"/>
               </a:solidFill>
@@ -9933,769 +12228,8 @@
           </p:nvSpPr>
           <p:spPr>
             <a:xfrm>
-              <a:off x="8212933" y="3580079"/>
-              <a:ext cx="3166634" cy="2510968"/>
-            </a:xfrm>
-            <a:prstGeom prst="rect">
-              <a:avLst/>
-            </a:prstGeom>
-            <a:noFill/>
-          </p:spPr>
-          <p:txBody>
-            <a:bodyPr wrap="square" anchor="t" lIns="36576" tIns="18288" rIns="36576" bIns="18288">
-              <a:noAutofit/>
-            </a:bodyPr>
-            <a:lstStyle/>
-            <a:p>
-              <a:pPr algn="l">
-                <a:lnSpc>
-                  <a:spcPct val="110000"/>
-                </a:lnSpc>
-              </a:pPr>
-              <a:r>
-                <a:rPr sz="1800" b="1">
-                  <a:solidFill>
-                    <a:srgbClr val="000000"/>
-                  </a:solidFill>
-                  <a:latin typeface="Play"/>
-                </a:rPr>
-                <a:t>Срок пилота:</a:t>
-              </a:r>
-              <a:r>
-                <a:rPr sz="1800" b="0">
-                  <a:solidFill>
-                    <a:srgbClr val="000000"/>
-                  </a:solidFill>
-                  <a:latin typeface="Play"/>
-                </a:rPr>
-                <a:t> 6 недель.</a:t>
-              </a:r>
-            </a:p>
-          </p:txBody>
-        </p:sp>
-      </p:grpSp>
-    </p:spTree>
-  </p:cSld>
-  <p:clrMapOvr>
-    <a:masterClrMapping/>
-  </p:clrMapOvr>
-</p:sld>
-</file>
-
-<file path=ppt/slides/slide12.xml><?xml version="1.0" encoding="utf-8"?>
-<p:sld xmlns:a="http://schemas.openxmlformats.org/drawingml/2006/main" xmlns:p="http://schemas.openxmlformats.org/presentationml/2006/main" xmlns:r="http://schemas.openxmlformats.org/officeDocument/2006/relationships">
-  <p:cSld>
-    <p:bg>
-      <p:bgPr>
-        <a:solidFill>
-          <a:schemeClr val="lt2"/>
-        </a:solidFill>
-      </p:bgPr>
-    </p:bg>
-    <p:spTree>
-      <p:nvGrpSpPr>
-        <p:cNvPr id="1" name=""/>
-        <p:cNvGrpSpPr/>
-        <p:nvPr/>
-      </p:nvGrpSpPr>
-      <p:grpSpPr/>
-      <p:sp>
-        <p:nvSpPr>
-          <p:cNvPr id="541" name="BrandDeck Text 541"/>
-          <p:cNvSpPr txBox="1"/>
-          <p:nvPr>
-            <p:ph idx="1" type="body"/>
-          </p:nvPr>
-        </p:nvSpPr>
-        <p:spPr>
-          <a:xfrm>
-            <a:off x="677334" y="2603500"/>
-            <a:ext cx="5304365" cy="3597275"/>
-          </a:xfrm>
-          <a:prstGeom prst="rect">
-            <a:avLst/>
-          </a:prstGeom>
-          <a:noFill/>
-          <a:ln>
-            <a:noFill/>
-          </a:ln>
-        </p:spPr>
-        <p:txBody>
-          <a:bodyPr anchorCtr="0" anchor="t" bIns="0" lIns="0" spcFirstLastPara="1" rIns="0" wrap="square" tIns="0">
-            <a:normAutofit/>
-          </a:bodyPr>
-          <a:lstStyle/>
-          <a:p>
-            <a:pPr indent="-255588" marL="255588" rtl="0" algn="l">
-              <a:lnSpc>
-                <a:spcPct val="115000"/>
-              </a:lnSpc>
-              <a:spcBef>
-                <a:spcPts val="0"/>
-              </a:spcBef>
-              <a:spcAft>
-                <a:spcPts val="240"/>
-              </a:spcAft>
-              <a:buSzPts val="1600"/>
-              <a:buChar char="•"/>
-            </a:pPr>
-            <a:r>
-              <a:rPr sz="1600"/>
-              <a:t>Решение о запуске пилота и выделении команды</a:t>
-            </a:r>
-            <a:endParaRPr/>
-          </a:p>
-        </p:txBody>
-      </p:sp>
-      <p:sp>
-        <p:nvSpPr>
-          <p:cNvPr id="542" name="BrandDeck Text 542"/>
-          <p:cNvSpPr txBox="1"/>
-          <p:nvPr>
-            <p:ph idx="2" type="body"/>
-          </p:nvPr>
-        </p:nvSpPr>
-        <p:spPr>
-          <a:xfrm>
-            <a:off x="6228824" y="2603501"/>
-            <a:ext cx="5304364" cy="3597275"/>
-          </a:xfrm>
-          <a:prstGeom prst="rect">
-            <a:avLst/>
-          </a:prstGeom>
-          <a:noFill/>
-          <a:ln>
-            <a:noFill/>
-          </a:ln>
-        </p:spPr>
-        <p:txBody>
-          <a:bodyPr anchorCtr="0" anchor="t" bIns="0" lIns="0" spcFirstLastPara="1" rIns="0" wrap="square" tIns="0">
-            <a:normAutofit/>
-          </a:bodyPr>
-          <a:lstStyle/>
-          <a:p>
-            <a:pPr indent="-255588" marL="255588" rtl="0" algn="l">
-              <a:lnSpc>
-                <a:spcPct val="115000"/>
-              </a:lnSpc>
-              <a:spcBef>
-                <a:spcPts val="0"/>
-              </a:spcBef>
-              <a:spcAft>
-                <a:spcPts val="240"/>
-              </a:spcAft>
-              <a:buSzPts val="1600"/>
-              <a:buChar char="•"/>
-            </a:pPr>
-            <a:r>
-              <a:rPr sz="1600"/>
-              <a:t>Просим одобрить запуск пилота с командой из 3 человек.</a:t>
-            </a:r>
-            <a:endParaRPr/>
-          </a:p>
-          <a:p>
-            <a:pPr indent="-255588" marL="255588" rtl="0" algn="l">
-              <a:lnSpc>
-                <a:spcPct val="115000"/>
-              </a:lnSpc>
-              <a:spcBef>
-                <a:spcPts val="0"/>
-              </a:spcBef>
-              <a:spcAft>
-                <a:spcPts val="240"/>
-              </a:spcAft>
-              <a:buSzPts val="1600"/>
-              <a:buChar char="•"/>
-            </a:pPr>
-            <a:r>
-              <a:rPr sz="1600"/>
-              <a:t>Пилот продлится 6 недель в двух подразделениях.</a:t>
-            </a:r>
-          </a:p>
-          <a:p>
-            <a:pPr indent="-255588" marL="255588" rtl="0" algn="l">
-              <a:lnSpc>
-                <a:spcPct val="115000"/>
-              </a:lnSpc>
-              <a:spcBef>
-                <a:spcPts val="0"/>
-              </a:spcBef>
-              <a:spcAft>
-                <a:spcPts val="240"/>
-              </a:spcAft>
-              <a:buSzPts val="1600"/>
-              <a:buChar char="•"/>
-            </a:pPr>
-            <a:r>
-              <a:rPr sz="1600"/>
-              <a:t>Измерим время поиска ответа и долю закрытых обращений.</a:t>
-            </a:r>
-          </a:p>
-        </p:txBody>
-      </p:sp>
-      <p:sp>
-        <p:nvSpPr>
-          <p:cNvPr id="543" name="BrandDeck Text 543"/>
-          <p:cNvSpPr txBox="1"/>
-          <p:nvPr>
-            <p:ph type="title"/>
-          </p:nvPr>
-        </p:nvSpPr>
-        <p:spPr>
-          <a:xfrm>
-            <a:off x="677334" y="692150"/>
-            <a:ext cx="10855854" cy="644241"/>
-          </a:xfrm>
-          <a:prstGeom prst="rect">
-            <a:avLst/>
-          </a:prstGeom>
-          <a:noFill/>
-          <a:ln>
-            <a:noFill/>
-          </a:ln>
-        </p:spPr>
-        <p:txBody>
-          <a:bodyPr anchorCtr="0" anchor="t" bIns="0" lIns="0" spcFirstLastPara="1" rIns="0" wrap="square" tIns="0">
-            <a:normAutofit/>
-          </a:bodyPr>
-          <a:lstStyle/>
-          <a:p>
-            <a:pPr indent="0" marL="0" rtl="0" algn="l">
-              <a:lnSpc>
-                <a:spcPct val="115000"/>
-              </a:lnSpc>
-              <a:spcBef>
-                <a:spcPts val="0"/>
-              </a:spcBef>
-              <a:spcAft>
-                <a:spcPts val="359"/>
-              </a:spcAft>
-              <a:buClr>
-                <a:schemeClr val="accent1"/>
-              </a:buClr>
-              <a:buSzPts val="3600"/>
-              <a:buFont typeface="Play"/>
-              <a:buNone/>
-            </a:pPr>
-            <a:r>
-              <a:rPr sz="2400">
-                <a:solidFill>
-                  <a:srgbClr val="000000"/>
-                </a:solidFill>
-              </a:rPr>
-              <a:t>Просим одобрить пилот и выделить команду из 3 человек</a:t>
-            </a:r>
-            <a:endParaRPr/>
-          </a:p>
-        </p:txBody>
-      </p:sp>
-    </p:spTree>
-  </p:cSld>
-  <p:clrMapOvr>
-    <a:masterClrMapping/>
-  </p:clrMapOvr>
-</p:sld>
-</file>
-
-<file path=ppt/slides/slide2.xml><?xml version="1.0" encoding="utf-8"?>
-<p:sld xmlns:a="http://schemas.openxmlformats.org/drawingml/2006/main" xmlns:p="http://schemas.openxmlformats.org/presentationml/2006/main" xmlns:r="http://schemas.openxmlformats.org/officeDocument/2006/relationships">
-  <p:cSld>
-    <p:bg>
-      <p:bgPr>
-        <a:solidFill>
-          <a:schemeClr val="lt2"/>
-        </a:solidFill>
-      </p:bgPr>
-    </p:bg>
-    <p:spTree>
-      <p:nvGrpSpPr>
-        <p:cNvPr id="1" name=""/>
-        <p:cNvGrpSpPr/>
-        <p:nvPr/>
-      </p:nvGrpSpPr>
-      <p:grpSpPr/>
-      <p:sp>
-        <p:nvSpPr>
-          <p:cNvPr id="543" name="BrandDeck Text 543"/>
-          <p:cNvSpPr txBox="1"/>
-          <p:nvPr>
-            <p:ph type="title"/>
-          </p:nvPr>
-        </p:nvSpPr>
-        <p:spPr>
-          <a:xfrm>
-            <a:off x="677334" y="692150"/>
-            <a:ext cx="10855854" cy="644241"/>
-          </a:xfrm>
-          <a:prstGeom prst="rect">
-            <a:avLst/>
-          </a:prstGeom>
-          <a:noFill/>
-          <a:ln>
-            <a:noFill/>
-          </a:ln>
-        </p:spPr>
-        <p:txBody>
-          <a:bodyPr anchorCtr="0" anchor="t" bIns="0" lIns="0" spcFirstLastPara="1" rIns="0" wrap="square" tIns="0">
-            <a:normAutofit/>
-          </a:bodyPr>
-          <a:lstStyle/>
-          <a:p>
-            <a:pPr indent="0" marL="0" rtl="0" algn="l">
-              <a:lnSpc>
-                <a:spcPct val="115000"/>
-              </a:lnSpc>
-              <a:spcBef>
-                <a:spcPts val="0"/>
-              </a:spcBef>
-              <a:spcAft>
-                <a:spcPts val="270"/>
-              </a:spcAft>
-              <a:buClr>
-                <a:schemeClr val="accent1"/>
-              </a:buClr>
-              <a:buSzPts val="3600"/>
-              <a:buFont typeface="Play"/>
-              <a:buNone/>
-            </a:pPr>
-            <a:r>
-              <a:rPr sz="1800">
-                <a:solidFill>
-                  <a:srgbClr val="000000"/>
-                </a:solidFill>
-              </a:rPr>
-              <a:t>Сотрудники тратят до 30 минут на поиск инструкции, а треть обращений — повторяющиеся вопросы</a:t>
-            </a:r>
-            <a:endParaRPr/>
-          </a:p>
-        </p:txBody>
-      </p:sp>
-      <p:grpSp>
-        <p:nvGrpSpPr>
-          <p:cNvPr id="2" name="BrandDeck Diagram icon_grid" descr="icon_grid: Сотрудники тратят до 30 минут на поиск инструкции.; Треть всех обращений в поддержку — повторяющиеся вопросы.; Это создает высокую нагрузку на специалистов поддержки."/>
-          <p:cNvGrpSpPr/>
-          <p:nvPr/>
-        </p:nvGrpSpPr>
-        <p:grpSpPr>
-          <a:xfrm>
-            <a:off x="677334" y="2912953"/>
-            <a:ext cx="10855853" cy="2782924"/>
-            <a:chOff x="677334" y="2912953"/>
-            <a:chExt cx="10855853" cy="2782924"/>
-          </a:xfrm>
-        </p:grpSpPr>
-        <p:sp>
-          <p:nvSpPr>
-            <p:cNvPr id="544" name="BrandDeck Diagram Card 1"/>
-            <p:cNvSpPr/>
-            <p:nvPr/>
-          </p:nvSpPr>
-          <p:spPr>
-            <a:xfrm>
-              <a:off x="677334" y="2912953"/>
-              <a:ext cx="5319368" cy="1282903"/>
-            </a:xfrm>
-            <a:prstGeom prst="roundRect">
-              <a:avLst>
-                <a:gd name="adj" fmla="val 8000"/>
-              </a:avLst>
-            </a:prstGeom>
-            <a:solidFill>
-              <a:srgbClr val="EDF5FF"/>
-            </a:solidFill>
-            <a:ln>
-              <a:noFill/>
-            </a:ln>
-          </p:spPr>
-          <p:txBody>
-            <a:bodyPr rtlCol="0" anchor="ctr"/>
-            <a:lstStyle/>
-            <a:p>
-              <a:pPr algn="ctr"/>
-            </a:p>
-          </p:txBody>
-        </p:sp>
-        <p:sp>
-          <p:nvSpPr>
-            <p:cNvPr id="545" name="BrandDeck Diagram Icon 1 Badge"/>
-            <p:cNvSpPr/>
-            <p:nvPr/>
-          </p:nvSpPr>
-          <p:spPr>
-            <a:xfrm>
-              <a:off x="896790" y="3317794"/>
-              <a:ext cx="473222" cy="473222"/>
-            </a:xfrm>
-            <a:prstGeom prst="ellipse">
-              <a:avLst/>
-            </a:prstGeom>
-            <a:solidFill>
-              <a:srgbClr val="006DEB"/>
-            </a:solidFill>
-            <a:ln>
-              <a:noFill/>
-            </a:ln>
-          </p:spPr>
-          <p:txBody>
-            <a:bodyPr rtlCol="0" anchor="ctr"/>
-            <a:lstStyle/>
-            <a:p>
-              <a:pPr algn="ctr"/>
-            </a:p>
-          </p:txBody>
-        </p:sp>
-        <p:sp>
-          <p:nvSpPr>
-            <p:cNvPr id="546" name="BrandDeck Icon users"/>
-            <p:cNvSpPr/>
-            <p:nvPr/>
-          </p:nvSpPr>
-          <p:spPr>
-            <a:xfrm>
-              <a:off x="1000898" y="3421903"/>
-              <a:ext cx="265004" cy="265004"/>
-            </a:xfrm>
-            <a:custGeom>
-              <a:avLst/>
-              <a:gdLst/>
-              <a:ahLst/>
-              <a:cxnLst/>
-              <a:rect l="l" t="t" r="r" b="b"/>
-              <a:pathLst>
-                <a:path w="24000" h="24000" fill="none">
-                  <a:moveTo>
-                    <a:pt x="16000" y="21000"/>
-                  </a:moveTo>
-                  <a:lnTo>
-                    <a:pt x="16000" y="19000"/>
-                  </a:lnTo>
-                  <a:cubicBezTo>
-                    <a:pt x="16000" y="16791"/>
-                    <a:pt x="14209" y="15000"/>
-                    <a:pt x="12000" y="15000"/>
-                  </a:cubicBezTo>
-                  <a:lnTo>
-                    <a:pt x="6000" y="15000"/>
-                  </a:lnTo>
-                  <a:cubicBezTo>
-                    <a:pt x="3791" y="15000"/>
-                    <a:pt x="2000" y="16791"/>
-                    <a:pt x="2000" y="19000"/>
-                  </a:cubicBezTo>
-                  <a:lnTo>
-                    <a:pt x="2000" y="21000"/>
-                  </a:lnTo>
-                </a:path>
-                <a:path w="24000" h="24000" fill="none">
-                  <a:moveTo>
-                    <a:pt x="13000" y="7000"/>
-                  </a:moveTo>
-                  <a:cubicBezTo>
-                    <a:pt x="13000" y="9209"/>
-                    <a:pt x="11209" y="11000"/>
-                    <a:pt x="9000" y="11000"/>
-                  </a:cubicBezTo>
-                  <a:cubicBezTo>
-                    <a:pt x="6791" y="11000"/>
-                    <a:pt x="5000" y="9209"/>
-                    <a:pt x="5000" y="7000"/>
-                  </a:cubicBezTo>
-                  <a:cubicBezTo>
-                    <a:pt x="5000" y="4791"/>
-                    <a:pt x="6791" y="3000"/>
-                    <a:pt x="9000" y="3000"/>
-                  </a:cubicBezTo>
-                  <a:cubicBezTo>
-                    <a:pt x="11209" y="3000"/>
-                    <a:pt x="13000" y="4791"/>
-                    <a:pt x="13000" y="7000"/>
-                  </a:cubicBezTo>
-                  <a:close/>
-                </a:path>
-                <a:path w="24000" h="24000" fill="none">
-                  <a:moveTo>
-                    <a:pt x="22000" y="21000"/>
-                  </a:moveTo>
-                  <a:lnTo>
-                    <a:pt x="22000" y="19000"/>
-                  </a:lnTo>
-                  <a:cubicBezTo>
-                    <a:pt x="21999" y="17177"/>
-                    <a:pt x="20765" y="15586"/>
-                    <a:pt x="19000" y="15130"/>
-                  </a:cubicBezTo>
-                </a:path>
-                <a:path w="24000" h="24000" fill="none">
-                  <a:moveTo>
-                    <a:pt x="16000" y="3130"/>
-                  </a:moveTo>
-                  <a:cubicBezTo>
-                    <a:pt x="17770" y="3583"/>
-                    <a:pt x="19008" y="5178"/>
-                    <a:pt x="19008" y="7005"/>
-                  </a:cubicBezTo>
-                  <a:cubicBezTo>
-                    <a:pt x="19008" y="8832"/>
-                    <a:pt x="17770" y="10427"/>
-                    <a:pt x="16000" y="10880"/>
-                  </a:cubicBezTo>
-                </a:path>
-              </a:pathLst>
-            </a:custGeom>
-            <a:noFill/>
-            <a:ln w="22083" cap="rnd">
-              <a:solidFill>
-                <a:srgbClr val="FFFFFF"/>
-              </a:solidFill>
-              <a:round/>
-            </a:ln>
-          </p:spPr>
-          <p:txBody>
-            <a:bodyPr rtlCol="0" anchor="ctr"/>
-            <a:lstStyle/>
-            <a:p>
-              <a:pPr algn="ctr"/>
-            </a:p>
-          </p:txBody>
-        </p:sp>
-        <p:sp>
-          <p:nvSpPr>
-            <p:cNvPr id="547" name="BrandDeck Diagram Text 1"/>
-            <p:cNvSpPr txBox="1"/>
-            <p:nvPr/>
-          </p:nvSpPr>
-          <p:spPr>
-            <a:xfrm>
-              <a:off x="1501685" y="3044627"/>
-              <a:ext cx="4275560" cy="1019556"/>
-            </a:xfrm>
-            <a:prstGeom prst="rect">
-              <a:avLst/>
-            </a:prstGeom>
-            <a:noFill/>
-          </p:spPr>
-          <p:txBody>
-            <a:bodyPr wrap="square" anchor="ctr" lIns="36576" tIns="18288" rIns="36576" bIns="18288">
-              <a:noAutofit/>
-            </a:bodyPr>
-            <a:lstStyle/>
-            <a:p>
-              <a:pPr algn="l">
-                <a:lnSpc>
-                  <a:spcPct val="110000"/>
-                </a:lnSpc>
-              </a:pPr>
-              <a:r>
-                <a:rPr sz="1800" b="0">
-                  <a:solidFill>
-                    <a:srgbClr val="000000"/>
-                  </a:solidFill>
-                  <a:latin typeface="Play"/>
-                </a:rPr>
-                <a:t>Сотрудники тратят до 30 минут на поиск инструкции.</a:t>
-              </a:r>
-            </a:p>
-          </p:txBody>
-        </p:sp>
-        <p:sp>
-          <p:nvSpPr>
-            <p:cNvPr id="548" name="BrandDeck Diagram Card 2"/>
-            <p:cNvSpPr/>
-            <p:nvPr/>
-          </p:nvSpPr>
-          <p:spPr>
-            <a:xfrm>
-              <a:off x="6213819" y="2912953"/>
-              <a:ext cx="5319368" cy="1282903"/>
-            </a:xfrm>
-            <a:prstGeom prst="roundRect">
-              <a:avLst>
-                <a:gd name="adj" fmla="val 8000"/>
-              </a:avLst>
-            </a:prstGeom>
-            <a:solidFill>
-              <a:srgbClr val="EDF5FF"/>
-            </a:solidFill>
-            <a:ln>
-              <a:noFill/>
-            </a:ln>
-          </p:spPr>
-          <p:txBody>
-            <a:bodyPr rtlCol="0" anchor="ctr"/>
-            <a:lstStyle/>
-            <a:p>
-              <a:pPr algn="ctr"/>
-            </a:p>
-          </p:txBody>
-        </p:sp>
-        <p:sp>
-          <p:nvSpPr>
-            <p:cNvPr id="549" name="BrandDeck Diagram Icon 2 Badge"/>
-            <p:cNvSpPr/>
-            <p:nvPr/>
-          </p:nvSpPr>
-          <p:spPr>
-            <a:xfrm>
-              <a:off x="6433275" y="3317794"/>
-              <a:ext cx="473222" cy="473222"/>
-            </a:xfrm>
-            <a:prstGeom prst="ellipse">
-              <a:avLst/>
-            </a:prstGeom>
-            <a:solidFill>
-              <a:srgbClr val="006DEB"/>
-            </a:solidFill>
-            <a:ln>
-              <a:noFill/>
-            </a:ln>
-          </p:spPr>
-          <p:txBody>
-            <a:bodyPr rtlCol="0" anchor="ctr"/>
-            <a:lstStyle/>
-            <a:p>
-              <a:pPr algn="ctr"/>
-            </a:p>
-          </p:txBody>
-        </p:sp>
-        <p:sp>
-          <p:nvSpPr>
-            <p:cNvPr id="550" name="BrandDeck Icon headset"/>
-            <p:cNvSpPr/>
-            <p:nvPr/>
-          </p:nvSpPr>
-          <p:spPr>
-            <a:xfrm>
-              <a:off x="6537384" y="3421903"/>
-              <a:ext cx="265004" cy="265004"/>
-            </a:xfrm>
-            <a:custGeom>
-              <a:avLst/>
-              <a:gdLst/>
-              <a:ahLst/>
-              <a:cxnLst/>
-              <a:rect l="l" t="t" r="r" b="b"/>
-              <a:pathLst>
-                <a:path w="24000" h="24000" fill="none">
-                  <a:moveTo>
-                    <a:pt x="3000" y="11000"/>
-                  </a:moveTo>
-                  <a:lnTo>
-                    <a:pt x="6000" y="11000"/>
-                  </a:lnTo>
-                  <a:cubicBezTo>
-                    <a:pt x="7105" y="11000"/>
-                    <a:pt x="8000" y="11895"/>
-                    <a:pt x="8000" y="13000"/>
-                  </a:cubicBezTo>
-                  <a:lnTo>
-                    <a:pt x="8000" y="16000"/>
-                  </a:lnTo>
-                  <a:cubicBezTo>
-                    <a:pt x="8000" y="17105"/>
-                    <a:pt x="7105" y="18000"/>
-                    <a:pt x="6000" y="18000"/>
-                  </a:cubicBezTo>
-                  <a:lnTo>
-                    <a:pt x="5000" y="18000"/>
-                  </a:lnTo>
-                  <a:cubicBezTo>
-                    <a:pt x="3895" y="18000"/>
-                    <a:pt x="3000" y="17105"/>
-                    <a:pt x="3000" y="16000"/>
-                  </a:cubicBezTo>
-                  <a:lnTo>
-                    <a:pt x="3000" y="11000"/>
-                  </a:lnTo>
-                  <a:close/>
-                  <a:moveTo>
-                    <a:pt x="3000" y="11000"/>
-                  </a:moveTo>
-                  <a:cubicBezTo>
-                    <a:pt x="3000" y="6029"/>
-                    <a:pt x="7029" y="2000"/>
-                    <a:pt x="12000" y="2000"/>
-                  </a:cubicBezTo>
-                  <a:cubicBezTo>
-                    <a:pt x="16971" y="2000"/>
-                    <a:pt x="21000" y="6029"/>
-                    <a:pt x="21000" y="11000"/>
-                  </a:cubicBezTo>
-                  <a:moveTo>
-                    <a:pt x="21000" y="11000"/>
-                  </a:moveTo>
-                  <a:lnTo>
-                    <a:pt x="21000" y="16000"/>
-                  </a:lnTo>
-                  <a:cubicBezTo>
-                    <a:pt x="21000" y="17105"/>
-                    <a:pt x="20105" y="18000"/>
-                    <a:pt x="19000" y="18000"/>
-                  </a:cubicBezTo>
-                  <a:lnTo>
-                    <a:pt x="18000" y="18000"/>
-                  </a:lnTo>
-                  <a:cubicBezTo>
-                    <a:pt x="16895" y="18000"/>
-                    <a:pt x="16000" y="17105"/>
-                    <a:pt x="16000" y="16000"/>
-                  </a:cubicBezTo>
-                  <a:lnTo>
-                    <a:pt x="16000" y="13000"/>
-                  </a:lnTo>
-                  <a:cubicBezTo>
-                    <a:pt x="16000" y="11895"/>
-                    <a:pt x="16895" y="11000"/>
-                    <a:pt x="18000" y="11000"/>
-                  </a:cubicBezTo>
-                  <a:lnTo>
-                    <a:pt x="21000" y="11000"/>
-                  </a:lnTo>
-                  <a:close/>
-                </a:path>
-                <a:path w="24000" h="24000" fill="none">
-                  <a:moveTo>
-                    <a:pt x="21000" y="16000"/>
-                  </a:moveTo>
-                  <a:lnTo>
-                    <a:pt x="21000" y="18000"/>
-                  </a:lnTo>
-                  <a:cubicBezTo>
-                    <a:pt x="21000" y="20209"/>
-                    <a:pt x="19209" y="22000"/>
-                    <a:pt x="17000" y="22000"/>
-                  </a:cubicBezTo>
-                  <a:lnTo>
-                    <a:pt x="12000" y="22000"/>
-                  </a:lnTo>
-                </a:path>
-              </a:pathLst>
-            </a:custGeom>
-            <a:noFill/>
-            <a:ln w="22083" cap="rnd">
-              <a:solidFill>
-                <a:srgbClr val="FFFFFF"/>
-              </a:solidFill>
-              <a:round/>
-            </a:ln>
-          </p:spPr>
-          <p:txBody>
-            <a:bodyPr rtlCol="0" anchor="ctr"/>
-            <a:lstStyle/>
-            <a:p>
-              <a:pPr algn="ctr"/>
-            </a:p>
-          </p:txBody>
-        </p:sp>
-        <p:sp>
-          <p:nvSpPr>
-            <p:cNvPr id="551" name="BrandDeck Diagram Text 2"/>
-            <p:cNvSpPr txBox="1"/>
-            <p:nvPr/>
-          </p:nvSpPr>
-          <p:spPr>
-            <a:xfrm>
-              <a:off x="7038171" y="3044627"/>
-              <a:ext cx="4275560" cy="1019556"/>
+              <a:off x="1394223" y="5278102"/>
+              <a:ext cx="9919508" cy="791000"/>
             </a:xfrm>
             <a:prstGeom prst="rect">
               <a:avLst/>
@@ -10720,488 +12254,7 @@
                   </a:solidFill>
                   <a:latin typeface="Play"/>
                 </a:rPr>
-                <a:t>Треть всех обращений в поддержку —</a:t>
-              </a:r>
-              <a:r>
-                <a:rPr sz="1800" b="0">
-                  <a:solidFill>
-                    <a:srgbClr val="000000"/>
-                  </a:solidFill>
-                  <a:latin typeface="Play"/>
-                </a:rPr>
-                <a:t> повторяющиеся вопросы.</a:t>
-              </a:r>
-            </a:p>
-          </p:txBody>
-        </p:sp>
-        <p:sp>
-          <p:nvSpPr>
-            <p:cNvPr id="552" name="BrandDeck Diagram Card 3"/>
-            <p:cNvSpPr/>
-            <p:nvPr/>
-          </p:nvSpPr>
-          <p:spPr>
-            <a:xfrm>
-              <a:off x="677334" y="4412974"/>
-              <a:ext cx="5319368" cy="1282903"/>
-            </a:xfrm>
-            <a:prstGeom prst="roundRect">
-              <a:avLst>
-                <a:gd name="adj" fmla="val 8000"/>
-              </a:avLst>
-            </a:prstGeom>
-            <a:solidFill>
-              <a:srgbClr val="EDF5FF"/>
-            </a:solidFill>
-            <a:ln>
-              <a:noFill/>
-            </a:ln>
-          </p:spPr>
-          <p:txBody>
-            <a:bodyPr rtlCol="0" anchor="ctr"/>
-            <a:lstStyle/>
-            <a:p>
-              <a:pPr algn="ctr"/>
-            </a:p>
-          </p:txBody>
-        </p:sp>
-        <p:sp>
-          <p:nvSpPr>
-            <p:cNvPr id="553" name="BrandDeck Diagram Icon 3 Badge"/>
-            <p:cNvSpPr/>
-            <p:nvPr/>
-          </p:nvSpPr>
-          <p:spPr>
-            <a:xfrm>
-              <a:off x="896790" y="4817814"/>
-              <a:ext cx="473222" cy="473222"/>
-            </a:xfrm>
-            <a:prstGeom prst="ellipse">
-              <a:avLst/>
-            </a:prstGeom>
-            <a:solidFill>
-              <a:srgbClr val="006DEB"/>
-            </a:solidFill>
-            <a:ln>
-              <a:noFill/>
-            </a:ln>
-          </p:spPr>
-          <p:txBody>
-            <a:bodyPr rtlCol="0" anchor="ctr"/>
-            <a:lstStyle/>
-            <a:p>
-              <a:pPr algn="ctr"/>
-            </a:p>
-          </p:txBody>
-        </p:sp>
-        <p:sp>
-          <p:nvSpPr>
-            <p:cNvPr id="554" name="BrandDeck Icon gauge"/>
-            <p:cNvSpPr/>
-            <p:nvPr/>
-          </p:nvSpPr>
-          <p:spPr>
-            <a:xfrm>
-              <a:off x="1000898" y="4921923"/>
-              <a:ext cx="265004" cy="265004"/>
-            </a:xfrm>
-            <a:custGeom>
-              <a:avLst/>
-              <a:gdLst/>
-              <a:ahLst/>
-              <a:cxnLst/>
-              <a:rect l="l" t="t" r="r" b="b"/>
-              <a:pathLst>
-                <a:path w="24000" h="24000" fill="none">
-                  <a:moveTo>
-                    <a:pt x="12000" y="14000"/>
-                  </a:moveTo>
-                  <a:lnTo>
-                    <a:pt x="16000" y="10000"/>
-                  </a:lnTo>
-                </a:path>
-                <a:path w="24000" h="24000" fill="none">
-                  <a:moveTo>
-                    <a:pt x="3340" y="19000"/>
-                  </a:moveTo>
-                  <a:cubicBezTo>
-                    <a:pt x="913" y="14797"/>
-                    <a:pt x="1854" y="9459"/>
-                    <a:pt x="5572" y="6339"/>
-                  </a:cubicBezTo>
-                  <a:cubicBezTo>
-                    <a:pt x="9290" y="3220"/>
-                    <a:pt x="14710" y="3220"/>
-                    <a:pt x="18428" y="6339"/>
-                  </a:cubicBezTo>
-                  <a:cubicBezTo>
-                    <a:pt x="22146" y="9459"/>
-                    <a:pt x="23087" y="14797"/>
-                    <a:pt x="20660" y="19000"/>
-                  </a:cubicBezTo>
-                </a:path>
-              </a:pathLst>
-            </a:custGeom>
-            <a:noFill/>
-            <a:ln w="22083" cap="rnd">
-              <a:solidFill>
-                <a:srgbClr val="FFFFFF"/>
-              </a:solidFill>
-              <a:round/>
-            </a:ln>
-          </p:spPr>
-          <p:txBody>
-            <a:bodyPr rtlCol="0" anchor="ctr"/>
-            <a:lstStyle/>
-            <a:p>
-              <a:pPr algn="ctr"/>
-            </a:p>
-          </p:txBody>
-        </p:sp>
-        <p:sp>
-          <p:nvSpPr>
-            <p:cNvPr id="555" name="BrandDeck Diagram Text 3"/>
-            <p:cNvSpPr txBox="1"/>
-            <p:nvPr/>
-          </p:nvSpPr>
-          <p:spPr>
-            <a:xfrm>
-              <a:off x="1501685" y="4544647"/>
-              <a:ext cx="4275560" cy="1019556"/>
-            </a:xfrm>
-            <a:prstGeom prst="rect">
-              <a:avLst/>
-            </a:prstGeom>
-            <a:noFill/>
-          </p:spPr>
-          <p:txBody>
-            <a:bodyPr wrap="square" anchor="ctr" lIns="36576" tIns="18288" rIns="36576" bIns="18288">
-              <a:noAutofit/>
-            </a:bodyPr>
-            <a:lstStyle/>
-            <a:p>
-              <a:pPr algn="l">
-                <a:lnSpc>
-                  <a:spcPct val="110000"/>
-                </a:lnSpc>
-              </a:pPr>
-              <a:r>
-                <a:rPr sz="1800" b="0">
-                  <a:solidFill>
-                    <a:srgbClr val="000000"/>
-                  </a:solidFill>
-                  <a:latin typeface="Play"/>
-                </a:rPr>
-                <a:t>Это создает высокую нагрузку на специалистов поддержки.</a:t>
-              </a:r>
-            </a:p>
-          </p:txBody>
-        </p:sp>
-      </p:grpSp>
-    </p:spTree>
-  </p:cSld>
-  <p:clrMapOvr>
-    <a:masterClrMapping/>
-  </p:clrMapOvr>
-</p:sld>
-</file>
-
-<file path=ppt/slides/slide3.xml><?xml version="1.0" encoding="utf-8"?>
-<p:sld xmlns:a="http://schemas.openxmlformats.org/drawingml/2006/main" xmlns:p="http://schemas.openxmlformats.org/presentationml/2006/main" xmlns:r="http://schemas.openxmlformats.org/officeDocument/2006/relationships">
-  <p:cSld>
-    <p:bg>
-      <p:bgPr>
-        <a:solidFill>
-          <a:schemeClr val="lt2"/>
-        </a:solidFill>
-      </p:bgPr>
-    </p:bg>
-    <p:spTree>
-      <p:nvGrpSpPr>
-        <p:cNvPr id="1" name=""/>
-        <p:cNvGrpSpPr/>
-        <p:nvPr/>
-      </p:nvGrpSpPr>
-      <p:grpSpPr/>
-      <p:sp>
-        <p:nvSpPr>
-          <p:cNvPr id="543" name="BrandDeck Text 543"/>
-          <p:cNvSpPr txBox="1"/>
-          <p:nvPr>
-            <p:ph type="title"/>
-          </p:nvPr>
-        </p:nvSpPr>
-        <p:spPr>
-          <a:xfrm>
-            <a:off x="677334" y="692150"/>
-            <a:ext cx="10855854" cy="644241"/>
-          </a:xfrm>
-          <a:prstGeom prst="rect">
-            <a:avLst/>
-          </a:prstGeom>
-          <a:noFill/>
-          <a:ln>
-            <a:noFill/>
-          </a:ln>
-        </p:spPr>
-        <p:txBody>
-          <a:bodyPr anchorCtr="0" anchor="t" bIns="0" lIns="0" spcFirstLastPara="1" rIns="0" wrap="square" tIns="0">
-            <a:normAutofit/>
-          </a:bodyPr>
-          <a:lstStyle/>
-          <a:p>
-            <a:pPr indent="0" marL="0" rtl="0" algn="l">
-              <a:lnSpc>
-                <a:spcPct val="115000"/>
-              </a:lnSpc>
-              <a:spcBef>
-                <a:spcPts val="0"/>
-              </a:spcBef>
-              <a:spcAft>
-                <a:spcPts val="270"/>
-              </a:spcAft>
-              <a:buClr>
-                <a:schemeClr val="accent1"/>
-              </a:buClr>
-              <a:buSzPts val="3600"/>
-              <a:buFont typeface="Play"/>
-              <a:buNone/>
-            </a:pPr>
-            <a:r>
-              <a:rPr sz="1800">
-                <a:solidFill>
-                  <a:srgbClr val="000000"/>
-                </a:solidFill>
-              </a:rPr>
-              <a:t>Влияет на 150 сотрудников двух подразделений при ежедневном обращении к регламентам</a:t>
-            </a:r>
-            <a:endParaRPr/>
-          </a:p>
-        </p:txBody>
-      </p:sp>
-      <p:grpSp>
-        <p:nvGrpSpPr>
-          <p:cNvPr id="2" name="BrandDeck Diagram icon_grid" descr="icon_grid: 150 сотрудников Два подразделения; 6 недель Период пилота"/>
-          <p:cNvGrpSpPr/>
-          <p:nvPr/>
-        </p:nvGrpSpPr>
-        <p:grpSpPr>
-          <a:xfrm>
-            <a:off x="677334" y="2603500"/>
-            <a:ext cx="10855853" cy="3597276"/>
-            <a:chOff x="677334" y="2603500"/>
-            <a:chExt cx="10855853" cy="3597276"/>
-          </a:xfrm>
-        </p:grpSpPr>
-        <p:sp>
-          <p:nvSpPr>
-            <p:cNvPr id="544" name="BrandDeck Diagram Card 1"/>
-            <p:cNvSpPr/>
-            <p:nvPr/>
-          </p:nvSpPr>
-          <p:spPr>
-            <a:xfrm>
-              <a:off x="677334" y="2603500"/>
-              <a:ext cx="5319368" cy="3597276"/>
-            </a:xfrm>
-            <a:prstGeom prst="roundRect">
-              <a:avLst>
-                <a:gd name="adj" fmla="val 8000"/>
-              </a:avLst>
-            </a:prstGeom>
-            <a:solidFill>
-              <a:srgbClr val="EDF5FF"/>
-            </a:solidFill>
-            <a:ln>
-              <a:noFill/>
-            </a:ln>
-          </p:spPr>
-          <p:txBody>
-            <a:bodyPr rtlCol="0" anchor="ctr"/>
-            <a:lstStyle/>
-            <a:p>
-              <a:pPr algn="ctr"/>
-            </a:p>
-          </p:txBody>
-        </p:sp>
-        <p:sp>
-          <p:nvSpPr>
-            <p:cNvPr id="545" name="BrandDeck Diagram Icon 1 Badge"/>
-            <p:cNvSpPr/>
-            <p:nvPr/>
-          </p:nvSpPr>
-          <p:spPr>
-            <a:xfrm>
-              <a:off x="896789" y="2822956"/>
-              <a:ext cx="603504" cy="603504"/>
-            </a:xfrm>
-            <a:prstGeom prst="ellipse">
-              <a:avLst/>
-            </a:prstGeom>
-            <a:solidFill>
-              <a:srgbClr val="006DEB"/>
-            </a:solidFill>
-            <a:ln>
-              <a:noFill/>
-            </a:ln>
-          </p:spPr>
-          <p:txBody>
-            <a:bodyPr rtlCol="0" anchor="ctr"/>
-            <a:lstStyle/>
-            <a:p>
-              <a:pPr algn="ctr"/>
-            </a:p>
-          </p:txBody>
-        </p:sp>
-        <p:sp>
-          <p:nvSpPr>
-            <p:cNvPr id="546" name="BrandDeck Icon users"/>
-            <p:cNvSpPr/>
-            <p:nvPr/>
-          </p:nvSpPr>
-          <p:spPr>
-            <a:xfrm>
-              <a:off x="1029560" y="2955726"/>
-              <a:ext cx="337962" cy="337962"/>
-            </a:xfrm>
-            <a:custGeom>
-              <a:avLst/>
-              <a:gdLst/>
-              <a:ahLst/>
-              <a:cxnLst/>
-              <a:rect l="l" t="t" r="r" b="b"/>
-              <a:pathLst>
-                <a:path w="24000" h="24000" fill="none">
-                  <a:moveTo>
-                    <a:pt x="16000" y="21000"/>
-                  </a:moveTo>
-                  <a:lnTo>
-                    <a:pt x="16000" y="19000"/>
-                  </a:lnTo>
-                  <a:cubicBezTo>
-                    <a:pt x="16000" y="16791"/>
-                    <a:pt x="14209" y="15000"/>
-                    <a:pt x="12000" y="15000"/>
-                  </a:cubicBezTo>
-                  <a:lnTo>
-                    <a:pt x="6000" y="15000"/>
-                  </a:lnTo>
-                  <a:cubicBezTo>
-                    <a:pt x="3791" y="15000"/>
-                    <a:pt x="2000" y="16791"/>
-                    <a:pt x="2000" y="19000"/>
-                  </a:cubicBezTo>
-                  <a:lnTo>
-                    <a:pt x="2000" y="21000"/>
-                  </a:lnTo>
-                </a:path>
-                <a:path w="24000" h="24000" fill="none">
-                  <a:moveTo>
-                    <a:pt x="13000" y="7000"/>
-                  </a:moveTo>
-                  <a:cubicBezTo>
-                    <a:pt x="13000" y="9209"/>
-                    <a:pt x="11209" y="11000"/>
-                    <a:pt x="9000" y="11000"/>
-                  </a:cubicBezTo>
-                  <a:cubicBezTo>
-                    <a:pt x="6791" y="11000"/>
-                    <a:pt x="5000" y="9209"/>
-                    <a:pt x="5000" y="7000"/>
-                  </a:cubicBezTo>
-                  <a:cubicBezTo>
-                    <a:pt x="5000" y="4791"/>
-                    <a:pt x="6791" y="3000"/>
-                    <a:pt x="9000" y="3000"/>
-                  </a:cubicBezTo>
-                  <a:cubicBezTo>
-                    <a:pt x="11209" y="3000"/>
-                    <a:pt x="13000" y="4791"/>
-                    <a:pt x="13000" y="7000"/>
-                  </a:cubicBezTo>
-                  <a:close/>
-                </a:path>
-                <a:path w="24000" h="24000" fill="none">
-                  <a:moveTo>
-                    <a:pt x="22000" y="21000"/>
-                  </a:moveTo>
-                  <a:lnTo>
-                    <a:pt x="22000" y="19000"/>
-                  </a:lnTo>
-                  <a:cubicBezTo>
-                    <a:pt x="21999" y="17177"/>
-                    <a:pt x="20765" y="15586"/>
-                    <a:pt x="19000" y="15130"/>
-                  </a:cubicBezTo>
-                </a:path>
-                <a:path w="24000" h="24000" fill="none">
-                  <a:moveTo>
-                    <a:pt x="16000" y="3130"/>
-                  </a:moveTo>
-                  <a:cubicBezTo>
-                    <a:pt x="17770" y="3583"/>
-                    <a:pt x="19008" y="5178"/>
-                    <a:pt x="19008" y="7005"/>
-                  </a:cubicBezTo>
-                  <a:cubicBezTo>
-                    <a:pt x="19008" y="8832"/>
-                    <a:pt x="17770" y="10427"/>
-                    <a:pt x="16000" y="10880"/>
-                  </a:cubicBezTo>
-                </a:path>
-              </a:pathLst>
-            </a:custGeom>
-            <a:noFill/>
-            <a:ln w="28163" cap="rnd">
-              <a:solidFill>
-                <a:srgbClr val="FFFFFF"/>
-              </a:solidFill>
-              <a:round/>
-            </a:ln>
-          </p:spPr>
-          <p:txBody>
-            <a:bodyPr rtlCol="0" anchor="ctr"/>
-            <a:lstStyle/>
-            <a:p>
-              <a:pPr algn="ctr"/>
-            </a:p>
-          </p:txBody>
-        </p:sp>
-        <p:sp>
-          <p:nvSpPr>
-            <p:cNvPr id="547" name="BrandDeck Diagram Text 1"/>
-            <p:cNvSpPr txBox="1"/>
-            <p:nvPr/>
-          </p:nvSpPr>
-          <p:spPr>
-            <a:xfrm>
-              <a:off x="830953" y="3580079"/>
-              <a:ext cx="5012130" cy="2510968"/>
-            </a:xfrm>
-            <a:prstGeom prst="rect">
-              <a:avLst/>
-            </a:prstGeom>
-            <a:noFill/>
-          </p:spPr>
-          <p:txBody>
-            <a:bodyPr wrap="square" anchor="t" lIns="36576" tIns="18288" rIns="36576" bIns="18288">
-              <a:noAutofit/>
-            </a:bodyPr>
-            <a:lstStyle/>
-            <a:p>
-              <a:pPr algn="l">
-                <a:lnSpc>
-                  <a:spcPct val="110000"/>
-                </a:lnSpc>
-              </a:pPr>
-              <a:r>
-                <a:rPr sz="1800" b="1">
-                  <a:solidFill>
-                    <a:srgbClr val="000000"/>
-                  </a:solidFill>
-                  <a:latin typeface="Play"/>
-                </a:rPr>
-                <a:t>150 сотрудников</a:t>
+                <a:t>Охват</a:t>
               </a:r>
             </a:p>
             <a:p>
@@ -11220,1646 +12273,7 @@
                   </a:solidFill>
                   <a:latin typeface="Play"/>
                 </a:rPr>
-                <a:t>Два подразделения</a:t>
-              </a:r>
-            </a:p>
-          </p:txBody>
-        </p:sp>
-        <p:sp>
-          <p:nvSpPr>
-            <p:cNvPr id="548" name="BrandDeck Diagram Card 2"/>
-            <p:cNvSpPr/>
-            <p:nvPr/>
-          </p:nvSpPr>
-          <p:spPr>
-            <a:xfrm>
-              <a:off x="6213819" y="2603500"/>
-              <a:ext cx="5319368" cy="3597276"/>
-            </a:xfrm>
-            <a:prstGeom prst="roundRect">
-              <a:avLst>
-                <a:gd name="adj" fmla="val 8000"/>
-              </a:avLst>
-            </a:prstGeom>
-            <a:solidFill>
-              <a:srgbClr val="EDF5FF"/>
-            </a:solidFill>
-            <a:ln>
-              <a:noFill/>
-            </a:ln>
-          </p:spPr>
-          <p:txBody>
-            <a:bodyPr rtlCol="0" anchor="ctr"/>
-            <a:lstStyle/>
-            <a:p>
-              <a:pPr algn="ctr"/>
-            </a:p>
-          </p:txBody>
-        </p:sp>
-        <p:sp>
-          <p:nvSpPr>
-            <p:cNvPr id="549" name="BrandDeck Diagram Icon 2 Badge"/>
-            <p:cNvSpPr/>
-            <p:nvPr/>
-          </p:nvSpPr>
-          <p:spPr>
-            <a:xfrm>
-              <a:off x="6433275" y="2822956"/>
-              <a:ext cx="603504" cy="603504"/>
-            </a:xfrm>
-            <a:prstGeom prst="ellipse">
-              <a:avLst/>
-            </a:prstGeom>
-            <a:solidFill>
-              <a:srgbClr val="006DEB"/>
-            </a:solidFill>
-            <a:ln>
-              <a:noFill/>
-            </a:ln>
-          </p:spPr>
-          <p:txBody>
-            <a:bodyPr rtlCol="0" anchor="ctr"/>
-            <a:lstStyle/>
-            <a:p>
-              <a:pPr algn="ctr"/>
-            </a:p>
-          </p:txBody>
-        </p:sp>
-        <p:sp>
-          <p:nvSpPr>
-            <p:cNvPr id="550" name="BrandDeck Icon calendar"/>
-            <p:cNvSpPr/>
-            <p:nvPr/>
-          </p:nvSpPr>
-          <p:spPr>
-            <a:xfrm>
-              <a:off x="6566046" y="2955726"/>
-              <a:ext cx="337962" cy="337962"/>
-            </a:xfrm>
-            <a:custGeom>
-              <a:avLst/>
-              <a:gdLst/>
-              <a:ahLst/>
-              <a:cxnLst/>
-              <a:rect l="l" t="t" r="r" b="b"/>
-              <a:pathLst>
-                <a:path w="24000" h="24000" fill="none">
-                  <a:moveTo>
-                    <a:pt x="8000" y="2000"/>
-                  </a:moveTo>
-                  <a:lnTo>
-                    <a:pt x="8000" y="6000"/>
-                  </a:lnTo>
-                </a:path>
-                <a:path w="24000" h="24000" fill="none">
-                  <a:moveTo>
-                    <a:pt x="16000" y="2000"/>
-                  </a:moveTo>
-                  <a:lnTo>
-                    <a:pt x="16000" y="6000"/>
-                  </a:lnTo>
-                </a:path>
-                <a:path w="24000" h="24000" fill="none">
-                  <a:moveTo>
-                    <a:pt x="5000" y="4000"/>
-                  </a:moveTo>
-                  <a:lnTo>
-                    <a:pt x="19000" y="4000"/>
-                  </a:lnTo>
-                  <a:cubicBezTo>
-                    <a:pt x="20105" y="4000"/>
-                    <a:pt x="21000" y="4895"/>
-                    <a:pt x="21000" y="6000"/>
-                  </a:cubicBezTo>
-                  <a:lnTo>
-                    <a:pt x="21000" y="20000"/>
-                  </a:lnTo>
-                  <a:cubicBezTo>
-                    <a:pt x="21000" y="21105"/>
-                    <a:pt x="20105" y="22000"/>
-                    <a:pt x="19000" y="22000"/>
-                  </a:cubicBezTo>
-                  <a:lnTo>
-                    <a:pt x="5000" y="22000"/>
-                  </a:lnTo>
-                  <a:cubicBezTo>
-                    <a:pt x="3895" y="22000"/>
-                    <a:pt x="3000" y="21105"/>
-                    <a:pt x="3000" y="20000"/>
-                  </a:cubicBezTo>
-                  <a:lnTo>
-                    <a:pt x="3000" y="6000"/>
-                  </a:lnTo>
-                  <a:cubicBezTo>
-                    <a:pt x="3000" y="4895"/>
-                    <a:pt x="3895" y="4000"/>
-                    <a:pt x="5000" y="4000"/>
-                  </a:cubicBezTo>
-                  <a:close/>
-                </a:path>
-                <a:path w="24000" h="24000" fill="none">
-                  <a:moveTo>
-                    <a:pt x="3000" y="10000"/>
-                  </a:moveTo>
-                  <a:lnTo>
-                    <a:pt x="21000" y="10000"/>
-                  </a:lnTo>
-                </a:path>
-              </a:pathLst>
-            </a:custGeom>
-            <a:noFill/>
-            <a:ln w="28163" cap="rnd">
-              <a:solidFill>
-                <a:srgbClr val="FFFFFF"/>
-              </a:solidFill>
-              <a:round/>
-            </a:ln>
-          </p:spPr>
-          <p:txBody>
-            <a:bodyPr rtlCol="0" anchor="ctr"/>
-            <a:lstStyle/>
-            <a:p>
-              <a:pPr algn="ctr"/>
-            </a:p>
-          </p:txBody>
-        </p:sp>
-        <p:sp>
-          <p:nvSpPr>
-            <p:cNvPr id="551" name="BrandDeck Diagram Text 2"/>
-            <p:cNvSpPr txBox="1"/>
-            <p:nvPr/>
-          </p:nvSpPr>
-          <p:spPr>
-            <a:xfrm>
-              <a:off x="6367438" y="3580079"/>
-              <a:ext cx="5012130" cy="2510968"/>
-            </a:xfrm>
-            <a:prstGeom prst="rect">
-              <a:avLst/>
-            </a:prstGeom>
-            <a:noFill/>
-          </p:spPr>
-          <p:txBody>
-            <a:bodyPr wrap="square" anchor="t" lIns="36576" tIns="18288" rIns="36576" bIns="18288">
-              <a:noAutofit/>
-            </a:bodyPr>
-            <a:lstStyle/>
-            <a:p>
-              <a:pPr algn="l">
-                <a:lnSpc>
-                  <a:spcPct val="110000"/>
-                </a:lnSpc>
-              </a:pPr>
-              <a:r>
-                <a:rPr sz="1800" b="1">
-                  <a:solidFill>
-                    <a:srgbClr val="000000"/>
-                  </a:solidFill>
-                  <a:latin typeface="Play"/>
-                </a:rPr>
-                <a:t>6 недель</a:t>
-              </a:r>
-            </a:p>
-            <a:p>
-              <a:pPr algn="l">
-                <a:lnSpc>
-                  <a:spcPct val="110000"/>
-                </a:lnSpc>
-                <a:spcBef>
-                  <a:spcPts val="450"/>
-                </a:spcBef>
-              </a:pPr>
-              <a:r>
-                <a:rPr sz="1800" b="0">
-                  <a:solidFill>
-                    <a:srgbClr val="000000"/>
-                  </a:solidFill>
-                  <a:latin typeface="Play"/>
-                </a:rPr>
-                <a:t>Период пилота</a:t>
-              </a:r>
-            </a:p>
-          </p:txBody>
-        </p:sp>
-      </p:grpSp>
-    </p:spTree>
-  </p:cSld>
-  <p:clrMapOvr>
-    <a:masterClrMapping/>
-  </p:clrMapOvr>
-</p:sld>
-</file>
-
-<file path=ppt/slides/slide4.xml><?xml version="1.0" encoding="utf-8"?>
-<p:sld xmlns:a="http://schemas.openxmlformats.org/drawingml/2006/main" xmlns:p="http://schemas.openxmlformats.org/presentationml/2006/main" xmlns:r="http://schemas.openxmlformats.org/officeDocument/2006/relationships">
-  <p:cSld>
-    <p:bg>
-      <p:bgPr>
-        <a:solidFill>
-          <a:schemeClr val="lt2"/>
-        </a:solidFill>
-      </p:bgPr>
-    </p:bg>
-    <p:spTree>
-      <p:nvGrpSpPr>
-        <p:cNvPr id="1" name=""/>
-        <p:cNvGrpSpPr/>
-        <p:nvPr/>
-      </p:nvGrpSpPr>
-      <p:grpSpPr/>
-      <p:sp>
-        <p:nvSpPr>
-          <p:cNvPr id="543" name="BrandDeck Text 543"/>
-          <p:cNvSpPr txBox="1"/>
-          <p:nvPr>
-            <p:ph type="title"/>
-          </p:nvPr>
-        </p:nvSpPr>
-        <p:spPr>
-          <a:xfrm>
-            <a:off x="677334" y="692150"/>
-            <a:ext cx="10855854" cy="644241"/>
-          </a:xfrm>
-          <a:prstGeom prst="rect">
-            <a:avLst/>
-          </a:prstGeom>
-          <a:noFill/>
-          <a:ln>
-            <a:noFill/>
-          </a:ln>
-        </p:spPr>
-        <p:txBody>
-          <a:bodyPr anchorCtr="0" anchor="t" bIns="0" lIns="0" spcFirstLastPara="1" rIns="0" wrap="square" tIns="0">
-            <a:normAutofit/>
-          </a:bodyPr>
-          <a:lstStyle/>
-          <a:p>
-            <a:pPr indent="0" marL="0" rtl="0" algn="l">
-              <a:lnSpc>
-                <a:spcPct val="115000"/>
-              </a:lnSpc>
-              <a:spcBef>
-                <a:spcPts val="0"/>
-              </a:spcBef>
-              <a:spcAft>
-                <a:spcPts val="270"/>
-              </a:spcAft>
-              <a:buClr>
-                <a:schemeClr val="accent1"/>
-              </a:buClr>
-              <a:buSzPts val="3600"/>
-              <a:buFont typeface="Play"/>
-              <a:buNone/>
-            </a:pPr>
-            <a:r>
-              <a:rPr sz="1800">
-                <a:solidFill>
-                  <a:srgbClr val="000000"/>
-                </a:solidFill>
-              </a:rPr>
-              <a:t>ИИ-помощник отвечает на вопросы по регламентам и сразу дает ссылку на документ-источник</a:t>
-            </a:r>
-            <a:endParaRPr/>
-          </a:p>
-        </p:txBody>
-      </p:sp>
-      <p:grpSp>
-        <p:nvGrpSpPr>
-          <p:cNvPr id="2" name="BrandDeck Diagram icon_grid" descr="icon_grid: ИИ-помощник отвечает на вопросы по регламентам и инструкциям.; Система сразу предоставляет ссылку на документ-источник.; Ответ формируется на основе внутренних корпоративных документов."/>
-          <p:cNvGrpSpPr/>
-          <p:nvPr/>
-        </p:nvGrpSpPr>
-        <p:grpSpPr>
-          <a:xfrm>
-            <a:off x="677334" y="2912953"/>
-            <a:ext cx="10855853" cy="2782924"/>
-            <a:chOff x="677334" y="2912953"/>
-            <a:chExt cx="10855853" cy="2782924"/>
-          </a:xfrm>
-        </p:grpSpPr>
-        <p:sp>
-          <p:nvSpPr>
-            <p:cNvPr id="544" name="BrandDeck Diagram Card 1"/>
-            <p:cNvSpPr/>
-            <p:nvPr/>
-          </p:nvSpPr>
-          <p:spPr>
-            <a:xfrm>
-              <a:off x="677334" y="2912953"/>
-              <a:ext cx="5319368" cy="1282903"/>
-            </a:xfrm>
-            <a:prstGeom prst="roundRect">
-              <a:avLst>
-                <a:gd name="adj" fmla="val 8000"/>
-              </a:avLst>
-            </a:prstGeom>
-            <a:solidFill>
-              <a:srgbClr val="EDF5FF"/>
-            </a:solidFill>
-            <a:ln>
-              <a:noFill/>
-            </a:ln>
-          </p:spPr>
-          <p:txBody>
-            <a:bodyPr rtlCol="0" anchor="ctr"/>
-            <a:lstStyle/>
-            <a:p>
-              <a:pPr algn="ctr"/>
-            </a:p>
-          </p:txBody>
-        </p:sp>
-        <p:sp>
-          <p:nvSpPr>
-            <p:cNvPr id="545" name="BrandDeck Diagram Icon 1 Badge"/>
-            <p:cNvSpPr/>
-            <p:nvPr/>
-          </p:nvSpPr>
-          <p:spPr>
-            <a:xfrm>
-              <a:off x="896790" y="3317794"/>
-              <a:ext cx="473222" cy="473222"/>
-            </a:xfrm>
-            <a:prstGeom prst="ellipse">
-              <a:avLst/>
-            </a:prstGeom>
-            <a:solidFill>
-              <a:srgbClr val="006DEB"/>
-            </a:solidFill>
-            <a:ln>
-              <a:noFill/>
-            </a:ln>
-          </p:spPr>
-          <p:txBody>
-            <a:bodyPr rtlCol="0" anchor="ctr"/>
-            <a:lstStyle/>
-            <a:p>
-              <a:pPr algn="ctr"/>
-            </a:p>
-          </p:txBody>
-        </p:sp>
-        <p:sp>
-          <p:nvSpPr>
-            <p:cNvPr id="546" name="BrandDeck Icon file-text"/>
-            <p:cNvSpPr/>
-            <p:nvPr/>
-          </p:nvSpPr>
-          <p:spPr>
-            <a:xfrm>
-              <a:off x="1000898" y="3421903"/>
-              <a:ext cx="265004" cy="265004"/>
-            </a:xfrm>
-            <a:custGeom>
-              <a:avLst/>
-              <a:gdLst/>
-              <a:ahLst/>
-              <a:cxnLst/>
-              <a:rect l="l" t="t" r="r" b="b"/>
-              <a:pathLst>
-                <a:path w="24000" h="24000" fill="none">
-                  <a:moveTo>
-                    <a:pt x="15000" y="2000"/>
-                  </a:moveTo>
-                  <a:lnTo>
-                    <a:pt x="6000" y="2000"/>
-                  </a:lnTo>
-                  <a:cubicBezTo>
-                    <a:pt x="4895" y="2000"/>
-                    <a:pt x="4000" y="2895"/>
-                    <a:pt x="4000" y="4000"/>
-                  </a:cubicBezTo>
-                  <a:lnTo>
-                    <a:pt x="4000" y="20000"/>
-                  </a:lnTo>
-                  <a:cubicBezTo>
-                    <a:pt x="4000" y="21105"/>
-                    <a:pt x="4895" y="22000"/>
-                    <a:pt x="6000" y="22000"/>
-                  </a:cubicBezTo>
-                  <a:lnTo>
-                    <a:pt x="18000" y="22000"/>
-                  </a:lnTo>
-                  <a:cubicBezTo>
-                    <a:pt x="19105" y="22000"/>
-                    <a:pt x="20000" y="21105"/>
-                    <a:pt x="20000" y="20000"/>
-                  </a:cubicBezTo>
-                  <a:lnTo>
-                    <a:pt x="20000" y="7000"/>
-                  </a:lnTo>
-                  <a:close/>
-                </a:path>
-                <a:path w="24000" h="24000" fill="none">
-                  <a:moveTo>
-                    <a:pt x="14000" y="2000"/>
-                  </a:moveTo>
-                  <a:lnTo>
-                    <a:pt x="14000" y="6000"/>
-                  </a:lnTo>
-                  <a:cubicBezTo>
-                    <a:pt x="14000" y="7105"/>
-                    <a:pt x="14895" y="8000"/>
-                    <a:pt x="16000" y="8000"/>
-                  </a:cubicBezTo>
-                  <a:lnTo>
-                    <a:pt x="20000" y="8000"/>
-                  </a:lnTo>
-                </a:path>
-                <a:path w="24000" h="24000" fill="none">
-                  <a:moveTo>
-                    <a:pt x="10000" y="9000"/>
-                  </a:moveTo>
-                  <a:lnTo>
-                    <a:pt x="8000" y="9000"/>
-                  </a:lnTo>
-                </a:path>
-                <a:path w="24000" h="24000" fill="none">
-                  <a:moveTo>
-                    <a:pt x="16000" y="13000"/>
-                  </a:moveTo>
-                  <a:lnTo>
-                    <a:pt x="8000" y="13000"/>
-                  </a:lnTo>
-                </a:path>
-                <a:path w="24000" h="24000" fill="none">
-                  <a:moveTo>
-                    <a:pt x="16000" y="17000"/>
-                  </a:moveTo>
-                  <a:lnTo>
-                    <a:pt x="8000" y="17000"/>
-                  </a:lnTo>
-                </a:path>
-              </a:pathLst>
-            </a:custGeom>
-            <a:noFill/>
-            <a:ln w="22083" cap="rnd">
-              <a:solidFill>
-                <a:srgbClr val="FFFFFF"/>
-              </a:solidFill>
-              <a:round/>
-            </a:ln>
-          </p:spPr>
-          <p:txBody>
-            <a:bodyPr rtlCol="0" anchor="ctr"/>
-            <a:lstStyle/>
-            <a:p>
-              <a:pPr algn="ctr"/>
-            </a:p>
-          </p:txBody>
-        </p:sp>
-        <p:sp>
-          <p:nvSpPr>
-            <p:cNvPr id="547" name="BrandDeck Diagram Text 1"/>
-            <p:cNvSpPr txBox="1"/>
-            <p:nvPr/>
-          </p:nvSpPr>
-          <p:spPr>
-            <a:xfrm>
-              <a:off x="1501685" y="3044627"/>
-              <a:ext cx="4275560" cy="1019556"/>
-            </a:xfrm>
-            <a:prstGeom prst="rect">
-              <a:avLst/>
-            </a:prstGeom>
-            <a:noFill/>
-          </p:spPr>
-          <p:txBody>
-            <a:bodyPr wrap="square" anchor="ctr" lIns="36576" tIns="18288" rIns="36576" bIns="18288">
-              <a:noAutofit/>
-            </a:bodyPr>
-            <a:lstStyle/>
-            <a:p>
-              <a:pPr algn="l">
-                <a:lnSpc>
-                  <a:spcPct val="110000"/>
-                </a:lnSpc>
-              </a:pPr>
-              <a:r>
-                <a:rPr sz="1800" b="0">
-                  <a:solidFill>
-                    <a:srgbClr val="000000"/>
-                  </a:solidFill>
-                  <a:latin typeface="Play"/>
-                </a:rPr>
-                <a:t>ИИ-помощник отвечает на вопросы по регламентам и инструкциям.</a:t>
-              </a:r>
-            </a:p>
-          </p:txBody>
-        </p:sp>
-        <p:sp>
-          <p:nvSpPr>
-            <p:cNvPr id="548" name="BrandDeck Diagram Card 2"/>
-            <p:cNvSpPr/>
-            <p:nvPr/>
-          </p:nvSpPr>
-          <p:spPr>
-            <a:xfrm>
-              <a:off x="6213819" y="2912953"/>
-              <a:ext cx="5319368" cy="1282903"/>
-            </a:xfrm>
-            <a:prstGeom prst="roundRect">
-              <a:avLst>
-                <a:gd name="adj" fmla="val 8000"/>
-              </a:avLst>
-            </a:prstGeom>
-            <a:solidFill>
-              <a:srgbClr val="EDF5FF"/>
-            </a:solidFill>
-            <a:ln>
-              <a:noFill/>
-            </a:ln>
-          </p:spPr>
-          <p:txBody>
-            <a:bodyPr rtlCol="0" anchor="ctr"/>
-            <a:lstStyle/>
-            <a:p>
-              <a:pPr algn="ctr"/>
-            </a:p>
-          </p:txBody>
-        </p:sp>
-        <p:sp>
-          <p:nvSpPr>
-            <p:cNvPr id="549" name="BrandDeck Diagram Icon 2 Badge"/>
-            <p:cNvSpPr/>
-            <p:nvPr/>
-          </p:nvSpPr>
-          <p:spPr>
-            <a:xfrm>
-              <a:off x="6433275" y="3317794"/>
-              <a:ext cx="473222" cy="473222"/>
-            </a:xfrm>
-            <a:prstGeom prst="ellipse">
-              <a:avLst/>
-            </a:prstGeom>
-            <a:solidFill>
-              <a:srgbClr val="006DEB"/>
-            </a:solidFill>
-            <a:ln>
-              <a:noFill/>
-            </a:ln>
-          </p:spPr>
-          <p:txBody>
-            <a:bodyPr rtlCol="0" anchor="ctr"/>
-            <a:lstStyle/>
-            <a:p>
-              <a:pPr algn="ctr"/>
-            </a:p>
-          </p:txBody>
-        </p:sp>
-        <p:sp>
-          <p:nvSpPr>
-            <p:cNvPr id="550" name="BrandDeck Icon link"/>
-            <p:cNvSpPr/>
-            <p:nvPr/>
-          </p:nvSpPr>
-          <p:spPr>
-            <a:xfrm>
-              <a:off x="6537384" y="3421903"/>
-              <a:ext cx="265004" cy="265004"/>
-            </a:xfrm>
-            <a:custGeom>
-              <a:avLst/>
-              <a:gdLst/>
-              <a:ahLst/>
-              <a:cxnLst/>
-              <a:rect l="l" t="t" r="r" b="b"/>
-              <a:pathLst>
-                <a:path w="24000" h="24000" fill="none">
-                  <a:moveTo>
-                    <a:pt x="10000" y="13000"/>
-                  </a:moveTo>
-                  <a:cubicBezTo>
-                    <a:pt x="10869" y="14162"/>
-                    <a:pt x="12200" y="14889"/>
-                    <a:pt x="13647" y="14992"/>
-                  </a:cubicBezTo>
-                  <a:cubicBezTo>
-                    <a:pt x="15094" y="15096"/>
-                    <a:pt x="16514" y="14566"/>
-                    <a:pt x="17540" y="13540"/>
-                  </a:cubicBezTo>
-                  <a:lnTo>
-                    <a:pt x="20540" y="10540"/>
-                  </a:lnTo>
-                  <a:cubicBezTo>
-                    <a:pt x="22435" y="8578"/>
-                    <a:pt x="22408" y="5460"/>
-                    <a:pt x="20479" y="3531"/>
-                  </a:cubicBezTo>
-                  <a:cubicBezTo>
-                    <a:pt x="18550" y="1602"/>
-                    <a:pt x="15432" y="1575"/>
-                    <a:pt x="13470" y="3470"/>
-                  </a:cubicBezTo>
-                  <a:lnTo>
-                    <a:pt x="11750" y="5180"/>
-                  </a:lnTo>
-                </a:path>
-                <a:path w="24000" h="24000" fill="none">
-                  <a:moveTo>
-                    <a:pt x="14000" y="11000"/>
-                  </a:moveTo>
-                  <a:cubicBezTo>
-                    <a:pt x="13131" y="9838"/>
-                    <a:pt x="11800" y="9111"/>
-                    <a:pt x="10353" y="9008"/>
-                  </a:cubicBezTo>
-                  <a:cubicBezTo>
-                    <a:pt x="8906" y="8904"/>
-                    <a:pt x="7486" y="9434"/>
-                    <a:pt x="6460" y="10460"/>
-                  </a:cubicBezTo>
-                  <a:lnTo>
-                    <a:pt x="3460" y="13460"/>
-                  </a:lnTo>
-                  <a:cubicBezTo>
-                    <a:pt x="1565" y="15422"/>
-                    <a:pt x="1592" y="18540"/>
-                    <a:pt x="3521" y="20469"/>
-                  </a:cubicBezTo>
-                  <a:cubicBezTo>
-                    <a:pt x="5450" y="22398"/>
-                    <a:pt x="8568" y="22425"/>
-                    <a:pt x="10530" y="20530"/>
-                  </a:cubicBezTo>
-                  <a:lnTo>
-                    <a:pt x="12240" y="18820"/>
-                  </a:lnTo>
-                </a:path>
-              </a:pathLst>
-            </a:custGeom>
-            <a:noFill/>
-            <a:ln w="22083" cap="rnd">
-              <a:solidFill>
-                <a:srgbClr val="FFFFFF"/>
-              </a:solidFill>
-              <a:round/>
-            </a:ln>
-          </p:spPr>
-          <p:txBody>
-            <a:bodyPr rtlCol="0" anchor="ctr"/>
-            <a:lstStyle/>
-            <a:p>
-              <a:pPr algn="ctr"/>
-            </a:p>
-          </p:txBody>
-        </p:sp>
-        <p:sp>
-          <p:nvSpPr>
-            <p:cNvPr id="551" name="BrandDeck Diagram Text 2"/>
-            <p:cNvSpPr txBox="1"/>
-            <p:nvPr/>
-          </p:nvSpPr>
-          <p:spPr>
-            <a:xfrm>
-              <a:off x="7038171" y="3044627"/>
-              <a:ext cx="4275560" cy="1019556"/>
-            </a:xfrm>
-            <a:prstGeom prst="rect">
-              <a:avLst/>
-            </a:prstGeom>
-            <a:noFill/>
-          </p:spPr>
-          <p:txBody>
-            <a:bodyPr wrap="square" anchor="ctr" lIns="36576" tIns="18288" rIns="36576" bIns="18288">
-              <a:noAutofit/>
-            </a:bodyPr>
-            <a:lstStyle/>
-            <a:p>
-              <a:pPr algn="l">
-                <a:lnSpc>
-                  <a:spcPct val="110000"/>
-                </a:lnSpc>
-              </a:pPr>
-              <a:r>
-                <a:rPr sz="1800" b="0">
-                  <a:solidFill>
-                    <a:srgbClr val="000000"/>
-                  </a:solidFill>
-                  <a:latin typeface="Play"/>
-                </a:rPr>
-                <a:t>Система сразу предоставляет ссылку на документ-источник.</a:t>
-              </a:r>
-            </a:p>
-          </p:txBody>
-        </p:sp>
-        <p:sp>
-          <p:nvSpPr>
-            <p:cNvPr id="552" name="BrandDeck Diagram Card 3"/>
-            <p:cNvSpPr/>
-            <p:nvPr/>
-          </p:nvSpPr>
-          <p:spPr>
-            <a:xfrm>
-              <a:off x="677334" y="4412974"/>
-              <a:ext cx="5319368" cy="1282903"/>
-            </a:xfrm>
-            <a:prstGeom prst="roundRect">
-              <a:avLst>
-                <a:gd name="adj" fmla="val 8000"/>
-              </a:avLst>
-            </a:prstGeom>
-            <a:solidFill>
-              <a:srgbClr val="EDF5FF"/>
-            </a:solidFill>
-            <a:ln>
-              <a:noFill/>
-            </a:ln>
-          </p:spPr>
-          <p:txBody>
-            <a:bodyPr rtlCol="0" anchor="ctr"/>
-            <a:lstStyle/>
-            <a:p>
-              <a:pPr algn="ctr"/>
-            </a:p>
-          </p:txBody>
-        </p:sp>
-        <p:sp>
-          <p:nvSpPr>
-            <p:cNvPr id="553" name="BrandDeck Diagram Icon 3 Badge"/>
-            <p:cNvSpPr/>
-            <p:nvPr/>
-          </p:nvSpPr>
-          <p:spPr>
-            <a:xfrm>
-              <a:off x="896790" y="4817814"/>
-              <a:ext cx="473222" cy="473222"/>
-            </a:xfrm>
-            <a:prstGeom prst="ellipse">
-              <a:avLst/>
-            </a:prstGeom>
-            <a:solidFill>
-              <a:srgbClr val="006DEB"/>
-            </a:solidFill>
-            <a:ln>
-              <a:noFill/>
-            </a:ln>
-          </p:spPr>
-          <p:txBody>
-            <a:bodyPr rtlCol="0" anchor="ctr"/>
-            <a:lstStyle/>
-            <a:p>
-              <a:pPr algn="ctr"/>
-            </a:p>
-          </p:txBody>
-        </p:sp>
-        <p:sp>
-          <p:nvSpPr>
-            <p:cNvPr id="554" name="BrandDeck Icon building"/>
-            <p:cNvSpPr/>
-            <p:nvPr/>
-          </p:nvSpPr>
-          <p:spPr>
-            <a:xfrm>
-              <a:off x="1000898" y="4921923"/>
-              <a:ext cx="265004" cy="265004"/>
-            </a:xfrm>
-            <a:custGeom>
-              <a:avLst/>
-              <a:gdLst/>
-              <a:ahLst/>
-              <a:cxnLst/>
-              <a:rect l="l" t="t" r="r" b="b"/>
-              <a:pathLst>
-                <a:path w="24000" h="24000" fill="none">
-                  <a:moveTo>
-                    <a:pt x="6000" y="2000"/>
-                  </a:moveTo>
-                  <a:lnTo>
-                    <a:pt x="18000" y="2000"/>
-                  </a:lnTo>
-                  <a:cubicBezTo>
-                    <a:pt x="19105" y="2000"/>
-                    <a:pt x="20000" y="2895"/>
-                    <a:pt x="20000" y="4000"/>
-                  </a:cubicBezTo>
-                  <a:lnTo>
-                    <a:pt x="20000" y="20000"/>
-                  </a:lnTo>
-                  <a:cubicBezTo>
-                    <a:pt x="20000" y="21105"/>
-                    <a:pt x="19105" y="22000"/>
-                    <a:pt x="18000" y="22000"/>
-                  </a:cubicBezTo>
-                  <a:lnTo>
-                    <a:pt x="6000" y="22000"/>
-                  </a:lnTo>
-                  <a:cubicBezTo>
-                    <a:pt x="4895" y="22000"/>
-                    <a:pt x="4000" y="21105"/>
-                    <a:pt x="4000" y="20000"/>
-                  </a:cubicBezTo>
-                  <a:lnTo>
-                    <a:pt x="4000" y="4000"/>
-                  </a:lnTo>
-                  <a:cubicBezTo>
-                    <a:pt x="4000" y="2895"/>
-                    <a:pt x="4895" y="2000"/>
-                    <a:pt x="6000" y="2000"/>
-                  </a:cubicBezTo>
-                  <a:close/>
-                </a:path>
-                <a:path w="24000" h="24000" fill="none">
-                  <a:moveTo>
-                    <a:pt x="9000" y="22000"/>
-                  </a:moveTo>
-                  <a:lnTo>
-                    <a:pt x="9000" y="18000"/>
-                  </a:lnTo>
-                  <a:lnTo>
-                    <a:pt x="15000" y="18000"/>
-                  </a:lnTo>
-                  <a:lnTo>
-                    <a:pt x="15000" y="22000"/>
-                  </a:lnTo>
-                </a:path>
-                <a:path w="24000" h="24000" fill="none">
-                  <a:moveTo>
-                    <a:pt x="8000" y="6000"/>
-                  </a:moveTo>
-                  <a:lnTo>
-                    <a:pt x="8010" y="6000"/>
-                  </a:lnTo>
-                </a:path>
-                <a:path w="24000" h="24000" fill="none">
-                  <a:moveTo>
-                    <a:pt x="16000" y="6000"/>
-                  </a:moveTo>
-                  <a:lnTo>
-                    <a:pt x="16010" y="6000"/>
-                  </a:lnTo>
-                </a:path>
-                <a:path w="24000" h="24000" fill="none">
-                  <a:moveTo>
-                    <a:pt x="12000" y="6000"/>
-                  </a:moveTo>
-                  <a:lnTo>
-                    <a:pt x="12010" y="6000"/>
-                  </a:lnTo>
-                </a:path>
-                <a:path w="24000" h="24000" fill="none">
-                  <a:moveTo>
-                    <a:pt x="12000" y="10000"/>
-                  </a:moveTo>
-                  <a:lnTo>
-                    <a:pt x="12010" y="10000"/>
-                  </a:lnTo>
-                </a:path>
-                <a:path w="24000" h="24000" fill="none">
-                  <a:moveTo>
-                    <a:pt x="12000" y="14000"/>
-                  </a:moveTo>
-                  <a:lnTo>
-                    <a:pt x="12010" y="14000"/>
-                  </a:lnTo>
-                </a:path>
-                <a:path w="24000" h="24000" fill="none">
-                  <a:moveTo>
-                    <a:pt x="16000" y="10000"/>
-                  </a:moveTo>
-                  <a:lnTo>
-                    <a:pt x="16010" y="10000"/>
-                  </a:lnTo>
-                </a:path>
-                <a:path w="24000" h="24000" fill="none">
-                  <a:moveTo>
-                    <a:pt x="16000" y="14000"/>
-                  </a:moveTo>
-                  <a:lnTo>
-                    <a:pt x="16010" y="14000"/>
-                  </a:lnTo>
-                </a:path>
-                <a:path w="24000" h="24000" fill="none">
-                  <a:moveTo>
-                    <a:pt x="8000" y="10000"/>
-                  </a:moveTo>
-                  <a:lnTo>
-                    <a:pt x="8010" y="10000"/>
-                  </a:lnTo>
-                </a:path>
-                <a:path w="24000" h="24000" fill="none">
-                  <a:moveTo>
-                    <a:pt x="8000" y="14000"/>
-                  </a:moveTo>
-                  <a:lnTo>
-                    <a:pt x="8010" y="14000"/>
-                  </a:lnTo>
-                </a:path>
-              </a:pathLst>
-            </a:custGeom>
-            <a:noFill/>
-            <a:ln w="22083" cap="rnd">
-              <a:solidFill>
-                <a:srgbClr val="FFFFFF"/>
-              </a:solidFill>
-              <a:round/>
-            </a:ln>
-          </p:spPr>
-          <p:txBody>
-            <a:bodyPr rtlCol="0" anchor="ctr"/>
-            <a:lstStyle/>
-            <a:p>
-              <a:pPr algn="ctr"/>
-            </a:p>
-          </p:txBody>
-        </p:sp>
-        <p:sp>
-          <p:nvSpPr>
-            <p:cNvPr id="555" name="BrandDeck Diagram Text 3"/>
-            <p:cNvSpPr txBox="1"/>
-            <p:nvPr/>
-          </p:nvSpPr>
-          <p:spPr>
-            <a:xfrm>
-              <a:off x="1501685" y="4544647"/>
-              <a:ext cx="4275560" cy="1019556"/>
-            </a:xfrm>
-            <a:prstGeom prst="rect">
-              <a:avLst/>
-            </a:prstGeom>
-            <a:noFill/>
-          </p:spPr>
-          <p:txBody>
-            <a:bodyPr wrap="square" anchor="ctr" lIns="36576" tIns="18288" rIns="36576" bIns="18288">
-              <a:noAutofit/>
-            </a:bodyPr>
-            <a:lstStyle/>
-            <a:p>
-              <a:pPr algn="l">
-                <a:lnSpc>
-                  <a:spcPct val="110000"/>
-                </a:lnSpc>
-              </a:pPr>
-              <a:r>
-                <a:rPr sz="1800" b="0">
-                  <a:solidFill>
-                    <a:srgbClr val="000000"/>
-                  </a:solidFill>
-                  <a:latin typeface="Play"/>
-                </a:rPr>
-                <a:t>Ответ формируется на основе внутренних корпоративных документов.</a:t>
-              </a:r>
-            </a:p>
-          </p:txBody>
-        </p:sp>
-      </p:grpSp>
-    </p:spTree>
-  </p:cSld>
-  <p:clrMapOvr>
-    <a:masterClrMapping/>
-  </p:clrMapOvr>
-</p:sld>
-</file>
-
-<file path=ppt/slides/slide5.xml><?xml version="1.0" encoding="utf-8"?>
-<p:sld xmlns:a="http://schemas.openxmlformats.org/drawingml/2006/main" xmlns:p="http://schemas.openxmlformats.org/presentationml/2006/main" xmlns:r="http://schemas.openxmlformats.org/officeDocument/2006/relationships">
-  <p:cSld>
-    <p:spTree>
-      <p:nvGrpSpPr>
-        <p:cNvPr id="1" name=""/>
-        <p:cNvGrpSpPr/>
-        <p:nvPr/>
-      </p:nvGrpSpPr>
-      <p:grpSpPr/>
-      <p:sp>
-        <p:nvSpPr>
-          <p:cNvPr id="2" name="BrandDeck Text 2"/>
-          <p:cNvSpPr>
-            <a:spLocks noGrp="1"/>
-          </p:cNvSpPr>
-          <p:nvPr>
-            <p:ph type="title"/>
-          </p:nvPr>
-        </p:nvSpPr>
-        <p:spPr>
-          <a:xfrm>
-            <a:off x="658813" y="692150"/>
-            <a:ext cx="5254307" cy="1380285"/>
-          </a:xfrm>
-        </p:spPr>
-        <p:txBody>
-          <a:bodyPr wrap="square" anchor="t">
-            <a:normAutofit/>
-          </a:bodyPr>
-          <a:lstStyle/>
-          <a:p>
-            <a:pPr algn="l">
-              <a:lnSpc>
-                <a:spcPct val="115000"/>
-              </a:lnSpc>
-              <a:spcBef>
-                <a:spcPts val="0"/>
-              </a:spcBef>
-              <a:spcAft>
-                <a:spcPts val="359"/>
-              </a:spcAft>
-            </a:pPr>
-            <a:r>
-              <a:rPr sz="2400">
-                <a:solidFill>
-                  <a:srgbClr val="000000"/>
-                </a:solidFill>
-              </a:rPr>
-              <a:t>Система работает внутри контура компании, не выводя документы наружу</a:t>
-            </a:r>
-          </a:p>
-        </p:txBody>
-      </p:sp>
-      <p:sp>
-        <p:nvSpPr>
-          <p:cNvPr id="3" name="BrandDeck Text 3"/>
-          <p:cNvSpPr>
-            <a:spLocks noGrp="1"/>
-          </p:cNvSpPr>
-          <p:nvPr>
-            <p:ph type="body" idx="1"/>
-          </p:nvPr>
-        </p:nvSpPr>
-        <p:spPr/>
-        <p:txBody>
-          <a:bodyPr wrap="square" anchor="t">
-            <a:normAutofit/>
-          </a:bodyPr>
-          <a:lstStyle/>
-          <a:p>
-            <a:pPr>
-              <a:lnSpc>
-                <a:spcPct val="115000"/>
-              </a:lnSpc>
-              <a:spcBef>
-                <a:spcPts val="0"/>
-              </a:spcBef>
-              <a:spcAft>
-                <a:spcPts val="270"/>
-              </a:spcAft>
-            </a:pPr>
-            <a:r>
-              <a:rPr sz="1800">
-                <a:solidFill>
-                  <a:srgbClr val="000000"/>
-                </a:solidFill>
-              </a:rPr>
-              <a:t>Модель с открытыми весами работает внутри контура компании.</a:t>
-            </a:r>
-          </a:p>
-          <a:p>
-            <a:pPr>
-              <a:lnSpc>
-                <a:spcPct val="115000"/>
-              </a:lnSpc>
-              <a:spcBef>
-                <a:spcPts val="0"/>
-              </a:spcBef>
-              <a:spcAft>
-                <a:spcPts val="270"/>
-              </a:spcAft>
-            </a:pPr>
-            <a:r>
-              <a:rPr sz="1800">
-                <a:solidFill>
-                  <a:srgbClr val="000000"/>
-                </a:solidFill>
-              </a:rPr>
-              <a:t>Документы не покидают периметр и не уходят наружу.</a:t>
-            </a:r>
-          </a:p>
-          <a:p>
-            <a:pPr>
-              <a:lnSpc>
-                <a:spcPct val="115000"/>
-              </a:lnSpc>
-              <a:spcBef>
-                <a:spcPts val="0"/>
-              </a:spcBef>
-              <a:spcAft>
-                <a:spcPts val="270"/>
-              </a:spcAft>
-            </a:pPr>
-            <a:r>
-              <a:rPr sz="1800">
-                <a:solidFill>
-                  <a:srgbClr val="000000"/>
-                </a:solidFill>
-              </a:rPr>
-              <a:t>Обработка запросов происходит локально без передачи данных.</a:t>
-            </a:r>
-          </a:p>
-        </p:txBody>
-      </p:sp>
-      <p:pic>
-        <p:nvPicPr>
-          <p:cNvPr id="4" name="BrandDeck Image" descr="внутренний контур серверная"/>
-          <p:cNvPicPr>
-            <a:picLocks noGrp="1" noChangeAspect="1"/>
-          </p:cNvPicPr>
-          <p:nvPr>
-            <p:ph type="pic" idx="2"/>
-          </p:nvPr>
-        </p:nvPicPr>
-        <p:blipFill>
-          <a:blip r:embed="rId2"/>
-          <a:srcRect l="24987" r="24987"/>
-          <a:stretch>
-            <a:fillRect/>
-          </a:stretch>
-        </p:blipFill>
-        <p:spPr/>
-      </p:pic>
-    </p:spTree>
-  </p:cSld>
-  <p:clrMapOvr>
-    <a:masterClrMapping/>
-  </p:clrMapOvr>
-</p:sld>
-</file>
-
-<file path=ppt/slides/slide6.xml><?xml version="1.0" encoding="utf-8"?>
-<p:sld xmlns:a="http://schemas.openxmlformats.org/drawingml/2006/main" xmlns:p="http://schemas.openxmlformats.org/presentationml/2006/main" xmlns:r="http://schemas.openxmlformats.org/officeDocument/2006/relationships">
-  <p:cSld>
-    <p:bg>
-      <p:bgPr>
-        <a:solidFill>
-          <a:schemeClr val="lt2"/>
-        </a:solidFill>
-      </p:bgPr>
-    </p:bg>
-    <p:spTree>
-      <p:nvGrpSpPr>
-        <p:cNvPr id="1" name=""/>
-        <p:cNvGrpSpPr/>
-        <p:nvPr/>
-      </p:nvGrpSpPr>
-      <p:grpSpPr/>
-      <p:sp>
-        <p:nvSpPr>
-          <p:cNvPr id="276" name="BrandDeck Text 276"/>
-          <p:cNvSpPr txBox="1"/>
-          <p:nvPr>
-            <p:ph type="title"/>
-          </p:nvPr>
-        </p:nvSpPr>
-        <p:spPr>
-          <a:xfrm>
-            <a:off x="677334" y="692150"/>
-            <a:ext cx="10855854" cy="644241"/>
-          </a:xfrm>
-          <a:prstGeom prst="rect">
-            <a:avLst/>
-          </a:prstGeom>
-          <a:noFill/>
-          <a:ln>
-            <a:noFill/>
-          </a:ln>
-        </p:spPr>
-        <p:txBody>
-          <a:bodyPr anchorCtr="0" anchor="t" bIns="0" lIns="0" spcFirstLastPara="1" rIns="0" wrap="square" tIns="0">
-            <a:normAutofit/>
-          </a:bodyPr>
-          <a:lstStyle/>
-          <a:p>
-            <a:pPr indent="0" marL="0" rtl="0" algn="l">
-              <a:lnSpc>
-                <a:spcPct val="115000"/>
-              </a:lnSpc>
-              <a:spcBef>
-                <a:spcPts val="0"/>
-              </a:spcBef>
-              <a:spcAft>
-                <a:spcPts val="270"/>
-              </a:spcAft>
-              <a:buClr>
-                <a:schemeClr val="dk2"/>
-              </a:buClr>
-              <a:buSzPts val="3600"/>
-              <a:buFont typeface="Play"/>
-              <a:buNone/>
-            </a:pPr>
-            <a:r>
-              <a:rPr sz="1800">
-                <a:solidFill>
-                  <a:srgbClr val="000000"/>
-                </a:solidFill>
-              </a:rPr>
-              <a:t>При отсутствии подтвержденного ответа вопрос автоматически уходит специалисту с контекстом</a:t>
-            </a:r>
-            <a:endParaRPr/>
-          </a:p>
-        </p:txBody>
-      </p:sp>
-      <p:grpSp>
-        <p:nvGrpSpPr>
-          <p:cNvPr id="2" name="BrandDeck Diagram process" descr="process: Запрос сотрудника Отправляется в ИИ-помощник; Отсутствие ответа Нет подтверждённого факта в базе; Эскалация Переход к специалисту с контекстом"/>
-          <p:cNvGrpSpPr/>
-          <p:nvPr/>
-        </p:nvGrpSpPr>
-        <p:grpSpPr>
-          <a:xfrm>
-            <a:off x="671512" y="2709023"/>
-            <a:ext cx="10874374" cy="1964944"/>
-            <a:chOff x="671512" y="2709023"/>
-            <a:chExt cx="10874374" cy="1964944"/>
-          </a:xfrm>
-        </p:grpSpPr>
-        <p:sp>
-          <p:nvSpPr>
-            <p:cNvPr id="279" name="BrandDeck Diagram Step 1"/>
-            <p:cNvSpPr/>
-            <p:nvPr/>
-          </p:nvSpPr>
-          <p:spPr>
-            <a:xfrm>
-              <a:off x="671512" y="2709023"/>
-              <a:ext cx="3791822" cy="822960"/>
-            </a:xfrm>
-            <a:prstGeom prst="homePlate">
-              <a:avLst>
-                <a:gd name="adj" fmla="val 36000"/>
-              </a:avLst>
-            </a:prstGeom>
-            <a:solidFill>
-              <a:srgbClr val="006DEB"/>
-            </a:solidFill>
-            <a:ln>
-              <a:noFill/>
-            </a:ln>
-          </p:spPr>
-          <p:txBody>
-            <a:bodyPr rtlCol="0" anchor="ctr" wrap="square" tIns="18288" rIns="351129" bIns="18288">
-              <a:noAutofit/>
-            </a:bodyPr>
-            <a:lstStyle/>
-            <a:p>
-              <a:pPr algn="ctr">
-                <a:lnSpc>
-                  <a:spcPct val="110000"/>
-                </a:lnSpc>
-              </a:pPr>
-              <a:r>
-                <a:rPr sz="1600" b="1">
-                  <a:solidFill>
-                    <a:srgbClr val="FFFFFF"/>
-                  </a:solidFill>
-                  <a:latin typeface="Play"/>
-                </a:rPr>
-                <a:t>01</a:t>
-              </a:r>
-            </a:p>
-          </p:txBody>
-        </p:sp>
-        <p:sp>
-          <p:nvSpPr>
-            <p:cNvPr id="280" name="BrandDeck Diagram Detail Card 1"/>
-            <p:cNvSpPr/>
-            <p:nvPr/>
-          </p:nvSpPr>
-          <p:spPr>
-            <a:xfrm>
-              <a:off x="708088" y="3641711"/>
-              <a:ext cx="3551639" cy="1032256"/>
-            </a:xfrm>
-            <a:prstGeom prst="roundRect">
-              <a:avLst>
-                <a:gd name="adj" fmla="val 12000"/>
-              </a:avLst>
-            </a:prstGeom>
-            <a:solidFill>
-              <a:srgbClr val="EDF5FF"/>
-            </a:solidFill>
-            <a:ln>
-              <a:noFill/>
-            </a:ln>
-          </p:spPr>
-          <p:txBody>
-            <a:bodyPr rtlCol="0" anchor="ctr"/>
-            <a:lstStyle/>
-            <a:p>
-              <a:pPr algn="ctr"/>
-            </a:p>
-          </p:txBody>
-        </p:sp>
-        <p:sp>
-          <p:nvSpPr>
-            <p:cNvPr id="281" name="BrandDeck Diagram Text 1"/>
-            <p:cNvSpPr txBox="1"/>
-            <p:nvPr/>
-          </p:nvSpPr>
-          <p:spPr>
-            <a:xfrm>
-              <a:off x="781240" y="3714863"/>
-              <a:ext cx="3405335" cy="885951"/>
-            </a:xfrm>
-            <a:prstGeom prst="rect">
-              <a:avLst/>
-            </a:prstGeom>
-            <a:noFill/>
-          </p:spPr>
-          <p:txBody>
-            <a:bodyPr wrap="square" anchor="ctr" lIns="36576" tIns="18288" rIns="36576" bIns="18288">
-              <a:noAutofit/>
-            </a:bodyPr>
-            <a:lstStyle/>
-            <a:p>
-              <a:pPr algn="l">
-                <a:lnSpc>
-                  <a:spcPct val="110000"/>
-                </a:lnSpc>
-              </a:pPr>
-              <a:r>
-                <a:rPr sz="1600" b="1">
-                  <a:solidFill>
-                    <a:srgbClr val="000000"/>
-                  </a:solidFill>
-                  <a:latin typeface="Play"/>
-                </a:rPr>
-                <a:t>Запрос сотрудника</a:t>
-              </a:r>
-            </a:p>
-            <a:p>
-              <a:pPr algn="l">
-                <a:lnSpc>
-                  <a:spcPct val="110000"/>
-                </a:lnSpc>
-                <a:spcBef>
-                  <a:spcPts val="400"/>
-                </a:spcBef>
-              </a:pPr>
-              <a:r>
-                <a:rPr sz="1600" b="0">
-                  <a:solidFill>
-                    <a:srgbClr val="000000"/>
-                  </a:solidFill>
-                  <a:latin typeface="Play"/>
-                </a:rPr>
-                <a:t>Отправляется в ИИ-помощник</a:t>
-              </a:r>
-            </a:p>
-          </p:txBody>
-        </p:sp>
-        <p:sp>
-          <p:nvSpPr>
-            <p:cNvPr id="282" name="BrandDeck Diagram Step 2"/>
-            <p:cNvSpPr/>
-            <p:nvPr/>
-          </p:nvSpPr>
-          <p:spPr>
-            <a:xfrm>
-              <a:off x="4212788" y="2709023"/>
-              <a:ext cx="3791822" cy="822960"/>
-            </a:xfrm>
-            <a:prstGeom prst="chevron">
-              <a:avLst>
-                <a:gd name="adj" fmla="val 36000"/>
-              </a:avLst>
-            </a:prstGeom>
-            <a:solidFill>
-              <a:srgbClr val="2683EE"/>
-            </a:solidFill>
-            <a:ln>
-              <a:noFill/>
-            </a:ln>
-          </p:spPr>
-          <p:txBody>
-            <a:bodyPr rtlCol="0" anchor="ctr" wrap="square" lIns="351129" tIns="18288" rIns="351129" bIns="18288">
-              <a:noAutofit/>
-            </a:bodyPr>
-            <a:lstStyle/>
-            <a:p>
-              <a:pPr algn="ctr">
-                <a:lnSpc>
-                  <a:spcPct val="110000"/>
-                </a:lnSpc>
-              </a:pPr>
-              <a:r>
-                <a:rPr sz="1600" b="1">
-                  <a:solidFill>
-                    <a:srgbClr val="000000"/>
-                  </a:solidFill>
-                  <a:latin typeface="Play"/>
-                </a:rPr>
-                <a:t>02</a:t>
-              </a:r>
-            </a:p>
-          </p:txBody>
-        </p:sp>
-        <p:sp>
-          <p:nvSpPr>
-            <p:cNvPr id="283" name="BrandDeck Diagram Detail Card 2"/>
-            <p:cNvSpPr/>
-            <p:nvPr/>
-          </p:nvSpPr>
-          <p:spPr>
-            <a:xfrm>
-              <a:off x="4332879" y="3641711"/>
-              <a:ext cx="3551639" cy="1032256"/>
-            </a:xfrm>
-            <a:prstGeom prst="roundRect">
-              <a:avLst>
-                <a:gd name="adj" fmla="val 12000"/>
-              </a:avLst>
-            </a:prstGeom>
-            <a:solidFill>
-              <a:srgbClr val="EDF5FF"/>
-            </a:solidFill>
-            <a:ln>
-              <a:noFill/>
-            </a:ln>
-          </p:spPr>
-          <p:txBody>
-            <a:bodyPr rtlCol="0" anchor="ctr"/>
-            <a:lstStyle/>
-            <a:p>
-              <a:pPr algn="ctr"/>
-            </a:p>
-          </p:txBody>
-        </p:sp>
-        <p:sp>
-          <p:nvSpPr>
-            <p:cNvPr id="284" name="BrandDeck Diagram Text 2"/>
-            <p:cNvSpPr txBox="1"/>
-            <p:nvPr/>
-          </p:nvSpPr>
-          <p:spPr>
-            <a:xfrm>
-              <a:off x="4406031" y="3714863"/>
-              <a:ext cx="3405335" cy="885951"/>
-            </a:xfrm>
-            <a:prstGeom prst="rect">
-              <a:avLst/>
-            </a:prstGeom>
-            <a:noFill/>
-          </p:spPr>
-          <p:txBody>
-            <a:bodyPr wrap="square" anchor="ctr" lIns="36576" tIns="18288" rIns="36576" bIns="18288">
-              <a:noAutofit/>
-            </a:bodyPr>
-            <a:lstStyle/>
-            <a:p>
-              <a:pPr algn="l">
-                <a:lnSpc>
-                  <a:spcPct val="110000"/>
-                </a:lnSpc>
-              </a:pPr>
-              <a:r>
-                <a:rPr sz="1400" b="1">
-                  <a:solidFill>
-                    <a:srgbClr val="000000"/>
-                  </a:solidFill>
-                  <a:latin typeface="Play"/>
-                </a:rPr>
-                <a:t>Отсутствие ответа</a:t>
-              </a:r>
-            </a:p>
-            <a:p>
-              <a:pPr algn="l">
-                <a:lnSpc>
-                  <a:spcPct val="110000"/>
-                </a:lnSpc>
-                <a:spcBef>
-                  <a:spcPts val="350"/>
-                </a:spcBef>
-              </a:pPr>
-              <a:r>
-                <a:rPr sz="1400" b="0">
-                  <a:solidFill>
-                    <a:srgbClr val="000000"/>
-                  </a:solidFill>
-                  <a:latin typeface="Play"/>
-                </a:rPr>
-                <a:t>Нет подтверждённого факта в базе</a:t>
-              </a:r>
-            </a:p>
-          </p:txBody>
-        </p:sp>
-        <p:sp>
-          <p:nvSpPr>
-            <p:cNvPr id="285" name="BrandDeck Diagram Step 3"/>
-            <p:cNvSpPr/>
-            <p:nvPr/>
-          </p:nvSpPr>
-          <p:spPr>
-            <a:xfrm>
-              <a:off x="7754064" y="2709023"/>
-              <a:ext cx="3791822" cy="822960"/>
-            </a:xfrm>
-            <a:prstGeom prst="chevron">
-              <a:avLst>
-                <a:gd name="adj" fmla="val 36000"/>
-              </a:avLst>
-            </a:prstGeom>
-            <a:solidFill>
-              <a:srgbClr val="4C99F1"/>
-            </a:solidFill>
-            <a:ln>
-              <a:noFill/>
-            </a:ln>
-          </p:spPr>
-          <p:txBody>
-            <a:bodyPr rtlCol="0" anchor="ctr" wrap="square" lIns="351129" tIns="18288" rIns="351129" bIns="18288">
-              <a:noAutofit/>
-            </a:bodyPr>
-            <a:lstStyle/>
-            <a:p>
-              <a:pPr algn="ctr">
-                <a:lnSpc>
-                  <a:spcPct val="110000"/>
-                </a:lnSpc>
-              </a:pPr>
-              <a:r>
-                <a:rPr sz="1600" b="1">
-                  <a:solidFill>
-                    <a:srgbClr val="000000"/>
-                  </a:solidFill>
-                  <a:latin typeface="Play"/>
-                </a:rPr>
-                <a:t>03</a:t>
-              </a:r>
-            </a:p>
-          </p:txBody>
-        </p:sp>
-        <p:sp>
-          <p:nvSpPr>
-            <p:cNvPr id="286" name="BrandDeck Diagram Detail Card 3"/>
-            <p:cNvSpPr/>
-            <p:nvPr/>
-          </p:nvSpPr>
-          <p:spPr>
-            <a:xfrm>
-              <a:off x="7957671" y="3641711"/>
-              <a:ext cx="3551639" cy="1032256"/>
-            </a:xfrm>
-            <a:prstGeom prst="roundRect">
-              <a:avLst>
-                <a:gd name="adj" fmla="val 12000"/>
-              </a:avLst>
-            </a:prstGeom>
-            <a:solidFill>
-              <a:srgbClr val="EDF5FF"/>
-            </a:solidFill>
-            <a:ln>
-              <a:noFill/>
-            </a:ln>
-          </p:spPr>
-          <p:txBody>
-            <a:bodyPr rtlCol="0" anchor="ctr"/>
-            <a:lstStyle/>
-            <a:p>
-              <a:pPr algn="ctr"/>
-            </a:p>
-          </p:txBody>
-        </p:sp>
-        <p:sp>
-          <p:nvSpPr>
-            <p:cNvPr id="287" name="BrandDeck Diagram Text 3"/>
-            <p:cNvSpPr txBox="1"/>
-            <p:nvPr/>
-          </p:nvSpPr>
-          <p:spPr>
-            <a:xfrm>
-              <a:off x="8030823" y="3714863"/>
-              <a:ext cx="3405335" cy="885951"/>
-            </a:xfrm>
-            <a:prstGeom prst="rect">
-              <a:avLst/>
-            </a:prstGeom>
-            <a:noFill/>
-          </p:spPr>
-          <p:txBody>
-            <a:bodyPr wrap="square" anchor="ctr" lIns="36576" tIns="18288" rIns="36576" bIns="18288">
-              <a:noAutofit/>
-            </a:bodyPr>
-            <a:lstStyle/>
-            <a:p>
-              <a:pPr algn="l">
-                <a:lnSpc>
-                  <a:spcPct val="110000"/>
-                </a:lnSpc>
-              </a:pPr>
-              <a:r>
-                <a:rPr sz="1400" b="1">
-                  <a:solidFill>
-                    <a:srgbClr val="000000"/>
-                  </a:solidFill>
-                  <a:latin typeface="Play"/>
-                </a:rPr>
-                <a:t>Эскалация</a:t>
-              </a:r>
-            </a:p>
-            <a:p>
-              <a:pPr algn="l">
-                <a:lnSpc>
-                  <a:spcPct val="110000"/>
-                </a:lnSpc>
-                <a:spcBef>
-                  <a:spcPts val="350"/>
-                </a:spcBef>
-              </a:pPr>
-              <a:r>
-                <a:rPr sz="1400" b="0">
-                  <a:solidFill>
-                    <a:srgbClr val="000000"/>
-                  </a:solidFill>
-                  <a:latin typeface="Play"/>
-                </a:rPr>
-                <a:t>Переход к специалисту с контекстом</a:t>
+                <a:t>2 подразделения</a:t>
               </a:r>
             </a:p>
           </p:txBody>
@@ -12912,7 +12326,7 @@
           </a:ln>
         </p:spPr>
         <p:txBody>
-          <a:bodyPr anchorCtr="0" anchor="t" bIns="0" lIns="0" spcFirstLastPara="1" rIns="0" wrap="square" tIns="0">
+          <a:bodyPr anchorCtr="0" anchor="t" bIns="0" lIns="0" spcFirstLastPara="1" rIns="0" wrap="square" tIns="0" vert="horz">
             <a:normAutofit/>
           </a:bodyPr>
           <a:lstStyle/>
@@ -12940,7 +12354,7 @@
                   <a:srgbClr val="000000"/>
                 </a:solidFill>
               </a:rPr>
-              <a:t>Снижение времени поиска ответа и увеличение доли обращений, закрытых без участия специалиста</a:t>
+              <a:t>Успех пилота измеряется временем поиска ответа и долей обращений, закрытых без специалиста</a:t>
             </a:r>
             <a:endParaRPr/>
           </a:p>
@@ -12948,28 +12362,88 @@
       </p:sp>
       <p:grpSp>
         <p:nvGrpSpPr>
-          <p:cNvPr id="2" name="BrandDeck Diagram pyramid" descr="pyramid: Критерии успеха Снижение времени поиска и рост автозакрытия; Время поиска Метрика времени ответа сотрудника; Доля автозакрытия Процент вопросов без участия специалиста"/>
+          <p:cNvPr id="2" name="BrandDeck Diagram icon_grid" descr="icon_grid: Время поиска ответа измеряется для оценки скорости работы.; Доля обращений, закрытых без специалиста, отслеживается как метрика.; Эти показатели определяют успешность пилотного проекта."/>
           <p:cNvGrpSpPr/>
           <p:nvPr/>
         </p:nvGrpSpPr>
         <p:grpSpPr>
           <a:xfrm>
-            <a:off x="694479" y="2642756"/>
-            <a:ext cx="10838709" cy="3511295"/>
-            <a:chOff x="694479" y="2642756"/>
-            <a:chExt cx="10838709" cy="3511295"/>
+            <a:off x="677334" y="2603500"/>
+            <a:ext cx="10855854" cy="3597275"/>
+            <a:chOff x="677334" y="2603500"/>
+            <a:chExt cx="10855854" cy="3597275"/>
           </a:xfrm>
         </p:grpSpPr>
         <p:sp>
           <p:nvSpPr>
-            <p:cNvPr id="544" name="BrandDeck Diagram Level 1"/>
+            <p:cNvPr id="544" name="BrandDeck Diagram Card 1"/>
             <p:cNvSpPr/>
             <p:nvPr/>
           </p:nvSpPr>
           <p:spPr>
             <a:xfrm>
-              <a:off x="2180379" y="2642756"/>
-              <a:ext cx="1451609" cy="1133856"/>
+              <a:off x="677334" y="2603500"/>
+              <a:ext cx="10855854" cy="1054347"/>
+            </a:xfrm>
+            <a:prstGeom prst="roundRect">
+              <a:avLst>
+                <a:gd name="adj" fmla="val 8000"/>
+              </a:avLst>
+            </a:prstGeom>
+            <a:solidFill>
+              <a:srgbClr val="EDF5FF"/>
+            </a:solidFill>
+            <a:ln>
+              <a:noFill/>
+            </a:ln>
+          </p:spPr>
+          <p:txBody>
+            <a:bodyPr rtlCol="0" anchor="ctr"/>
+            <a:lstStyle/>
+            <a:p>
+              <a:pPr algn="ctr"/>
+            </a:p>
+          </p:txBody>
+        </p:sp>
+        <p:sp>
+          <p:nvSpPr>
+            <p:cNvPr id="545" name="BrandDeck Diagram Icon 1 Badge"/>
+            <p:cNvSpPr/>
+            <p:nvPr/>
+          </p:nvSpPr>
+          <p:spPr>
+            <a:xfrm>
+              <a:off x="896790" y="2947793"/>
+              <a:ext cx="365760" cy="365760"/>
+            </a:xfrm>
+            <a:prstGeom prst="ellipse">
+              <a:avLst/>
+            </a:prstGeom>
+            <a:solidFill>
+              <a:srgbClr val="006DEB"/>
+            </a:solidFill>
+            <a:ln>
+              <a:noFill/>
+            </a:ln>
+          </p:spPr>
+          <p:txBody>
+            <a:bodyPr rtlCol="0" anchor="ctr"/>
+            <a:lstStyle/>
+            <a:p>
+              <a:pPr algn="ctr"/>
+            </a:p>
+          </p:txBody>
+        </p:sp>
+        <p:sp>
+          <p:nvSpPr>
+            <p:cNvPr id="546" name="BrandDeck Icon clock"/>
+            <p:cNvSpPr/>
+            <p:nvPr/>
+          </p:nvSpPr>
+          <p:spPr>
+            <a:xfrm>
+              <a:off x="977257" y="3028260"/>
+              <a:ext cx="204825" cy="204825"/>
             </a:xfrm>
             <a:custGeom>
               <a:avLst/>
@@ -12978,63 +12452,71 @@
               <a:cxnLst/>
               <a:rect l="l" t="t" r="r" b="b"/>
               <a:pathLst>
-                <a:path w="1587" h="1240" stroke="0">
+                <a:path w="24000" h="24000" fill="none">
                   <a:moveTo>
-                    <a:pt x="769" y="0"/>
+                    <a:pt x="22000" y="12000"/>
+                  </a:moveTo>
+                  <a:cubicBezTo>
+                    <a:pt x="22000" y="17523"/>
+                    <a:pt x="17523" y="22000"/>
+                    <a:pt x="12000" y="22000"/>
+                  </a:cubicBezTo>
+                  <a:cubicBezTo>
+                    <a:pt x="6477" y="22000"/>
+                    <a:pt x="2000" y="17523"/>
+                    <a:pt x="2000" y="12000"/>
+                  </a:cubicBezTo>
+                  <a:cubicBezTo>
+                    <a:pt x="2000" y="6477"/>
+                    <a:pt x="6477" y="2000"/>
+                    <a:pt x="12000" y="2000"/>
+                  </a:cubicBezTo>
+                  <a:cubicBezTo>
+                    <a:pt x="17523" y="2000"/>
+                    <a:pt x="22000" y="6477"/>
+                    <a:pt x="22000" y="12000"/>
+                  </a:cubicBezTo>
+                  <a:close/>
+                </a:path>
+                <a:path w="24000" h="24000" fill="none">
+                  <a:moveTo>
+                    <a:pt x="12000" y="6000"/>
                   </a:moveTo>
                   <a:lnTo>
-                    <a:pt x="819" y="0"/>
+                    <a:pt x="12000" y="12000"/>
                   </a:lnTo>
                   <a:lnTo>
-                    <a:pt x="1587" y="1240"/>
+                    <a:pt x="16000" y="14000"/>
                   </a:lnTo>
-                  <a:lnTo>
-                    <a:pt x="0" y="1240"/>
-                  </a:lnTo>
-                  <a:close/>
                 </a:path>
               </a:pathLst>
             </a:custGeom>
-            <a:solidFill>
-              <a:srgbClr val="006DEB"/>
-            </a:solidFill>
-            <a:ln w="0">
-              <a:noFill/>
+            <a:noFill/>
+            <a:ln w="17068" cap="rnd">
+              <a:solidFill>
+                <a:srgbClr val="FFFFFF"/>
+              </a:solidFill>
+              <a:round/>
             </a:ln>
           </p:spPr>
           <p:txBody>
-            <a:bodyPr rtlCol="0" anchor="b" wrap="square" lIns="18288" tIns="0" rIns="18288" bIns="73152">
-              <a:noAutofit/>
-            </a:bodyPr>
+            <a:bodyPr rtlCol="0" anchor="ctr"/>
             <a:lstStyle/>
             <a:p>
-              <a:pPr algn="ctr">
-                <a:lnSpc>
-                  <a:spcPct val="110000"/>
-                </a:lnSpc>
-              </a:pPr>
-              <a:r>
-                <a:rPr sz="1400" b="1">
-                  <a:solidFill>
-                    <a:srgbClr val="FFFFFF"/>
-                  </a:solidFill>
-                  <a:latin typeface="Play"/>
-                </a:rPr>
-                <a:t>01</a:t>
-              </a:r>
+              <a:pPr algn="ctr"/>
             </a:p>
           </p:txBody>
         </p:sp>
         <p:sp>
           <p:nvSpPr>
-            <p:cNvPr id="545" name="BrandDeck Diagram Text 1"/>
+            <p:cNvPr id="547" name="BrandDeck Diagram Text 1"/>
             <p:cNvSpPr txBox="1"/>
             <p:nvPr/>
           </p:nvSpPr>
           <p:spPr>
             <a:xfrm>
-              <a:off x="5409354" y="2642756"/>
-              <a:ext cx="6123834" cy="1133856"/>
+              <a:off x="1394223" y="2735173"/>
+              <a:ext cx="9919508" cy="791000"/>
             </a:xfrm>
             <a:prstGeom prst="rect">
               <a:avLst/>
@@ -13053,46 +12535,87 @@
                 </a:lnSpc>
               </a:pPr>
               <a:r>
-                <a:rPr sz="1600" b="1">
+                <a:rPr sz="1800" b="0">
                   <a:solidFill>
                     <a:srgbClr val="000000"/>
                   </a:solidFill>
                   <a:latin typeface="Play"/>
                 </a:rPr>
-                <a:t>Критерии успеха</a:t>
-              </a:r>
-            </a:p>
-            <a:p>
-              <a:pPr algn="l">
-                <a:lnSpc>
-                  <a:spcPct val="110000"/>
-                </a:lnSpc>
-                <a:spcBef>
-                  <a:spcPts val="400"/>
-                </a:spcBef>
-              </a:pPr>
-              <a:r>
-                <a:rPr sz="1600" b="0">
-                  <a:solidFill>
-                    <a:srgbClr val="000000"/>
-                  </a:solidFill>
-                  <a:latin typeface="Play"/>
-                </a:rPr>
-                <a:t>Снижение времени поиска и рост автозакрытия</a:t>
+                <a:t>Время поиска ответа измеряется для оценки скорости работы.</a:t>
               </a:r>
             </a:p>
           </p:txBody>
         </p:sp>
         <p:sp>
           <p:nvSpPr>
-            <p:cNvPr id="546" name="BrandDeck Diagram Level 2"/>
+            <p:cNvPr id="548" name="BrandDeck Diagram Card 2"/>
             <p:cNvSpPr/>
             <p:nvPr/>
           </p:nvSpPr>
           <p:spPr>
             <a:xfrm>
-              <a:off x="1437429" y="3831476"/>
-              <a:ext cx="2937509" cy="1133855"/>
+              <a:off x="677334" y="3874964"/>
+              <a:ext cx="10855854" cy="1054347"/>
+            </a:xfrm>
+            <a:prstGeom prst="roundRect">
+              <a:avLst>
+                <a:gd name="adj" fmla="val 8000"/>
+              </a:avLst>
+            </a:prstGeom>
+            <a:solidFill>
+              <a:srgbClr val="EDF5FF"/>
+            </a:solidFill>
+            <a:ln>
+              <a:noFill/>
+            </a:ln>
+          </p:spPr>
+          <p:txBody>
+            <a:bodyPr rtlCol="0" anchor="ctr"/>
+            <a:lstStyle/>
+            <a:p>
+              <a:pPr algn="ctr"/>
+            </a:p>
+          </p:txBody>
+        </p:sp>
+        <p:sp>
+          <p:nvSpPr>
+            <p:cNvPr id="549" name="BrandDeck Diagram Icon 2 Badge"/>
+            <p:cNvSpPr/>
+            <p:nvPr/>
+          </p:nvSpPr>
+          <p:spPr>
+            <a:xfrm>
+              <a:off x="896790" y="4219258"/>
+              <a:ext cx="365760" cy="365760"/>
+            </a:xfrm>
+            <a:prstGeom prst="ellipse">
+              <a:avLst/>
+            </a:prstGeom>
+            <a:solidFill>
+              <a:srgbClr val="006DEB"/>
+            </a:solidFill>
+            <a:ln>
+              <a:noFill/>
+            </a:ln>
+          </p:spPr>
+          <p:txBody>
+            <a:bodyPr rtlCol="0" anchor="ctr"/>
+            <a:lstStyle/>
+            <a:p>
+              <a:pPr algn="ctr"/>
+            </a:p>
+          </p:txBody>
+        </p:sp>
+        <p:sp>
+          <p:nvSpPr>
+            <p:cNvPr id="550" name="BrandDeck Icon user"/>
+            <p:cNvSpPr/>
+            <p:nvPr/>
+          </p:nvSpPr>
+          <p:spPr>
+            <a:xfrm>
+              <a:off x="977257" y="4299725"/>
+              <a:ext cx="204825" cy="204825"/>
             </a:xfrm>
             <a:custGeom>
               <a:avLst/>
@@ -13101,63 +12624,84 @@
               <a:cxnLst/>
               <a:rect l="l" t="t" r="r" b="b"/>
               <a:pathLst>
-                <a:path w="3212" h="1240" stroke="0">
+                <a:path w="24000" h="24000" fill="none">
                   <a:moveTo>
-                    <a:pt x="775" y="0"/>
+                    <a:pt x="19000" y="21000"/>
                   </a:moveTo>
                   <a:lnTo>
-                    <a:pt x="2438" y="0"/>
+                    <a:pt x="19000" y="19000"/>
                   </a:lnTo>
+                  <a:cubicBezTo>
+                    <a:pt x="19000" y="16791"/>
+                    <a:pt x="17209" y="15000"/>
+                    <a:pt x="15000" y="15000"/>
+                  </a:cubicBezTo>
                   <a:lnTo>
-                    <a:pt x="3212" y="1240"/>
+                    <a:pt x="9000" y="15000"/>
                   </a:lnTo>
+                  <a:cubicBezTo>
+                    <a:pt x="6791" y="15000"/>
+                    <a:pt x="5000" y="16791"/>
+                    <a:pt x="5000" y="19000"/>
+                  </a:cubicBezTo>
                   <a:lnTo>
-                    <a:pt x="0" y="1240"/>
+                    <a:pt x="5000" y="21000"/>
                   </a:lnTo>
+                </a:path>
+                <a:path w="24000" h="24000" fill="none">
+                  <a:moveTo>
+                    <a:pt x="16000" y="7000"/>
+                  </a:moveTo>
+                  <a:cubicBezTo>
+                    <a:pt x="16000" y="9209"/>
+                    <a:pt x="14209" y="11000"/>
+                    <a:pt x="12000" y="11000"/>
+                  </a:cubicBezTo>
+                  <a:cubicBezTo>
+                    <a:pt x="9791" y="11000"/>
+                    <a:pt x="8000" y="9209"/>
+                    <a:pt x="8000" y="7000"/>
+                  </a:cubicBezTo>
+                  <a:cubicBezTo>
+                    <a:pt x="8000" y="4791"/>
+                    <a:pt x="9791" y="3000"/>
+                    <a:pt x="12000" y="3000"/>
+                  </a:cubicBezTo>
+                  <a:cubicBezTo>
+                    <a:pt x="14209" y="3000"/>
+                    <a:pt x="16000" y="4791"/>
+                    <a:pt x="16000" y="7000"/>
+                  </a:cubicBezTo>
                   <a:close/>
                 </a:path>
               </a:pathLst>
             </a:custGeom>
-            <a:solidFill>
-              <a:srgbClr val="4092F0"/>
-            </a:solidFill>
-            <a:ln w="0">
-              <a:noFill/>
+            <a:noFill/>
+            <a:ln w="17068" cap="rnd">
+              <a:solidFill>
+                <a:srgbClr val="FFFFFF"/>
+              </a:solidFill>
+              <a:round/>
             </a:ln>
           </p:spPr>
           <p:txBody>
-            <a:bodyPr rtlCol="0" anchor="ctr" wrap="square" lIns="18288" tIns="0" rIns="18288" bIns="0">
-              <a:noAutofit/>
-            </a:bodyPr>
+            <a:bodyPr rtlCol="0" anchor="ctr"/>
             <a:lstStyle/>
             <a:p>
-              <a:pPr algn="ctr">
-                <a:lnSpc>
-                  <a:spcPct val="110000"/>
-                </a:lnSpc>
-              </a:pPr>
-              <a:r>
-                <a:rPr sz="1400" b="1">
-                  <a:solidFill>
-                    <a:srgbClr val="000000"/>
-                  </a:solidFill>
-                  <a:latin typeface="Play"/>
-                </a:rPr>
-                <a:t>02</a:t>
-              </a:r>
+              <a:pPr algn="ctr"/>
             </a:p>
           </p:txBody>
         </p:sp>
         <p:sp>
           <p:nvSpPr>
-            <p:cNvPr id="547" name="BrandDeck Diagram Text 2"/>
+            <p:cNvPr id="551" name="BrandDeck Diagram Text 2"/>
             <p:cNvSpPr txBox="1"/>
             <p:nvPr/>
           </p:nvSpPr>
           <p:spPr>
             <a:xfrm>
-              <a:off x="5409354" y="3831476"/>
-              <a:ext cx="6123834" cy="1133855"/>
+              <a:off x="1394223" y="4006637"/>
+              <a:ext cx="9919508" cy="791000"/>
             </a:xfrm>
             <a:prstGeom prst="rect">
               <a:avLst/>
@@ -13176,46 +12720,87 @@
                 </a:lnSpc>
               </a:pPr>
               <a:r>
-                <a:rPr sz="1600" b="1">
+                <a:rPr sz="1800" b="0">
                   <a:solidFill>
                     <a:srgbClr val="000000"/>
                   </a:solidFill>
                   <a:latin typeface="Play"/>
                 </a:rPr>
-                <a:t>Время поиска</a:t>
-              </a:r>
-            </a:p>
-            <a:p>
-              <a:pPr algn="l">
-                <a:lnSpc>
-                  <a:spcPct val="110000"/>
-                </a:lnSpc>
-                <a:spcBef>
-                  <a:spcPts val="400"/>
-                </a:spcBef>
-              </a:pPr>
-              <a:r>
-                <a:rPr sz="1600" b="0">
-                  <a:solidFill>
-                    <a:srgbClr val="000000"/>
-                  </a:solidFill>
-                  <a:latin typeface="Play"/>
-                </a:rPr>
-                <a:t>Метрика времени ответа сотрудника</a:t>
+                <a:t>Доля обращений, закрытых без специалиста, отслеживается как метрика.</a:t>
               </a:r>
             </a:p>
           </p:txBody>
         </p:sp>
         <p:sp>
           <p:nvSpPr>
-            <p:cNvPr id="548" name="BrandDeck Diagram Level 3"/>
+            <p:cNvPr id="552" name="BrandDeck Diagram Card 3"/>
             <p:cNvSpPr/>
             <p:nvPr/>
           </p:nvSpPr>
           <p:spPr>
             <a:xfrm>
-              <a:off x="694479" y="5020196"/>
-              <a:ext cx="4423409" cy="1133855"/>
+              <a:off x="677334" y="5146428"/>
+              <a:ext cx="10855854" cy="1054347"/>
+            </a:xfrm>
+            <a:prstGeom prst="roundRect">
+              <a:avLst>
+                <a:gd name="adj" fmla="val 8000"/>
+              </a:avLst>
+            </a:prstGeom>
+            <a:solidFill>
+              <a:srgbClr val="EDF5FF"/>
+            </a:solidFill>
+            <a:ln>
+              <a:noFill/>
+            </a:ln>
+          </p:spPr>
+          <p:txBody>
+            <a:bodyPr rtlCol="0" anchor="ctr"/>
+            <a:lstStyle/>
+            <a:p>
+              <a:pPr algn="ctr"/>
+            </a:p>
+          </p:txBody>
+        </p:sp>
+        <p:sp>
+          <p:nvSpPr>
+            <p:cNvPr id="553" name="BrandDeck Diagram Icon 3 Badge"/>
+            <p:cNvSpPr/>
+            <p:nvPr/>
+          </p:nvSpPr>
+          <p:spPr>
+            <a:xfrm>
+              <a:off x="896790" y="5490722"/>
+              <a:ext cx="365760" cy="365760"/>
+            </a:xfrm>
+            <a:prstGeom prst="ellipse">
+              <a:avLst/>
+            </a:prstGeom>
+            <a:solidFill>
+              <a:srgbClr val="006DEB"/>
+            </a:solidFill>
+            <a:ln>
+              <a:noFill/>
+            </a:ln>
+          </p:spPr>
+          <p:txBody>
+            <a:bodyPr rtlCol="0" anchor="ctr"/>
+            <a:lstStyle/>
+            <a:p>
+              <a:pPr algn="ctr"/>
+            </a:p>
+          </p:txBody>
+        </p:sp>
+        <p:sp>
+          <p:nvSpPr>
+            <p:cNvPr id="554" name="BrandDeck Icon chart-column"/>
+            <p:cNvSpPr/>
+            <p:nvPr/>
+          </p:nvSpPr>
+          <p:spPr>
+            <a:xfrm>
+              <a:off x="977257" y="5571189"/>
+              <a:ext cx="204825" cy="204825"/>
             </a:xfrm>
             <a:custGeom>
               <a:avLst/>
@@ -13224,63 +12809,74 @@
               <a:cxnLst/>
               <a:rect l="l" t="t" r="r" b="b"/>
               <a:pathLst>
-                <a:path w="4837" h="1240" stroke="0">
+                <a:path w="24000" h="24000" fill="none">
                   <a:moveTo>
-                    <a:pt x="775" y="0"/>
+                    <a:pt x="3000" y="3000"/>
                   </a:moveTo>
                   <a:lnTo>
-                    <a:pt x="4062" y="0"/>
+                    <a:pt x="3000" y="19000"/>
                   </a:lnTo>
+                  <a:cubicBezTo>
+                    <a:pt x="3000" y="20105"/>
+                    <a:pt x="3895" y="21000"/>
+                    <a:pt x="5000" y="21000"/>
+                  </a:cubicBezTo>
                   <a:lnTo>
-                    <a:pt x="4837" y="1240"/>
+                    <a:pt x="21000" y="21000"/>
                   </a:lnTo>
+                </a:path>
+                <a:path w="24000" h="24000" fill="none">
+                  <a:moveTo>
+                    <a:pt x="18000" y="17000"/>
+                  </a:moveTo>
                   <a:lnTo>
-                    <a:pt x="0" y="1240"/>
+                    <a:pt x="18000" y="9000"/>
                   </a:lnTo>
-                  <a:close/>
+                </a:path>
+                <a:path w="24000" h="24000" fill="none">
+                  <a:moveTo>
+                    <a:pt x="13000" y="17000"/>
+                  </a:moveTo>
+                  <a:lnTo>
+                    <a:pt x="13000" y="5000"/>
+                  </a:lnTo>
+                </a:path>
+                <a:path w="24000" h="24000" fill="none">
+                  <a:moveTo>
+                    <a:pt x="8000" y="17000"/>
+                  </a:moveTo>
+                  <a:lnTo>
+                    <a:pt x="8000" y="14000"/>
+                  </a:lnTo>
                 </a:path>
               </a:pathLst>
             </a:custGeom>
-            <a:solidFill>
-              <a:srgbClr val="80B6F5"/>
-            </a:solidFill>
-            <a:ln w="0">
-              <a:noFill/>
+            <a:noFill/>
+            <a:ln w="17068" cap="rnd">
+              <a:solidFill>
+                <a:srgbClr val="FFFFFF"/>
+              </a:solidFill>
+              <a:round/>
             </a:ln>
           </p:spPr>
           <p:txBody>
-            <a:bodyPr rtlCol="0" anchor="ctr" wrap="square" lIns="18288" tIns="0" rIns="18288" bIns="0">
-              <a:noAutofit/>
-            </a:bodyPr>
+            <a:bodyPr rtlCol="0" anchor="ctr"/>
             <a:lstStyle/>
             <a:p>
-              <a:pPr algn="ctr">
-                <a:lnSpc>
-                  <a:spcPct val="110000"/>
-                </a:lnSpc>
-              </a:pPr>
-              <a:r>
-                <a:rPr sz="1400" b="1">
-                  <a:solidFill>
-                    <a:srgbClr val="000000"/>
-                  </a:solidFill>
-                  <a:latin typeface="Play"/>
-                </a:rPr>
-                <a:t>03</a:t>
-              </a:r>
+              <a:pPr algn="ctr"/>
             </a:p>
           </p:txBody>
         </p:sp>
         <p:sp>
           <p:nvSpPr>
-            <p:cNvPr id="549" name="BrandDeck Diagram Text 3"/>
+            <p:cNvPr id="555" name="BrandDeck Diagram Text 3"/>
             <p:cNvSpPr txBox="1"/>
             <p:nvPr/>
           </p:nvSpPr>
           <p:spPr>
             <a:xfrm>
-              <a:off x="5409354" y="5020196"/>
-              <a:ext cx="6123834" cy="1133855"/>
+              <a:off x="1394223" y="5278102"/>
+              <a:ext cx="9919508" cy="791000"/>
             </a:xfrm>
             <a:prstGeom prst="rect">
               <a:avLst/>
@@ -13299,32 +12895,13 @@
                 </a:lnSpc>
               </a:pPr>
               <a:r>
-                <a:rPr sz="1600" b="1">
+                <a:rPr sz="1800" b="0">
                   <a:solidFill>
                     <a:srgbClr val="000000"/>
                   </a:solidFill>
                   <a:latin typeface="Play"/>
                 </a:rPr>
-                <a:t>Доля автозакрытия</a:t>
-              </a:r>
-            </a:p>
-            <a:p>
-              <a:pPr algn="l">
-                <a:lnSpc>
-                  <a:spcPct val="110000"/>
-                </a:lnSpc>
-                <a:spcBef>
-                  <a:spcPts val="400"/>
-                </a:spcBef>
-              </a:pPr>
-              <a:r>
-                <a:rPr sz="1600" b="0">
-                  <a:solidFill>
-                    <a:srgbClr val="000000"/>
-                  </a:solidFill>
-                  <a:latin typeface="Play"/>
-                </a:rPr>
-                <a:t>Процент вопросов без участия специалиста</a:t>
+                <a:t>Эти показатели определяют успешность пилотного проекта.</a:t>
               </a:r>
             </a:p>
           </p:txBody>
@@ -13377,7 +12954,7 @@
           </a:ln>
         </p:spPr>
         <p:txBody>
-          <a:bodyPr anchorCtr="0" anchor="t" bIns="0" lIns="0" spcFirstLastPara="1" rIns="0" wrap="square" tIns="0">
+          <a:bodyPr anchorCtr="0" anchor="t" bIns="0" lIns="0" spcFirstLastPara="1" rIns="0" wrap="square" tIns="0" vert="horz">
             <a:normAutofit/>
           </a:bodyPr>
           <a:lstStyle/>
@@ -13390,7 +12967,7 @@
                 <a:spcPts val="0"/>
               </a:spcBef>
               <a:spcAft>
-                <a:spcPts val="300"/>
+                <a:spcPts val="270"/>
               </a:spcAft>
               <a:buClr>
                 <a:schemeClr val="dk2"/>
@@ -13400,12 +12977,12 @@
               <a:buNone/>
             </a:pPr>
             <a:r>
-              <a:rPr sz="2000">
+              <a:rPr sz="1800">
                 <a:solidFill>
                   <a:srgbClr val="000000"/>
                 </a:solidFill>
               </a:rPr>
-              <a:t>В пилоте участвуют 2 подразделения, 150 сотрудников и 6 недель работы</a:t>
+              <a:t>План включает запуск пилота в двух подразделениях и мониторинг метрик в течение 6 недель</a:t>
             </a:r>
             <a:endParaRPr/>
           </a:p>
@@ -13413,62 +12990,157 @@
       </p:sp>
       <p:grpSp>
         <p:nvGrpSpPr>
-          <p:cNvPr id="2" name="BrandDeck Diagram pyramid" descr="pyramid: 6 недель Длительность пилотного запуска; 150 сотрудников Всего участников пилота; 2 подразделения Охват пилотной группы"/>
+          <p:cNvPr id="2" name="BrandDeck Diagram cycle" descr="cycle: Запуск 2 подразделения; Мониторинг 6 недель; Анализ Время поиска и доля закрытых"/>
           <p:cNvGrpSpPr/>
           <p:nvPr/>
         </p:nvGrpSpPr>
         <p:grpSpPr>
           <a:xfrm>
-            <a:off x="688657" y="2127993"/>
-            <a:ext cx="10857230" cy="3511295"/>
-            <a:chOff x="688657" y="2127993"/>
-            <a:chExt cx="10857230" cy="3511295"/>
+            <a:off x="923998" y="1773238"/>
+            <a:ext cx="10621889" cy="4381816"/>
+            <a:chOff x="923998" y="1773238"/>
+            <a:chExt cx="10621889" cy="4381816"/>
           </a:xfrm>
         </p:grpSpPr>
         <p:sp>
           <p:nvSpPr>
-            <p:cNvPr id="279" name="BrandDeck Diagram Level 1"/>
+            <p:cNvPr id="279" name="BrandDeck Diagram Ring"/>
             <p:cNvSpPr/>
             <p:nvPr/>
           </p:nvSpPr>
           <p:spPr>
             <a:xfrm>
-              <a:off x="2174556" y="2127993"/>
-              <a:ext cx="1451610" cy="1133856"/>
+              <a:off x="1000695" y="2102422"/>
+              <a:ext cx="3769169" cy="3769169"/>
             </a:xfrm>
-            <a:custGeom>
+            <a:prstGeom prst="ellipse">
               <a:avLst/>
-              <a:gdLst/>
-              <a:ahLst/>
-              <a:cxnLst/>
-              <a:rect l="l" t="t" r="r" b="b"/>
-              <a:pathLst>
-                <a:path w="1588" h="1240" stroke="0">
-                  <a:moveTo>
-                    <a:pt x="769" y="0"/>
-                  </a:moveTo>
-                  <a:lnTo>
-                    <a:pt x="819" y="0"/>
-                  </a:lnTo>
-                  <a:lnTo>
-                    <a:pt x="1588" y="1240"/>
-                  </a:lnTo>
-                  <a:lnTo>
-                    <a:pt x="0" y="1240"/>
-                  </a:lnTo>
-                  <a:close/>
-                </a:path>
-              </a:pathLst>
-            </a:custGeom>
+            </a:prstGeom>
+            <a:noFill/>
+            <a:ln w="28575">
+              <a:solidFill>
+                <a:srgbClr val="59A7FF"/>
+              </a:solidFill>
+            </a:ln>
+          </p:spPr>
+          <p:txBody>
+            <a:bodyPr rtlCol="0" anchor="ctr"/>
+            <a:lstStyle/>
+            <a:p>
+              <a:pPr algn="ctr"/>
+            </a:p>
+          </p:txBody>
+        </p:sp>
+        <p:sp>
+          <p:nvSpPr>
+            <p:cNvPr id="280" name="BrandDeck Diagram Arrow 1"/>
+            <p:cNvSpPr/>
+            <p:nvPr/>
+          </p:nvSpPr>
+          <p:spPr>
+            <a:xfrm rot="9000000">
+              <a:off x="4416794" y="2944130"/>
+              <a:ext cx="201168" cy="201168"/>
+            </a:xfrm>
+            <a:prstGeom prst="triangle">
+              <a:avLst/>
+            </a:prstGeom>
             <a:solidFill>
-              <a:srgbClr val="006DEB"/>
+              <a:srgbClr val="59A7FF"/>
             </a:solidFill>
-            <a:ln w="0">
+            <a:ln>
               <a:noFill/>
             </a:ln>
           </p:spPr>
           <p:txBody>
-            <a:bodyPr rtlCol="0" anchor="b" wrap="square" lIns="18288" tIns="0" rIns="18288" bIns="73152">
+            <a:bodyPr rtlCol="0" anchor="ctr"/>
+            <a:lstStyle/>
+            <a:p>
+              <a:pPr algn="ctr"/>
+            </a:p>
+          </p:txBody>
+        </p:sp>
+        <p:sp>
+          <p:nvSpPr>
+            <p:cNvPr id="281" name="BrandDeck Diagram Arrow 2"/>
+            <p:cNvSpPr/>
+            <p:nvPr/>
+          </p:nvSpPr>
+          <p:spPr>
+            <a:xfrm rot="16200000">
+              <a:off x="2784696" y="5771007"/>
+              <a:ext cx="201168" cy="201168"/>
+            </a:xfrm>
+            <a:prstGeom prst="triangle">
+              <a:avLst/>
+            </a:prstGeom>
+            <a:solidFill>
+              <a:srgbClr val="59A7FF"/>
+            </a:solidFill>
+            <a:ln>
+              <a:noFill/>
+            </a:ln>
+          </p:spPr>
+          <p:txBody>
+            <a:bodyPr rtlCol="0" anchor="ctr"/>
+            <a:lstStyle/>
+            <a:p>
+              <a:pPr algn="ctr"/>
+            </a:p>
+          </p:txBody>
+        </p:sp>
+        <p:sp>
+          <p:nvSpPr>
+            <p:cNvPr id="282" name="BrandDeck Diagram Arrow 3"/>
+            <p:cNvSpPr/>
+            <p:nvPr/>
+          </p:nvSpPr>
+          <p:spPr>
+            <a:xfrm rot="1800000">
+              <a:off x="1152598" y="2944130"/>
+              <a:ext cx="201168" cy="201168"/>
+            </a:xfrm>
+            <a:prstGeom prst="triangle">
+              <a:avLst/>
+            </a:prstGeom>
+            <a:solidFill>
+              <a:srgbClr val="59A7FF"/>
+            </a:solidFill>
+            <a:ln>
+              <a:noFill/>
+            </a:ln>
+          </p:spPr>
+          <p:txBody>
+            <a:bodyPr rtlCol="0" anchor="ctr"/>
+            <a:lstStyle/>
+            <a:p>
+              <a:pPr algn="ctr"/>
+            </a:p>
+          </p:txBody>
+        </p:sp>
+        <p:sp>
+          <p:nvSpPr>
+            <p:cNvPr id="283" name="BrandDeck Diagram Node 1 Badge"/>
+            <p:cNvSpPr/>
+            <p:nvPr/>
+          </p:nvSpPr>
+          <p:spPr>
+            <a:xfrm>
+              <a:off x="2556096" y="1773238"/>
+              <a:ext cx="658368" cy="658368"/>
+            </a:xfrm>
+            <a:prstGeom prst="ellipse">
+              <a:avLst/>
+            </a:prstGeom>
+            <a:solidFill>
+              <a:srgbClr val="006DEB"/>
+            </a:solidFill>
+            <a:ln>
+              <a:noFill/>
+            </a:ln>
+          </p:spPr>
+          <p:txBody>
+            <a:bodyPr rtlCol="0" anchor="ctr" wrap="square" lIns="0" tIns="0" rIns="0" bIns="0">
               <a:noAutofit/>
             </a:bodyPr>
             <a:lstStyle/>
@@ -13479,7 +13151,7 @@
                 </a:lnSpc>
               </a:pPr>
               <a:r>
-                <a:rPr sz="1400" b="1">
+                <a:rPr sz="1600" b="1">
                   <a:solidFill>
                     <a:srgbClr val="FFFFFF"/>
                   </a:solidFill>
@@ -13492,14 +13164,177 @@
         </p:sp>
         <p:sp>
           <p:nvSpPr>
-            <p:cNvPr id="280" name="BrandDeck Diagram Text 1"/>
+            <p:cNvPr id="284" name="BrandDeck Diagram Node 2 Badge"/>
+            <p:cNvSpPr/>
+            <p:nvPr/>
+          </p:nvSpPr>
+          <p:spPr>
+            <a:xfrm>
+              <a:off x="4188194" y="4600114"/>
+              <a:ext cx="658368" cy="658368"/>
+            </a:xfrm>
+            <a:prstGeom prst="ellipse">
+              <a:avLst/>
+            </a:prstGeom>
+            <a:solidFill>
+              <a:srgbClr val="006DEB"/>
+            </a:solidFill>
+            <a:ln>
+              <a:noFill/>
+            </a:ln>
+          </p:spPr>
+          <p:txBody>
+            <a:bodyPr rtlCol="0" anchor="ctr" wrap="square" lIns="0" tIns="0" rIns="0" bIns="0">
+              <a:noAutofit/>
+            </a:bodyPr>
+            <a:lstStyle/>
+            <a:p>
+              <a:pPr algn="ctr">
+                <a:lnSpc>
+                  <a:spcPct val="110000"/>
+                </a:lnSpc>
+              </a:pPr>
+              <a:r>
+                <a:rPr sz="1600" b="1">
+                  <a:solidFill>
+                    <a:srgbClr val="FFFFFF"/>
+                  </a:solidFill>
+                  <a:latin typeface="Play"/>
+                </a:rPr>
+                <a:t>02</a:t>
+              </a:r>
+            </a:p>
+          </p:txBody>
+        </p:sp>
+        <p:sp>
+          <p:nvSpPr>
+            <p:cNvPr id="285" name="BrandDeck Diagram Node 3 Badge"/>
+            <p:cNvSpPr/>
+            <p:nvPr/>
+          </p:nvSpPr>
+          <p:spPr>
+            <a:xfrm>
+              <a:off x="923998" y="4600114"/>
+              <a:ext cx="658368" cy="658368"/>
+            </a:xfrm>
+            <a:prstGeom prst="ellipse">
+              <a:avLst/>
+            </a:prstGeom>
+            <a:solidFill>
+              <a:srgbClr val="006DEB"/>
+            </a:solidFill>
+            <a:ln>
+              <a:noFill/>
+            </a:ln>
+          </p:spPr>
+          <p:txBody>
+            <a:bodyPr rtlCol="0" anchor="ctr" wrap="square" lIns="0" tIns="0" rIns="0" bIns="0">
+              <a:noAutofit/>
+            </a:bodyPr>
+            <a:lstStyle/>
+            <a:p>
+              <a:pPr algn="ctr">
+                <a:lnSpc>
+                  <a:spcPct val="110000"/>
+                </a:lnSpc>
+              </a:pPr>
+              <a:r>
+                <a:rPr sz="1600" b="1">
+                  <a:solidFill>
+                    <a:srgbClr val="FFFFFF"/>
+                  </a:solidFill>
+                  <a:latin typeface="Play"/>
+                </a:rPr>
+                <a:t>03</a:t>
+              </a:r>
+            </a:p>
+          </p:txBody>
+        </p:sp>
+        <p:sp>
+          <p:nvSpPr>
+            <p:cNvPr id="286" name="BrandDeck Diagram Legend Card 1"/>
+            <p:cNvSpPr/>
+            <p:nvPr/>
+          </p:nvSpPr>
+          <p:spPr>
+            <a:xfrm>
+              <a:off x="5419089" y="1818958"/>
+              <a:ext cx="6126798" cy="1384405"/>
+            </a:xfrm>
+            <a:prstGeom prst="roundRect">
+              <a:avLst>
+                <a:gd name="adj" fmla="val 12000"/>
+              </a:avLst>
+            </a:prstGeom>
+            <a:solidFill>
+              <a:srgbClr val="EDF5FF"/>
+            </a:solidFill>
+            <a:ln>
+              <a:noFill/>
+            </a:ln>
+          </p:spPr>
+          <p:txBody>
+            <a:bodyPr rtlCol="0" anchor="ctr"/>
+            <a:lstStyle/>
+            <a:p>
+              <a:pPr algn="ctr"/>
+            </a:p>
+          </p:txBody>
+        </p:sp>
+        <p:sp>
+          <p:nvSpPr>
+            <p:cNvPr id="287" name="BrandDeck Diagram Legend 1 Badge"/>
+            <p:cNvSpPr/>
+            <p:nvPr/>
+          </p:nvSpPr>
+          <p:spPr>
+            <a:xfrm>
+              <a:off x="5547104" y="2355712"/>
+              <a:ext cx="310896" cy="310896"/>
+            </a:xfrm>
+            <a:prstGeom prst="ellipse">
+              <a:avLst/>
+            </a:prstGeom>
+            <a:solidFill>
+              <a:srgbClr val="006DEB"/>
+            </a:solidFill>
+            <a:ln>
+              <a:noFill/>
+            </a:ln>
+          </p:spPr>
+          <p:txBody>
+            <a:bodyPr rtlCol="0" anchor="ctr" wrap="square" lIns="0" tIns="0" rIns="0" bIns="0">
+              <a:noAutofit/>
+            </a:bodyPr>
+            <a:lstStyle/>
+            <a:p>
+              <a:pPr algn="ctr">
+                <a:lnSpc>
+                  <a:spcPct val="110000"/>
+                </a:lnSpc>
+              </a:pPr>
+              <a:r>
+                <a:rPr sz="1200" b="1">
+                  <a:solidFill>
+                    <a:srgbClr val="FFFFFF"/>
+                  </a:solidFill>
+                  <a:latin typeface="Play"/>
+                </a:rPr>
+                <a:t>01</a:t>
+              </a:r>
+            </a:p>
+          </p:txBody>
+        </p:sp>
+        <p:sp>
+          <p:nvSpPr>
+            <p:cNvPr id="288" name="BrandDeck Diagram Text 1"/>
             <p:cNvSpPr txBox="1"/>
             <p:nvPr/>
           </p:nvSpPr>
           <p:spPr>
             <a:xfrm>
-              <a:off x="5403532" y="2127993"/>
-              <a:ext cx="6142355" cy="1133856"/>
+              <a:off x="6004304" y="1828102"/>
+              <a:ext cx="5413566" cy="1366117"/>
             </a:xfrm>
             <a:prstGeom prst="rect">
               <a:avLst/>
@@ -13518,13 +13353,13 @@
                 </a:lnSpc>
               </a:pPr>
               <a:r>
-                <a:rPr sz="1600" b="1">
+                <a:rPr sz="1400" b="1">
                   <a:solidFill>
                     <a:srgbClr val="000000"/>
                   </a:solidFill>
                   <a:latin typeface="Play"/>
                 </a:rPr>
-                <a:t>6 недель</a:t>
+                <a:t>Запуск</a:t>
               </a:r>
             </a:p>
             <a:p>
@@ -13533,65 +13368,75 @@
                   <a:spcPct val="110000"/>
                 </a:lnSpc>
                 <a:spcBef>
-                  <a:spcPts val="400"/>
+                  <a:spcPts val="350"/>
                 </a:spcBef>
               </a:pPr>
               <a:r>
-                <a:rPr sz="1600" b="0">
+                <a:rPr sz="1400" b="0">
                   <a:solidFill>
                     <a:srgbClr val="000000"/>
                   </a:solidFill>
                   <a:latin typeface="Play"/>
                 </a:rPr>
-                <a:t>Длительность пилотного запуска</a:t>
+                <a:t>2 подразделения</a:t>
               </a:r>
             </a:p>
           </p:txBody>
         </p:sp>
         <p:sp>
           <p:nvSpPr>
-            <p:cNvPr id="281" name="BrandDeck Diagram Level 2"/>
+            <p:cNvPr id="289" name="BrandDeck Diagram Legend Card 2"/>
             <p:cNvSpPr/>
             <p:nvPr/>
           </p:nvSpPr>
           <p:spPr>
             <a:xfrm>
-              <a:off x="1431607" y="3316713"/>
-              <a:ext cx="2937509" cy="1133855"/>
+              <a:off x="5419089" y="3294803"/>
+              <a:ext cx="6126798" cy="1384405"/>
             </a:xfrm>
-            <a:custGeom>
-              <a:avLst/>
-              <a:gdLst/>
-              <a:ahLst/>
-              <a:cxnLst/>
-              <a:rect l="l" t="t" r="r" b="b"/>
-              <a:pathLst>
-                <a:path w="3212" h="1240" stroke="0">
-                  <a:moveTo>
-                    <a:pt x="775" y="0"/>
-                  </a:moveTo>
-                  <a:lnTo>
-                    <a:pt x="2438" y="0"/>
-                  </a:lnTo>
-                  <a:lnTo>
-                    <a:pt x="3212" y="1240"/>
-                  </a:lnTo>
-                  <a:lnTo>
-                    <a:pt x="0" y="1240"/>
-                  </a:lnTo>
-                  <a:close/>
-                </a:path>
-              </a:pathLst>
-            </a:custGeom>
+            <a:prstGeom prst="roundRect">
+              <a:avLst>
+                <a:gd name="adj" fmla="val 12000"/>
+              </a:avLst>
+            </a:prstGeom>
             <a:solidFill>
-              <a:srgbClr val="4092F0"/>
+              <a:srgbClr val="EDF5FF"/>
             </a:solidFill>
-            <a:ln w="0">
+            <a:ln>
               <a:noFill/>
             </a:ln>
           </p:spPr>
           <p:txBody>
-            <a:bodyPr rtlCol="0" anchor="ctr" wrap="square" lIns="18288" tIns="0" rIns="18288" bIns="0">
+            <a:bodyPr rtlCol="0" anchor="ctr"/>
+            <a:lstStyle/>
+            <a:p>
+              <a:pPr algn="ctr"/>
+            </a:p>
+          </p:txBody>
+        </p:sp>
+        <p:sp>
+          <p:nvSpPr>
+            <p:cNvPr id="290" name="BrandDeck Diagram Legend 2 Badge"/>
+            <p:cNvSpPr/>
+            <p:nvPr/>
+          </p:nvSpPr>
+          <p:spPr>
+            <a:xfrm>
+              <a:off x="5547104" y="3831558"/>
+              <a:ext cx="310896" cy="310896"/>
+            </a:xfrm>
+            <a:prstGeom prst="ellipse">
+              <a:avLst/>
+            </a:prstGeom>
+            <a:solidFill>
+              <a:srgbClr val="006DEB"/>
+            </a:solidFill>
+            <a:ln>
+              <a:noFill/>
+            </a:ln>
+          </p:spPr>
+          <p:txBody>
+            <a:bodyPr rtlCol="0" anchor="ctr" wrap="square" lIns="0" tIns="0" rIns="0" bIns="0">
               <a:noAutofit/>
             </a:bodyPr>
             <a:lstStyle/>
@@ -13602,9 +13447,9 @@
                 </a:lnSpc>
               </a:pPr>
               <a:r>
-                <a:rPr sz="1400" b="1">
+                <a:rPr sz="1200" b="1">
                   <a:solidFill>
-                    <a:srgbClr val="000000"/>
+                    <a:srgbClr val="FFFFFF"/>
                   </a:solidFill>
                   <a:latin typeface="Play"/>
                 </a:rPr>
@@ -13615,14 +13460,14 @@
         </p:sp>
         <p:sp>
           <p:nvSpPr>
-            <p:cNvPr id="282" name="BrandDeck Diagram Text 2"/>
+            <p:cNvPr id="291" name="BrandDeck Diagram Text 2"/>
             <p:cNvSpPr txBox="1"/>
             <p:nvPr/>
           </p:nvSpPr>
           <p:spPr>
             <a:xfrm>
-              <a:off x="5403532" y="3316713"/>
-              <a:ext cx="6142355" cy="1133855"/>
+              <a:off x="6004304" y="3303947"/>
+              <a:ext cx="5413566" cy="1366117"/>
             </a:xfrm>
             <a:prstGeom prst="rect">
               <a:avLst/>
@@ -13641,13 +13486,13 @@
                 </a:lnSpc>
               </a:pPr>
               <a:r>
-                <a:rPr sz="1600" b="1">
+                <a:rPr sz="1400" b="1">
                   <a:solidFill>
                     <a:srgbClr val="000000"/>
                   </a:solidFill>
                   <a:latin typeface="Play"/>
                 </a:rPr>
-                <a:t>150 сотрудников</a:t>
+                <a:t>Мониторинг</a:t>
               </a:r>
             </a:p>
             <a:p>
@@ -13656,65 +13501,75 @@
                   <a:spcPct val="110000"/>
                 </a:lnSpc>
                 <a:spcBef>
-                  <a:spcPts val="400"/>
+                  <a:spcPts val="350"/>
                 </a:spcBef>
               </a:pPr>
               <a:r>
-                <a:rPr sz="1600" b="0">
+                <a:rPr sz="1400" b="0">
                   <a:solidFill>
                     <a:srgbClr val="000000"/>
                   </a:solidFill>
                   <a:latin typeface="Play"/>
                 </a:rPr>
-                <a:t>Всего участников пилота</a:t>
+                <a:t>6 недель</a:t>
               </a:r>
             </a:p>
           </p:txBody>
         </p:sp>
         <p:sp>
           <p:nvSpPr>
-            <p:cNvPr id="283" name="BrandDeck Diagram Level 3"/>
+            <p:cNvPr id="292" name="BrandDeck Diagram Legend Card 3"/>
             <p:cNvSpPr/>
             <p:nvPr/>
           </p:nvSpPr>
           <p:spPr>
             <a:xfrm>
-              <a:off x="688657" y="4505433"/>
-              <a:ext cx="4423409" cy="1133855"/>
+              <a:off x="5419089" y="4770649"/>
+              <a:ext cx="6126798" cy="1384405"/>
             </a:xfrm>
-            <a:custGeom>
-              <a:avLst/>
-              <a:gdLst/>
-              <a:ahLst/>
-              <a:cxnLst/>
-              <a:rect l="l" t="t" r="r" b="b"/>
-              <a:pathLst>
-                <a:path w="4837" h="1240" stroke="0">
-                  <a:moveTo>
-                    <a:pt x="775" y="0"/>
-                  </a:moveTo>
-                  <a:lnTo>
-                    <a:pt x="4062" y="0"/>
-                  </a:lnTo>
-                  <a:lnTo>
-                    <a:pt x="4837" y="1240"/>
-                  </a:lnTo>
-                  <a:lnTo>
-                    <a:pt x="0" y="1240"/>
-                  </a:lnTo>
-                  <a:close/>
-                </a:path>
-              </a:pathLst>
-            </a:custGeom>
+            <a:prstGeom prst="roundRect">
+              <a:avLst>
+                <a:gd name="adj" fmla="val 12000"/>
+              </a:avLst>
+            </a:prstGeom>
             <a:solidFill>
-              <a:srgbClr val="80B6F5"/>
+              <a:srgbClr val="EDF5FF"/>
             </a:solidFill>
-            <a:ln w="0">
+            <a:ln>
               <a:noFill/>
             </a:ln>
           </p:spPr>
           <p:txBody>
-            <a:bodyPr rtlCol="0" anchor="ctr" wrap="square" lIns="18288" tIns="0" rIns="18288" bIns="0">
+            <a:bodyPr rtlCol="0" anchor="ctr"/>
+            <a:lstStyle/>
+            <a:p>
+              <a:pPr algn="ctr"/>
+            </a:p>
+          </p:txBody>
+        </p:sp>
+        <p:sp>
+          <p:nvSpPr>
+            <p:cNvPr id="293" name="BrandDeck Diagram Legend 3 Badge"/>
+            <p:cNvSpPr/>
+            <p:nvPr/>
+          </p:nvSpPr>
+          <p:spPr>
+            <a:xfrm>
+              <a:off x="5547104" y="5307404"/>
+              <a:ext cx="310896" cy="310896"/>
+            </a:xfrm>
+            <a:prstGeom prst="ellipse">
+              <a:avLst/>
+            </a:prstGeom>
+            <a:solidFill>
+              <a:srgbClr val="006DEB"/>
+            </a:solidFill>
+            <a:ln>
+              <a:noFill/>
+            </a:ln>
+          </p:spPr>
+          <p:txBody>
+            <a:bodyPr rtlCol="0" anchor="ctr" wrap="square" lIns="0" tIns="0" rIns="0" bIns="0">
               <a:noAutofit/>
             </a:bodyPr>
             <a:lstStyle/>
@@ -13725,9 +13580,9 @@
                 </a:lnSpc>
               </a:pPr>
               <a:r>
-                <a:rPr sz="1400" b="1">
+                <a:rPr sz="1200" b="1">
                   <a:solidFill>
-                    <a:srgbClr val="000000"/>
+                    <a:srgbClr val="FFFFFF"/>
                   </a:solidFill>
                   <a:latin typeface="Play"/>
                 </a:rPr>
@@ -13738,14 +13593,14 @@
         </p:sp>
         <p:sp>
           <p:nvSpPr>
-            <p:cNvPr id="284" name="BrandDeck Diagram Text 3"/>
+            <p:cNvPr id="294" name="BrandDeck Diagram Text 3"/>
             <p:cNvSpPr txBox="1"/>
             <p:nvPr/>
           </p:nvSpPr>
           <p:spPr>
             <a:xfrm>
-              <a:off x="5403532" y="4505433"/>
-              <a:ext cx="6142355" cy="1133855"/>
+              <a:off x="6004304" y="4779793"/>
+              <a:ext cx="5413566" cy="1366117"/>
             </a:xfrm>
             <a:prstGeom prst="rect">
               <a:avLst/>
@@ -13764,13 +13619,13 @@
                 </a:lnSpc>
               </a:pPr>
               <a:r>
-                <a:rPr sz="1600" b="1">
+                <a:rPr sz="1400" b="1">
                   <a:solidFill>
                     <a:srgbClr val="000000"/>
                   </a:solidFill>
                   <a:latin typeface="Play"/>
                 </a:rPr>
-                <a:t>2 подразделения</a:t>
+                <a:t>Анализ</a:t>
               </a:r>
             </a:p>
             <a:p>
@@ -13779,17 +13634,17 @@
                   <a:spcPct val="110000"/>
                 </a:lnSpc>
                 <a:spcBef>
-                  <a:spcPts val="400"/>
+                  <a:spcPts val="350"/>
                 </a:spcBef>
               </a:pPr>
               <a:r>
-                <a:rPr sz="1600" b="0">
+                <a:rPr sz="1400" b="0">
                   <a:solidFill>
                     <a:srgbClr val="000000"/>
                   </a:solidFill>
                   <a:latin typeface="Play"/>
                 </a:rPr>
-                <a:t>Охват пилотной группы</a:t>
+                <a:t>Время поиска и доля закрытых</a:t>
               </a:r>
             </a:p>
           </p:txBody>
@@ -13815,8 +13670,10 @@
       <p:grpSpPr/>
       <p:sp>
         <p:nvSpPr>
-          <p:cNvPr id="1060" name="BrandDeck Text 1060"/>
-          <p:cNvSpPr txBox="1"/>
+          <p:cNvPr id="3" name="BrandDeck Text 3"/>
+          <p:cNvSpPr>
+            <a:spLocks noGrp="1"/>
+          </p:cNvSpPr>
           <p:nvPr>
             <p:ph type="title"/>
           </p:nvPr>
@@ -13826,159 +13683,9 @@
             <a:off x="677334" y="692150"/>
             <a:ext cx="10855854" cy="644241"/>
           </a:xfrm>
-          <a:prstGeom prst="rect">
-            <a:avLst/>
-          </a:prstGeom>
-          <a:noFill/>
-          <a:ln>
-            <a:noFill/>
-          </a:ln>
         </p:spPr>
         <p:txBody>
-          <a:bodyPr anchorCtr="0" anchor="t" bIns="0" lIns="0" spcFirstLastPara="1" rIns="0" wrap="square" tIns="0">
-            <a:normAutofit/>
-          </a:bodyPr>
-          <a:lstStyle/>
-          <a:p>
-            <a:pPr indent="0" marL="0" rtl="0" algn="l">
-              <a:lnSpc>
-                <a:spcPct val="115000"/>
-              </a:lnSpc>
-              <a:spcBef>
-                <a:spcPts val="0"/>
-              </a:spcBef>
-              <a:spcAft>
-                <a:spcPts val="270"/>
-              </a:spcAft>
-              <a:buClr>
-                <a:schemeClr val="accent1"/>
-              </a:buClr>
-              <a:buSzPts val="3600"/>
-              <a:buFont typeface="Play"/>
-              <a:buNone/>
-            </a:pPr>
-            <a:r>
-              <a:rPr sz="1800">
-                <a:solidFill>
-                  <a:srgbClr val="000000"/>
-                </a:solidFill>
-              </a:rPr>
-              <a:t>Измерим время поиска ответа и долю обращений, закрытых без специалиста поддержки</a:t>
-            </a:r>
-            <a:endParaRPr/>
-          </a:p>
-        </p:txBody>
-      </p:sp>
-      <p:pic>
-        <p:nvPicPr>
-          <p:cNvPr id="1072" name="BrandDeck Image" descr="сотрудник специалист поддержки"/>
-          <p:cNvPicPr>
-            <a:picLocks noChangeAspect="1"/>
-          </p:cNvPicPr>
-          <p:nvPr/>
-        </p:nvPicPr>
-        <p:blipFill>
-          <a:blip r:embed="rId3"/>
-          <a:srcRect l="5955" r="5955"/>
-          <a:stretch>
-            <a:fillRect/>
-          </a:stretch>
-        </p:blipFill>
-        <p:spPr>
-          <a:xfrm>
-            <a:off x="671514" y="1773238"/>
-            <a:ext cx="6929992" cy="4427537"/>
-          </a:xfrm>
-          <a:prstGeom prst="rect">
-            <a:avLst/>
-          </a:prstGeom>
-        </p:spPr>
-      </p:pic>
-      <p:sp>
-        <p:nvSpPr>
-          <p:cNvPr id="1069" name="Google Shape;1069;p83"/>
-          <p:cNvSpPr txBox="1"/>
-          <p:nvPr/>
-        </p:nvSpPr>
-        <p:spPr>
-          <a:xfrm>
-            <a:off x="8355728" y="627078"/>
-            <a:ext cx="3409196" cy="3951457"/>
-          </a:xfrm>
-          <a:prstGeom prst="rect">
-            <a:avLst/>
-          </a:prstGeom>
-          <a:noFill/>
-          <a:ln>
-            <a:noFill/>
-          </a:ln>
-        </p:spPr>
-        <p:txBody>
-          <a:bodyPr anchorCtr="0" anchor="t" bIns="36000" lIns="36000" spcFirstLastPara="1" rIns="36000" wrap="square" tIns="36000">
-            <a:normAutofit/>
-          </a:bodyPr>
-          <a:lstStyle/>
-          <a:p>
-            <a:pPr indent="0" lvl="0" marL="0" marR="0" rtl="0" algn="l">
-              <a:lnSpc>
-                <a:spcPct val="110000"/>
-              </a:lnSpc>
-              <a:spcBef>
-                <a:spcPts val="0"/>
-              </a:spcBef>
-              <a:spcAft>
-                <a:spcPts val="0"/>
-              </a:spcAft>
-              <a:buNone/>
-            </a:pPr>
-            <a:endParaRPr/>
-          </a:p>
-        </p:txBody>
-      </p:sp>
-      <p:cxnSp>
-        <p:nvCxnSpPr>
-          <p:cNvPr id="1070" name="Google Shape;1070;p83"/>
-          <p:cNvCxnSpPr/>
-          <p:nvPr/>
-        </p:nvCxnSpPr>
-        <p:spPr>
-          <a:xfrm flipH="1">
-            <a:off x="8111315" y="692150"/>
-            <a:ext cx="9261" cy="5508625"/>
-          </a:xfrm>
-          <a:prstGeom prst="straightConnector1">
-            <a:avLst/>
-          </a:prstGeom>
-          <a:noFill/>
-          <a:ln cap="flat" cmpd="sng" w="9525">
-            <a:solidFill>
-              <a:srgbClr val="F4F8FB"/>
-            </a:solidFill>
-            <a:prstDash val="solid"/>
-            <a:miter lim="8000"/>
-            <a:headEnd len="sm" w="sm" type="none"/>
-            <a:tailEnd len="sm" w="sm" type="none"/>
-          </a:ln>
-        </p:spPr>
-      </p:cxnSp>
-      <p:sp>
-        <p:nvSpPr>
-          <p:cNvPr id="1071" name="BrandDeck Body"/>
-          <p:cNvSpPr txBox="1"/>
-          <p:nvPr/>
-        </p:nvSpPr>
-        <p:spPr>
-          <a:xfrm>
-            <a:off x="8355728" y="1473551"/>
-            <a:ext cx="3409196" cy="3104984"/>
-          </a:xfrm>
-          <a:prstGeom prst="rect">
-            <a:avLst/>
-          </a:prstGeom>
-          <a:noFill/>
-        </p:spPr>
-        <p:txBody>
-          <a:bodyPr wrap="square" anchor="t" lIns="36576" rIns="36576" tIns="18288" bIns="18288">
+          <a:bodyPr vert="horz" wrap="square" anchor="t">
             <a:normAutofit/>
           </a:bodyPr>
           <a:lstStyle/>
@@ -13991,65 +13698,373 @@
                 <a:spcPts val="0"/>
               </a:spcBef>
               <a:spcAft>
-                <a:spcPts val="210"/>
+                <a:spcPts val="240"/>
               </a:spcAft>
             </a:pPr>
             <a:r>
-              <a:rPr sz="1400">
+              <a:rPr sz="1600">
                 <a:solidFill>
                   <a:srgbClr val="000000"/>
                 </a:solidFill>
-                <a:latin typeface="Play"/>
               </a:rPr>
-              <a:t>• Измерим время поиска ответа и долю закрытых обращений.</a:t>
-            </a:r>
-          </a:p>
-          <a:p>
-            <a:pPr algn="l">
-              <a:lnSpc>
-                <a:spcPct val="115000"/>
-              </a:lnSpc>
-              <a:spcBef>
-                <a:spcPts val="0"/>
-              </a:spcBef>
-              <a:spcAft>
-                <a:spcPts val="210"/>
-              </a:spcAft>
-            </a:pPr>
-            <a:r>
-              <a:rPr sz="1400">
-                <a:solidFill>
-                  <a:srgbClr val="000000"/>
-                </a:solidFill>
-                <a:latin typeface="Play"/>
-              </a:rPr>
-              <a:t>• Снижение времени поиска и нагрузки на поддержку — критерии успеха.</a:t>
-            </a:r>
-          </a:p>
-          <a:p>
-            <a:pPr algn="l">
-              <a:lnSpc>
-                <a:spcPct val="115000"/>
-              </a:lnSpc>
-              <a:spcBef>
-                <a:spcPts val="0"/>
-              </a:spcBef>
-              <a:spcAft>
-                <a:spcPts val="210"/>
-              </a:spcAft>
-            </a:pPr>
-            <a:r>
-              <a:rPr sz="1400">
-                <a:solidFill>
-                  <a:srgbClr val="000000"/>
-                </a:solidFill>
-                <a:latin typeface="Play"/>
-              </a:rPr>
-              <a:t>• Результаты пилота определят эффективность ИИ-помощника.</a:t>
+              <a:t>Основные риски связаны с безопасностью данных, которые контролируются работой внутри контура</a:t>
             </a:r>
           </a:p>
         </p:txBody>
       </p:sp>
+      <p:grpSp>
+        <p:nvGrpSpPr>
+          <p:cNvPr id="2" name="BrandDeck Diagram matrix" descr="matrix: Риск Утечка данных наружу; Мера Работа модели внутри контура; Риск Отсутствие контекста; Мера Передача вопроса специалисту"/>
+          <p:cNvGrpSpPr/>
+          <p:nvPr/>
+        </p:nvGrpSpPr>
+        <p:grpSpPr>
+          <a:xfrm>
+            <a:off x="671514" y="1773238"/>
+            <a:ext cx="10843152" cy="4427537"/>
+            <a:chOff x="671514" y="1773238"/>
+            <a:chExt cx="10843152" cy="4427537"/>
+          </a:xfrm>
+        </p:grpSpPr>
+        <p:sp>
+          <p:nvSpPr>
+            <p:cNvPr id="4" name="BrandDeck Diagram Axis Y"/>
+            <p:cNvSpPr txBox="1"/>
+            <p:nvPr/>
+          </p:nvSpPr>
+          <p:spPr>
+            <a:xfrm>
+              <a:off x="671514" y="1773238"/>
+              <a:ext cx="10843152" cy="274320"/>
+            </a:xfrm>
+            <a:prstGeom prst="rect">
+              <a:avLst/>
+            </a:prstGeom>
+            <a:noFill/>
+          </p:spPr>
+          <p:txBody>
+            <a:bodyPr wrap="square" anchor="t" lIns="36576" tIns="18288" rIns="36576" bIns="18288">
+              <a:noAutofit/>
+            </a:bodyPr>
+            <a:lstStyle/>
+            <a:p>
+              <a:pPr algn="l">
+                <a:lnSpc>
+                  <a:spcPct val="110000"/>
+                </a:lnSpc>
+              </a:pPr>
+              <a:r>
+                <a:rPr sz="1200" b="0">
+                  <a:solidFill>
+                    <a:srgbClr val="000000"/>
+                  </a:solidFill>
+                  <a:latin typeface="Play"/>
+                </a:rPr>
+                <a:t>Риск</a:t>
+              </a:r>
+            </a:p>
+          </p:txBody>
+        </p:sp>
+        <p:sp>
+          <p:nvSpPr>
+            <p:cNvPr id="5" name="BrandDeck Diagram Quadrant 1"/>
+            <p:cNvSpPr/>
+            <p:nvPr/>
+          </p:nvSpPr>
+          <p:spPr>
+            <a:xfrm>
+              <a:off x="671514" y="2084134"/>
+              <a:ext cx="5357568" cy="1838864"/>
+            </a:xfrm>
+            <a:prstGeom prst="roundRect">
+              <a:avLst>
+                <a:gd name="adj" fmla="val 6000"/>
+              </a:avLst>
+            </a:prstGeom>
+            <a:solidFill>
+              <a:srgbClr val="006DEB"/>
+            </a:solidFill>
+            <a:ln>
+              <a:noFill/>
+            </a:ln>
+          </p:spPr>
+          <p:txBody>
+            <a:bodyPr rtlCol="0" anchor="t" wrap="square" lIns="164592" tIns="128016" rIns="164592" bIns="109728">
+              <a:noAutofit/>
+            </a:bodyPr>
+            <a:lstStyle/>
+            <a:p>
+              <a:pPr algn="l">
+                <a:lnSpc>
+                  <a:spcPct val="110000"/>
+                </a:lnSpc>
+              </a:pPr>
+              <a:r>
+                <a:rPr sz="1600" b="1">
+                  <a:solidFill>
+                    <a:srgbClr val="FFFFFF"/>
+                  </a:solidFill>
+                  <a:latin typeface="Play"/>
+                </a:rPr>
+                <a:t>Риск</a:t>
+              </a:r>
+            </a:p>
+            <a:p>
+              <a:pPr algn="l">
+                <a:lnSpc>
+                  <a:spcPct val="110000"/>
+                </a:lnSpc>
+                <a:spcBef>
+                  <a:spcPts val="400"/>
+                </a:spcBef>
+              </a:pPr>
+              <a:r>
+                <a:rPr sz="1600" b="0">
+                  <a:solidFill>
+                    <a:srgbClr val="FFFFFF"/>
+                  </a:solidFill>
+                  <a:latin typeface="Play"/>
+                </a:rPr>
+                <a:t>Утечка данных наружу</a:t>
+              </a:r>
+            </a:p>
+          </p:txBody>
+        </p:sp>
+        <p:sp>
+          <p:nvSpPr>
+            <p:cNvPr id="6" name="BrandDeck Diagram Quadrant 2"/>
+            <p:cNvSpPr/>
+            <p:nvPr/>
+          </p:nvSpPr>
+          <p:spPr>
+            <a:xfrm>
+              <a:off x="6157098" y="2084134"/>
+              <a:ext cx="5357568" cy="1838864"/>
+            </a:xfrm>
+            <a:prstGeom prst="roundRect">
+              <a:avLst>
+                <a:gd name="adj" fmla="val 6000"/>
+              </a:avLst>
+            </a:prstGeom>
+            <a:solidFill>
+              <a:srgbClr val="358BEF"/>
+            </a:solidFill>
+            <a:ln>
+              <a:noFill/>
+            </a:ln>
+          </p:spPr>
+          <p:txBody>
+            <a:bodyPr rtlCol="0" anchor="t" wrap="square" lIns="164592" tIns="128016" rIns="164592" bIns="109728">
+              <a:noAutofit/>
+            </a:bodyPr>
+            <a:lstStyle/>
+            <a:p>
+              <a:pPr algn="l">
+                <a:lnSpc>
+                  <a:spcPct val="110000"/>
+                </a:lnSpc>
+              </a:pPr>
+              <a:r>
+                <a:rPr sz="1600" b="1">
+                  <a:solidFill>
+                    <a:srgbClr val="000000"/>
+                  </a:solidFill>
+                  <a:latin typeface="Play"/>
+                </a:rPr>
+                <a:t>Мера</a:t>
+              </a:r>
+            </a:p>
+            <a:p>
+              <a:pPr algn="l">
+                <a:lnSpc>
+                  <a:spcPct val="110000"/>
+                </a:lnSpc>
+                <a:spcBef>
+                  <a:spcPts val="400"/>
+                </a:spcBef>
+              </a:pPr>
+              <a:r>
+                <a:rPr sz="1600" b="0">
+                  <a:solidFill>
+                    <a:srgbClr val="000000"/>
+                  </a:solidFill>
+                  <a:latin typeface="Play"/>
+                </a:rPr>
+                <a:t>Работа модели внутри контура</a:t>
+              </a:r>
+            </a:p>
+          </p:txBody>
+        </p:sp>
+        <p:sp>
+          <p:nvSpPr>
+            <p:cNvPr id="7" name="BrandDeck Diagram Quadrant 3"/>
+            <p:cNvSpPr/>
+            <p:nvPr/>
+          </p:nvSpPr>
+          <p:spPr>
+            <a:xfrm>
+              <a:off x="671514" y="4051014"/>
+              <a:ext cx="5357568" cy="1838864"/>
+            </a:xfrm>
+            <a:prstGeom prst="roundRect">
+              <a:avLst>
+                <a:gd name="adj" fmla="val 6000"/>
+              </a:avLst>
+            </a:prstGeom>
+            <a:solidFill>
+              <a:srgbClr val="69A9F3"/>
+            </a:solidFill>
+            <a:ln>
+              <a:noFill/>
+            </a:ln>
+          </p:spPr>
+          <p:txBody>
+            <a:bodyPr rtlCol="0" anchor="t" wrap="square" lIns="164592" tIns="128016" rIns="164592" bIns="109728">
+              <a:noAutofit/>
+            </a:bodyPr>
+            <a:lstStyle/>
+            <a:p>
+              <a:pPr algn="l">
+                <a:lnSpc>
+                  <a:spcPct val="110000"/>
+                </a:lnSpc>
+              </a:pPr>
+              <a:r>
+                <a:rPr sz="1600" b="1">
+                  <a:solidFill>
+                    <a:srgbClr val="000000"/>
+                  </a:solidFill>
+                  <a:latin typeface="Play"/>
+                </a:rPr>
+                <a:t>Риск</a:t>
+              </a:r>
+            </a:p>
+            <a:p>
+              <a:pPr algn="l">
+                <a:lnSpc>
+                  <a:spcPct val="110000"/>
+                </a:lnSpc>
+                <a:spcBef>
+                  <a:spcPts val="400"/>
+                </a:spcBef>
+              </a:pPr>
+              <a:r>
+                <a:rPr sz="1600" b="0">
+                  <a:solidFill>
+                    <a:srgbClr val="000000"/>
+                  </a:solidFill>
+                  <a:latin typeface="Play"/>
+                </a:rPr>
+                <a:t>Отсутствие контекста</a:t>
+              </a:r>
+            </a:p>
+          </p:txBody>
+        </p:sp>
+        <p:sp>
+          <p:nvSpPr>
+            <p:cNvPr id="8" name="BrandDeck Diagram Quadrant 4"/>
+            <p:cNvSpPr/>
+            <p:nvPr/>
+          </p:nvSpPr>
+          <p:spPr>
+            <a:xfrm>
+              <a:off x="6157098" y="4051014"/>
+              <a:ext cx="5357568" cy="1838864"/>
+            </a:xfrm>
+            <a:prstGeom prst="roundRect">
+              <a:avLst>
+                <a:gd name="adj" fmla="val 6000"/>
+              </a:avLst>
+            </a:prstGeom>
+            <a:solidFill>
+              <a:srgbClr val="9EC8F7"/>
+            </a:solidFill>
+            <a:ln>
+              <a:noFill/>
+            </a:ln>
+          </p:spPr>
+          <p:txBody>
+            <a:bodyPr rtlCol="0" anchor="t" wrap="square" lIns="164592" tIns="128016" rIns="164592" bIns="109728">
+              <a:noAutofit/>
+            </a:bodyPr>
+            <a:lstStyle/>
+            <a:p>
+              <a:pPr algn="l">
+                <a:lnSpc>
+                  <a:spcPct val="110000"/>
+                </a:lnSpc>
+              </a:pPr>
+              <a:r>
+                <a:rPr sz="1600" b="1">
+                  <a:solidFill>
+                    <a:srgbClr val="000000"/>
+                  </a:solidFill>
+                  <a:latin typeface="Play"/>
+                </a:rPr>
+                <a:t>Мера</a:t>
+              </a:r>
+            </a:p>
+            <a:p>
+              <a:pPr algn="l">
+                <a:lnSpc>
+                  <a:spcPct val="110000"/>
+                </a:lnSpc>
+                <a:spcBef>
+                  <a:spcPts val="400"/>
+                </a:spcBef>
+              </a:pPr>
+              <a:r>
+                <a:rPr sz="1600" b="0">
+                  <a:solidFill>
+                    <a:srgbClr val="000000"/>
+                  </a:solidFill>
+                  <a:latin typeface="Play"/>
+                </a:rPr>
+                <a:t>Передача вопроса специалисту</a:t>
+              </a:r>
+            </a:p>
+          </p:txBody>
+        </p:sp>
+        <p:sp>
+          <p:nvSpPr>
+            <p:cNvPr id="9" name="BrandDeck Diagram Axis X"/>
+            <p:cNvSpPr txBox="1"/>
+            <p:nvPr/>
+          </p:nvSpPr>
+          <p:spPr>
+            <a:xfrm>
+              <a:off x="671514" y="5926455"/>
+              <a:ext cx="10843152" cy="274320"/>
+            </a:xfrm>
+            <a:prstGeom prst="rect">
+              <a:avLst/>
+            </a:prstGeom>
+            <a:noFill/>
+          </p:spPr>
+          <p:txBody>
+            <a:bodyPr wrap="square" anchor="t" lIns="36576" tIns="18288" rIns="36576" bIns="18288">
+              <a:noAutofit/>
+            </a:bodyPr>
+            <a:lstStyle/>
+            <a:p>
+              <a:pPr algn="ctr">
+                <a:lnSpc>
+                  <a:spcPct val="110000"/>
+                </a:lnSpc>
+              </a:pPr>
+              <a:r>
+                <a:rPr sz="1200" b="0">
+                  <a:solidFill>
+                    <a:srgbClr val="000000"/>
+                  </a:solidFill>
+                  <a:latin typeface="Play"/>
+                </a:rPr>
+                <a:t>Мера</a:t>
+              </a:r>
+            </a:p>
+          </p:txBody>
+        </p:sp>
+      </p:grpSp>
     </p:spTree>
   </p:cSld>
   <p:clrMapOvr>
